--- a/output/wordlabs-soft-3day.pptx
+++ b/output/wordlabs-soft-3day.pptx
@@ -4279,7 +4279,7 @@
                 <a:ea typeface="Calibri" pitchFamily="34" charset="-122"/>
                 <a:cs typeface="Calibri" pitchFamily="34" charset="-120"/>
               </a:rPr>
-              <a:t>Origin: Old English: softe</a:t>
+              <a:t>Origin: Latin: softus</a:t>
             </a:r>
             <a:endParaRPr lang="en-US" sz="1300" dirty="0"/>
           </a:p>
@@ -5622,7 +5622,7 @@
                 <a:ea typeface="Trebuchet MS" pitchFamily="34" charset="-122"/>
                 <a:cs typeface="Trebuchet MS" pitchFamily="34" charset="-120"/>
               </a:rPr>
-              <a:t>0</a:t>
+              <a:t>1</a:t>
             </a:r>
             <a:pPr algn="ctr" indent="0" marL="0">
               <a:buNone/>
@@ -6040,7 +6040,7 @@
                 <a:ea typeface="Calibri" pitchFamily="34" charset="-122"/>
                 <a:cs typeface="Calibri" pitchFamily="34" charset="-120"/>
               </a:rPr>
-              <a:t>The coach asked the players to </a:t>
+              <a:t>She spoke </a:t>
             </a:r>
             <a:pPr algn="l" indent="0" marL="0">
               <a:buNone/>
@@ -6057,7 +6057,7 @@
                 <a:ea typeface="Calibri" pitchFamily="34" charset="-122"/>
                 <a:cs typeface="Calibri" pitchFamily="34" charset="-120"/>
               </a:rPr>
-              <a:t>soften</a:t>
+              <a:t>softly</a:t>
             </a:r>
             <a:pPr algn="l" indent="0" marL="0">
               <a:buNone/>
@@ -6071,7 +6071,7 @@
                 <a:ea typeface="Calibri" pitchFamily="34" charset="-122"/>
                 <a:cs typeface="Calibri" pitchFamily="34" charset="-120"/>
               </a:rPr>
-              <a:t> their grip on the bat before the </a:t>
+              <a:t> and stroked the kitten's fur, amazed by its </a:t>
             </a:r>
             <a:pPr algn="l" indent="0" marL="0">
               <a:buNone/>
@@ -6088,7 +6088,7 @@
                 <a:ea typeface="Calibri" pitchFamily="34" charset="-122"/>
                 <a:cs typeface="Calibri" pitchFamily="34" charset="-120"/>
               </a:rPr>
-              <a:t>softball</a:t>
+              <a:t>softness</a:t>
             </a:r>
             <a:pPr algn="l" indent="0" marL="0">
               <a:buNone/>
@@ -6102,7 +6102,7 @@
                 <a:ea typeface="Calibri" pitchFamily="34" charset="-122"/>
                 <a:cs typeface="Calibri" pitchFamily="34" charset="-120"/>
               </a:rPr>
-              <a:t> match began.</a:t>
+              <a:t>.</a:t>
             </a:r>
             <a:endParaRPr lang="en-US" sz="1800" dirty="0"/>
           </a:p>
@@ -6257,7 +6257,7 @@
                 <a:ea typeface="Trebuchet MS" pitchFamily="34" charset="-122"/>
                 <a:cs typeface="Trebuchet MS" pitchFamily="34" charset="-120"/>
               </a:rPr>
-              <a:t>soften</a:t>
+              <a:t>softly</a:t>
             </a:r>
             <a:endParaRPr lang="en-US" sz="1400" dirty="0"/>
           </a:p>
@@ -6385,7 +6385,7 @@
                 <a:ea typeface="Trebuchet MS" pitchFamily="34" charset="-122"/>
                 <a:cs typeface="Trebuchet MS" pitchFamily="34" charset="-120"/>
               </a:rPr>
-              <a:t>softball</a:t>
+              <a:t>softness</a:t>
             </a:r>
             <a:endParaRPr lang="en-US" sz="1400" dirty="0"/>
           </a:p>
@@ -6855,7 +6855,7 @@
                 <a:ea typeface="Trebuchet MS" pitchFamily="34" charset="-122"/>
                 <a:cs typeface="Trebuchet MS" pitchFamily="34" charset="-120"/>
               </a:rPr>
-              <a:t>soften</a:t>
+              <a:t>softly</a:t>
             </a:r>
             <a:endParaRPr lang="en-US" sz="2800" dirty="0"/>
           </a:p>
@@ -7682,7 +7682,7 @@
                 <a:ea typeface="Trebuchet MS" pitchFamily="34" charset="-122"/>
                 <a:cs typeface="Trebuchet MS" pitchFamily="34" charset="-120"/>
               </a:rPr>
-              <a:t>soften</a:t>
+              <a:t>softly</a:t>
             </a:r>
             <a:endParaRPr lang="en-US" sz="2800" dirty="0"/>
           </a:p>
@@ -7860,7 +7860,7 @@
                 <a:ea typeface="Calibri" pitchFamily="34" charset="-122"/>
                 <a:cs typeface="Calibri" pitchFamily="34" charset="-120"/>
               </a:rPr>
-              <a:t>not hard, gentle</a:t>
+              <a:t>gentle, not hard</a:t>
             </a:r>
             <a:endParaRPr lang="en-US" sz="850" dirty="0"/>
           </a:p>
@@ -7933,7 +7933,7 @@
                 <a:ea typeface="Trebuchet MS" pitchFamily="34" charset="-122"/>
                 <a:cs typeface="Trebuchet MS" pitchFamily="34" charset="-120"/>
               </a:rPr>
-              <a:t>en</a:t>
+              <a:t>ly</a:t>
             </a:r>
             <a:endParaRPr lang="en-US" sz="1300" dirty="0"/>
           </a:p>
@@ -7972,7 +7972,7 @@
                 <a:ea typeface="Calibri" pitchFamily="34" charset="-122"/>
                 <a:cs typeface="Calibri" pitchFamily="34" charset="-120"/>
               </a:rPr>
-              <a:t>to make or become</a:t>
+              <a:t>in a way, how something is done</a:t>
             </a:r>
             <a:endParaRPr lang="en-US" sz="850" dirty="0"/>
           </a:p>
@@ -8667,7 +8667,7 @@
                 <a:ea typeface="Trebuchet MS" pitchFamily="34" charset="-122"/>
                 <a:cs typeface="Trebuchet MS" pitchFamily="34" charset="-120"/>
               </a:rPr>
-              <a:t>soften</a:t>
+              <a:t>softly</a:t>
             </a:r>
             <a:endParaRPr lang="en-US" sz="2800" dirty="0"/>
           </a:p>
@@ -8845,7 +8845,7 @@
                 <a:ea typeface="Calibri" pitchFamily="34" charset="-122"/>
                 <a:cs typeface="Calibri" pitchFamily="34" charset="-120"/>
               </a:rPr>
-              <a:t>not hard, gentle</a:t>
+              <a:t>gentle, not hard</a:t>
             </a:r>
             <a:endParaRPr lang="en-US" sz="850" dirty="0"/>
           </a:p>
@@ -8918,7 +8918,7 @@
                 <a:ea typeface="Trebuchet MS" pitchFamily="34" charset="-122"/>
                 <a:cs typeface="Trebuchet MS" pitchFamily="34" charset="-120"/>
               </a:rPr>
-              <a:t>en</a:t>
+              <a:t>ly</a:t>
             </a:r>
             <a:endParaRPr lang="en-US" sz="1300" dirty="0"/>
           </a:p>
@@ -8957,7 +8957,7 @@
                 <a:ea typeface="Calibri" pitchFamily="34" charset="-122"/>
                 <a:cs typeface="Calibri" pitchFamily="34" charset="-120"/>
               </a:rPr>
-              <a:t>to make or become</a:t>
+              <a:t>in a way, how something is done</a:t>
             </a:r>
             <a:endParaRPr lang="en-US" sz="850" dirty="0"/>
           </a:p>
@@ -9116,7 +9116,7 @@
                 <a:ea typeface="Trebuchet MS" pitchFamily="34" charset="-122"/>
                 <a:cs typeface="Trebuchet MS" pitchFamily="34" charset="-120"/>
               </a:rPr>
-              <a:t>sof</a:t>
+              <a:t>soft</a:t>
             </a:r>
             <a:endParaRPr lang="en-US" sz="1400" dirty="0"/>
           </a:p>
@@ -9221,7 +9221,7 @@
                 <a:ea typeface="Trebuchet MS" pitchFamily="34" charset="-122"/>
                 <a:cs typeface="Trebuchet MS" pitchFamily="34" charset="-120"/>
               </a:rPr>
-              <a:t>ten</a:t>
+              <a:t>ly</a:t>
             </a:r>
             <a:endParaRPr lang="en-US" sz="1400" dirty="0"/>
           </a:p>
@@ -9784,7 +9784,7 @@
                 <a:ea typeface="Trebuchet MS" pitchFamily="34" charset="-122"/>
                 <a:cs typeface="Trebuchet MS" pitchFamily="34" charset="-120"/>
               </a:rPr>
-              <a:t>soften</a:t>
+              <a:t>softly</a:t>
             </a:r>
             <a:endParaRPr lang="en-US" sz="2800" dirty="0"/>
           </a:p>
@@ -9962,7 +9962,7 @@
                 <a:ea typeface="Calibri" pitchFamily="34" charset="-122"/>
                 <a:cs typeface="Calibri" pitchFamily="34" charset="-120"/>
               </a:rPr>
-              <a:t>not hard, gentle</a:t>
+              <a:t>gentle, not hard</a:t>
             </a:r>
             <a:endParaRPr lang="en-US" sz="850" dirty="0"/>
           </a:p>
@@ -10035,7 +10035,7 @@
                 <a:ea typeface="Trebuchet MS" pitchFamily="34" charset="-122"/>
                 <a:cs typeface="Trebuchet MS" pitchFamily="34" charset="-120"/>
               </a:rPr>
-              <a:t>en</a:t>
+              <a:t>ly</a:t>
             </a:r>
             <a:endParaRPr lang="en-US" sz="1300" dirty="0"/>
           </a:p>
@@ -10074,7 +10074,7 @@
                 <a:ea typeface="Calibri" pitchFamily="34" charset="-122"/>
                 <a:cs typeface="Calibri" pitchFamily="34" charset="-120"/>
               </a:rPr>
-              <a:t>to make or become</a:t>
+              <a:t>in a way, how something is done</a:t>
             </a:r>
             <a:endParaRPr lang="en-US" sz="850" dirty="0"/>
           </a:p>
@@ -10233,7 +10233,7 @@
                 <a:ea typeface="Trebuchet MS" pitchFamily="34" charset="-122"/>
                 <a:cs typeface="Trebuchet MS" pitchFamily="34" charset="-120"/>
               </a:rPr>
-              <a:t>sof</a:t>
+              <a:t>soft</a:t>
             </a:r>
             <a:endParaRPr lang="en-US" sz="1400" dirty="0"/>
           </a:p>
@@ -10338,7 +10338,7 @@
                 <a:ea typeface="Trebuchet MS" pitchFamily="34" charset="-122"/>
                 <a:cs typeface="Trebuchet MS" pitchFamily="34" charset="-120"/>
               </a:rPr>
-              <a:t>ten</a:t>
+              <a:t>ly</a:t>
             </a:r>
             <a:endParaRPr lang="en-US" sz="1400" dirty="0"/>
           </a:p>
@@ -10629,7 +10629,7 @@
                 <a:ea typeface="Trebuchet MS" pitchFamily="34" charset="-122"/>
                 <a:cs typeface="Trebuchet MS" pitchFamily="34" charset="-120"/>
               </a:rPr>
-              <a:t>f</a:t>
+              <a:t>ft</a:t>
             </a:r>
             <a:endParaRPr lang="en-US" sz="900" dirty="0"/>
           </a:p>
@@ -10695,7 +10695,7 @@
                 <a:ea typeface="Trebuchet MS" pitchFamily="34" charset="-122"/>
                 <a:cs typeface="Trebuchet MS" pitchFamily="34" charset="-120"/>
               </a:rPr>
-              <a:t>t</a:t>
+              <a:t>l</a:t>
             </a:r>
             <a:endParaRPr lang="en-US" sz="900" dirty="0"/>
           </a:p>
@@ -10761,7 +10761,7 @@
                 <a:ea typeface="Trebuchet MS" pitchFamily="34" charset="-122"/>
                 <a:cs typeface="Trebuchet MS" pitchFamily="34" charset="-120"/>
               </a:rPr>
-              <a:t>en</a:t>
+              <a:t>y</a:t>
             </a:r>
             <a:endParaRPr lang="en-US" sz="900" dirty="0"/>
           </a:p>
@@ -11192,7 +11192,7 @@
                 <a:ea typeface="Trebuchet MS" pitchFamily="34" charset="-122"/>
                 <a:cs typeface="Trebuchet MS" pitchFamily="34" charset="-120"/>
               </a:rPr>
-              <a:t>softball</a:t>
+              <a:t>softness</a:t>
             </a:r>
             <a:endParaRPr lang="en-US" sz="2800" dirty="0"/>
           </a:p>
@@ -12019,7 +12019,7 @@
                 <a:ea typeface="Trebuchet MS" pitchFamily="34" charset="-122"/>
                 <a:cs typeface="Trebuchet MS" pitchFamily="34" charset="-120"/>
               </a:rPr>
-              <a:t>softball</a:t>
+              <a:t>softness</a:t>
             </a:r>
             <a:endParaRPr lang="en-US" sz="2800" dirty="0"/>
           </a:p>
@@ -12197,7 +12197,7 @@
                 <a:ea typeface="Calibri" pitchFamily="34" charset="-122"/>
                 <a:cs typeface="Calibri" pitchFamily="34" charset="-120"/>
               </a:rPr>
-              <a:t>not hard, gentle</a:t>
+              <a:t>gentle, not hard</a:t>
             </a:r>
             <a:endParaRPr lang="en-US" sz="850" dirty="0"/>
           </a:p>
@@ -12270,7 +12270,7 @@
                 <a:ea typeface="Trebuchet MS" pitchFamily="34" charset="-122"/>
                 <a:cs typeface="Trebuchet MS" pitchFamily="34" charset="-120"/>
               </a:rPr>
-              <a:t>ball</a:t>
+              <a:t>ness</a:t>
             </a:r>
             <a:endParaRPr lang="en-US" sz="1300" dirty="0"/>
           </a:p>
@@ -12309,7 +12309,7 @@
                 <a:ea typeface="Calibri" pitchFamily="34" charset="-122"/>
                 <a:cs typeface="Calibri" pitchFamily="34" charset="-120"/>
               </a:rPr>
-              <a:t>round object</a:t>
+              <a:t>the quality or state of</a:t>
             </a:r>
             <a:endParaRPr lang="en-US" sz="850" dirty="0"/>
           </a:p>
@@ -13004,7 +13004,7 @@
                 <a:ea typeface="Trebuchet MS" pitchFamily="34" charset="-122"/>
                 <a:cs typeface="Trebuchet MS" pitchFamily="34" charset="-120"/>
               </a:rPr>
-              <a:t>softball</a:t>
+              <a:t>softness</a:t>
             </a:r>
             <a:endParaRPr lang="en-US" sz="2800" dirty="0"/>
           </a:p>
@@ -13182,7 +13182,7 @@
                 <a:ea typeface="Calibri" pitchFamily="34" charset="-122"/>
                 <a:cs typeface="Calibri" pitchFamily="34" charset="-120"/>
               </a:rPr>
-              <a:t>not hard, gentle</a:t>
+              <a:t>gentle, not hard</a:t>
             </a:r>
             <a:endParaRPr lang="en-US" sz="850" dirty="0"/>
           </a:p>
@@ -13255,7 +13255,7 @@
                 <a:ea typeface="Trebuchet MS" pitchFamily="34" charset="-122"/>
                 <a:cs typeface="Trebuchet MS" pitchFamily="34" charset="-120"/>
               </a:rPr>
-              <a:t>ball</a:t>
+              <a:t>ness</a:t>
             </a:r>
             <a:endParaRPr lang="en-US" sz="1300" dirty="0"/>
           </a:p>
@@ -13294,7 +13294,7 @@
                 <a:ea typeface="Calibri" pitchFamily="34" charset="-122"/>
                 <a:cs typeface="Calibri" pitchFamily="34" charset="-120"/>
               </a:rPr>
-              <a:t>round object</a:t>
+              <a:t>the quality or state of</a:t>
             </a:r>
             <a:endParaRPr lang="en-US" sz="850" dirty="0"/>
           </a:p>
@@ -13558,7 +13558,7 @@
                 <a:ea typeface="Trebuchet MS" pitchFamily="34" charset="-122"/>
                 <a:cs typeface="Trebuchet MS" pitchFamily="34" charset="-120"/>
               </a:rPr>
-              <a:t>ball</a:t>
+              <a:t>ness</a:t>
             </a:r>
             <a:endParaRPr lang="en-US" sz="1400" dirty="0"/>
           </a:p>
@@ -14386,7 +14386,7 @@
                 <a:ea typeface="Trebuchet MS" pitchFamily="34" charset="-122"/>
                 <a:cs typeface="Trebuchet MS" pitchFamily="34" charset="-120"/>
               </a:rPr>
-              <a:t>softball</a:t>
+              <a:t>softness</a:t>
             </a:r>
             <a:endParaRPr lang="en-US" sz="2800" dirty="0"/>
           </a:p>
@@ -14564,7 +14564,7 @@
                 <a:ea typeface="Calibri" pitchFamily="34" charset="-122"/>
                 <a:cs typeface="Calibri" pitchFamily="34" charset="-120"/>
               </a:rPr>
-              <a:t>not hard, gentle</a:t>
+              <a:t>gentle, not hard</a:t>
             </a:r>
             <a:endParaRPr lang="en-US" sz="850" dirty="0"/>
           </a:p>
@@ -14637,7 +14637,7 @@
                 <a:ea typeface="Trebuchet MS" pitchFamily="34" charset="-122"/>
                 <a:cs typeface="Trebuchet MS" pitchFamily="34" charset="-120"/>
               </a:rPr>
-              <a:t>ball</a:t>
+              <a:t>ness</a:t>
             </a:r>
             <a:endParaRPr lang="en-US" sz="1300" dirty="0"/>
           </a:p>
@@ -14676,7 +14676,7 @@
                 <a:ea typeface="Calibri" pitchFamily="34" charset="-122"/>
                 <a:cs typeface="Calibri" pitchFamily="34" charset="-120"/>
               </a:rPr>
-              <a:t>round object</a:t>
+              <a:t>the quality or state of</a:t>
             </a:r>
             <a:endParaRPr lang="en-US" sz="850" dirty="0"/>
           </a:p>
@@ -14940,7 +14940,7 @@
                 <a:ea typeface="Trebuchet MS" pitchFamily="34" charset="-122"/>
                 <a:cs typeface="Trebuchet MS" pitchFamily="34" charset="-120"/>
               </a:rPr>
-              <a:t>ball</a:t>
+              <a:t>ness</a:t>
             </a:r>
             <a:endParaRPr lang="en-US" sz="1400" dirty="0"/>
           </a:p>
@@ -15047,7 +15047,7 @@
         </p:nvSpPr>
         <p:spPr>
           <a:xfrm>
-            <a:off x="2124837" y="4169664"/>
+            <a:off x="2254649" y="4169664"/>
             <a:ext cx="685800" cy="475488"/>
           </a:xfrm>
           <a:prstGeom prst="rect">
@@ -15074,7 +15074,7 @@
         </p:nvSpPr>
         <p:spPr>
           <a:xfrm>
-            <a:off x="2124837" y="4169664"/>
+            <a:off x="2254649" y="4169664"/>
             <a:ext cx="685800" cy="475488"/>
           </a:xfrm>
           <a:prstGeom prst="rect">
@@ -15113,7 +15113,7 @@
         </p:nvSpPr>
         <p:spPr>
           <a:xfrm>
-            <a:off x="3033522" y="4169664"/>
+            <a:off x="3293146" y="4169664"/>
             <a:ext cx="685800" cy="475488"/>
           </a:xfrm>
           <a:prstGeom prst="rect">
@@ -15140,7 +15140,7 @@
         </p:nvSpPr>
         <p:spPr>
           <a:xfrm>
-            <a:off x="3033522" y="4169664"/>
+            <a:off x="3293146" y="4169664"/>
             <a:ext cx="685800" cy="475488"/>
           </a:xfrm>
           <a:prstGeom prst="rect">
@@ -15179,7 +15179,7 @@
         </p:nvSpPr>
         <p:spPr>
           <a:xfrm>
-            <a:off x="3942207" y="4169664"/>
+            <a:off x="4331643" y="4169664"/>
             <a:ext cx="685800" cy="475488"/>
           </a:xfrm>
           <a:prstGeom prst="rect">
@@ -15206,7 +15206,7 @@
         </p:nvSpPr>
         <p:spPr>
           <a:xfrm>
-            <a:off x="3942207" y="4169664"/>
+            <a:off x="4331643" y="4169664"/>
             <a:ext cx="685800" cy="475488"/>
           </a:xfrm>
           <a:prstGeom prst="rect">
@@ -15231,7 +15231,7 @@
                 <a:ea typeface="Trebuchet MS" pitchFamily="34" charset="-122"/>
                 <a:cs typeface="Trebuchet MS" pitchFamily="34" charset="-120"/>
               </a:rPr>
-              <a:t>f</a:t>
+              <a:t>ft</a:t>
             </a:r>
             <a:endParaRPr lang="en-US" sz="900" dirty="0"/>
           </a:p>
@@ -15245,7 +15245,7 @@
         </p:nvSpPr>
         <p:spPr>
           <a:xfrm>
-            <a:off x="4850892" y="4169664"/>
+            <a:off x="5370141" y="4169664"/>
             <a:ext cx="685800" cy="475488"/>
           </a:xfrm>
           <a:prstGeom prst="rect">
@@ -15272,7 +15272,7 @@
         </p:nvSpPr>
         <p:spPr>
           <a:xfrm>
-            <a:off x="4850892" y="4169664"/>
+            <a:off x="5370141" y="4169664"/>
             <a:ext cx="685800" cy="475488"/>
           </a:xfrm>
           <a:prstGeom prst="rect">
@@ -15297,7 +15297,7 @@
                 <a:ea typeface="Trebuchet MS" pitchFamily="34" charset="-122"/>
                 <a:cs typeface="Trebuchet MS" pitchFamily="34" charset="-120"/>
               </a:rPr>
-              <a:t>t</a:t>
+              <a:t>n</a:t>
             </a:r>
             <a:endParaRPr lang="en-US" sz="900" dirty="0"/>
           </a:p>
@@ -15311,7 +15311,7 @@
         </p:nvSpPr>
         <p:spPr>
           <a:xfrm>
-            <a:off x="5759577" y="4169664"/>
+            <a:off x="6408638" y="4169664"/>
             <a:ext cx="685800" cy="475488"/>
           </a:xfrm>
           <a:prstGeom prst="rect">
@@ -15338,7 +15338,7 @@
         </p:nvSpPr>
         <p:spPr>
           <a:xfrm>
-            <a:off x="5759577" y="4169664"/>
+            <a:off x="6408638" y="4169664"/>
             <a:ext cx="685800" cy="475488"/>
           </a:xfrm>
           <a:prstGeom prst="rect">
@@ -15363,7 +15363,7 @@
                 <a:ea typeface="Trebuchet MS" pitchFamily="34" charset="-122"/>
                 <a:cs typeface="Trebuchet MS" pitchFamily="34" charset="-120"/>
               </a:rPr>
-              <a:t>b</a:t>
+              <a:t>e</a:t>
             </a:r>
             <a:endParaRPr lang="en-US" sz="900" dirty="0"/>
           </a:p>
@@ -15377,7 +15377,7 @@
         </p:nvSpPr>
         <p:spPr>
           <a:xfrm>
-            <a:off x="6668262" y="4169664"/>
+            <a:off x="7447135" y="4169664"/>
             <a:ext cx="685800" cy="475488"/>
           </a:xfrm>
           <a:prstGeom prst="rect">
@@ -15404,7 +15404,7 @@
         </p:nvSpPr>
         <p:spPr>
           <a:xfrm>
-            <a:off x="6668262" y="4169664"/>
+            <a:off x="7447135" y="4169664"/>
             <a:ext cx="685800" cy="475488"/>
           </a:xfrm>
           <a:prstGeom prst="rect">
@@ -15429,73 +15429,7 @@
                 <a:ea typeface="Trebuchet MS" pitchFamily="34" charset="-122"/>
                 <a:cs typeface="Trebuchet MS" pitchFamily="34" charset="-120"/>
               </a:rPr>
-              <a:t>a</a:t>
-            </a:r>
-            <a:endParaRPr lang="en-US" sz="900" dirty="0"/>
-          </a:p>
-        </p:txBody>
-      </p:sp>
-      <p:sp>
-        <p:nvSpPr>
-          <p:cNvPr id="45" name="Shape 43"/>
-          <p:cNvSpPr/>
-          <p:nvPr/>
-        </p:nvSpPr>
-        <p:spPr>
-          <a:xfrm>
-            <a:off x="7576947" y="4169664"/>
-            <a:ext cx="685800" cy="475488"/>
-          </a:xfrm>
-          <a:prstGeom prst="rect">
-            <a:avLst>
-              <a:gd name="adj" fmla="val 7692"/>
-            </a:avLst>
-          </a:prstGeom>
-          <a:solidFill>
-            <a:srgbClr val="FFFFFF"/>
-          </a:solidFill>
-          <a:ln w="12700">
-            <a:solidFill>
-              <a:srgbClr val="DB2777"/>
-            </a:solidFill>
-            <a:prstDash val="solid"/>
-          </a:ln>
-        </p:spPr>
-      </p:sp>
-      <p:sp>
-        <p:nvSpPr>
-          <p:cNvPr id="46" name="Text 44"/>
-          <p:cNvSpPr/>
-          <p:nvPr/>
-        </p:nvSpPr>
-        <p:spPr>
-          <a:xfrm>
-            <a:off x="7576947" y="4169664"/>
-            <a:ext cx="685800" cy="475488"/>
-          </a:xfrm>
-          <a:prstGeom prst="rect">
-            <a:avLst/>
-          </a:prstGeom>
-          <a:noFill/>
-          <a:ln/>
-        </p:spPr>
-        <p:txBody>
-          <a:bodyPr wrap="square" lIns="0" tIns="0" rIns="0" bIns="0" rtlCol="0" anchor="ctr"/>
-          <a:lstStyle/>
-          <a:p>
-            <a:pPr algn="ctr" indent="0" marL="0">
-              <a:buNone/>
-            </a:pPr>
-            <a:r>
-              <a:rPr lang="en-US" sz="900" b="1" dirty="0">
-                <a:solidFill>
-                  <a:srgbClr val="9D174D"/>
-                </a:solidFill>
-                <a:latin typeface="Trebuchet MS" pitchFamily="34" charset="0"/>
-                <a:ea typeface="Trebuchet MS" pitchFamily="34" charset="-122"/>
-                <a:cs typeface="Trebuchet MS" pitchFamily="34" charset="-120"/>
-              </a:rPr>
-              <a:t>ll</a:t>
+              <a:t>ss</a:t>
             </a:r>
             <a:endParaRPr lang="en-US" sz="900" dirty="0"/>
           </a:p>
@@ -16403,7 +16337,7 @@
                 <a:ea typeface="Trebuchet MS" pitchFamily="34" charset="-122"/>
                 <a:cs typeface="Trebuchet MS" pitchFamily="34" charset="-120"/>
               </a:rPr>
-              <a:t>1</a:t>
+              <a:t>2</a:t>
             </a:r>
             <a:pPr algn="ctr" indent="0" marL="0">
               <a:buNone/>
@@ -16417,7 +16351,7 @@
                 <a:ea typeface="Trebuchet MS" pitchFamily="34" charset="-122"/>
                 <a:cs typeface="Trebuchet MS" pitchFamily="34" charset="-120"/>
               </a:rPr>
-              <a:t>  punctuation mark</a:t>
+              <a:t>  punctuation marks</a:t>
             </a:r>
             <a:endParaRPr lang="en-US" sz="2800" dirty="0"/>
           </a:p>
@@ -16821,7 +16755,7 @@
                 <a:ea typeface="Calibri" pitchFamily="34" charset="-122"/>
                 <a:cs typeface="Calibri" pitchFamily="34" charset="-120"/>
               </a:rPr>
-              <a:t>She </a:t>
+              <a:t>The </a:t>
             </a:r>
             <a:pPr algn="l" indent="0" marL="0">
               <a:buNone/>
@@ -16838,7 +16772,7 @@
                 <a:ea typeface="Calibri" pitchFamily="34" charset="-122"/>
                 <a:cs typeface="Calibri" pitchFamily="34" charset="-120"/>
               </a:rPr>
-              <a:t>softly</a:t>
+              <a:t>softest</a:t>
             </a:r>
             <a:pPr algn="l" indent="0" marL="0">
               <a:buNone/>
@@ -16852,7 +16786,7 @@
                 <a:ea typeface="Calibri" pitchFamily="34" charset="-122"/>
                 <a:cs typeface="Calibri" pitchFamily="34" charset="-120"/>
               </a:rPr>
-              <a:t> suggested that we should </a:t>
+              <a:t> blanket began to </a:t>
             </a:r>
             <a:pPr algn="l" indent="0" marL="0">
               <a:buNone/>
@@ -16883,7 +16817,7 @@
                 <a:ea typeface="Calibri" pitchFamily="34" charset="-122"/>
                 <a:cs typeface="Calibri" pitchFamily="34" charset="-120"/>
               </a:rPr>
-              <a:t> the clay first, because its </a:t>
+              <a:t> even more after washing, but we were careful not to </a:t>
             </a:r>
             <a:pPr algn="l" indent="0" marL="0">
               <a:buNone/>
@@ -16900,7 +16834,7 @@
                 <a:ea typeface="Calibri" pitchFamily="34" charset="-122"/>
                 <a:cs typeface="Calibri" pitchFamily="34" charset="-120"/>
               </a:rPr>
-              <a:t>softness</a:t>
+              <a:t>oversoften</a:t>
             </a:r>
             <a:pPr algn="l" indent="0" marL="0">
               <a:buNone/>
@@ -16914,7 +16848,7 @@
                 <a:ea typeface="Calibri" pitchFamily="34" charset="-122"/>
                 <a:cs typeface="Calibri" pitchFamily="34" charset="-120"/>
               </a:rPr>
-              <a:t> would make it much easier to shape.</a:t>
+              <a:t> it.</a:t>
             </a:r>
             <a:endParaRPr lang="en-US" sz="1800" dirty="0"/>
           </a:p>
@@ -17069,7 +17003,7 @@
                 <a:ea typeface="Trebuchet MS" pitchFamily="34" charset="-122"/>
                 <a:cs typeface="Trebuchet MS" pitchFamily="34" charset="-120"/>
               </a:rPr>
-              <a:t>softly</a:t>
+              <a:t>softest</a:t>
             </a:r>
             <a:endParaRPr lang="en-US" sz="1400" dirty="0"/>
           </a:p>
@@ -17325,7 +17259,7 @@
                 <a:ea typeface="Trebuchet MS" pitchFamily="34" charset="-122"/>
                 <a:cs typeface="Trebuchet MS" pitchFamily="34" charset="-120"/>
               </a:rPr>
-              <a:t>softness</a:t>
+              <a:t>oversoften</a:t>
             </a:r>
             <a:endParaRPr lang="en-US" sz="1400" dirty="0"/>
           </a:p>
@@ -17795,7 +17729,7 @@
                 <a:ea typeface="Trebuchet MS" pitchFamily="34" charset="-122"/>
                 <a:cs typeface="Trebuchet MS" pitchFamily="34" charset="-120"/>
               </a:rPr>
-              <a:t>softly</a:t>
+              <a:t>softest</a:t>
             </a:r>
             <a:endParaRPr lang="en-US" sz="2800" dirty="0"/>
           </a:p>
@@ -18622,7 +18556,7 @@
                 <a:ea typeface="Trebuchet MS" pitchFamily="34" charset="-122"/>
                 <a:cs typeface="Trebuchet MS" pitchFamily="34" charset="-120"/>
               </a:rPr>
-              <a:t>softly</a:t>
+              <a:t>softest</a:t>
             </a:r>
             <a:endParaRPr lang="en-US" sz="2800" dirty="0"/>
           </a:p>
@@ -18800,7 +18734,7 @@
                 <a:ea typeface="Calibri" pitchFamily="34" charset="-122"/>
                 <a:cs typeface="Calibri" pitchFamily="34" charset="-120"/>
               </a:rPr>
-              <a:t>not hard, gentle</a:t>
+              <a:t>gentle, not hard</a:t>
             </a:r>
             <a:endParaRPr lang="en-US" sz="850" dirty="0"/>
           </a:p>
@@ -18873,7 +18807,7 @@
                 <a:ea typeface="Trebuchet MS" pitchFamily="34" charset="-122"/>
                 <a:cs typeface="Trebuchet MS" pitchFamily="34" charset="-120"/>
               </a:rPr>
-              <a:t>ly</a:t>
+              <a:t>est</a:t>
             </a:r>
             <a:endParaRPr lang="en-US" sz="1300" dirty="0"/>
           </a:p>
@@ -18912,7 +18846,7 @@
                 <a:ea typeface="Calibri" pitchFamily="34" charset="-122"/>
                 <a:cs typeface="Calibri" pitchFamily="34" charset="-120"/>
               </a:rPr>
-              <a:t>in a certain way</a:t>
+              <a:t>the most</a:t>
             </a:r>
             <a:endParaRPr lang="en-US" sz="850" dirty="0"/>
           </a:p>
@@ -19607,7 +19541,7 @@
                 <a:ea typeface="Trebuchet MS" pitchFamily="34" charset="-122"/>
                 <a:cs typeface="Trebuchet MS" pitchFamily="34" charset="-120"/>
               </a:rPr>
-              <a:t>softly</a:t>
+              <a:t>softest</a:t>
             </a:r>
             <a:endParaRPr lang="en-US" sz="2800" dirty="0"/>
           </a:p>
@@ -19785,7 +19719,7 @@
                 <a:ea typeface="Calibri" pitchFamily="34" charset="-122"/>
                 <a:cs typeface="Calibri" pitchFamily="34" charset="-120"/>
               </a:rPr>
-              <a:t>not hard, gentle</a:t>
+              <a:t>gentle, not hard</a:t>
             </a:r>
             <a:endParaRPr lang="en-US" sz="850" dirty="0"/>
           </a:p>
@@ -19858,7 +19792,7 @@
                 <a:ea typeface="Trebuchet MS" pitchFamily="34" charset="-122"/>
                 <a:cs typeface="Trebuchet MS" pitchFamily="34" charset="-120"/>
               </a:rPr>
-              <a:t>ly</a:t>
+              <a:t>est</a:t>
             </a:r>
             <a:endParaRPr lang="en-US" sz="1300" dirty="0"/>
           </a:p>
@@ -19897,7 +19831,7 @@
                 <a:ea typeface="Calibri" pitchFamily="34" charset="-122"/>
                 <a:cs typeface="Calibri" pitchFamily="34" charset="-120"/>
               </a:rPr>
-              <a:t>in a certain way</a:t>
+              <a:t>the most</a:t>
             </a:r>
             <a:endParaRPr lang="en-US" sz="850" dirty="0"/>
           </a:p>
@@ -20161,7 +20095,7 @@
                 <a:ea typeface="Trebuchet MS" pitchFamily="34" charset="-122"/>
                 <a:cs typeface="Trebuchet MS" pitchFamily="34" charset="-120"/>
               </a:rPr>
-              <a:t>ly</a:t>
+              <a:t>est</a:t>
             </a:r>
             <a:endParaRPr lang="en-US" sz="1400" dirty="0"/>
           </a:p>
@@ -20724,7 +20658,7 @@
                 <a:ea typeface="Trebuchet MS" pitchFamily="34" charset="-122"/>
                 <a:cs typeface="Trebuchet MS" pitchFamily="34" charset="-120"/>
               </a:rPr>
-              <a:t>softly</a:t>
+              <a:t>softest</a:t>
             </a:r>
             <a:endParaRPr lang="en-US" sz="2800" dirty="0"/>
           </a:p>
@@ -20902,7 +20836,7 @@
                 <a:ea typeface="Calibri" pitchFamily="34" charset="-122"/>
                 <a:cs typeface="Calibri" pitchFamily="34" charset="-120"/>
               </a:rPr>
-              <a:t>not hard, gentle</a:t>
+              <a:t>gentle, not hard</a:t>
             </a:r>
             <a:endParaRPr lang="en-US" sz="850" dirty="0"/>
           </a:p>
@@ -20975,7 +20909,7 @@
                 <a:ea typeface="Trebuchet MS" pitchFamily="34" charset="-122"/>
                 <a:cs typeface="Trebuchet MS" pitchFamily="34" charset="-120"/>
               </a:rPr>
-              <a:t>ly</a:t>
+              <a:t>est</a:t>
             </a:r>
             <a:endParaRPr lang="en-US" sz="1300" dirty="0"/>
           </a:p>
@@ -21014,7 +20948,7 @@
                 <a:ea typeface="Calibri" pitchFamily="34" charset="-122"/>
                 <a:cs typeface="Calibri" pitchFamily="34" charset="-120"/>
               </a:rPr>
-              <a:t>in a certain way</a:t>
+              <a:t>the most</a:t>
             </a:r>
             <a:endParaRPr lang="en-US" sz="850" dirty="0"/>
           </a:p>
@@ -21278,7 +21212,7 @@
                 <a:ea typeface="Trebuchet MS" pitchFamily="34" charset="-122"/>
                 <a:cs typeface="Trebuchet MS" pitchFamily="34" charset="-120"/>
               </a:rPr>
-              <a:t>ly</a:t>
+              <a:t>est</a:t>
             </a:r>
             <a:endParaRPr lang="en-US" sz="1400" dirty="0"/>
           </a:p>
@@ -21359,11 +21293,11 @@
         <p:spPr>
           <a:xfrm>
             <a:off x="1874520" y="4096512"/>
-            <a:ext cx="6903720" cy="804672"/>
+            <a:ext cx="6903720" cy="658368"/>
           </a:xfrm>
           <a:prstGeom prst="rect">
             <a:avLst>
-              <a:gd name="adj" fmla="val 6818"/>
+              <a:gd name="adj" fmla="val 8333"/>
             </a:avLst>
           </a:prstGeom>
           <a:solidFill>
@@ -21386,11 +21320,11 @@
         <p:spPr>
           <a:xfrm>
             <a:off x="2254649" y="4169664"/>
-            <a:ext cx="685800" cy="384048"/>
+            <a:ext cx="685800" cy="475488"/>
           </a:xfrm>
           <a:prstGeom prst="rect">
             <a:avLst>
-              <a:gd name="adj" fmla="val 9524"/>
+              <a:gd name="adj" fmla="val 7692"/>
             </a:avLst>
           </a:prstGeom>
           <a:solidFill>
@@ -21413,7 +21347,7 @@
         <p:spPr>
           <a:xfrm>
             <a:off x="2254649" y="4169664"/>
-            <a:ext cx="685800" cy="384048"/>
+            <a:ext cx="685800" cy="475488"/>
           </a:xfrm>
           <a:prstGeom prst="rect">
             <a:avLst/>
@@ -21452,11 +21386,11 @@
         <p:spPr>
           <a:xfrm>
             <a:off x="3293146" y="4169664"/>
-            <a:ext cx="685800" cy="384048"/>
+            <a:ext cx="685800" cy="475488"/>
           </a:xfrm>
           <a:prstGeom prst="rect">
             <a:avLst>
-              <a:gd name="adj" fmla="val 9524"/>
+              <a:gd name="adj" fmla="val 7692"/>
             </a:avLst>
           </a:prstGeom>
           <a:solidFill>
@@ -21479,7 +21413,7 @@
         <p:spPr>
           <a:xfrm>
             <a:off x="3293146" y="4169664"/>
-            <a:ext cx="685800" cy="384048"/>
+            <a:ext cx="685800" cy="475488"/>
           </a:xfrm>
           <a:prstGeom prst="rect">
             <a:avLst/>
@@ -21518,11 +21452,11 @@
         <p:spPr>
           <a:xfrm>
             <a:off x="4331643" y="4169664"/>
-            <a:ext cx="685800" cy="384048"/>
+            <a:ext cx="685800" cy="475488"/>
           </a:xfrm>
           <a:prstGeom prst="rect">
             <a:avLst>
-              <a:gd name="adj" fmla="val 9524"/>
+              <a:gd name="adj" fmla="val 7692"/>
             </a:avLst>
           </a:prstGeom>
           <a:solidFill>
@@ -21545,7 +21479,7 @@
         <p:spPr>
           <a:xfrm>
             <a:off x="4331643" y="4169664"/>
-            <a:ext cx="685800" cy="384048"/>
+            <a:ext cx="685800" cy="475488"/>
           </a:xfrm>
           <a:prstGeom prst="rect">
             <a:avLst/>
@@ -21569,7 +21503,7 @@
                 <a:ea typeface="Trebuchet MS" pitchFamily="34" charset="-122"/>
                 <a:cs typeface="Trebuchet MS" pitchFamily="34" charset="-120"/>
               </a:rPr>
-              <a:t>f</a:t>
+              <a:t>ft</a:t>
             </a:r>
             <a:endParaRPr lang="en-US" sz="900" dirty="0"/>
           </a:p>
@@ -21584,11 +21518,11 @@
         <p:spPr>
           <a:xfrm>
             <a:off x="5370141" y="4169664"/>
-            <a:ext cx="685800" cy="384048"/>
+            <a:ext cx="685800" cy="475488"/>
           </a:xfrm>
           <a:prstGeom prst="rect">
             <a:avLst>
-              <a:gd name="adj" fmla="val 9524"/>
+              <a:gd name="adj" fmla="val 7692"/>
             </a:avLst>
           </a:prstGeom>
           <a:solidFill>
@@ -21611,7 +21545,7 @@
         <p:spPr>
           <a:xfrm>
             <a:off x="5370141" y="4169664"/>
-            <a:ext cx="685800" cy="384048"/>
+            <a:ext cx="685800" cy="475488"/>
           </a:xfrm>
           <a:prstGeom prst="rect">
             <a:avLst/>
@@ -21635,7 +21569,7 @@
                 <a:ea typeface="Trebuchet MS" pitchFamily="34" charset="-122"/>
                 <a:cs typeface="Trebuchet MS" pitchFamily="34" charset="-120"/>
               </a:rPr>
-              <a:t>t</a:t>
+              <a:t>e</a:t>
             </a:r>
             <a:endParaRPr lang="en-US" sz="900" dirty="0"/>
           </a:p>
@@ -21650,11 +21584,11 @@
         <p:spPr>
           <a:xfrm>
             <a:off x="6408638" y="4169664"/>
-            <a:ext cx="685800" cy="384048"/>
+            <a:ext cx="685800" cy="475488"/>
           </a:xfrm>
           <a:prstGeom prst="rect">
             <a:avLst>
-              <a:gd name="adj" fmla="val 9524"/>
+              <a:gd name="adj" fmla="val 7692"/>
             </a:avLst>
           </a:prstGeom>
           <a:solidFill>
@@ -21677,7 +21611,7 @@
         <p:spPr>
           <a:xfrm>
             <a:off x="6408638" y="4169664"/>
-            <a:ext cx="685800" cy="384048"/>
+            <a:ext cx="685800" cy="475488"/>
           </a:xfrm>
           <a:prstGeom prst="rect">
             <a:avLst/>
@@ -21701,7 +21635,7 @@
                 <a:ea typeface="Trebuchet MS" pitchFamily="34" charset="-122"/>
                 <a:cs typeface="Trebuchet MS" pitchFamily="34" charset="-120"/>
               </a:rPr>
-              <a:t>l</a:t>
+              <a:t>s</a:t>
             </a:r>
             <a:endParaRPr lang="en-US" sz="900" dirty="0"/>
           </a:p>
@@ -21716,11 +21650,11 @@
         <p:spPr>
           <a:xfrm>
             <a:off x="7447135" y="4169664"/>
-            <a:ext cx="685800" cy="384048"/>
+            <a:ext cx="685800" cy="475488"/>
           </a:xfrm>
           <a:prstGeom prst="rect">
             <a:avLst>
-              <a:gd name="adj" fmla="val 9524"/>
+              <a:gd name="adj" fmla="val 7692"/>
             </a:avLst>
           </a:prstGeom>
           <a:solidFill>
@@ -21743,7 +21677,7 @@
         <p:spPr>
           <a:xfrm>
             <a:off x="7447135" y="4169664"/>
-            <a:ext cx="685800" cy="384048"/>
+            <a:ext cx="685800" cy="475488"/>
           </a:xfrm>
           <a:prstGeom prst="rect">
             <a:avLst/>
@@ -21767,48 +21701,9 @@
                 <a:ea typeface="Trebuchet MS" pitchFamily="34" charset="-122"/>
                 <a:cs typeface="Trebuchet MS" pitchFamily="34" charset="-120"/>
               </a:rPr>
-              <a:t>ee</a:t>
+              <a:t>t</a:t>
             </a:r>
             <a:endParaRPr lang="en-US" sz="900" dirty="0"/>
-          </a:p>
-        </p:txBody>
-      </p:sp>
-      <p:sp>
-        <p:nvSpPr>
-          <p:cNvPr id="45" name="Text 43"/>
-          <p:cNvSpPr/>
-          <p:nvPr/>
-        </p:nvSpPr>
-        <p:spPr>
-          <a:xfrm>
-            <a:off x="7447135" y="4572000"/>
-            <a:ext cx="685800" cy="219456"/>
-          </a:xfrm>
-          <a:prstGeom prst="rect">
-            <a:avLst/>
-          </a:prstGeom>
-          <a:noFill/>
-          <a:ln/>
-        </p:spPr>
-        <p:txBody>
-          <a:bodyPr wrap="square" lIns="0" tIns="0" rIns="0" bIns="0" rtlCol="0" anchor="t"/>
-          <a:lstStyle/>
-          <a:p>
-            <a:pPr algn="ctr" indent="0" marL="0">
-              <a:buNone/>
-            </a:pPr>
-            <a:r>
-              <a:rPr lang="en-US" sz="750" i="1" dirty="0">
-                <a:solidFill>
-                  <a:srgbClr val="94A3B8"/>
-                </a:solidFill>
-                <a:latin typeface="Calibri" pitchFamily="34" charset="0"/>
-                <a:ea typeface="Calibri" pitchFamily="34" charset="-122"/>
-                <a:cs typeface="Calibri" pitchFamily="34" charset="-120"/>
-              </a:rPr>
-              <a:t>/ee/</a:t>
-            </a:r>
-            <a:endParaRPr lang="en-US" sz="750" dirty="0"/>
           </a:p>
         </p:txBody>
       </p:sp>
@@ -23242,7 +23137,7 @@
                 <a:ea typeface="Calibri" pitchFamily="34" charset="-122"/>
                 <a:cs typeface="Calibri" pitchFamily="34" charset="-120"/>
               </a:rPr>
-              <a:t>not hard, gentle</a:t>
+              <a:t>gentle, not hard</a:t>
             </a:r>
             <a:endParaRPr lang="en-US" sz="850" dirty="0"/>
           </a:p>
@@ -24946,7 +24841,7 @@
                 <a:ea typeface="Calibri" pitchFamily="34" charset="-122"/>
                 <a:cs typeface="Calibri" pitchFamily="34" charset="-120"/>
               </a:rPr>
-              <a:t>not hard, gentle</a:t>
+              <a:t>gentle, not hard</a:t>
             </a:r>
             <a:endParaRPr lang="en-US" sz="850" dirty="0"/>
           </a:p>
@@ -25217,7 +25112,7 @@
                 <a:ea typeface="Trebuchet MS" pitchFamily="34" charset="-122"/>
                 <a:cs typeface="Trebuchet MS" pitchFamily="34" charset="-120"/>
               </a:rPr>
-              <a:t>sof</a:t>
+              <a:t>soft</a:t>
             </a:r>
             <a:endParaRPr lang="en-US" sz="1400" dirty="0"/>
           </a:p>
@@ -25322,7 +25217,7 @@
                 <a:ea typeface="Trebuchet MS" pitchFamily="34" charset="-122"/>
                 <a:cs typeface="Trebuchet MS" pitchFamily="34" charset="-120"/>
               </a:rPr>
-              <a:t>ten</a:t>
+              <a:t>en</a:t>
             </a:r>
             <a:endParaRPr lang="en-US" sz="1400" dirty="0"/>
           </a:p>
@@ -26063,7 +25958,7 @@
                 <a:ea typeface="Calibri" pitchFamily="34" charset="-122"/>
                 <a:cs typeface="Calibri" pitchFamily="34" charset="-120"/>
               </a:rPr>
-              <a:t>not hard, gentle</a:t>
+              <a:t>gentle, not hard</a:t>
             </a:r>
             <a:endParaRPr lang="en-US" sz="850" dirty="0"/>
           </a:p>
@@ -26334,7 +26229,7 @@
                 <a:ea typeface="Trebuchet MS" pitchFamily="34" charset="-122"/>
                 <a:cs typeface="Trebuchet MS" pitchFamily="34" charset="-120"/>
               </a:rPr>
-              <a:t>sof</a:t>
+              <a:t>soft</a:t>
             </a:r>
             <a:endParaRPr lang="en-US" sz="1400" dirty="0"/>
           </a:p>
@@ -26439,7 +26334,7 @@
                 <a:ea typeface="Trebuchet MS" pitchFamily="34" charset="-122"/>
                 <a:cs typeface="Trebuchet MS" pitchFamily="34" charset="-120"/>
               </a:rPr>
-              <a:t>ten</a:t>
+              <a:t>en</a:t>
             </a:r>
             <a:endParaRPr lang="en-US" sz="1400" dirty="0"/>
           </a:p>
@@ -26730,7 +26625,7 @@
                 <a:ea typeface="Trebuchet MS" pitchFamily="34" charset="-122"/>
                 <a:cs typeface="Trebuchet MS" pitchFamily="34" charset="-120"/>
               </a:rPr>
-              <a:t>f</a:t>
+              <a:t>ft</a:t>
             </a:r>
             <a:endParaRPr lang="en-US" sz="900" dirty="0"/>
           </a:p>
@@ -26796,7 +26691,7 @@
                 <a:ea typeface="Trebuchet MS" pitchFamily="34" charset="-122"/>
                 <a:cs typeface="Trebuchet MS" pitchFamily="34" charset="-120"/>
               </a:rPr>
-              <a:t>t</a:t>
+              <a:t>e</a:t>
             </a:r>
             <a:endParaRPr lang="en-US" sz="900" dirty="0"/>
           </a:p>
@@ -26862,7 +26757,7 @@
                 <a:ea typeface="Trebuchet MS" pitchFamily="34" charset="-122"/>
                 <a:cs typeface="Trebuchet MS" pitchFamily="34" charset="-120"/>
               </a:rPr>
-              <a:t>en</a:t>
+              <a:t>n</a:t>
             </a:r>
             <a:endParaRPr lang="en-US" sz="900" dirty="0"/>
           </a:p>
@@ -27293,7 +27188,7 @@
                 <a:ea typeface="Trebuchet MS" pitchFamily="34" charset="-122"/>
                 <a:cs typeface="Trebuchet MS" pitchFamily="34" charset="-120"/>
               </a:rPr>
-              <a:t>softness</a:t>
+              <a:t>oversoften</a:t>
             </a:r>
             <a:endParaRPr lang="en-US" sz="2800" dirty="0"/>
           </a:p>
@@ -28120,7 +28015,7 @@
                 <a:ea typeface="Trebuchet MS" pitchFamily="34" charset="-122"/>
                 <a:cs typeface="Trebuchet MS" pitchFamily="34" charset="-120"/>
               </a:rPr>
-              <a:t>softness</a:t>
+              <a:t>oversoften</a:t>
             </a:r>
             <a:endParaRPr lang="en-US" sz="2800" dirty="0"/>
           </a:p>
@@ -28200,7 +28095,7 @@
         </p:nvSpPr>
         <p:spPr>
           <a:xfrm>
-            <a:off x="2938272" y="2258568"/>
+            <a:off x="2221992" y="2258568"/>
             <a:ext cx="1828800" cy="292608"/>
           </a:xfrm>
           <a:prstGeom prst="rect">
@@ -28209,11 +28104,11 @@
             </a:avLst>
           </a:prstGeom>
           <a:solidFill>
-            <a:srgbClr val="CCFBF1"/>
+            <a:srgbClr val="DDD6FE"/>
           </a:solidFill>
           <a:ln w="19050">
             <a:solidFill>
-              <a:srgbClr val="0D9488"/>
+              <a:srgbClr val="7C3AED"/>
             </a:solidFill>
             <a:prstDash val="solid"/>
           </a:ln>
@@ -28234,7 +28129,7 @@
         </p:nvSpPr>
         <p:spPr>
           <a:xfrm>
-            <a:off x="2938272" y="2258568"/>
+            <a:off x="2221992" y="2258568"/>
             <a:ext cx="1828800" cy="292608"/>
           </a:xfrm>
           <a:prstGeom prst="rect">
@@ -28253,13 +28148,13 @@
             <a:r>
               <a:rPr lang="en-US" sz="1300" b="1" dirty="0">
                 <a:solidFill>
-                  <a:srgbClr val="0F766E"/>
+                  <a:srgbClr val="4C1D95"/>
                 </a:solidFill>
                 <a:latin typeface="Trebuchet MS" pitchFamily="34" charset="0"/>
                 <a:ea typeface="Trebuchet MS" pitchFamily="34" charset="-122"/>
                 <a:cs typeface="Trebuchet MS" pitchFamily="34" charset="-120"/>
               </a:rPr>
-              <a:t>soft</a:t>
+              <a:t>over</a:t>
             </a:r>
             <a:endParaRPr lang="en-US" sz="1300" dirty="0"/>
           </a:p>
@@ -28273,7 +28168,7 @@
         </p:nvSpPr>
         <p:spPr>
           <a:xfrm>
-            <a:off x="2938272" y="2569464"/>
+            <a:off x="2221992" y="2569464"/>
             <a:ext cx="1828800" cy="201168"/>
           </a:xfrm>
           <a:prstGeom prst="rect">
@@ -28298,7 +28193,7 @@
                 <a:ea typeface="Calibri" pitchFamily="34" charset="-122"/>
                 <a:cs typeface="Calibri" pitchFamily="34" charset="-120"/>
               </a:rPr>
-              <a:t>not hard, gentle</a:t>
+              <a:t>too much, beyond</a:t>
             </a:r>
             <a:endParaRPr lang="en-US" sz="850" dirty="0"/>
           </a:p>
@@ -28312,7 +28207,7 @@
         </p:nvSpPr>
         <p:spPr>
           <a:xfrm>
-            <a:off x="5803392" y="2258568"/>
+            <a:off x="4370832" y="2258568"/>
             <a:ext cx="1828800" cy="292608"/>
           </a:xfrm>
           <a:prstGeom prst="rect">
@@ -28321,11 +28216,11 @@
             </a:avLst>
           </a:prstGeom>
           <a:solidFill>
-            <a:srgbClr val="FCE7F3"/>
+            <a:srgbClr val="CCFBF1"/>
           </a:solidFill>
           <a:ln w="19050">
             <a:solidFill>
-              <a:srgbClr val="DB2777"/>
+              <a:srgbClr val="0D9488"/>
             </a:solidFill>
             <a:prstDash val="solid"/>
           </a:ln>
@@ -28346,7 +28241,7 @@
         </p:nvSpPr>
         <p:spPr>
           <a:xfrm>
-            <a:off x="5803392" y="2258568"/>
+            <a:off x="4370832" y="2258568"/>
             <a:ext cx="1828800" cy="292608"/>
           </a:xfrm>
           <a:prstGeom prst="rect">
@@ -28365,13 +28260,13 @@
             <a:r>
               <a:rPr lang="en-US" sz="1300" b="1" dirty="0">
                 <a:solidFill>
-                  <a:srgbClr val="9D174D"/>
+                  <a:srgbClr val="0F766E"/>
                 </a:solidFill>
                 <a:latin typeface="Trebuchet MS" pitchFamily="34" charset="0"/>
                 <a:ea typeface="Trebuchet MS" pitchFamily="34" charset="-122"/>
                 <a:cs typeface="Trebuchet MS" pitchFamily="34" charset="-120"/>
               </a:rPr>
-              <a:t>ness</a:t>
+              <a:t>soft</a:t>
             </a:r>
             <a:endParaRPr lang="en-US" sz="1300" dirty="0"/>
           </a:p>
@@ -28385,7 +28280,7 @@
         </p:nvSpPr>
         <p:spPr>
           <a:xfrm>
-            <a:off x="5803392" y="2569464"/>
+            <a:off x="4370832" y="2569464"/>
             <a:ext cx="1828800" cy="201168"/>
           </a:xfrm>
           <a:prstGeom prst="rect">
@@ -28410,7 +28305,7 @@
                 <a:ea typeface="Calibri" pitchFamily="34" charset="-122"/>
                 <a:cs typeface="Calibri" pitchFamily="34" charset="-120"/>
               </a:rPr>
-              <a:t>state or quality of</a:t>
+              <a:t>gentle, not hard</a:t>
             </a:r>
             <a:endParaRPr lang="en-US" sz="850" dirty="0"/>
           </a:p>
@@ -28419,6 +28314,118 @@
       <p:sp>
         <p:nvSpPr>
           <p:cNvPr id="22" name="Shape 20"/>
+          <p:cNvSpPr/>
+          <p:nvPr/>
+        </p:nvSpPr>
+        <p:spPr>
+          <a:xfrm>
+            <a:off x="6519672" y="2258568"/>
+            <a:ext cx="1828800" cy="292608"/>
+          </a:xfrm>
+          <a:prstGeom prst="rect">
+            <a:avLst>
+              <a:gd name="adj" fmla="val 25000"/>
+            </a:avLst>
+          </a:prstGeom>
+          <a:solidFill>
+            <a:srgbClr val="FCE7F3"/>
+          </a:solidFill>
+          <a:ln w="19050">
+            <a:solidFill>
+              <a:srgbClr val="DB2777"/>
+            </a:solidFill>
+            <a:prstDash val="solid"/>
+          </a:ln>
+          <a:effectLst>
+            <a:outerShdw sx="100000" sy="100000" kx="0" ky="0" algn="bl" rotWithShape="0" blurRad="101600" dist="38100" dir="8100000">
+              <a:srgbClr val="000000">
+                <a:alpha val="12000"/>
+              </a:srgbClr>
+            </a:outerShdw>
+          </a:effectLst>
+        </p:spPr>
+      </p:sp>
+      <p:sp>
+        <p:nvSpPr>
+          <p:cNvPr id="23" name="Text 21"/>
+          <p:cNvSpPr/>
+          <p:nvPr/>
+        </p:nvSpPr>
+        <p:spPr>
+          <a:xfrm>
+            <a:off x="6519672" y="2258568"/>
+            <a:ext cx="1828800" cy="292608"/>
+          </a:xfrm>
+          <a:prstGeom prst="rect">
+            <a:avLst/>
+          </a:prstGeom>
+          <a:noFill/>
+          <a:ln/>
+        </p:spPr>
+        <p:txBody>
+          <a:bodyPr wrap="square" lIns="0" tIns="0" rIns="0" bIns="0" rtlCol="0" anchor="ctr"/>
+          <a:lstStyle/>
+          <a:p>
+            <a:pPr algn="ctr" indent="0" marL="0">
+              <a:buNone/>
+            </a:pPr>
+            <a:r>
+              <a:rPr lang="en-US" sz="1300" b="1" dirty="0">
+                <a:solidFill>
+                  <a:srgbClr val="9D174D"/>
+                </a:solidFill>
+                <a:latin typeface="Trebuchet MS" pitchFamily="34" charset="0"/>
+                <a:ea typeface="Trebuchet MS" pitchFamily="34" charset="-122"/>
+                <a:cs typeface="Trebuchet MS" pitchFamily="34" charset="-120"/>
+              </a:rPr>
+              <a:t>en</a:t>
+            </a:r>
+            <a:endParaRPr lang="en-US" sz="1300" dirty="0"/>
+          </a:p>
+        </p:txBody>
+      </p:sp>
+      <p:sp>
+        <p:nvSpPr>
+          <p:cNvPr id="24" name="Text 22"/>
+          <p:cNvSpPr/>
+          <p:nvPr/>
+        </p:nvSpPr>
+        <p:spPr>
+          <a:xfrm>
+            <a:off x="6519672" y="2569464"/>
+            <a:ext cx="1828800" cy="201168"/>
+          </a:xfrm>
+          <a:prstGeom prst="rect">
+            <a:avLst/>
+          </a:prstGeom>
+          <a:noFill/>
+          <a:ln/>
+        </p:spPr>
+        <p:txBody>
+          <a:bodyPr wrap="square" lIns="0" tIns="0" rIns="0" bIns="0" rtlCol="0" anchor="t"/>
+          <a:lstStyle/>
+          <a:p>
+            <a:pPr algn="ctr" indent="0" marL="0">
+              <a:buNone/>
+            </a:pPr>
+            <a:r>
+              <a:rPr lang="en-US" sz="850" dirty="0">
+                <a:solidFill>
+                  <a:srgbClr val="475569"/>
+                </a:solidFill>
+                <a:latin typeface="Calibri" pitchFamily="34" charset="0"/>
+                <a:ea typeface="Calibri" pitchFamily="34" charset="-122"/>
+                <a:cs typeface="Calibri" pitchFamily="34" charset="-120"/>
+              </a:rPr>
+              <a:t>to make or become</a:t>
+            </a:r>
+            <a:endParaRPr lang="en-US" sz="850" dirty="0"/>
+          </a:p>
+        </p:txBody>
+      </p:sp>
+      <p:sp>
+        <p:nvSpPr>
+          <p:cNvPr id="25" name="Shape 23"/>
           <p:cNvSpPr/>
           <p:nvPr/>
         </p:nvSpPr>
@@ -28445,7 +28452,7 @@
       </p:sp>
       <p:sp>
         <p:nvSpPr>
-          <p:cNvPr id="23" name="Text 21"/>
+          <p:cNvPr id="26" name="Text 24"/>
           <p:cNvSpPr/>
           <p:nvPr/>
         </p:nvSpPr>
@@ -28484,7 +28491,7 @@
       </p:sp>
       <p:sp>
         <p:nvSpPr>
-          <p:cNvPr id="24" name="Shape 22"/>
+          <p:cNvPr id="27" name="Shape 25"/>
           <p:cNvSpPr/>
           <p:nvPr/>
         </p:nvSpPr>
@@ -28511,7 +28518,7 @@
       </p:sp>
       <p:sp>
         <p:nvSpPr>
-          <p:cNvPr id="25" name="Text 23"/>
+          <p:cNvPr id="28" name="Text 26"/>
           <p:cNvSpPr/>
           <p:nvPr/>
         </p:nvSpPr>
@@ -28550,7 +28557,7 @@
       </p:sp>
       <p:sp>
         <p:nvSpPr>
-          <p:cNvPr id="26" name="Shape 24"/>
+          <p:cNvPr id="29" name="Shape 27"/>
           <p:cNvSpPr/>
           <p:nvPr/>
         </p:nvSpPr>
@@ -28577,7 +28584,7 @@
       </p:sp>
       <p:sp>
         <p:nvSpPr>
-          <p:cNvPr id="27" name="Text 25"/>
+          <p:cNvPr id="30" name="Text 28"/>
           <p:cNvSpPr/>
           <p:nvPr/>
         </p:nvSpPr>
@@ -28616,7 +28623,7 @@
       </p:sp>
       <p:sp>
         <p:nvSpPr>
-          <p:cNvPr id="28" name="Shape 26"/>
+          <p:cNvPr id="31" name="Shape 29"/>
           <p:cNvSpPr/>
           <p:nvPr/>
         </p:nvSpPr>
@@ -28643,7 +28650,7 @@
       </p:sp>
       <p:sp>
         <p:nvSpPr>
-          <p:cNvPr id="29" name="Text 27"/>
+          <p:cNvPr id="32" name="Text 30"/>
           <p:cNvSpPr/>
           <p:nvPr/>
         </p:nvSpPr>
@@ -29105,7 +29112,7 @@
                 <a:ea typeface="Trebuchet MS" pitchFamily="34" charset="-122"/>
                 <a:cs typeface="Trebuchet MS" pitchFamily="34" charset="-120"/>
               </a:rPr>
-              <a:t>softness</a:t>
+              <a:t>oversoften</a:t>
             </a:r>
             <a:endParaRPr lang="en-US" sz="2800" dirty="0"/>
           </a:p>
@@ -29185,7 +29192,7 @@
         </p:nvSpPr>
         <p:spPr>
           <a:xfrm>
-            <a:off x="2938272" y="2258568"/>
+            <a:off x="2221992" y="2258568"/>
             <a:ext cx="1828800" cy="292608"/>
           </a:xfrm>
           <a:prstGeom prst="rect">
@@ -29194,11 +29201,11 @@
             </a:avLst>
           </a:prstGeom>
           <a:solidFill>
-            <a:srgbClr val="CCFBF1"/>
+            <a:srgbClr val="DDD6FE"/>
           </a:solidFill>
           <a:ln w="19050">
             <a:solidFill>
-              <a:srgbClr val="0D9488"/>
+              <a:srgbClr val="7C3AED"/>
             </a:solidFill>
             <a:prstDash val="solid"/>
           </a:ln>
@@ -29219,7 +29226,7 @@
         </p:nvSpPr>
         <p:spPr>
           <a:xfrm>
-            <a:off x="2938272" y="2258568"/>
+            <a:off x="2221992" y="2258568"/>
             <a:ext cx="1828800" cy="292608"/>
           </a:xfrm>
           <a:prstGeom prst="rect">
@@ -29238,13 +29245,13 @@
             <a:r>
               <a:rPr lang="en-US" sz="1300" b="1" dirty="0">
                 <a:solidFill>
-                  <a:srgbClr val="0F766E"/>
+                  <a:srgbClr val="4C1D95"/>
                 </a:solidFill>
                 <a:latin typeface="Trebuchet MS" pitchFamily="34" charset="0"/>
                 <a:ea typeface="Trebuchet MS" pitchFamily="34" charset="-122"/>
                 <a:cs typeface="Trebuchet MS" pitchFamily="34" charset="-120"/>
               </a:rPr>
-              <a:t>soft</a:t>
+              <a:t>over</a:t>
             </a:r>
             <a:endParaRPr lang="en-US" sz="1300" dirty="0"/>
           </a:p>
@@ -29258,7 +29265,7 @@
         </p:nvSpPr>
         <p:spPr>
           <a:xfrm>
-            <a:off x="2938272" y="2569464"/>
+            <a:off x="2221992" y="2569464"/>
             <a:ext cx="1828800" cy="201168"/>
           </a:xfrm>
           <a:prstGeom prst="rect">
@@ -29283,7 +29290,7 @@
                 <a:ea typeface="Calibri" pitchFamily="34" charset="-122"/>
                 <a:cs typeface="Calibri" pitchFamily="34" charset="-120"/>
               </a:rPr>
-              <a:t>not hard, gentle</a:t>
+              <a:t>too much, beyond</a:t>
             </a:r>
             <a:endParaRPr lang="en-US" sz="850" dirty="0"/>
           </a:p>
@@ -29297,7 +29304,7 @@
         </p:nvSpPr>
         <p:spPr>
           <a:xfrm>
-            <a:off x="5803392" y="2258568"/>
+            <a:off x="4370832" y="2258568"/>
             <a:ext cx="1828800" cy="292608"/>
           </a:xfrm>
           <a:prstGeom prst="rect">
@@ -29306,11 +29313,11 @@
             </a:avLst>
           </a:prstGeom>
           <a:solidFill>
-            <a:srgbClr val="FCE7F3"/>
+            <a:srgbClr val="CCFBF1"/>
           </a:solidFill>
           <a:ln w="19050">
             <a:solidFill>
-              <a:srgbClr val="DB2777"/>
+              <a:srgbClr val="0D9488"/>
             </a:solidFill>
             <a:prstDash val="solid"/>
           </a:ln>
@@ -29331,7 +29338,7 @@
         </p:nvSpPr>
         <p:spPr>
           <a:xfrm>
-            <a:off x="5803392" y="2258568"/>
+            <a:off x="4370832" y="2258568"/>
             <a:ext cx="1828800" cy="292608"/>
           </a:xfrm>
           <a:prstGeom prst="rect">
@@ -29350,13 +29357,13 @@
             <a:r>
               <a:rPr lang="en-US" sz="1300" b="1" dirty="0">
                 <a:solidFill>
-                  <a:srgbClr val="9D174D"/>
+                  <a:srgbClr val="0F766E"/>
                 </a:solidFill>
                 <a:latin typeface="Trebuchet MS" pitchFamily="34" charset="0"/>
                 <a:ea typeface="Trebuchet MS" pitchFamily="34" charset="-122"/>
                 <a:cs typeface="Trebuchet MS" pitchFamily="34" charset="-120"/>
               </a:rPr>
-              <a:t>ness</a:t>
+              <a:t>soft</a:t>
             </a:r>
             <a:endParaRPr lang="en-US" sz="1300" dirty="0"/>
           </a:p>
@@ -29370,7 +29377,7 @@
         </p:nvSpPr>
         <p:spPr>
           <a:xfrm>
-            <a:off x="5803392" y="2569464"/>
+            <a:off x="4370832" y="2569464"/>
             <a:ext cx="1828800" cy="201168"/>
           </a:xfrm>
           <a:prstGeom prst="rect">
@@ -29395,7 +29402,7 @@
                 <a:ea typeface="Calibri" pitchFamily="34" charset="-122"/>
                 <a:cs typeface="Calibri" pitchFamily="34" charset="-120"/>
               </a:rPr>
-              <a:t>state or quality of</a:t>
+              <a:t>gentle, not hard</a:t>
             </a:r>
             <a:endParaRPr lang="en-US" sz="850" dirty="0"/>
           </a:p>
@@ -29404,6 +29411,118 @@
       <p:sp>
         <p:nvSpPr>
           <p:cNvPr id="22" name="Shape 20"/>
+          <p:cNvSpPr/>
+          <p:nvPr/>
+        </p:nvSpPr>
+        <p:spPr>
+          <a:xfrm>
+            <a:off x="6519672" y="2258568"/>
+            <a:ext cx="1828800" cy="292608"/>
+          </a:xfrm>
+          <a:prstGeom prst="rect">
+            <a:avLst>
+              <a:gd name="adj" fmla="val 25000"/>
+            </a:avLst>
+          </a:prstGeom>
+          <a:solidFill>
+            <a:srgbClr val="FCE7F3"/>
+          </a:solidFill>
+          <a:ln w="19050">
+            <a:solidFill>
+              <a:srgbClr val="DB2777"/>
+            </a:solidFill>
+            <a:prstDash val="solid"/>
+          </a:ln>
+          <a:effectLst>
+            <a:outerShdw sx="100000" sy="100000" kx="0" ky="0" algn="bl" rotWithShape="0" blurRad="101600" dist="38100" dir="8100000">
+              <a:srgbClr val="000000">
+                <a:alpha val="12000"/>
+              </a:srgbClr>
+            </a:outerShdw>
+          </a:effectLst>
+        </p:spPr>
+      </p:sp>
+      <p:sp>
+        <p:nvSpPr>
+          <p:cNvPr id="23" name="Text 21"/>
+          <p:cNvSpPr/>
+          <p:nvPr/>
+        </p:nvSpPr>
+        <p:spPr>
+          <a:xfrm>
+            <a:off x="6519672" y="2258568"/>
+            <a:ext cx="1828800" cy="292608"/>
+          </a:xfrm>
+          <a:prstGeom prst="rect">
+            <a:avLst/>
+          </a:prstGeom>
+          <a:noFill/>
+          <a:ln/>
+        </p:spPr>
+        <p:txBody>
+          <a:bodyPr wrap="square" lIns="0" tIns="0" rIns="0" bIns="0" rtlCol="0" anchor="ctr"/>
+          <a:lstStyle/>
+          <a:p>
+            <a:pPr algn="ctr" indent="0" marL="0">
+              <a:buNone/>
+            </a:pPr>
+            <a:r>
+              <a:rPr lang="en-US" sz="1300" b="1" dirty="0">
+                <a:solidFill>
+                  <a:srgbClr val="9D174D"/>
+                </a:solidFill>
+                <a:latin typeface="Trebuchet MS" pitchFamily="34" charset="0"/>
+                <a:ea typeface="Trebuchet MS" pitchFamily="34" charset="-122"/>
+                <a:cs typeface="Trebuchet MS" pitchFamily="34" charset="-120"/>
+              </a:rPr>
+              <a:t>en</a:t>
+            </a:r>
+            <a:endParaRPr lang="en-US" sz="1300" dirty="0"/>
+          </a:p>
+        </p:txBody>
+      </p:sp>
+      <p:sp>
+        <p:nvSpPr>
+          <p:cNvPr id="24" name="Text 22"/>
+          <p:cNvSpPr/>
+          <p:nvPr/>
+        </p:nvSpPr>
+        <p:spPr>
+          <a:xfrm>
+            <a:off x="6519672" y="2569464"/>
+            <a:ext cx="1828800" cy="201168"/>
+          </a:xfrm>
+          <a:prstGeom prst="rect">
+            <a:avLst/>
+          </a:prstGeom>
+          <a:noFill/>
+          <a:ln/>
+        </p:spPr>
+        <p:txBody>
+          <a:bodyPr wrap="square" lIns="0" tIns="0" rIns="0" bIns="0" rtlCol="0" anchor="t"/>
+          <a:lstStyle/>
+          <a:p>
+            <a:pPr algn="ctr" indent="0" marL="0">
+              <a:buNone/>
+            </a:pPr>
+            <a:r>
+              <a:rPr lang="en-US" sz="850" dirty="0">
+                <a:solidFill>
+                  <a:srgbClr val="475569"/>
+                </a:solidFill>
+                <a:latin typeface="Calibri" pitchFamily="34" charset="0"/>
+                <a:ea typeface="Calibri" pitchFamily="34" charset="-122"/>
+                <a:cs typeface="Calibri" pitchFamily="34" charset="-120"/>
+              </a:rPr>
+              <a:t>to make or become</a:t>
+            </a:r>
+            <a:endParaRPr lang="en-US" sz="850" dirty="0"/>
+          </a:p>
+        </p:txBody>
+      </p:sp>
+      <p:sp>
+        <p:nvSpPr>
+          <p:cNvPr id="25" name="Shape 23"/>
           <p:cNvSpPr/>
           <p:nvPr/>
         </p:nvSpPr>
@@ -29430,7 +29549,7 @@
       </p:sp>
       <p:sp>
         <p:nvSpPr>
-          <p:cNvPr id="23" name="Text 21"/>
+          <p:cNvPr id="26" name="Text 24"/>
           <p:cNvSpPr/>
           <p:nvPr/>
         </p:nvSpPr>
@@ -29469,7 +29588,7 @@
       </p:sp>
       <p:sp>
         <p:nvSpPr>
-          <p:cNvPr id="24" name="Shape 22"/>
+          <p:cNvPr id="27" name="Shape 25"/>
           <p:cNvSpPr/>
           <p:nvPr/>
         </p:nvSpPr>
@@ -29496,14 +29615,14 @@
       </p:sp>
       <p:sp>
         <p:nvSpPr>
-          <p:cNvPr id="25" name="Shape 23"/>
-          <p:cNvSpPr/>
-          <p:nvPr/>
-        </p:nvSpPr>
-        <p:spPr>
-          <a:xfrm>
-            <a:off x="2999232" y="3364992"/>
-            <a:ext cx="1645920" cy="475488"/>
+          <p:cNvPr id="28" name="Shape 26"/>
+          <p:cNvSpPr/>
+          <p:nvPr/>
+        </p:nvSpPr>
+        <p:spPr>
+          <a:xfrm>
+            <a:off x="1975104" y="3364992"/>
+            <a:ext cx="1554480" cy="475488"/>
           </a:xfrm>
           <a:prstGeom prst="rect">
             <a:avLst>
@@ -29523,14 +29642,14 @@
       </p:sp>
       <p:sp>
         <p:nvSpPr>
-          <p:cNvPr id="26" name="Text 24"/>
-          <p:cNvSpPr/>
-          <p:nvPr/>
-        </p:nvSpPr>
-        <p:spPr>
-          <a:xfrm>
-            <a:off x="2999232" y="3364992"/>
-            <a:ext cx="1645920" cy="475488"/>
+          <p:cNvPr id="29" name="Text 27"/>
+          <p:cNvSpPr/>
+          <p:nvPr/>
+        </p:nvSpPr>
+        <p:spPr>
+          <a:xfrm>
+            <a:off x="1975104" y="3364992"/>
+            <a:ext cx="1554480" cy="475488"/>
           </a:xfrm>
           <a:prstGeom prst="rect">
             <a:avLst/>
@@ -29554,7 +29673,7 @@
                 <a:ea typeface="Trebuchet MS" pitchFamily="34" charset="-122"/>
                 <a:cs typeface="Trebuchet MS" pitchFamily="34" charset="-120"/>
               </a:rPr>
-              <a:t>soft</a:t>
+              <a:t>o</a:t>
             </a:r>
             <a:endParaRPr lang="en-US" sz="1400" dirty="0"/>
           </a:p>
@@ -29562,14 +29681,14 @@
       </p:sp>
       <p:sp>
         <p:nvSpPr>
-          <p:cNvPr id="27" name="Text 25"/>
-          <p:cNvSpPr/>
-          <p:nvPr/>
-        </p:nvSpPr>
-        <p:spPr>
-          <a:xfrm>
-            <a:off x="4645152" y="3364992"/>
-            <a:ext cx="1097280" cy="475488"/>
+          <p:cNvPr id="30" name="Text 28"/>
+          <p:cNvSpPr/>
+          <p:nvPr/>
+        </p:nvSpPr>
+        <p:spPr>
+          <a:xfrm>
+            <a:off x="3529584" y="3364992"/>
+            <a:ext cx="73152" cy="475488"/>
           </a:xfrm>
           <a:prstGeom prst="rect">
             <a:avLst/>
@@ -29601,14 +29720,14 @@
       </p:sp>
       <p:sp>
         <p:nvSpPr>
-          <p:cNvPr id="28" name="Shape 26"/>
-          <p:cNvSpPr/>
-          <p:nvPr/>
-        </p:nvSpPr>
-        <p:spPr>
-          <a:xfrm>
-            <a:off x="5742432" y="3364992"/>
-            <a:ext cx="1645920" cy="475488"/>
+          <p:cNvPr id="31" name="Shape 29"/>
+          <p:cNvSpPr/>
+          <p:nvPr/>
+        </p:nvSpPr>
+        <p:spPr>
+          <a:xfrm>
+            <a:off x="3602736" y="3364992"/>
+            <a:ext cx="1554480" cy="475488"/>
           </a:xfrm>
           <a:prstGeom prst="rect">
             <a:avLst>
@@ -29628,14 +29747,14 @@
       </p:sp>
       <p:sp>
         <p:nvSpPr>
-          <p:cNvPr id="29" name="Text 27"/>
-          <p:cNvSpPr/>
-          <p:nvPr/>
-        </p:nvSpPr>
-        <p:spPr>
-          <a:xfrm>
-            <a:off x="5742432" y="3364992"/>
-            <a:ext cx="1645920" cy="475488"/>
+          <p:cNvPr id="32" name="Text 30"/>
+          <p:cNvSpPr/>
+          <p:nvPr/>
+        </p:nvSpPr>
+        <p:spPr>
+          <a:xfrm>
+            <a:off x="3602736" y="3364992"/>
+            <a:ext cx="1554480" cy="475488"/>
           </a:xfrm>
           <a:prstGeom prst="rect">
             <a:avLst/>
@@ -29659,7 +29778,7 @@
                 <a:ea typeface="Trebuchet MS" pitchFamily="34" charset="-122"/>
                 <a:cs typeface="Trebuchet MS" pitchFamily="34" charset="-120"/>
               </a:rPr>
-              <a:t>ness</a:t>
+              <a:t>ver</a:t>
             </a:r>
             <a:endParaRPr lang="en-US" sz="1400" dirty="0"/>
           </a:p>
@@ -29667,7 +29786,217 @@
       </p:sp>
       <p:sp>
         <p:nvSpPr>
-          <p:cNvPr id="30" name="Shape 28"/>
+          <p:cNvPr id="33" name="Text 31"/>
+          <p:cNvSpPr/>
+          <p:nvPr/>
+        </p:nvSpPr>
+        <p:spPr>
+          <a:xfrm>
+            <a:off x="5157216" y="3364992"/>
+            <a:ext cx="73152" cy="475488"/>
+          </a:xfrm>
+          <a:prstGeom prst="rect">
+            <a:avLst/>
+          </a:prstGeom>
+          <a:noFill/>
+          <a:ln/>
+        </p:spPr>
+        <p:txBody>
+          <a:bodyPr wrap="square" lIns="0" tIns="0" rIns="0" bIns="0" rtlCol="0" anchor="ctr"/>
+          <a:lstStyle/>
+          <a:p>
+            <a:pPr algn="ctr" indent="0" marL="0">
+              <a:buNone/>
+            </a:pPr>
+            <a:r>
+              <a:rPr lang="en-US" sz="1600" b="1" dirty="0">
+                <a:solidFill>
+                  <a:srgbClr val="0D9488"/>
+                </a:solidFill>
+                <a:latin typeface="Trebuchet MS" pitchFamily="34" charset="0"/>
+                <a:ea typeface="Trebuchet MS" pitchFamily="34" charset="-122"/>
+                <a:cs typeface="Trebuchet MS" pitchFamily="34" charset="-120"/>
+              </a:rPr>
+              <a:t>·</a:t>
+            </a:r>
+            <a:endParaRPr lang="en-US" sz="1600" dirty="0"/>
+          </a:p>
+        </p:txBody>
+      </p:sp>
+      <p:sp>
+        <p:nvSpPr>
+          <p:cNvPr id="34" name="Shape 32"/>
+          <p:cNvSpPr/>
+          <p:nvPr/>
+        </p:nvSpPr>
+        <p:spPr>
+          <a:xfrm>
+            <a:off x="5230368" y="3364992"/>
+            <a:ext cx="1554480" cy="475488"/>
+          </a:xfrm>
+          <a:prstGeom prst="rect">
+            <a:avLst>
+              <a:gd name="adj" fmla="val 9615"/>
+            </a:avLst>
+          </a:prstGeom>
+          <a:solidFill>
+            <a:srgbClr val="FFFFFF"/>
+          </a:solidFill>
+          <a:ln w="12700">
+            <a:solidFill>
+              <a:srgbClr val="0D9488"/>
+            </a:solidFill>
+            <a:prstDash val="solid"/>
+          </a:ln>
+        </p:spPr>
+      </p:sp>
+      <p:sp>
+        <p:nvSpPr>
+          <p:cNvPr id="35" name="Text 33"/>
+          <p:cNvSpPr/>
+          <p:nvPr/>
+        </p:nvSpPr>
+        <p:spPr>
+          <a:xfrm>
+            <a:off x="5230368" y="3364992"/>
+            <a:ext cx="1554480" cy="475488"/>
+          </a:xfrm>
+          <a:prstGeom prst="rect">
+            <a:avLst/>
+          </a:prstGeom>
+          <a:noFill/>
+          <a:ln/>
+        </p:spPr>
+        <p:txBody>
+          <a:bodyPr wrap="square" lIns="0" tIns="0" rIns="0" bIns="0" rtlCol="0" anchor="ctr"/>
+          <a:lstStyle/>
+          <a:p>
+            <a:pPr algn="ctr" indent="0" marL="0">
+              <a:buNone/>
+            </a:pPr>
+            <a:r>
+              <a:rPr lang="en-US" sz="1400" b="1" dirty="0">
+                <a:solidFill>
+                  <a:srgbClr val="0D9488"/>
+                </a:solidFill>
+                <a:latin typeface="Trebuchet MS" pitchFamily="34" charset="0"/>
+                <a:ea typeface="Trebuchet MS" pitchFamily="34" charset="-122"/>
+                <a:cs typeface="Trebuchet MS" pitchFamily="34" charset="-120"/>
+              </a:rPr>
+              <a:t>soft</a:t>
+            </a:r>
+            <a:endParaRPr lang="en-US" sz="1400" dirty="0"/>
+          </a:p>
+        </p:txBody>
+      </p:sp>
+      <p:sp>
+        <p:nvSpPr>
+          <p:cNvPr id="36" name="Text 34"/>
+          <p:cNvSpPr/>
+          <p:nvPr/>
+        </p:nvSpPr>
+        <p:spPr>
+          <a:xfrm>
+            <a:off x="6784848" y="3364992"/>
+            <a:ext cx="73152" cy="475488"/>
+          </a:xfrm>
+          <a:prstGeom prst="rect">
+            <a:avLst/>
+          </a:prstGeom>
+          <a:noFill/>
+          <a:ln/>
+        </p:spPr>
+        <p:txBody>
+          <a:bodyPr wrap="square" lIns="0" tIns="0" rIns="0" bIns="0" rtlCol="0" anchor="ctr"/>
+          <a:lstStyle/>
+          <a:p>
+            <a:pPr algn="ctr" indent="0" marL="0">
+              <a:buNone/>
+            </a:pPr>
+            <a:r>
+              <a:rPr lang="en-US" sz="1600" b="1" dirty="0">
+                <a:solidFill>
+                  <a:srgbClr val="0D9488"/>
+                </a:solidFill>
+                <a:latin typeface="Trebuchet MS" pitchFamily="34" charset="0"/>
+                <a:ea typeface="Trebuchet MS" pitchFamily="34" charset="-122"/>
+                <a:cs typeface="Trebuchet MS" pitchFamily="34" charset="-120"/>
+              </a:rPr>
+              <a:t>·</a:t>
+            </a:r>
+            <a:endParaRPr lang="en-US" sz="1600" dirty="0"/>
+          </a:p>
+        </p:txBody>
+      </p:sp>
+      <p:sp>
+        <p:nvSpPr>
+          <p:cNvPr id="37" name="Shape 35"/>
+          <p:cNvSpPr/>
+          <p:nvPr/>
+        </p:nvSpPr>
+        <p:spPr>
+          <a:xfrm>
+            <a:off x="6858000" y="3364992"/>
+            <a:ext cx="1554480" cy="475488"/>
+          </a:xfrm>
+          <a:prstGeom prst="rect">
+            <a:avLst>
+              <a:gd name="adj" fmla="val 9615"/>
+            </a:avLst>
+          </a:prstGeom>
+          <a:solidFill>
+            <a:srgbClr val="FFFFFF"/>
+          </a:solidFill>
+          <a:ln w="12700">
+            <a:solidFill>
+              <a:srgbClr val="0D9488"/>
+            </a:solidFill>
+            <a:prstDash val="solid"/>
+          </a:ln>
+        </p:spPr>
+      </p:sp>
+      <p:sp>
+        <p:nvSpPr>
+          <p:cNvPr id="38" name="Text 36"/>
+          <p:cNvSpPr/>
+          <p:nvPr/>
+        </p:nvSpPr>
+        <p:spPr>
+          <a:xfrm>
+            <a:off x="6858000" y="3364992"/>
+            <a:ext cx="1554480" cy="475488"/>
+          </a:xfrm>
+          <a:prstGeom prst="rect">
+            <a:avLst/>
+          </a:prstGeom>
+          <a:noFill/>
+          <a:ln/>
+        </p:spPr>
+        <p:txBody>
+          <a:bodyPr wrap="square" lIns="0" tIns="0" rIns="0" bIns="0" rtlCol="0" anchor="ctr"/>
+          <a:lstStyle/>
+          <a:p>
+            <a:pPr algn="ctr" indent="0" marL="0">
+              <a:buNone/>
+            </a:pPr>
+            <a:r>
+              <a:rPr lang="en-US" sz="1400" b="1" dirty="0">
+                <a:solidFill>
+                  <a:srgbClr val="0D9488"/>
+                </a:solidFill>
+                <a:latin typeface="Trebuchet MS" pitchFamily="34" charset="0"/>
+                <a:ea typeface="Trebuchet MS" pitchFamily="34" charset="-122"/>
+                <a:cs typeface="Trebuchet MS" pitchFamily="34" charset="-120"/>
+              </a:rPr>
+              <a:t>en</a:t>
+            </a:r>
+            <a:endParaRPr lang="en-US" sz="1400" dirty="0"/>
+          </a:p>
+        </p:txBody>
+      </p:sp>
+      <p:sp>
+        <p:nvSpPr>
+          <p:cNvPr id="39" name="Shape 37"/>
           <p:cNvSpPr/>
           <p:nvPr/>
         </p:nvSpPr>
@@ -29694,7 +30023,7 @@
       </p:sp>
       <p:sp>
         <p:nvSpPr>
-          <p:cNvPr id="31" name="Text 29"/>
+          <p:cNvPr id="40" name="Text 38"/>
           <p:cNvSpPr/>
           <p:nvPr/>
         </p:nvSpPr>
@@ -29733,7 +30062,7 @@
       </p:sp>
       <p:sp>
         <p:nvSpPr>
-          <p:cNvPr id="32" name="Shape 30"/>
+          <p:cNvPr id="41" name="Shape 39"/>
           <p:cNvSpPr/>
           <p:nvPr/>
         </p:nvSpPr>
@@ -29760,7 +30089,7 @@
       </p:sp>
       <p:sp>
         <p:nvSpPr>
-          <p:cNvPr id="33" name="Text 31"/>
+          <p:cNvPr id="42" name="Text 40"/>
           <p:cNvSpPr/>
           <p:nvPr/>
         </p:nvSpPr>
@@ -30222,7 +30551,7 @@
                 <a:ea typeface="Trebuchet MS" pitchFamily="34" charset="-122"/>
                 <a:cs typeface="Trebuchet MS" pitchFamily="34" charset="-120"/>
               </a:rPr>
-              <a:t>softness</a:t>
+              <a:t>oversoften</a:t>
             </a:r>
             <a:endParaRPr lang="en-US" sz="2800" dirty="0"/>
           </a:p>
@@ -30302,7 +30631,7 @@
         </p:nvSpPr>
         <p:spPr>
           <a:xfrm>
-            <a:off x="2938272" y="2258568"/>
+            <a:off x="2221992" y="2258568"/>
             <a:ext cx="1828800" cy="292608"/>
           </a:xfrm>
           <a:prstGeom prst="rect">
@@ -30311,11 +30640,11 @@
             </a:avLst>
           </a:prstGeom>
           <a:solidFill>
-            <a:srgbClr val="CCFBF1"/>
+            <a:srgbClr val="DDD6FE"/>
           </a:solidFill>
           <a:ln w="19050">
             <a:solidFill>
-              <a:srgbClr val="0D9488"/>
+              <a:srgbClr val="7C3AED"/>
             </a:solidFill>
             <a:prstDash val="solid"/>
           </a:ln>
@@ -30336,7 +30665,7 @@
         </p:nvSpPr>
         <p:spPr>
           <a:xfrm>
-            <a:off x="2938272" y="2258568"/>
+            <a:off x="2221992" y="2258568"/>
             <a:ext cx="1828800" cy="292608"/>
           </a:xfrm>
           <a:prstGeom prst="rect">
@@ -30355,13 +30684,13 @@
             <a:r>
               <a:rPr lang="en-US" sz="1300" b="1" dirty="0">
                 <a:solidFill>
-                  <a:srgbClr val="0F766E"/>
+                  <a:srgbClr val="4C1D95"/>
                 </a:solidFill>
                 <a:latin typeface="Trebuchet MS" pitchFamily="34" charset="0"/>
                 <a:ea typeface="Trebuchet MS" pitchFamily="34" charset="-122"/>
                 <a:cs typeface="Trebuchet MS" pitchFamily="34" charset="-120"/>
               </a:rPr>
-              <a:t>soft</a:t>
+              <a:t>over</a:t>
             </a:r>
             <a:endParaRPr lang="en-US" sz="1300" dirty="0"/>
           </a:p>
@@ -30375,7 +30704,7 @@
         </p:nvSpPr>
         <p:spPr>
           <a:xfrm>
-            <a:off x="2938272" y="2569464"/>
+            <a:off x="2221992" y="2569464"/>
             <a:ext cx="1828800" cy="201168"/>
           </a:xfrm>
           <a:prstGeom prst="rect">
@@ -30400,7 +30729,7 @@
                 <a:ea typeface="Calibri" pitchFamily="34" charset="-122"/>
                 <a:cs typeface="Calibri" pitchFamily="34" charset="-120"/>
               </a:rPr>
-              <a:t>not hard, gentle</a:t>
+              <a:t>too much, beyond</a:t>
             </a:r>
             <a:endParaRPr lang="en-US" sz="850" dirty="0"/>
           </a:p>
@@ -30414,7 +30743,7 @@
         </p:nvSpPr>
         <p:spPr>
           <a:xfrm>
-            <a:off x="5803392" y="2258568"/>
+            <a:off x="4370832" y="2258568"/>
             <a:ext cx="1828800" cy="292608"/>
           </a:xfrm>
           <a:prstGeom prst="rect">
@@ -30423,11 +30752,11 @@
             </a:avLst>
           </a:prstGeom>
           <a:solidFill>
-            <a:srgbClr val="FCE7F3"/>
+            <a:srgbClr val="CCFBF1"/>
           </a:solidFill>
           <a:ln w="19050">
             <a:solidFill>
-              <a:srgbClr val="DB2777"/>
+              <a:srgbClr val="0D9488"/>
             </a:solidFill>
             <a:prstDash val="solid"/>
           </a:ln>
@@ -30448,7 +30777,7 @@
         </p:nvSpPr>
         <p:spPr>
           <a:xfrm>
-            <a:off x="5803392" y="2258568"/>
+            <a:off x="4370832" y="2258568"/>
             <a:ext cx="1828800" cy="292608"/>
           </a:xfrm>
           <a:prstGeom prst="rect">
@@ -30467,13 +30796,13 @@
             <a:r>
               <a:rPr lang="en-US" sz="1300" b="1" dirty="0">
                 <a:solidFill>
-                  <a:srgbClr val="9D174D"/>
+                  <a:srgbClr val="0F766E"/>
                 </a:solidFill>
                 <a:latin typeface="Trebuchet MS" pitchFamily="34" charset="0"/>
                 <a:ea typeface="Trebuchet MS" pitchFamily="34" charset="-122"/>
                 <a:cs typeface="Trebuchet MS" pitchFamily="34" charset="-120"/>
               </a:rPr>
-              <a:t>ness</a:t>
+              <a:t>soft</a:t>
             </a:r>
             <a:endParaRPr lang="en-US" sz="1300" dirty="0"/>
           </a:p>
@@ -30487,7 +30816,7 @@
         </p:nvSpPr>
         <p:spPr>
           <a:xfrm>
-            <a:off x="5803392" y="2569464"/>
+            <a:off x="4370832" y="2569464"/>
             <a:ext cx="1828800" cy="201168"/>
           </a:xfrm>
           <a:prstGeom prst="rect">
@@ -30512,7 +30841,7 @@
                 <a:ea typeface="Calibri" pitchFamily="34" charset="-122"/>
                 <a:cs typeface="Calibri" pitchFamily="34" charset="-120"/>
               </a:rPr>
-              <a:t>state or quality of</a:t>
+              <a:t>gentle, not hard</a:t>
             </a:r>
             <a:endParaRPr lang="en-US" sz="850" dirty="0"/>
           </a:p>
@@ -30521,6 +30850,118 @@
       <p:sp>
         <p:nvSpPr>
           <p:cNvPr id="22" name="Shape 20"/>
+          <p:cNvSpPr/>
+          <p:nvPr/>
+        </p:nvSpPr>
+        <p:spPr>
+          <a:xfrm>
+            <a:off x="6519672" y="2258568"/>
+            <a:ext cx="1828800" cy="292608"/>
+          </a:xfrm>
+          <a:prstGeom prst="rect">
+            <a:avLst>
+              <a:gd name="adj" fmla="val 25000"/>
+            </a:avLst>
+          </a:prstGeom>
+          <a:solidFill>
+            <a:srgbClr val="FCE7F3"/>
+          </a:solidFill>
+          <a:ln w="19050">
+            <a:solidFill>
+              <a:srgbClr val="DB2777"/>
+            </a:solidFill>
+            <a:prstDash val="solid"/>
+          </a:ln>
+          <a:effectLst>
+            <a:outerShdw sx="100000" sy="100000" kx="0" ky="0" algn="bl" rotWithShape="0" blurRad="101600" dist="38100" dir="8100000">
+              <a:srgbClr val="000000">
+                <a:alpha val="12000"/>
+              </a:srgbClr>
+            </a:outerShdw>
+          </a:effectLst>
+        </p:spPr>
+      </p:sp>
+      <p:sp>
+        <p:nvSpPr>
+          <p:cNvPr id="23" name="Text 21"/>
+          <p:cNvSpPr/>
+          <p:nvPr/>
+        </p:nvSpPr>
+        <p:spPr>
+          <a:xfrm>
+            <a:off x="6519672" y="2258568"/>
+            <a:ext cx="1828800" cy="292608"/>
+          </a:xfrm>
+          <a:prstGeom prst="rect">
+            <a:avLst/>
+          </a:prstGeom>
+          <a:noFill/>
+          <a:ln/>
+        </p:spPr>
+        <p:txBody>
+          <a:bodyPr wrap="square" lIns="0" tIns="0" rIns="0" bIns="0" rtlCol="0" anchor="ctr"/>
+          <a:lstStyle/>
+          <a:p>
+            <a:pPr algn="ctr" indent="0" marL="0">
+              <a:buNone/>
+            </a:pPr>
+            <a:r>
+              <a:rPr lang="en-US" sz="1300" b="1" dirty="0">
+                <a:solidFill>
+                  <a:srgbClr val="9D174D"/>
+                </a:solidFill>
+                <a:latin typeface="Trebuchet MS" pitchFamily="34" charset="0"/>
+                <a:ea typeface="Trebuchet MS" pitchFamily="34" charset="-122"/>
+                <a:cs typeface="Trebuchet MS" pitchFamily="34" charset="-120"/>
+              </a:rPr>
+              <a:t>en</a:t>
+            </a:r>
+            <a:endParaRPr lang="en-US" sz="1300" dirty="0"/>
+          </a:p>
+        </p:txBody>
+      </p:sp>
+      <p:sp>
+        <p:nvSpPr>
+          <p:cNvPr id="24" name="Text 22"/>
+          <p:cNvSpPr/>
+          <p:nvPr/>
+        </p:nvSpPr>
+        <p:spPr>
+          <a:xfrm>
+            <a:off x="6519672" y="2569464"/>
+            <a:ext cx="1828800" cy="201168"/>
+          </a:xfrm>
+          <a:prstGeom prst="rect">
+            <a:avLst/>
+          </a:prstGeom>
+          <a:noFill/>
+          <a:ln/>
+        </p:spPr>
+        <p:txBody>
+          <a:bodyPr wrap="square" lIns="0" tIns="0" rIns="0" bIns="0" rtlCol="0" anchor="t"/>
+          <a:lstStyle/>
+          <a:p>
+            <a:pPr algn="ctr" indent="0" marL="0">
+              <a:buNone/>
+            </a:pPr>
+            <a:r>
+              <a:rPr lang="en-US" sz="850" dirty="0">
+                <a:solidFill>
+                  <a:srgbClr val="475569"/>
+                </a:solidFill>
+                <a:latin typeface="Calibri" pitchFamily="34" charset="0"/>
+                <a:ea typeface="Calibri" pitchFamily="34" charset="-122"/>
+                <a:cs typeface="Calibri" pitchFamily="34" charset="-120"/>
+              </a:rPr>
+              <a:t>to make or become</a:t>
+            </a:r>
+            <a:endParaRPr lang="en-US" sz="850" dirty="0"/>
+          </a:p>
+        </p:txBody>
+      </p:sp>
+      <p:sp>
+        <p:nvSpPr>
+          <p:cNvPr id="25" name="Shape 23"/>
           <p:cNvSpPr/>
           <p:nvPr/>
         </p:nvSpPr>
@@ -30547,7 +30988,7 @@
       </p:sp>
       <p:sp>
         <p:nvSpPr>
-          <p:cNvPr id="23" name="Text 21"/>
+          <p:cNvPr id="26" name="Text 24"/>
           <p:cNvSpPr/>
           <p:nvPr/>
         </p:nvSpPr>
@@ -30586,7 +31027,7 @@
       </p:sp>
       <p:sp>
         <p:nvSpPr>
-          <p:cNvPr id="24" name="Shape 22"/>
+          <p:cNvPr id="27" name="Shape 25"/>
           <p:cNvSpPr/>
           <p:nvPr/>
         </p:nvSpPr>
@@ -30613,14 +31054,14 @@
       </p:sp>
       <p:sp>
         <p:nvSpPr>
-          <p:cNvPr id="25" name="Shape 23"/>
-          <p:cNvSpPr/>
-          <p:nvPr/>
-        </p:nvSpPr>
-        <p:spPr>
-          <a:xfrm>
-            <a:off x="2999232" y="3364992"/>
-            <a:ext cx="1645920" cy="475488"/>
+          <p:cNvPr id="28" name="Shape 26"/>
+          <p:cNvSpPr/>
+          <p:nvPr/>
+        </p:nvSpPr>
+        <p:spPr>
+          <a:xfrm>
+            <a:off x="1975104" y="3364992"/>
+            <a:ext cx="1554480" cy="475488"/>
           </a:xfrm>
           <a:prstGeom prst="rect">
             <a:avLst>
@@ -30640,14 +31081,14 @@
       </p:sp>
       <p:sp>
         <p:nvSpPr>
-          <p:cNvPr id="26" name="Text 24"/>
-          <p:cNvSpPr/>
-          <p:nvPr/>
-        </p:nvSpPr>
-        <p:spPr>
-          <a:xfrm>
-            <a:off x="2999232" y="3364992"/>
-            <a:ext cx="1645920" cy="475488"/>
+          <p:cNvPr id="29" name="Text 27"/>
+          <p:cNvSpPr/>
+          <p:nvPr/>
+        </p:nvSpPr>
+        <p:spPr>
+          <a:xfrm>
+            <a:off x="1975104" y="3364992"/>
+            <a:ext cx="1554480" cy="475488"/>
           </a:xfrm>
           <a:prstGeom prst="rect">
             <a:avLst/>
@@ -30671,7 +31112,7 @@
                 <a:ea typeface="Trebuchet MS" pitchFamily="34" charset="-122"/>
                 <a:cs typeface="Trebuchet MS" pitchFamily="34" charset="-120"/>
               </a:rPr>
-              <a:t>soft</a:t>
+              <a:t>o</a:t>
             </a:r>
             <a:endParaRPr lang="en-US" sz="1400" dirty="0"/>
           </a:p>
@@ -30679,14 +31120,14 @@
       </p:sp>
       <p:sp>
         <p:nvSpPr>
-          <p:cNvPr id="27" name="Text 25"/>
-          <p:cNvSpPr/>
-          <p:nvPr/>
-        </p:nvSpPr>
-        <p:spPr>
-          <a:xfrm>
-            <a:off x="4645152" y="3364992"/>
-            <a:ext cx="1097280" cy="475488"/>
+          <p:cNvPr id="30" name="Text 28"/>
+          <p:cNvSpPr/>
+          <p:nvPr/>
+        </p:nvSpPr>
+        <p:spPr>
+          <a:xfrm>
+            <a:off x="3529584" y="3364992"/>
+            <a:ext cx="73152" cy="475488"/>
           </a:xfrm>
           <a:prstGeom prst="rect">
             <a:avLst/>
@@ -30718,14 +31159,14 @@
       </p:sp>
       <p:sp>
         <p:nvSpPr>
-          <p:cNvPr id="28" name="Shape 26"/>
-          <p:cNvSpPr/>
-          <p:nvPr/>
-        </p:nvSpPr>
-        <p:spPr>
-          <a:xfrm>
-            <a:off x="5742432" y="3364992"/>
-            <a:ext cx="1645920" cy="475488"/>
+          <p:cNvPr id="31" name="Shape 29"/>
+          <p:cNvSpPr/>
+          <p:nvPr/>
+        </p:nvSpPr>
+        <p:spPr>
+          <a:xfrm>
+            <a:off x="3602736" y="3364992"/>
+            <a:ext cx="1554480" cy="475488"/>
           </a:xfrm>
           <a:prstGeom prst="rect">
             <a:avLst>
@@ -30745,14 +31186,14 @@
       </p:sp>
       <p:sp>
         <p:nvSpPr>
-          <p:cNvPr id="29" name="Text 27"/>
-          <p:cNvSpPr/>
-          <p:nvPr/>
-        </p:nvSpPr>
-        <p:spPr>
-          <a:xfrm>
-            <a:off x="5742432" y="3364992"/>
-            <a:ext cx="1645920" cy="475488"/>
+          <p:cNvPr id="32" name="Text 30"/>
+          <p:cNvSpPr/>
+          <p:nvPr/>
+        </p:nvSpPr>
+        <p:spPr>
+          <a:xfrm>
+            <a:off x="3602736" y="3364992"/>
+            <a:ext cx="1554480" cy="475488"/>
           </a:xfrm>
           <a:prstGeom prst="rect">
             <a:avLst/>
@@ -30776,7 +31217,7 @@
                 <a:ea typeface="Trebuchet MS" pitchFamily="34" charset="-122"/>
                 <a:cs typeface="Trebuchet MS" pitchFamily="34" charset="-120"/>
               </a:rPr>
-              <a:t>ness</a:t>
+              <a:t>ver</a:t>
             </a:r>
             <a:endParaRPr lang="en-US" sz="1400" dirty="0"/>
           </a:p>
@@ -30784,7 +31225,217 @@
       </p:sp>
       <p:sp>
         <p:nvSpPr>
-          <p:cNvPr id="30" name="Shape 28"/>
+          <p:cNvPr id="33" name="Text 31"/>
+          <p:cNvSpPr/>
+          <p:nvPr/>
+        </p:nvSpPr>
+        <p:spPr>
+          <a:xfrm>
+            <a:off x="5157216" y="3364992"/>
+            <a:ext cx="73152" cy="475488"/>
+          </a:xfrm>
+          <a:prstGeom prst="rect">
+            <a:avLst/>
+          </a:prstGeom>
+          <a:noFill/>
+          <a:ln/>
+        </p:spPr>
+        <p:txBody>
+          <a:bodyPr wrap="square" lIns="0" tIns="0" rIns="0" bIns="0" rtlCol="0" anchor="ctr"/>
+          <a:lstStyle/>
+          <a:p>
+            <a:pPr algn="ctr" indent="0" marL="0">
+              <a:buNone/>
+            </a:pPr>
+            <a:r>
+              <a:rPr lang="en-US" sz="1600" b="1" dirty="0">
+                <a:solidFill>
+                  <a:srgbClr val="0D9488"/>
+                </a:solidFill>
+                <a:latin typeface="Trebuchet MS" pitchFamily="34" charset="0"/>
+                <a:ea typeface="Trebuchet MS" pitchFamily="34" charset="-122"/>
+                <a:cs typeface="Trebuchet MS" pitchFamily="34" charset="-120"/>
+              </a:rPr>
+              <a:t>·</a:t>
+            </a:r>
+            <a:endParaRPr lang="en-US" sz="1600" dirty="0"/>
+          </a:p>
+        </p:txBody>
+      </p:sp>
+      <p:sp>
+        <p:nvSpPr>
+          <p:cNvPr id="34" name="Shape 32"/>
+          <p:cNvSpPr/>
+          <p:nvPr/>
+        </p:nvSpPr>
+        <p:spPr>
+          <a:xfrm>
+            <a:off x="5230368" y="3364992"/>
+            <a:ext cx="1554480" cy="475488"/>
+          </a:xfrm>
+          <a:prstGeom prst="rect">
+            <a:avLst>
+              <a:gd name="adj" fmla="val 9615"/>
+            </a:avLst>
+          </a:prstGeom>
+          <a:solidFill>
+            <a:srgbClr val="FFFFFF"/>
+          </a:solidFill>
+          <a:ln w="12700">
+            <a:solidFill>
+              <a:srgbClr val="0D9488"/>
+            </a:solidFill>
+            <a:prstDash val="solid"/>
+          </a:ln>
+        </p:spPr>
+      </p:sp>
+      <p:sp>
+        <p:nvSpPr>
+          <p:cNvPr id="35" name="Text 33"/>
+          <p:cNvSpPr/>
+          <p:nvPr/>
+        </p:nvSpPr>
+        <p:spPr>
+          <a:xfrm>
+            <a:off x="5230368" y="3364992"/>
+            <a:ext cx="1554480" cy="475488"/>
+          </a:xfrm>
+          <a:prstGeom prst="rect">
+            <a:avLst/>
+          </a:prstGeom>
+          <a:noFill/>
+          <a:ln/>
+        </p:spPr>
+        <p:txBody>
+          <a:bodyPr wrap="square" lIns="0" tIns="0" rIns="0" bIns="0" rtlCol="0" anchor="ctr"/>
+          <a:lstStyle/>
+          <a:p>
+            <a:pPr algn="ctr" indent="0" marL="0">
+              <a:buNone/>
+            </a:pPr>
+            <a:r>
+              <a:rPr lang="en-US" sz="1400" b="1" dirty="0">
+                <a:solidFill>
+                  <a:srgbClr val="0D9488"/>
+                </a:solidFill>
+                <a:latin typeface="Trebuchet MS" pitchFamily="34" charset="0"/>
+                <a:ea typeface="Trebuchet MS" pitchFamily="34" charset="-122"/>
+                <a:cs typeface="Trebuchet MS" pitchFamily="34" charset="-120"/>
+              </a:rPr>
+              <a:t>soft</a:t>
+            </a:r>
+            <a:endParaRPr lang="en-US" sz="1400" dirty="0"/>
+          </a:p>
+        </p:txBody>
+      </p:sp>
+      <p:sp>
+        <p:nvSpPr>
+          <p:cNvPr id="36" name="Text 34"/>
+          <p:cNvSpPr/>
+          <p:nvPr/>
+        </p:nvSpPr>
+        <p:spPr>
+          <a:xfrm>
+            <a:off x="6784848" y="3364992"/>
+            <a:ext cx="73152" cy="475488"/>
+          </a:xfrm>
+          <a:prstGeom prst="rect">
+            <a:avLst/>
+          </a:prstGeom>
+          <a:noFill/>
+          <a:ln/>
+        </p:spPr>
+        <p:txBody>
+          <a:bodyPr wrap="square" lIns="0" tIns="0" rIns="0" bIns="0" rtlCol="0" anchor="ctr"/>
+          <a:lstStyle/>
+          <a:p>
+            <a:pPr algn="ctr" indent="0" marL="0">
+              <a:buNone/>
+            </a:pPr>
+            <a:r>
+              <a:rPr lang="en-US" sz="1600" b="1" dirty="0">
+                <a:solidFill>
+                  <a:srgbClr val="0D9488"/>
+                </a:solidFill>
+                <a:latin typeface="Trebuchet MS" pitchFamily="34" charset="0"/>
+                <a:ea typeface="Trebuchet MS" pitchFamily="34" charset="-122"/>
+                <a:cs typeface="Trebuchet MS" pitchFamily="34" charset="-120"/>
+              </a:rPr>
+              <a:t>·</a:t>
+            </a:r>
+            <a:endParaRPr lang="en-US" sz="1600" dirty="0"/>
+          </a:p>
+        </p:txBody>
+      </p:sp>
+      <p:sp>
+        <p:nvSpPr>
+          <p:cNvPr id="37" name="Shape 35"/>
+          <p:cNvSpPr/>
+          <p:nvPr/>
+        </p:nvSpPr>
+        <p:spPr>
+          <a:xfrm>
+            <a:off x="6858000" y="3364992"/>
+            <a:ext cx="1554480" cy="475488"/>
+          </a:xfrm>
+          <a:prstGeom prst="rect">
+            <a:avLst>
+              <a:gd name="adj" fmla="val 9615"/>
+            </a:avLst>
+          </a:prstGeom>
+          <a:solidFill>
+            <a:srgbClr val="FFFFFF"/>
+          </a:solidFill>
+          <a:ln w="12700">
+            <a:solidFill>
+              <a:srgbClr val="0D9488"/>
+            </a:solidFill>
+            <a:prstDash val="solid"/>
+          </a:ln>
+        </p:spPr>
+      </p:sp>
+      <p:sp>
+        <p:nvSpPr>
+          <p:cNvPr id="38" name="Text 36"/>
+          <p:cNvSpPr/>
+          <p:nvPr/>
+        </p:nvSpPr>
+        <p:spPr>
+          <a:xfrm>
+            <a:off x="6858000" y="3364992"/>
+            <a:ext cx="1554480" cy="475488"/>
+          </a:xfrm>
+          <a:prstGeom prst="rect">
+            <a:avLst/>
+          </a:prstGeom>
+          <a:noFill/>
+          <a:ln/>
+        </p:spPr>
+        <p:txBody>
+          <a:bodyPr wrap="square" lIns="0" tIns="0" rIns="0" bIns="0" rtlCol="0" anchor="ctr"/>
+          <a:lstStyle/>
+          <a:p>
+            <a:pPr algn="ctr" indent="0" marL="0">
+              <a:buNone/>
+            </a:pPr>
+            <a:r>
+              <a:rPr lang="en-US" sz="1400" b="1" dirty="0">
+                <a:solidFill>
+                  <a:srgbClr val="0D9488"/>
+                </a:solidFill>
+                <a:latin typeface="Trebuchet MS" pitchFamily="34" charset="0"/>
+                <a:ea typeface="Trebuchet MS" pitchFamily="34" charset="-122"/>
+                <a:cs typeface="Trebuchet MS" pitchFamily="34" charset="-120"/>
+              </a:rPr>
+              <a:t>en</a:t>
+            </a:r>
+            <a:endParaRPr lang="en-US" sz="1400" dirty="0"/>
+          </a:p>
+        </p:txBody>
+      </p:sp>
+      <p:sp>
+        <p:nvSpPr>
+          <p:cNvPr id="39" name="Shape 37"/>
           <p:cNvSpPr/>
           <p:nvPr/>
         </p:nvSpPr>
@@ -30811,7 +31462,7 @@
       </p:sp>
       <p:sp>
         <p:nvSpPr>
-          <p:cNvPr id="31" name="Text 29"/>
+          <p:cNvPr id="40" name="Text 38"/>
           <p:cNvSpPr/>
           <p:nvPr/>
         </p:nvSpPr>
@@ -30850,7 +31501,7 @@
       </p:sp>
       <p:sp>
         <p:nvSpPr>
-          <p:cNvPr id="32" name="Shape 30"/>
+          <p:cNvPr id="41" name="Shape 39"/>
           <p:cNvSpPr/>
           <p:nvPr/>
         </p:nvSpPr>
@@ -30877,13 +31528,13 @@
       </p:sp>
       <p:sp>
         <p:nvSpPr>
-          <p:cNvPr id="33" name="Shape 31"/>
-          <p:cNvSpPr/>
-          <p:nvPr/>
-        </p:nvSpPr>
-        <p:spPr>
-          <a:xfrm>
-            <a:off x="2124837" y="4169664"/>
+          <p:cNvPr id="42" name="Shape 40"/>
+          <p:cNvSpPr/>
+          <p:nvPr/>
+        </p:nvSpPr>
+        <p:spPr>
+          <a:xfrm>
+            <a:off x="2023872" y="4169664"/>
             <a:ext cx="685800" cy="475488"/>
           </a:xfrm>
           <a:prstGeom prst="rect">
@@ -30904,13 +31555,13 @@
       </p:sp>
       <p:sp>
         <p:nvSpPr>
-          <p:cNvPr id="34" name="Text 32"/>
-          <p:cNvSpPr/>
-          <p:nvPr/>
-        </p:nvSpPr>
-        <p:spPr>
-          <a:xfrm>
-            <a:off x="2124837" y="4169664"/>
+          <p:cNvPr id="43" name="Text 41"/>
+          <p:cNvSpPr/>
+          <p:nvPr/>
+        </p:nvSpPr>
+        <p:spPr>
+          <a:xfrm>
+            <a:off x="2023872" y="4169664"/>
             <a:ext cx="685800" cy="475488"/>
           </a:xfrm>
           <a:prstGeom prst="rect">
@@ -30935,7 +31586,7 @@
                 <a:ea typeface="Trebuchet MS" pitchFamily="34" charset="-122"/>
                 <a:cs typeface="Trebuchet MS" pitchFamily="34" charset="-120"/>
               </a:rPr>
-              <a:t>s</a:t>
+              <a:t>o</a:t>
             </a:r>
             <a:endParaRPr lang="en-US" sz="900" dirty="0"/>
           </a:p>
@@ -30943,13 +31594,13 @@
       </p:sp>
       <p:sp>
         <p:nvSpPr>
-          <p:cNvPr id="35" name="Shape 33"/>
-          <p:cNvSpPr/>
-          <p:nvPr/>
-        </p:nvSpPr>
-        <p:spPr>
-          <a:xfrm>
-            <a:off x="3033522" y="4169664"/>
+          <p:cNvPr id="44" name="Shape 42"/>
+          <p:cNvSpPr/>
+          <p:nvPr/>
+        </p:nvSpPr>
+        <p:spPr>
+          <a:xfrm>
+            <a:off x="2831592" y="4169664"/>
             <a:ext cx="685800" cy="475488"/>
           </a:xfrm>
           <a:prstGeom prst="rect">
@@ -30970,13 +31621,13 @@
       </p:sp>
       <p:sp>
         <p:nvSpPr>
-          <p:cNvPr id="36" name="Text 34"/>
-          <p:cNvSpPr/>
-          <p:nvPr/>
-        </p:nvSpPr>
-        <p:spPr>
-          <a:xfrm>
-            <a:off x="3033522" y="4169664"/>
+          <p:cNvPr id="45" name="Text 43"/>
+          <p:cNvSpPr/>
+          <p:nvPr/>
+        </p:nvSpPr>
+        <p:spPr>
+          <a:xfrm>
+            <a:off x="2831592" y="4169664"/>
             <a:ext cx="685800" cy="475488"/>
           </a:xfrm>
           <a:prstGeom prst="rect">
@@ -31001,7 +31652,7 @@
                 <a:ea typeface="Trebuchet MS" pitchFamily="34" charset="-122"/>
                 <a:cs typeface="Trebuchet MS" pitchFamily="34" charset="-120"/>
               </a:rPr>
-              <a:t>o</a:t>
+              <a:t>v</a:t>
             </a:r>
             <a:endParaRPr lang="en-US" sz="900" dirty="0"/>
           </a:p>
@@ -31009,13 +31660,13 @@
       </p:sp>
       <p:sp>
         <p:nvSpPr>
-          <p:cNvPr id="37" name="Shape 35"/>
-          <p:cNvSpPr/>
-          <p:nvPr/>
-        </p:nvSpPr>
-        <p:spPr>
-          <a:xfrm>
-            <a:off x="3942207" y="4169664"/>
+          <p:cNvPr id="46" name="Shape 44"/>
+          <p:cNvSpPr/>
+          <p:nvPr/>
+        </p:nvSpPr>
+        <p:spPr>
+          <a:xfrm>
+            <a:off x="3639312" y="4169664"/>
             <a:ext cx="685800" cy="475488"/>
           </a:xfrm>
           <a:prstGeom prst="rect">
@@ -31036,13 +31687,13 @@
       </p:sp>
       <p:sp>
         <p:nvSpPr>
-          <p:cNvPr id="38" name="Text 36"/>
-          <p:cNvSpPr/>
-          <p:nvPr/>
-        </p:nvSpPr>
-        <p:spPr>
-          <a:xfrm>
-            <a:off x="3942207" y="4169664"/>
+          <p:cNvPr id="47" name="Text 45"/>
+          <p:cNvSpPr/>
+          <p:nvPr/>
+        </p:nvSpPr>
+        <p:spPr>
+          <a:xfrm>
+            <a:off x="3639312" y="4169664"/>
             <a:ext cx="685800" cy="475488"/>
           </a:xfrm>
           <a:prstGeom prst="rect">
@@ -31067,7 +31718,7 @@
                 <a:ea typeface="Trebuchet MS" pitchFamily="34" charset="-122"/>
                 <a:cs typeface="Trebuchet MS" pitchFamily="34" charset="-120"/>
               </a:rPr>
-              <a:t>f</a:t>
+              <a:t>er</a:t>
             </a:r>
             <a:endParaRPr lang="en-US" sz="900" dirty="0"/>
           </a:p>
@@ -31075,13 +31726,13 @@
       </p:sp>
       <p:sp>
         <p:nvSpPr>
-          <p:cNvPr id="39" name="Shape 37"/>
-          <p:cNvSpPr/>
-          <p:nvPr/>
-        </p:nvSpPr>
-        <p:spPr>
-          <a:xfrm>
-            <a:off x="4850892" y="4169664"/>
+          <p:cNvPr id="48" name="Shape 46"/>
+          <p:cNvSpPr/>
+          <p:nvPr/>
+        </p:nvSpPr>
+        <p:spPr>
+          <a:xfrm>
+            <a:off x="4447032" y="4169664"/>
             <a:ext cx="685800" cy="475488"/>
           </a:xfrm>
           <a:prstGeom prst="rect">
@@ -31102,13 +31753,13 @@
       </p:sp>
       <p:sp>
         <p:nvSpPr>
-          <p:cNvPr id="40" name="Text 38"/>
-          <p:cNvSpPr/>
-          <p:nvPr/>
-        </p:nvSpPr>
-        <p:spPr>
-          <a:xfrm>
-            <a:off x="4850892" y="4169664"/>
+          <p:cNvPr id="49" name="Text 47"/>
+          <p:cNvSpPr/>
+          <p:nvPr/>
+        </p:nvSpPr>
+        <p:spPr>
+          <a:xfrm>
+            <a:off x="4447032" y="4169664"/>
             <a:ext cx="685800" cy="475488"/>
           </a:xfrm>
           <a:prstGeom prst="rect">
@@ -31133,7 +31784,7 @@
                 <a:ea typeface="Trebuchet MS" pitchFamily="34" charset="-122"/>
                 <a:cs typeface="Trebuchet MS" pitchFamily="34" charset="-120"/>
               </a:rPr>
-              <a:t>t</a:t>
+              <a:t>s</a:t>
             </a:r>
             <a:endParaRPr lang="en-US" sz="900" dirty="0"/>
           </a:p>
@@ -31141,13 +31792,13 @@
       </p:sp>
       <p:sp>
         <p:nvSpPr>
-          <p:cNvPr id="41" name="Shape 39"/>
-          <p:cNvSpPr/>
-          <p:nvPr/>
-        </p:nvSpPr>
-        <p:spPr>
-          <a:xfrm>
-            <a:off x="5759577" y="4169664"/>
+          <p:cNvPr id="50" name="Shape 48"/>
+          <p:cNvSpPr/>
+          <p:nvPr/>
+        </p:nvSpPr>
+        <p:spPr>
+          <a:xfrm>
+            <a:off x="5254752" y="4169664"/>
             <a:ext cx="685800" cy="475488"/>
           </a:xfrm>
           <a:prstGeom prst="rect">
@@ -31168,13 +31819,13 @@
       </p:sp>
       <p:sp>
         <p:nvSpPr>
-          <p:cNvPr id="42" name="Text 40"/>
-          <p:cNvSpPr/>
-          <p:nvPr/>
-        </p:nvSpPr>
-        <p:spPr>
-          <a:xfrm>
-            <a:off x="5759577" y="4169664"/>
+          <p:cNvPr id="51" name="Text 49"/>
+          <p:cNvSpPr/>
+          <p:nvPr/>
+        </p:nvSpPr>
+        <p:spPr>
+          <a:xfrm>
+            <a:off x="5254752" y="4169664"/>
             <a:ext cx="685800" cy="475488"/>
           </a:xfrm>
           <a:prstGeom prst="rect">
@@ -31199,7 +31850,7 @@
                 <a:ea typeface="Trebuchet MS" pitchFamily="34" charset="-122"/>
                 <a:cs typeface="Trebuchet MS" pitchFamily="34" charset="-120"/>
               </a:rPr>
-              <a:t>n</a:t>
+              <a:t>o</a:t>
             </a:r>
             <a:endParaRPr lang="en-US" sz="900" dirty="0"/>
           </a:p>
@@ -31207,13 +31858,13 @@
       </p:sp>
       <p:sp>
         <p:nvSpPr>
-          <p:cNvPr id="43" name="Shape 41"/>
-          <p:cNvSpPr/>
-          <p:nvPr/>
-        </p:nvSpPr>
-        <p:spPr>
-          <a:xfrm>
-            <a:off x="6668262" y="4169664"/>
+          <p:cNvPr id="52" name="Shape 50"/>
+          <p:cNvSpPr/>
+          <p:nvPr/>
+        </p:nvSpPr>
+        <p:spPr>
+          <a:xfrm>
+            <a:off x="6062472" y="4169664"/>
             <a:ext cx="685800" cy="475488"/>
           </a:xfrm>
           <a:prstGeom prst="rect">
@@ -31234,13 +31885,13 @@
       </p:sp>
       <p:sp>
         <p:nvSpPr>
-          <p:cNvPr id="44" name="Text 42"/>
-          <p:cNvSpPr/>
-          <p:nvPr/>
-        </p:nvSpPr>
-        <p:spPr>
-          <a:xfrm>
-            <a:off x="6668262" y="4169664"/>
+          <p:cNvPr id="53" name="Text 51"/>
+          <p:cNvSpPr/>
+          <p:nvPr/>
+        </p:nvSpPr>
+        <p:spPr>
+          <a:xfrm>
+            <a:off x="6062472" y="4169664"/>
             <a:ext cx="685800" cy="475488"/>
           </a:xfrm>
           <a:prstGeom prst="rect">
@@ -31265,7 +31916,7 @@
                 <a:ea typeface="Trebuchet MS" pitchFamily="34" charset="-122"/>
                 <a:cs typeface="Trebuchet MS" pitchFamily="34" charset="-120"/>
               </a:rPr>
-              <a:t>e</a:t>
+              <a:t>ft</a:t>
             </a:r>
             <a:endParaRPr lang="en-US" sz="900" dirty="0"/>
           </a:p>
@@ -31273,13 +31924,13 @@
       </p:sp>
       <p:sp>
         <p:nvSpPr>
-          <p:cNvPr id="45" name="Shape 43"/>
-          <p:cNvSpPr/>
-          <p:nvPr/>
-        </p:nvSpPr>
-        <p:spPr>
-          <a:xfrm>
-            <a:off x="7576947" y="4169664"/>
+          <p:cNvPr id="54" name="Shape 52"/>
+          <p:cNvSpPr/>
+          <p:nvPr/>
+        </p:nvSpPr>
+        <p:spPr>
+          <a:xfrm>
+            <a:off x="6870192" y="4169664"/>
             <a:ext cx="685800" cy="475488"/>
           </a:xfrm>
           <a:prstGeom prst="rect">
@@ -31300,13 +31951,13 @@
       </p:sp>
       <p:sp>
         <p:nvSpPr>
-          <p:cNvPr id="46" name="Text 44"/>
-          <p:cNvSpPr/>
-          <p:nvPr/>
-        </p:nvSpPr>
-        <p:spPr>
-          <a:xfrm>
-            <a:off x="7576947" y="4169664"/>
+          <p:cNvPr id="55" name="Text 53"/>
+          <p:cNvSpPr/>
+          <p:nvPr/>
+        </p:nvSpPr>
+        <p:spPr>
+          <a:xfrm>
+            <a:off x="6870192" y="4169664"/>
             <a:ext cx="685800" cy="475488"/>
           </a:xfrm>
           <a:prstGeom prst="rect">
@@ -31331,7 +31982,73 @@
                 <a:ea typeface="Trebuchet MS" pitchFamily="34" charset="-122"/>
                 <a:cs typeface="Trebuchet MS" pitchFamily="34" charset="-120"/>
               </a:rPr>
-              <a:t>ss</a:t>
+              <a:t>e</a:t>
+            </a:r>
+            <a:endParaRPr lang="en-US" sz="900" dirty="0"/>
+          </a:p>
+        </p:txBody>
+      </p:sp>
+      <p:sp>
+        <p:nvSpPr>
+          <p:cNvPr id="56" name="Shape 54"/>
+          <p:cNvSpPr/>
+          <p:nvPr/>
+        </p:nvSpPr>
+        <p:spPr>
+          <a:xfrm>
+            <a:off x="7677912" y="4169664"/>
+            <a:ext cx="685800" cy="475488"/>
+          </a:xfrm>
+          <a:prstGeom prst="rect">
+            <a:avLst>
+              <a:gd name="adj" fmla="val 7692"/>
+            </a:avLst>
+          </a:prstGeom>
+          <a:solidFill>
+            <a:srgbClr val="FFFFFF"/>
+          </a:solidFill>
+          <a:ln w="12700">
+            <a:solidFill>
+              <a:srgbClr val="DB2777"/>
+            </a:solidFill>
+            <a:prstDash val="solid"/>
+          </a:ln>
+        </p:spPr>
+      </p:sp>
+      <p:sp>
+        <p:nvSpPr>
+          <p:cNvPr id="57" name="Text 55"/>
+          <p:cNvSpPr/>
+          <p:nvPr/>
+        </p:nvSpPr>
+        <p:spPr>
+          <a:xfrm>
+            <a:off x="7677912" y="4169664"/>
+            <a:ext cx="685800" cy="475488"/>
+          </a:xfrm>
+          <a:prstGeom prst="rect">
+            <a:avLst/>
+          </a:prstGeom>
+          <a:noFill/>
+          <a:ln/>
+        </p:spPr>
+        <p:txBody>
+          <a:bodyPr wrap="square" lIns="0" tIns="0" rIns="0" bIns="0" rtlCol="0" anchor="ctr"/>
+          <a:lstStyle/>
+          <a:p>
+            <a:pPr algn="ctr" indent="0" marL="0">
+              <a:buNone/>
+            </a:pPr>
+            <a:r>
+              <a:rPr lang="en-US" sz="900" b="1" dirty="0">
+                <a:solidFill>
+                  <a:srgbClr val="9D174D"/>
+                </a:solidFill>
+                <a:latin typeface="Trebuchet MS" pitchFamily="34" charset="0"/>
+                <a:ea typeface="Trebuchet MS" pitchFamily="34" charset="-122"/>
+                <a:cs typeface="Trebuchet MS" pitchFamily="34" charset="-120"/>
+              </a:rPr>
+              <a:t>n</a:t>
             </a:r>
             <a:endParaRPr lang="en-US" sz="900" dirty="0"/>
           </a:p>
@@ -33221,7 +33938,7 @@
                 <a:ea typeface="Trebuchet MS" pitchFamily="34" charset="-122"/>
                 <a:cs typeface="Trebuchet MS" pitchFamily="34" charset="-120"/>
               </a:rPr>
-              <a:t>-en</a:t>
+              <a:t>-ly</a:t>
             </a:r>
             <a:endParaRPr lang="en-US" sz="1300" dirty="0"/>
           </a:p>
@@ -33374,7 +34091,7 @@
                 <a:ea typeface="Trebuchet MS" pitchFamily="34" charset="-122"/>
                 <a:cs typeface="Trebuchet MS" pitchFamily="34" charset="-120"/>
               </a:rPr>
-              <a:t>-ly</a:t>
+              <a:t>-en</a:t>
             </a:r>
             <a:endParaRPr lang="en-US" sz="1300" dirty="0"/>
           </a:p>
@@ -33527,7 +34244,7 @@
                 <a:ea typeface="Trebuchet MS" pitchFamily="34" charset="-122"/>
                 <a:cs typeface="Trebuchet MS" pitchFamily="34" charset="-120"/>
               </a:rPr>
-              <a:t>-er</a:t>
+              <a:t>-ness</a:t>
             </a:r>
             <a:endParaRPr lang="en-US" sz="1300" dirty="0"/>
           </a:p>
@@ -33591,7 +34308,7 @@
                 <a:ea typeface="Trebuchet MS" pitchFamily="34" charset="-122"/>
                 <a:cs typeface="Trebuchet MS" pitchFamily="34" charset="-120"/>
               </a:rPr>
-              <a:t>ultra-</a:t>
+              <a:t>non-</a:t>
             </a:r>
             <a:endParaRPr lang="en-US" sz="1300" dirty="0"/>
           </a:p>
@@ -33680,7 +34397,7 @@
                 <a:ea typeface="Trebuchet MS" pitchFamily="34" charset="-122"/>
                 <a:cs typeface="Trebuchet MS" pitchFamily="34" charset="-120"/>
               </a:rPr>
-              <a:t>-est</a:t>
+              <a:t>-er</a:t>
             </a:r>
             <a:endParaRPr lang="en-US" sz="1300" dirty="0"/>
           </a:p>
@@ -33744,7 +34461,7 @@
                 <a:ea typeface="Trebuchet MS" pitchFamily="34" charset="-122"/>
                 <a:cs typeface="Trebuchet MS" pitchFamily="34" charset="-120"/>
               </a:rPr>
-              <a:t>hyper-</a:t>
+              <a:t>super-</a:t>
             </a:r>
             <a:endParaRPr lang="en-US" sz="1300" dirty="0"/>
           </a:p>
@@ -33833,7 +34550,7 @@
                 <a:ea typeface="Trebuchet MS" pitchFamily="34" charset="-122"/>
                 <a:cs typeface="Trebuchet MS" pitchFamily="34" charset="-120"/>
               </a:rPr>
-              <a:t>-ness</a:t>
+              <a:t>-est</a:t>
             </a:r>
             <a:endParaRPr lang="en-US" sz="1300" dirty="0"/>
           </a:p>
@@ -33938,7 +34655,7 @@
                 <a:ea typeface="Trebuchet MS" pitchFamily="34" charset="-122"/>
                 <a:cs typeface="Trebuchet MS" pitchFamily="34" charset="-120"/>
               </a:rPr>
-              <a:t>soften</a:t>
+              <a:t>softly</a:t>
             </a:r>
             <a:endParaRPr lang="en-US" sz="1200" dirty="0"/>
           </a:p>
@@ -34004,7 +34721,7 @@
                 <a:ea typeface="Trebuchet MS" pitchFamily="34" charset="-122"/>
                 <a:cs typeface="Trebuchet MS" pitchFamily="34" charset="-120"/>
               </a:rPr>
-              <a:t>softly</a:t>
+              <a:t>soften</a:t>
             </a:r>
             <a:endParaRPr lang="en-US" sz="1200" dirty="0"/>
           </a:p>
@@ -34070,7 +34787,7 @@
                 <a:ea typeface="Trebuchet MS" pitchFamily="34" charset="-122"/>
                 <a:cs typeface="Trebuchet MS" pitchFamily="34" charset="-120"/>
               </a:rPr>
-              <a:t>softer</a:t>
+              <a:t>softness</a:t>
             </a:r>
             <a:endParaRPr lang="en-US" sz="1200" dirty="0"/>
           </a:p>
@@ -34136,7 +34853,7 @@
                 <a:ea typeface="Trebuchet MS" pitchFamily="34" charset="-122"/>
                 <a:cs typeface="Trebuchet MS" pitchFamily="34" charset="-120"/>
               </a:rPr>
-              <a:t>softest</a:t>
+              <a:t>softer</a:t>
             </a:r>
             <a:endParaRPr lang="en-US" sz="1200" dirty="0"/>
           </a:p>
@@ -34202,7 +34919,7 @@
                 <a:ea typeface="Trebuchet MS" pitchFamily="34" charset="-122"/>
                 <a:cs typeface="Trebuchet MS" pitchFamily="34" charset="-120"/>
               </a:rPr>
-              <a:t>softness</a:t>
+              <a:t>softest</a:t>
             </a:r>
             <a:endParaRPr lang="en-US" sz="1200" dirty="0"/>
           </a:p>
@@ -34268,7 +34985,7 @@
                 <a:ea typeface="Trebuchet MS" pitchFamily="34" charset="-122"/>
                 <a:cs typeface="Trebuchet MS" pitchFamily="34" charset="-120"/>
               </a:rPr>
-              <a:t>software</a:t>
+              <a:t>unsoftened</a:t>
             </a:r>
             <a:endParaRPr lang="en-US" sz="1200" dirty="0"/>
           </a:p>
@@ -34334,7 +35051,7 @@
                 <a:ea typeface="Trebuchet MS" pitchFamily="34" charset="-122"/>
                 <a:cs typeface="Trebuchet MS" pitchFamily="34" charset="-120"/>
               </a:rPr>
-              <a:t>softball</a:t>
+              <a:t>oversoften</a:t>
             </a:r>
             <a:endParaRPr lang="en-US" sz="1200" dirty="0"/>
           </a:p>
@@ -34400,7 +35117,7 @@
                 <a:ea typeface="Trebuchet MS" pitchFamily="34" charset="-122"/>
                 <a:cs typeface="Trebuchet MS" pitchFamily="34" charset="-120"/>
               </a:rPr>
-              <a:t>unsoftened</a:t>
+              <a:t>softener</a:t>
             </a:r>
             <a:endParaRPr lang="en-US" sz="1200" dirty="0"/>
           </a:p>
@@ -35588,7 +36305,7 @@
                 <a:ea typeface="Calibri" pitchFamily="34" charset="-122"/>
                 <a:cs typeface="Calibri" pitchFamily="34" charset="-120"/>
               </a:rPr>
-              <a:t>1.  The word 'softly' contains the root 'soft' and the suffix '-ly'.</a:t>
+              <a:t>1.  The word 'softest' means something is only slightly soft.</a:t>
             </a:r>
             <a:endParaRPr lang="en-US" sz="1300" dirty="0"/>
           </a:p>
@@ -35611,11 +36328,11 @@
             </a:avLst>
           </a:prstGeom>
           <a:solidFill>
-            <a:srgbClr val="DCFCE7"/>
-          </a:solidFill>
-          <a:ln w="12700">
-            <a:solidFill>
-              <a:srgbClr val="16A34A"/>
+            <a:srgbClr val="FEE2E2"/>
+          </a:solidFill>
+          <a:ln w="12700">
+            <a:solidFill>
+              <a:srgbClr val="DC2626"/>
             </a:solidFill>
             <a:prstDash val="solid"/>
           </a:ln>
@@ -35648,13 +36365,13 @@
             <a:r>
               <a:rPr lang="en-US" sz="1100" b="1" dirty="0">
                 <a:solidFill>
-                  <a:srgbClr val="16A34A"/>
+                  <a:srgbClr val="DC2626"/>
                 </a:solidFill>
                 <a:latin typeface="Trebuchet MS" pitchFamily="34" charset="0"/>
                 <a:ea typeface="Trebuchet MS" pitchFamily="34" charset="-122"/>
                 <a:cs typeface="Trebuchet MS" pitchFamily="34" charset="-120"/>
               </a:rPr>
-              <a:t>TRUE</a:t>
+              <a:t>FALSE</a:t>
             </a:r>
             <a:endParaRPr lang="en-US" sz="1100" dirty="0"/>
           </a:p>
@@ -35727,7 +36444,7 @@
                 <a:ea typeface="Calibri" pitchFamily="34" charset="-122"/>
                 <a:cs typeface="Calibri" pitchFamily="34" charset="-120"/>
               </a:rPr>
-              <a:t>2.  The root 'soft' comes from the Latin language.</a:t>
+              <a:t>2.  The word 'softly' contains the root 'soft' plus the suffix '-ly'.</a:t>
             </a:r>
             <a:endParaRPr lang="en-US" sz="1300" dirty="0"/>
           </a:p>
@@ -35750,11 +36467,11 @@
             </a:avLst>
           </a:prstGeom>
           <a:solidFill>
-            <a:srgbClr val="FEE2E2"/>
-          </a:solidFill>
-          <a:ln w="12700">
-            <a:solidFill>
-              <a:srgbClr val="DC2626"/>
+            <a:srgbClr val="DCFCE7"/>
+          </a:solidFill>
+          <a:ln w="12700">
+            <a:solidFill>
+              <a:srgbClr val="16A34A"/>
             </a:solidFill>
             <a:prstDash val="solid"/>
           </a:ln>
@@ -35787,13 +36504,13 @@
             <a:r>
               <a:rPr lang="en-US" sz="1100" b="1" dirty="0">
                 <a:solidFill>
-                  <a:srgbClr val="DC2626"/>
+                  <a:srgbClr val="16A34A"/>
                 </a:solidFill>
                 <a:latin typeface="Trebuchet MS" pitchFamily="34" charset="0"/>
                 <a:ea typeface="Trebuchet MS" pitchFamily="34" charset="-122"/>
                 <a:cs typeface="Trebuchet MS" pitchFamily="34" charset="-120"/>
               </a:rPr>
-              <a:t>FALSE</a:t>
+              <a:t>TRUE</a:t>
             </a:r>
             <a:endParaRPr lang="en-US" sz="1100" dirty="0"/>
           </a:p>
@@ -35866,7 +36583,7 @@
                 <a:ea typeface="Calibri" pitchFamily="34" charset="-122"/>
                 <a:cs typeface="Calibri" pitchFamily="34" charset="-120"/>
               </a:rPr>
-              <a:t>3.  Adding '-en' to 'soft' makes the verb 'soften', meaning to make something soft.</a:t>
+              <a:t>3.  The root 'soft' comes from the Greek language.</a:t>
             </a:r>
             <a:endParaRPr lang="en-US" sz="1300" dirty="0"/>
           </a:p>
@@ -35889,11 +36606,11 @@
             </a:avLst>
           </a:prstGeom>
           <a:solidFill>
-            <a:srgbClr val="DCFCE7"/>
-          </a:solidFill>
-          <a:ln w="12700">
-            <a:solidFill>
-              <a:srgbClr val="16A34A"/>
+            <a:srgbClr val="FEE2E2"/>
+          </a:solidFill>
+          <a:ln w="12700">
+            <a:solidFill>
+              <a:srgbClr val="DC2626"/>
             </a:solidFill>
             <a:prstDash val="solid"/>
           </a:ln>
@@ -35926,13 +36643,13 @@
             <a:r>
               <a:rPr lang="en-US" sz="1100" b="1" dirty="0">
                 <a:solidFill>
-                  <a:srgbClr val="16A34A"/>
+                  <a:srgbClr val="DC2626"/>
                 </a:solidFill>
                 <a:latin typeface="Trebuchet MS" pitchFamily="34" charset="0"/>
                 <a:ea typeface="Trebuchet MS" pitchFamily="34" charset="-122"/>
                 <a:cs typeface="Trebuchet MS" pitchFamily="34" charset="-120"/>
               </a:rPr>
-              <a:t>TRUE</a:t>
+              <a:t>FALSE</a:t>
             </a:r>
             <a:endParaRPr lang="en-US" sz="1100" dirty="0"/>
           </a:p>
@@ -36005,7 +36722,7 @@
                 <a:ea typeface="Calibri" pitchFamily="34" charset="-122"/>
                 <a:cs typeface="Calibri" pitchFamily="34" charset="-120"/>
               </a:rPr>
-              <a:t>4.  The word 'softness' uses the suffix '-ness' to turn an adjective into a noun.</a:t>
+              <a:t>4.  The prefix 'un-' can be added to softened to mean not softened.</a:t>
             </a:r>
             <a:endParaRPr lang="en-US" sz="1300" dirty="0"/>
           </a:p>
@@ -36144,7 +36861,7 @@
                 <a:ea typeface="Calibri" pitchFamily="34" charset="-122"/>
                 <a:cs typeface="Calibri" pitchFamily="34" charset="-120"/>
               </a:rPr>
-              <a:t>5.  The word 'softest' means less soft than other things.</a:t>
+              <a:t>5.  Adding '-en' to 'soft' makes the verb 'soften', meaning to make something softer.</a:t>
             </a:r>
             <a:endParaRPr lang="en-US" sz="1300" dirty="0"/>
           </a:p>
@@ -36167,11 +36884,11 @@
             </a:avLst>
           </a:prstGeom>
           <a:solidFill>
-            <a:srgbClr val="FEE2E2"/>
-          </a:solidFill>
-          <a:ln w="12700">
-            <a:solidFill>
-              <a:srgbClr val="DC2626"/>
+            <a:srgbClr val="DCFCE7"/>
+          </a:solidFill>
+          <a:ln w="12700">
+            <a:solidFill>
+              <a:srgbClr val="16A34A"/>
             </a:solidFill>
             <a:prstDash val="solid"/>
           </a:ln>
@@ -36204,13 +36921,13 @@
             <a:r>
               <a:rPr lang="en-US" sz="1100" b="1" dirty="0">
                 <a:solidFill>
-                  <a:srgbClr val="DC2626"/>
+                  <a:srgbClr val="16A34A"/>
                 </a:solidFill>
                 <a:latin typeface="Trebuchet MS" pitchFamily="34" charset="0"/>
                 <a:ea typeface="Trebuchet MS" pitchFamily="34" charset="-122"/>
                 <a:cs typeface="Trebuchet MS" pitchFamily="34" charset="-120"/>
               </a:rPr>
-              <a:t>FALSE</a:t>
+              <a:t>TRUE</a:t>
             </a:r>
             <a:endParaRPr lang="en-US" sz="1100" dirty="0"/>
           </a:p>
@@ -36678,7 +37395,7 @@
                 <a:ea typeface="Calibri" pitchFamily="34" charset="-122"/>
                 <a:cs typeface="Calibri" pitchFamily="34" charset="-120"/>
               </a:rPr>
-              <a:t>Origin: Old English: softe</a:t>
+              <a:t>Origin: Latin: softus</a:t>
             </a:r>
             <a:endParaRPr lang="en-US" sz="1100" dirty="0"/>
           </a:p>
@@ -36783,7 +37500,7 @@
                 <a:ea typeface="Trebuchet MS" pitchFamily="34" charset="-122"/>
                 <a:cs typeface="Trebuchet MS" pitchFamily="34" charset="-120"/>
               </a:rPr>
-              <a:t>soften</a:t>
+              <a:t>softly</a:t>
             </a:r>
             <a:endParaRPr lang="en-US" sz="1300" dirty="0"/>
           </a:p>
@@ -36849,7 +37566,7 @@
                 <a:ea typeface="Trebuchet MS" pitchFamily="34" charset="-122"/>
                 <a:cs typeface="Trebuchet MS" pitchFamily="34" charset="-120"/>
               </a:rPr>
-              <a:t>softly</a:t>
+              <a:t>soften</a:t>
             </a:r>
             <a:endParaRPr lang="en-US" sz="1300" dirty="0"/>
           </a:p>
@@ -36915,7 +37632,7 @@
                 <a:ea typeface="Trebuchet MS" pitchFamily="34" charset="-122"/>
                 <a:cs typeface="Trebuchet MS" pitchFamily="34" charset="-120"/>
               </a:rPr>
-              <a:t>softer</a:t>
+              <a:t>softness</a:t>
             </a:r>
             <a:endParaRPr lang="en-US" sz="1300" dirty="0"/>
           </a:p>
@@ -36981,7 +37698,7 @@
                 <a:ea typeface="Trebuchet MS" pitchFamily="34" charset="-122"/>
                 <a:cs typeface="Trebuchet MS" pitchFamily="34" charset="-120"/>
               </a:rPr>
-              <a:t>softest</a:t>
+              <a:t>softer</a:t>
             </a:r>
             <a:endParaRPr lang="en-US" sz="1300" dirty="0"/>
           </a:p>
@@ -37047,7 +37764,7 @@
                 <a:ea typeface="Trebuchet MS" pitchFamily="34" charset="-122"/>
                 <a:cs typeface="Trebuchet MS" pitchFamily="34" charset="-120"/>
               </a:rPr>
-              <a:t>softness</a:t>
+              <a:t>softest</a:t>
             </a:r>
             <a:endParaRPr lang="en-US" sz="1300" dirty="0"/>
           </a:p>
@@ -37113,7 +37830,7 @@
                 <a:ea typeface="Trebuchet MS" pitchFamily="34" charset="-122"/>
                 <a:cs typeface="Trebuchet MS" pitchFamily="34" charset="-120"/>
               </a:rPr>
-              <a:t>software</a:t>
+              <a:t>unsoftened</a:t>
             </a:r>
             <a:endParaRPr lang="en-US" sz="1300" dirty="0"/>
           </a:p>
@@ -37179,7 +37896,7 @@
                 <a:ea typeface="Trebuchet MS" pitchFamily="34" charset="-122"/>
                 <a:cs typeface="Trebuchet MS" pitchFamily="34" charset="-120"/>
               </a:rPr>
-              <a:t>softball</a:t>
+              <a:t>oversoften</a:t>
             </a:r>
             <a:endParaRPr lang="en-US" sz="1300" dirty="0"/>
           </a:p>
@@ -37900,7 +38617,7 @@
                 <a:ea typeface="Trebuchet MS" pitchFamily="34" charset="-122"/>
                 <a:cs typeface="Trebuchet MS" pitchFamily="34" charset="-120"/>
               </a:rPr>
-              <a:t>-en</a:t>
+              <a:t>-ly</a:t>
             </a:r>
             <a:endParaRPr lang="en-US" sz="1300" dirty="0"/>
           </a:p>
@@ -38053,7 +38770,7 @@
                 <a:ea typeface="Trebuchet MS" pitchFamily="34" charset="-122"/>
                 <a:cs typeface="Trebuchet MS" pitchFamily="34" charset="-120"/>
               </a:rPr>
-              <a:t>-ly</a:t>
+              <a:t>-en</a:t>
             </a:r>
             <a:endParaRPr lang="en-US" sz="1300" dirty="0"/>
           </a:p>
@@ -38206,7 +38923,7 @@
                 <a:ea typeface="Trebuchet MS" pitchFamily="34" charset="-122"/>
                 <a:cs typeface="Trebuchet MS" pitchFamily="34" charset="-120"/>
               </a:rPr>
-              <a:t>-er</a:t>
+              <a:t>-ness</a:t>
             </a:r>
             <a:endParaRPr lang="en-US" sz="1300" dirty="0"/>
           </a:p>
@@ -38270,7 +38987,7 @@
                 <a:ea typeface="Trebuchet MS" pitchFamily="34" charset="-122"/>
                 <a:cs typeface="Trebuchet MS" pitchFamily="34" charset="-120"/>
               </a:rPr>
-              <a:t>ultra-</a:t>
+              <a:t>non-</a:t>
             </a:r>
             <a:endParaRPr lang="en-US" sz="1300" dirty="0"/>
           </a:p>
@@ -38359,7 +39076,7 @@
                 <a:ea typeface="Trebuchet MS" pitchFamily="34" charset="-122"/>
                 <a:cs typeface="Trebuchet MS" pitchFamily="34" charset="-120"/>
               </a:rPr>
-              <a:t>-est</a:t>
+              <a:t>-er</a:t>
             </a:r>
             <a:endParaRPr lang="en-US" sz="1300" dirty="0"/>
           </a:p>
@@ -38423,7 +39140,7 @@
                 <a:ea typeface="Trebuchet MS" pitchFamily="34" charset="-122"/>
                 <a:cs typeface="Trebuchet MS" pitchFamily="34" charset="-120"/>
               </a:rPr>
-              <a:t>hyper-</a:t>
+              <a:t>super-</a:t>
             </a:r>
             <a:endParaRPr lang="en-US" sz="1300" dirty="0"/>
           </a:p>
@@ -38512,7 +39229,7 @@
                 <a:ea typeface="Trebuchet MS" pitchFamily="34" charset="-122"/>
                 <a:cs typeface="Trebuchet MS" pitchFamily="34" charset="-120"/>
               </a:rPr>
-              <a:t>-ness</a:t>
+              <a:t>-est</a:t>
             </a:r>
             <a:endParaRPr lang="en-US" sz="1300" dirty="0"/>
           </a:p>
@@ -38848,7 +39565,7 @@
                 <a:ea typeface="Trebuchet MS" pitchFamily="34" charset="-122"/>
                 <a:cs typeface="Trebuchet MS" pitchFamily="34" charset="-120"/>
               </a:rPr>
-              <a:t>-en</a:t>
+              <a:t>-ly</a:t>
             </a:r>
             <a:endParaRPr lang="en-US" sz="1300" dirty="0"/>
           </a:p>
@@ -38953,7 +39670,7 @@
                 <a:ea typeface="Trebuchet MS" pitchFamily="34" charset="-122"/>
                 <a:cs typeface="Trebuchet MS" pitchFamily="34" charset="-120"/>
               </a:rPr>
-              <a:t>soften</a:t>
+              <a:t>softly</a:t>
             </a:r>
             <a:endParaRPr lang="en-US" sz="1400" dirty="0"/>
           </a:p>
@@ -39357,7 +40074,7 @@
                 <a:ea typeface="Trebuchet MS" pitchFamily="34" charset="-122"/>
                 <a:cs typeface="Trebuchet MS" pitchFamily="34" charset="-120"/>
               </a:rPr>
-              <a:t>soften</a:t>
+              <a:t>softly</a:t>
             </a:r>
             <a:endParaRPr lang="en-US" sz="1200" dirty="0"/>
           </a:p>
@@ -39423,7 +40140,7 @@
                 <a:ea typeface="Calibri" pitchFamily="34" charset="-122"/>
                 <a:cs typeface="Calibri" pitchFamily="34" charset="-120"/>
               </a:rPr>
-              <a:t>A sport similar to baseball but played with a larger, softer ball.</a:t>
+              <a:t>To make something too soft or too gentle.</a:t>
             </a:r>
             <a:endParaRPr lang="en-US" sz="1200" dirty="0"/>
           </a:p>
@@ -39496,7 +40213,7 @@
                 <a:ea typeface="Trebuchet MS" pitchFamily="34" charset="-122"/>
                 <a:cs typeface="Trebuchet MS" pitchFamily="34" charset="-120"/>
               </a:rPr>
-              <a:t>softly</a:t>
+              <a:t>soften</a:t>
             </a:r>
             <a:endParaRPr lang="en-US" sz="1200" dirty="0"/>
           </a:p>
@@ -39562,7 +40279,7 @@
                 <a:ea typeface="Calibri" pitchFamily="34" charset="-122"/>
                 <a:cs typeface="Calibri" pitchFamily="34" charset="-120"/>
               </a:rPr>
-              <a:t>The quality of being soft, like the softness of a kitten's fur.</a:t>
+              <a:t>The most gentle or least hard of all things being compared.</a:t>
             </a:r>
             <a:endParaRPr lang="en-US" sz="1200" dirty="0"/>
           </a:p>
@@ -39635,7 +40352,7 @@
                 <a:ea typeface="Trebuchet MS" pitchFamily="34" charset="-122"/>
                 <a:cs typeface="Trebuchet MS" pitchFamily="34" charset="-120"/>
               </a:rPr>
-              <a:t>softer</a:t>
+              <a:t>softness</a:t>
             </a:r>
             <a:endParaRPr lang="en-US" sz="1200" dirty="0"/>
           </a:p>
@@ -39701,7 +40418,7 @@
                 <a:ea typeface="Calibri" pitchFamily="34" charset="-122"/>
                 <a:cs typeface="Calibri" pitchFamily="34" charset="-120"/>
               </a:rPr>
-              <a:t>The most soft of all, like the softest blanket you have ever felt.</a:t>
+              <a:t>More gentle or less hard than something else.</a:t>
             </a:r>
             <a:endParaRPr lang="en-US" sz="1200" dirty="0"/>
           </a:p>
@@ -39774,7 +40491,7 @@
                 <a:ea typeface="Trebuchet MS" pitchFamily="34" charset="-122"/>
                 <a:cs typeface="Trebuchet MS" pitchFamily="34" charset="-120"/>
               </a:rPr>
-              <a:t>softest</a:t>
+              <a:t>softer</a:t>
             </a:r>
             <a:endParaRPr lang="en-US" sz="1200" dirty="0"/>
           </a:p>
@@ -39840,7 +40557,7 @@
                 <a:ea typeface="Calibri" pitchFamily="34" charset="-122"/>
                 <a:cs typeface="Calibri" pitchFamily="34" charset="-120"/>
               </a:rPr>
-              <a:t>Programs and instructions that tell a computer what to do.</a:t>
+              <a:t>Not made gentler or less harsh; still hard or rough.</a:t>
             </a:r>
             <a:endParaRPr lang="en-US" sz="1200" dirty="0"/>
           </a:p>
@@ -39913,7 +40630,7 @@
                 <a:ea typeface="Trebuchet MS" pitchFamily="34" charset="-122"/>
                 <a:cs typeface="Trebuchet MS" pitchFamily="34" charset="-120"/>
               </a:rPr>
-              <a:t>softness</a:t>
+              <a:t>softest</a:t>
             </a:r>
             <a:endParaRPr lang="en-US" sz="1200" dirty="0"/>
           </a:p>
@@ -39979,7 +40696,7 @@
                 <a:ea typeface="Calibri" pitchFamily="34" charset="-122"/>
                 <a:cs typeface="Calibri" pitchFamily="34" charset="-120"/>
               </a:rPr>
-              <a:t>More soft than something else, like a pillow that is softer than a rock.</a:t>
+              <a:t>The quality of being smooth, gentle, or not hard.</a:t>
             </a:r>
             <a:endParaRPr lang="en-US" sz="1200" dirty="0"/>
           </a:p>
@@ -40052,7 +40769,7 @@
                 <a:ea typeface="Trebuchet MS" pitchFamily="34" charset="-122"/>
                 <a:cs typeface="Trebuchet MS" pitchFamily="34" charset="-120"/>
               </a:rPr>
-              <a:t>software</a:t>
+              <a:t>unsoftened</a:t>
             </a:r>
             <a:endParaRPr lang="en-US" sz="1200" dirty="0"/>
           </a:p>
@@ -40118,7 +40835,7 @@
                 <a:ea typeface="Calibri" pitchFamily="34" charset="-122"/>
                 <a:cs typeface="Calibri" pitchFamily="34" charset="-120"/>
               </a:rPr>
-              <a:t>To make something less hard or less harsh, like softening butter by leaving it out.</a:t>
+              <a:t>In a gentle or quiet way, without making much noise or force.</a:t>
             </a:r>
             <a:endParaRPr lang="en-US" sz="1200" dirty="0"/>
           </a:p>
@@ -40191,7 +40908,7 @@
                 <a:ea typeface="Trebuchet MS" pitchFamily="34" charset="-122"/>
                 <a:cs typeface="Trebuchet MS" pitchFamily="34" charset="-120"/>
               </a:rPr>
-              <a:t>softball</a:t>
+              <a:t>oversoften</a:t>
             </a:r>
             <a:endParaRPr lang="en-US" sz="1200" dirty="0"/>
           </a:p>
@@ -40257,7 +40974,7 @@
                 <a:ea typeface="Calibri" pitchFamily="34" charset="-122"/>
                 <a:cs typeface="Calibri" pitchFamily="34" charset="-120"/>
               </a:rPr>
-              <a:t>Done in a quiet or gentle way, like speaking softly so you don't wake someone up.</a:t>
+              <a:t>To make something less hard, less harsh, or more gentle.</a:t>
             </a:r>
             <a:endParaRPr lang="en-US" sz="1200" dirty="0"/>
           </a:p>
@@ -40752,7 +41469,7 @@
                 <a:ea typeface="Calibri" pitchFamily="34" charset="-122"/>
                 <a:cs typeface="Calibri" pitchFamily="34" charset="-120"/>
               </a:rPr>
-              <a:t>The baker had to soften the butter before she could mix it into the cake batter.</a:t>
+              <a:t>The teacher spoke softly so she wouldn't wake the students who were reading quietly.</a:t>
             </a:r>
             <a:endParaRPr lang="en-US" sz="1500" dirty="0"/>
           </a:p>
@@ -40916,7 +41633,7 @@
                 <a:ea typeface="Calibri" pitchFamily="34" charset="-122"/>
                 <a:cs typeface="Calibri" pitchFamily="34" charset="-120"/>
               </a:rPr>
-              <a:t>She spoke softly to the baby so that it would not wake up and start crying.</a:t>
+              <a:t>Mum used fabric softener in the wash to make the towels feel fluffy and gentle on our skin.</a:t>
             </a:r>
             <a:endParaRPr lang="en-US" sz="1500" dirty="0"/>
           </a:p>
@@ -41080,7 +41797,7 @@
                 <a:ea typeface="Calibri" pitchFamily="34" charset="-122"/>
                 <a:cs typeface="Calibri" pitchFamily="34" charset="-120"/>
               </a:rPr>
-              <a:t>The softness of the new blanket made it perfect for snuggling up on a cold winter evening.</a:t>
+              <a:t>The softness of the new pillow made it much easier to fall asleep at night.</a:t>
             </a:r>
             <a:endParaRPr lang="en-US" sz="1500" dirty="0"/>
           </a:p>

--- a/output/wordlabs-soft-3day.pptx
+++ b/output/wordlabs-soft-3day.pptx
@@ -4240,7 +4240,7 @@
                 <a:ea typeface="Calibri" pitchFamily="34" charset="-122"/>
                 <a:cs typeface="Calibri" pitchFamily="34" charset="-120"/>
               </a:rPr>
-              <a:t>"not hard, gentle, quiet"</a:t>
+              <a:t>"not hard or rough"</a:t>
             </a:r>
             <a:endParaRPr lang="en-US" sz="2200" dirty="0"/>
           </a:p>
@@ -4279,7 +4279,7 @@
                 <a:ea typeface="Calibri" pitchFamily="34" charset="-122"/>
                 <a:cs typeface="Calibri" pitchFamily="34" charset="-120"/>
               </a:rPr>
-              <a:t>Origin: Latin: softus</a:t>
+              <a:t>Origin: Anglo-Saxon (Old English) root</a:t>
             </a:r>
             <a:endParaRPr lang="en-US" sz="1300" dirty="0"/>
           </a:p>
@@ -5288,7 +5288,7 @@
                 <a:ea typeface="Calibri" pitchFamily="34" charset="-122"/>
                 <a:cs typeface="Calibri" pitchFamily="34" charset="-120"/>
               </a:rPr>
-              <a:t>Word Labs  •  wordlabs.app  •  Root: 'soft' = not hard, gentle, quiet</a:t>
+              <a:t>Word Labs  •  wordlabs.app  •  Root: 'soft' = not hard or rough</a:t>
             </a:r>
             <a:endParaRPr lang="en-US" sz="800" dirty="0"/>
           </a:p>
@@ -5622,7 +5622,7 @@
                 <a:ea typeface="Trebuchet MS" pitchFamily="34" charset="-122"/>
                 <a:cs typeface="Trebuchet MS" pitchFamily="34" charset="-120"/>
               </a:rPr>
-              <a:t>1</a:t>
+              <a:t>0</a:t>
             </a:r>
             <a:pPr algn="ctr" indent="0" marL="0">
               <a:buNone/>
@@ -5928,7 +5928,7 @@
                 <a:ea typeface="Calibri" pitchFamily="34" charset="-122"/>
                 <a:cs typeface="Calibri" pitchFamily="34" charset="-120"/>
               </a:rPr>
-              <a:t>Word Labs  •  wordlabs.app  •  Root: 'soft' = not hard, gentle, quiet</a:t>
+              <a:t>Word Labs  •  wordlabs.app  •  Root: 'soft' = not hard or rough</a:t>
             </a:r>
             <a:endParaRPr lang="en-US" sz="800" dirty="0"/>
           </a:p>
@@ -6071,7 +6071,7 @@
                 <a:ea typeface="Calibri" pitchFamily="34" charset="-122"/>
                 <a:cs typeface="Calibri" pitchFamily="34" charset="-120"/>
               </a:rPr>
-              <a:t> and stroked the kitten's fur, amazed by its </a:t>
+              <a:t> so as not to wake the baby. This is the </a:t>
             </a:r>
             <a:pPr algn="l" indent="0" marL="0">
               <a:buNone/>
@@ -6088,7 +6088,7 @@
                 <a:ea typeface="Calibri" pitchFamily="34" charset="-122"/>
                 <a:cs typeface="Calibri" pitchFamily="34" charset="-120"/>
               </a:rPr>
-              <a:t>softness</a:t>
+              <a:t>softest</a:t>
             </a:r>
             <a:pPr algn="l" indent="0" marL="0">
               <a:buNone/>
@@ -6102,7 +6102,7 @@
                 <a:ea typeface="Calibri" pitchFamily="34" charset="-122"/>
                 <a:cs typeface="Calibri" pitchFamily="34" charset="-120"/>
               </a:rPr>
-              <a:t>.</a:t>
+              <a:t> blanket I have ever felt.</a:t>
             </a:r>
             <a:endParaRPr lang="en-US" sz="1800" dirty="0"/>
           </a:p>
@@ -6385,7 +6385,7 @@
                 <a:ea typeface="Trebuchet MS" pitchFamily="34" charset="-122"/>
                 <a:cs typeface="Trebuchet MS" pitchFamily="34" charset="-120"/>
               </a:rPr>
-              <a:t>softness</a:t>
+              <a:t>softest</a:t>
             </a:r>
             <a:endParaRPr lang="en-US" sz="1400" dirty="0"/>
           </a:p>
@@ -6716,7 +6716,7 @@
                 <a:ea typeface="Calibri" pitchFamily="34" charset="-122"/>
                 <a:cs typeface="Calibri" pitchFamily="34" charset="-120"/>
               </a:rPr>
-              <a:t>Word Labs  •  wordlabs.app  •  Root: 'soft' = not hard, gentle, quiet</a:t>
+              <a:t>Word Labs  •  wordlabs.app  •  Root: 'soft' = not hard or rough</a:t>
             </a:r>
             <a:endParaRPr lang="en-US" sz="800" dirty="0"/>
           </a:p>
@@ -7543,7 +7543,7 @@
                 <a:ea typeface="Calibri" pitchFamily="34" charset="-122"/>
                 <a:cs typeface="Calibri" pitchFamily="34" charset="-120"/>
               </a:rPr>
-              <a:t>Word Labs  •  wordlabs.app  •  Root: 'soft' = not hard, gentle, quiet</a:t>
+              <a:t>Word Labs  •  wordlabs.app  •  Root: 'soft' = not hard or rough</a:t>
             </a:r>
             <a:endParaRPr lang="en-US" sz="800" dirty="0"/>
           </a:p>
@@ -7860,7 +7860,7 @@
                 <a:ea typeface="Calibri" pitchFamily="34" charset="-122"/>
                 <a:cs typeface="Calibri" pitchFamily="34" charset="-120"/>
               </a:rPr>
-              <a:t>gentle, not hard</a:t>
+              <a:t>not hard or rough</a:t>
             </a:r>
             <a:endParaRPr lang="en-US" sz="850" dirty="0"/>
           </a:p>
@@ -7972,7 +7972,7 @@
                 <a:ea typeface="Calibri" pitchFamily="34" charset="-122"/>
                 <a:cs typeface="Calibri" pitchFamily="34" charset="-120"/>
               </a:rPr>
-              <a:t>in a way, how something is done</a:t>
+              <a:t>in a way</a:t>
             </a:r>
             <a:endParaRPr lang="en-US" sz="850" dirty="0"/>
           </a:p>
@@ -8528,7 +8528,7 @@
                 <a:ea typeface="Calibri" pitchFamily="34" charset="-122"/>
                 <a:cs typeface="Calibri" pitchFamily="34" charset="-120"/>
               </a:rPr>
-              <a:t>Word Labs  •  wordlabs.app  •  Root: 'soft' = not hard, gentle, quiet</a:t>
+              <a:t>Word Labs  •  wordlabs.app  •  Root: 'soft' = not hard or rough</a:t>
             </a:r>
             <a:endParaRPr lang="en-US" sz="800" dirty="0"/>
           </a:p>
@@ -8845,7 +8845,7 @@
                 <a:ea typeface="Calibri" pitchFamily="34" charset="-122"/>
                 <a:cs typeface="Calibri" pitchFamily="34" charset="-120"/>
               </a:rPr>
-              <a:t>gentle, not hard</a:t>
+              <a:t>not hard or rough</a:t>
             </a:r>
             <a:endParaRPr lang="en-US" sz="850" dirty="0"/>
           </a:p>
@@ -8957,7 +8957,7 @@
                 <a:ea typeface="Calibri" pitchFamily="34" charset="-122"/>
                 <a:cs typeface="Calibri" pitchFamily="34" charset="-120"/>
               </a:rPr>
-              <a:t>in a way, how something is done</a:t>
+              <a:t>in a way</a:t>
             </a:r>
             <a:endParaRPr lang="en-US" sz="850" dirty="0"/>
           </a:p>
@@ -9645,7 +9645,7 @@
                 <a:ea typeface="Calibri" pitchFamily="34" charset="-122"/>
                 <a:cs typeface="Calibri" pitchFamily="34" charset="-120"/>
               </a:rPr>
-              <a:t>Word Labs  •  wordlabs.app  •  Root: 'soft' = not hard, gentle, quiet</a:t>
+              <a:t>Word Labs  •  wordlabs.app  •  Root: 'soft' = not hard or rough</a:t>
             </a:r>
             <a:endParaRPr lang="en-US" sz="800" dirty="0"/>
           </a:p>
@@ -9962,7 +9962,7 @@
                 <a:ea typeface="Calibri" pitchFamily="34" charset="-122"/>
                 <a:cs typeface="Calibri" pitchFamily="34" charset="-120"/>
               </a:rPr>
-              <a:t>gentle, not hard</a:t>
+              <a:t>not hard or rough</a:t>
             </a:r>
             <a:endParaRPr lang="en-US" sz="850" dirty="0"/>
           </a:p>
@@ -10074,7 +10074,7 @@
                 <a:ea typeface="Calibri" pitchFamily="34" charset="-122"/>
                 <a:cs typeface="Calibri" pitchFamily="34" charset="-120"/>
               </a:rPr>
-              <a:t>in a way, how something is done</a:t>
+              <a:t>in a way</a:t>
             </a:r>
             <a:endParaRPr lang="en-US" sz="850" dirty="0"/>
           </a:p>
@@ -10445,7 +10445,7 @@
         </p:nvSpPr>
         <p:spPr>
           <a:xfrm>
-            <a:off x="2427732" y="4169664"/>
+            <a:off x="2254649" y="4169664"/>
             <a:ext cx="685800" cy="475488"/>
           </a:xfrm>
           <a:prstGeom prst="rect">
@@ -10472,7 +10472,7 @@
         </p:nvSpPr>
         <p:spPr>
           <a:xfrm>
-            <a:off x="2427732" y="4169664"/>
+            <a:off x="2254649" y="4169664"/>
             <a:ext cx="685800" cy="475488"/>
           </a:xfrm>
           <a:prstGeom prst="rect">
@@ -10511,7 +10511,7 @@
         </p:nvSpPr>
         <p:spPr>
           <a:xfrm>
-            <a:off x="3639312" y="4169664"/>
+            <a:off x="3293146" y="4169664"/>
             <a:ext cx="685800" cy="475488"/>
           </a:xfrm>
           <a:prstGeom prst="rect">
@@ -10538,7 +10538,7 @@
         </p:nvSpPr>
         <p:spPr>
           <a:xfrm>
-            <a:off x="3639312" y="4169664"/>
+            <a:off x="3293146" y="4169664"/>
             <a:ext cx="685800" cy="475488"/>
           </a:xfrm>
           <a:prstGeom prst="rect">
@@ -10577,7 +10577,7 @@
         </p:nvSpPr>
         <p:spPr>
           <a:xfrm>
-            <a:off x="4850892" y="4169664"/>
+            <a:off x="4331643" y="4169664"/>
             <a:ext cx="685800" cy="475488"/>
           </a:xfrm>
           <a:prstGeom prst="rect">
@@ -10604,7 +10604,7 @@
         </p:nvSpPr>
         <p:spPr>
           <a:xfrm>
-            <a:off x="4850892" y="4169664"/>
+            <a:off x="4331643" y="4169664"/>
             <a:ext cx="685800" cy="475488"/>
           </a:xfrm>
           <a:prstGeom prst="rect">
@@ -10629,7 +10629,7 @@
                 <a:ea typeface="Trebuchet MS" pitchFamily="34" charset="-122"/>
                 <a:cs typeface="Trebuchet MS" pitchFamily="34" charset="-120"/>
               </a:rPr>
-              <a:t>ft</a:t>
+              <a:t>f</a:t>
             </a:r>
             <a:endParaRPr lang="en-US" sz="900" dirty="0"/>
           </a:p>
@@ -10643,7 +10643,7 @@
         </p:nvSpPr>
         <p:spPr>
           <a:xfrm>
-            <a:off x="6062472" y="4169664"/>
+            <a:off x="5370141" y="4169664"/>
             <a:ext cx="685800" cy="475488"/>
           </a:xfrm>
           <a:prstGeom prst="rect">
@@ -10670,7 +10670,7 @@
         </p:nvSpPr>
         <p:spPr>
           <a:xfrm>
-            <a:off x="6062472" y="4169664"/>
+            <a:off x="5370141" y="4169664"/>
             <a:ext cx="685800" cy="475488"/>
           </a:xfrm>
           <a:prstGeom prst="rect">
@@ -10695,7 +10695,7 @@
                 <a:ea typeface="Trebuchet MS" pitchFamily="34" charset="-122"/>
                 <a:cs typeface="Trebuchet MS" pitchFamily="34" charset="-120"/>
               </a:rPr>
-              <a:t>l</a:t>
+              <a:t>t</a:t>
             </a:r>
             <a:endParaRPr lang="en-US" sz="900" dirty="0"/>
           </a:p>
@@ -10709,7 +10709,7 @@
         </p:nvSpPr>
         <p:spPr>
           <a:xfrm>
-            <a:off x="7274052" y="4169664"/>
+            <a:off x="6408638" y="4169664"/>
             <a:ext cx="685800" cy="475488"/>
           </a:xfrm>
           <a:prstGeom prst="rect">
@@ -10736,7 +10736,73 @@
         </p:nvSpPr>
         <p:spPr>
           <a:xfrm>
-            <a:off x="7274052" y="4169664"/>
+            <a:off x="6408638" y="4169664"/>
+            <a:ext cx="685800" cy="475488"/>
+          </a:xfrm>
+          <a:prstGeom prst="rect">
+            <a:avLst/>
+          </a:prstGeom>
+          <a:noFill/>
+          <a:ln/>
+        </p:spPr>
+        <p:txBody>
+          <a:bodyPr wrap="square" lIns="0" tIns="0" rIns="0" bIns="0" rtlCol="0" anchor="ctr"/>
+          <a:lstStyle/>
+          <a:p>
+            <a:pPr algn="ctr" indent="0" marL="0">
+              <a:buNone/>
+            </a:pPr>
+            <a:r>
+              <a:rPr lang="en-US" sz="900" b="1" dirty="0">
+                <a:solidFill>
+                  <a:srgbClr val="9D174D"/>
+                </a:solidFill>
+                <a:latin typeface="Trebuchet MS" pitchFamily="34" charset="0"/>
+                <a:ea typeface="Trebuchet MS" pitchFamily="34" charset="-122"/>
+                <a:cs typeface="Trebuchet MS" pitchFamily="34" charset="-120"/>
+              </a:rPr>
+              <a:t>l</a:t>
+            </a:r>
+            <a:endParaRPr lang="en-US" sz="900" dirty="0"/>
+          </a:p>
+        </p:txBody>
+      </p:sp>
+      <p:sp>
+        <p:nvSpPr>
+          <p:cNvPr id="43" name="Shape 41"/>
+          <p:cNvSpPr/>
+          <p:nvPr/>
+        </p:nvSpPr>
+        <p:spPr>
+          <a:xfrm>
+            <a:off x="7447135" y="4169664"/>
+            <a:ext cx="685800" cy="475488"/>
+          </a:xfrm>
+          <a:prstGeom prst="rect">
+            <a:avLst>
+              <a:gd name="adj" fmla="val 7692"/>
+            </a:avLst>
+          </a:prstGeom>
+          <a:solidFill>
+            <a:srgbClr val="FFFFFF"/>
+          </a:solidFill>
+          <a:ln w="12700">
+            <a:solidFill>
+              <a:srgbClr val="DB2777"/>
+            </a:solidFill>
+            <a:prstDash val="solid"/>
+          </a:ln>
+        </p:spPr>
+      </p:sp>
+      <p:sp>
+        <p:nvSpPr>
+          <p:cNvPr id="44" name="Text 42"/>
+          <p:cNvSpPr/>
+          <p:nvPr/>
+        </p:nvSpPr>
+        <p:spPr>
+          <a:xfrm>
+            <a:off x="7447135" y="4169664"/>
             <a:ext cx="685800" cy="475488"/>
           </a:xfrm>
           <a:prstGeom prst="rect">
@@ -11053,7 +11119,7 @@
                 <a:ea typeface="Calibri" pitchFamily="34" charset="-122"/>
                 <a:cs typeface="Calibri" pitchFamily="34" charset="-120"/>
               </a:rPr>
-              <a:t>Word Labs  •  wordlabs.app  •  Root: 'soft' = not hard, gentle, quiet</a:t>
+              <a:t>Word Labs  •  wordlabs.app  •  Root: 'soft' = not hard or rough</a:t>
             </a:r>
             <a:endParaRPr lang="en-US" sz="800" dirty="0"/>
           </a:p>
@@ -11192,7 +11258,7 @@
                 <a:ea typeface="Trebuchet MS" pitchFamily="34" charset="-122"/>
                 <a:cs typeface="Trebuchet MS" pitchFamily="34" charset="-120"/>
               </a:rPr>
-              <a:t>softness</a:t>
+              <a:t>softest</a:t>
             </a:r>
             <a:endParaRPr lang="en-US" sz="2800" dirty="0"/>
           </a:p>
@@ -11880,7 +11946,7 @@
                 <a:ea typeface="Calibri" pitchFamily="34" charset="-122"/>
                 <a:cs typeface="Calibri" pitchFamily="34" charset="-120"/>
               </a:rPr>
-              <a:t>Word Labs  •  wordlabs.app  •  Root: 'soft' = not hard, gentle, quiet</a:t>
+              <a:t>Word Labs  •  wordlabs.app  •  Root: 'soft' = not hard or rough</a:t>
             </a:r>
             <a:endParaRPr lang="en-US" sz="800" dirty="0"/>
           </a:p>
@@ -12019,7 +12085,7 @@
                 <a:ea typeface="Trebuchet MS" pitchFamily="34" charset="-122"/>
                 <a:cs typeface="Trebuchet MS" pitchFamily="34" charset="-120"/>
               </a:rPr>
-              <a:t>softness</a:t>
+              <a:t>softest</a:t>
             </a:r>
             <a:endParaRPr lang="en-US" sz="2800" dirty="0"/>
           </a:p>
@@ -12197,7 +12263,7 @@
                 <a:ea typeface="Calibri" pitchFamily="34" charset="-122"/>
                 <a:cs typeface="Calibri" pitchFamily="34" charset="-120"/>
               </a:rPr>
-              <a:t>gentle, not hard</a:t>
+              <a:t>not hard or rough</a:t>
             </a:r>
             <a:endParaRPr lang="en-US" sz="850" dirty="0"/>
           </a:p>
@@ -12270,7 +12336,7 @@
                 <a:ea typeface="Trebuchet MS" pitchFamily="34" charset="-122"/>
                 <a:cs typeface="Trebuchet MS" pitchFamily="34" charset="-120"/>
               </a:rPr>
-              <a:t>ness</a:t>
+              <a:t>est</a:t>
             </a:r>
             <a:endParaRPr lang="en-US" sz="1300" dirty="0"/>
           </a:p>
@@ -12309,7 +12375,7 @@
                 <a:ea typeface="Calibri" pitchFamily="34" charset="-122"/>
                 <a:cs typeface="Calibri" pitchFamily="34" charset="-120"/>
               </a:rPr>
-              <a:t>the quality or state of</a:t>
+              <a:t>most</a:t>
             </a:r>
             <a:endParaRPr lang="en-US" sz="850" dirty="0"/>
           </a:p>
@@ -12865,7 +12931,7 @@
                 <a:ea typeface="Calibri" pitchFamily="34" charset="-122"/>
                 <a:cs typeface="Calibri" pitchFamily="34" charset="-120"/>
               </a:rPr>
-              <a:t>Word Labs  •  wordlabs.app  •  Root: 'soft' = not hard, gentle, quiet</a:t>
+              <a:t>Word Labs  •  wordlabs.app  •  Root: 'soft' = not hard or rough</a:t>
             </a:r>
             <a:endParaRPr lang="en-US" sz="800" dirty="0"/>
           </a:p>
@@ -13004,7 +13070,7 @@
                 <a:ea typeface="Trebuchet MS" pitchFamily="34" charset="-122"/>
                 <a:cs typeface="Trebuchet MS" pitchFamily="34" charset="-120"/>
               </a:rPr>
-              <a:t>softness</a:t>
+              <a:t>softest</a:t>
             </a:r>
             <a:endParaRPr lang="en-US" sz="2800" dirty="0"/>
           </a:p>
@@ -13182,7 +13248,7 @@
                 <a:ea typeface="Calibri" pitchFamily="34" charset="-122"/>
                 <a:cs typeface="Calibri" pitchFamily="34" charset="-120"/>
               </a:rPr>
-              <a:t>gentle, not hard</a:t>
+              <a:t>not hard or rough</a:t>
             </a:r>
             <a:endParaRPr lang="en-US" sz="850" dirty="0"/>
           </a:p>
@@ -13255,7 +13321,7 @@
                 <a:ea typeface="Trebuchet MS" pitchFamily="34" charset="-122"/>
                 <a:cs typeface="Trebuchet MS" pitchFamily="34" charset="-120"/>
               </a:rPr>
-              <a:t>ness</a:t>
+              <a:t>est</a:t>
             </a:r>
             <a:endParaRPr lang="en-US" sz="1300" dirty="0"/>
           </a:p>
@@ -13294,7 +13360,7 @@
                 <a:ea typeface="Calibri" pitchFamily="34" charset="-122"/>
                 <a:cs typeface="Calibri" pitchFamily="34" charset="-120"/>
               </a:rPr>
-              <a:t>the quality or state of</a:t>
+              <a:t>most</a:t>
             </a:r>
             <a:endParaRPr lang="en-US" sz="850" dirty="0"/>
           </a:p>
@@ -13558,7 +13624,7 @@
                 <a:ea typeface="Trebuchet MS" pitchFamily="34" charset="-122"/>
                 <a:cs typeface="Trebuchet MS" pitchFamily="34" charset="-120"/>
               </a:rPr>
-              <a:t>ness</a:t>
+              <a:t>est</a:t>
             </a:r>
             <a:endParaRPr lang="en-US" sz="1400" dirty="0"/>
           </a:p>
@@ -13891,7 +13957,7 @@
                 <a:ea typeface="Calibri" pitchFamily="34" charset="-122"/>
                 <a:cs typeface="Calibri" pitchFamily="34" charset="-120"/>
               </a:rPr>
-              <a:t>Root 'soft' — not hard, gentle, quiet</a:t>
+              <a:t>Root 'soft' — not hard or rough</a:t>
             </a:r>
             <a:endParaRPr lang="en-US" sz="1600" dirty="0"/>
           </a:p>
@@ -14247,7 +14313,7 @@
                 <a:ea typeface="Calibri" pitchFamily="34" charset="-122"/>
                 <a:cs typeface="Calibri" pitchFamily="34" charset="-120"/>
               </a:rPr>
-              <a:t>Word Labs  •  wordlabs.app  •  Root: 'soft' = not hard, gentle, quiet</a:t>
+              <a:t>Word Labs  •  wordlabs.app  •  Root: 'soft' = not hard or rough</a:t>
             </a:r>
             <a:endParaRPr lang="en-US" sz="800" dirty="0"/>
           </a:p>
@@ -14386,7 +14452,7 @@
                 <a:ea typeface="Trebuchet MS" pitchFamily="34" charset="-122"/>
                 <a:cs typeface="Trebuchet MS" pitchFamily="34" charset="-120"/>
               </a:rPr>
-              <a:t>softness</a:t>
+              <a:t>softest</a:t>
             </a:r>
             <a:endParaRPr lang="en-US" sz="2800" dirty="0"/>
           </a:p>
@@ -14564,7 +14630,7 @@
                 <a:ea typeface="Calibri" pitchFamily="34" charset="-122"/>
                 <a:cs typeface="Calibri" pitchFamily="34" charset="-120"/>
               </a:rPr>
-              <a:t>gentle, not hard</a:t>
+              <a:t>not hard or rough</a:t>
             </a:r>
             <a:endParaRPr lang="en-US" sz="850" dirty="0"/>
           </a:p>
@@ -14637,7 +14703,7 @@
                 <a:ea typeface="Trebuchet MS" pitchFamily="34" charset="-122"/>
                 <a:cs typeface="Trebuchet MS" pitchFamily="34" charset="-120"/>
               </a:rPr>
-              <a:t>ness</a:t>
+              <a:t>est</a:t>
             </a:r>
             <a:endParaRPr lang="en-US" sz="1300" dirty="0"/>
           </a:p>
@@ -14676,7 +14742,7 @@
                 <a:ea typeface="Calibri" pitchFamily="34" charset="-122"/>
                 <a:cs typeface="Calibri" pitchFamily="34" charset="-120"/>
               </a:rPr>
-              <a:t>the quality or state of</a:t>
+              <a:t>most</a:t>
             </a:r>
             <a:endParaRPr lang="en-US" sz="850" dirty="0"/>
           </a:p>
@@ -14940,7 +15006,7 @@
                 <a:ea typeface="Trebuchet MS" pitchFamily="34" charset="-122"/>
                 <a:cs typeface="Trebuchet MS" pitchFamily="34" charset="-120"/>
               </a:rPr>
-              <a:t>ness</a:t>
+              <a:t>est</a:t>
             </a:r>
             <a:endParaRPr lang="en-US" sz="1400" dirty="0"/>
           </a:p>
@@ -15047,7 +15113,7 @@
         </p:nvSpPr>
         <p:spPr>
           <a:xfrm>
-            <a:off x="2254649" y="4169664"/>
+            <a:off x="2124837" y="4169664"/>
             <a:ext cx="685800" cy="475488"/>
           </a:xfrm>
           <a:prstGeom prst="rect">
@@ -15074,7 +15140,7 @@
         </p:nvSpPr>
         <p:spPr>
           <a:xfrm>
-            <a:off x="2254649" y="4169664"/>
+            <a:off x="2124837" y="4169664"/>
             <a:ext cx="685800" cy="475488"/>
           </a:xfrm>
           <a:prstGeom prst="rect">
@@ -15113,7 +15179,7 @@
         </p:nvSpPr>
         <p:spPr>
           <a:xfrm>
-            <a:off x="3293146" y="4169664"/>
+            <a:off x="3033522" y="4169664"/>
             <a:ext cx="685800" cy="475488"/>
           </a:xfrm>
           <a:prstGeom prst="rect">
@@ -15140,7 +15206,7 @@
         </p:nvSpPr>
         <p:spPr>
           <a:xfrm>
-            <a:off x="3293146" y="4169664"/>
+            <a:off x="3033522" y="4169664"/>
             <a:ext cx="685800" cy="475488"/>
           </a:xfrm>
           <a:prstGeom prst="rect">
@@ -15179,7 +15245,7 @@
         </p:nvSpPr>
         <p:spPr>
           <a:xfrm>
-            <a:off x="4331643" y="4169664"/>
+            <a:off x="3942207" y="4169664"/>
             <a:ext cx="685800" cy="475488"/>
           </a:xfrm>
           <a:prstGeom prst="rect">
@@ -15206,7 +15272,7 @@
         </p:nvSpPr>
         <p:spPr>
           <a:xfrm>
-            <a:off x="4331643" y="4169664"/>
+            <a:off x="3942207" y="4169664"/>
             <a:ext cx="685800" cy="475488"/>
           </a:xfrm>
           <a:prstGeom prst="rect">
@@ -15231,7 +15297,7 @@
                 <a:ea typeface="Trebuchet MS" pitchFamily="34" charset="-122"/>
                 <a:cs typeface="Trebuchet MS" pitchFamily="34" charset="-120"/>
               </a:rPr>
-              <a:t>ft</a:t>
+              <a:t>f</a:t>
             </a:r>
             <a:endParaRPr lang="en-US" sz="900" dirty="0"/>
           </a:p>
@@ -15245,7 +15311,7 @@
         </p:nvSpPr>
         <p:spPr>
           <a:xfrm>
-            <a:off x="5370141" y="4169664"/>
+            <a:off x="4850892" y="4169664"/>
             <a:ext cx="685800" cy="475488"/>
           </a:xfrm>
           <a:prstGeom prst="rect">
@@ -15272,7 +15338,7 @@
         </p:nvSpPr>
         <p:spPr>
           <a:xfrm>
-            <a:off x="5370141" y="4169664"/>
+            <a:off x="4850892" y="4169664"/>
             <a:ext cx="685800" cy="475488"/>
           </a:xfrm>
           <a:prstGeom prst="rect">
@@ -15297,7 +15363,7 @@
                 <a:ea typeface="Trebuchet MS" pitchFamily="34" charset="-122"/>
                 <a:cs typeface="Trebuchet MS" pitchFamily="34" charset="-120"/>
               </a:rPr>
-              <a:t>n</a:t>
+              <a:t>t</a:t>
             </a:r>
             <a:endParaRPr lang="en-US" sz="900" dirty="0"/>
           </a:p>
@@ -15311,7 +15377,7 @@
         </p:nvSpPr>
         <p:spPr>
           <a:xfrm>
-            <a:off x="6408638" y="4169664"/>
+            <a:off x="5759577" y="4169664"/>
             <a:ext cx="685800" cy="475488"/>
           </a:xfrm>
           <a:prstGeom prst="rect">
@@ -15338,7 +15404,7 @@
         </p:nvSpPr>
         <p:spPr>
           <a:xfrm>
-            <a:off x="6408638" y="4169664"/>
+            <a:off x="5759577" y="4169664"/>
             <a:ext cx="685800" cy="475488"/>
           </a:xfrm>
           <a:prstGeom prst="rect">
@@ -15377,7 +15443,7 @@
         </p:nvSpPr>
         <p:spPr>
           <a:xfrm>
-            <a:off x="7447135" y="4169664"/>
+            <a:off x="6668262" y="4169664"/>
             <a:ext cx="685800" cy="475488"/>
           </a:xfrm>
           <a:prstGeom prst="rect">
@@ -15404,7 +15470,7 @@
         </p:nvSpPr>
         <p:spPr>
           <a:xfrm>
-            <a:off x="7447135" y="4169664"/>
+            <a:off x="6668262" y="4169664"/>
             <a:ext cx="685800" cy="475488"/>
           </a:xfrm>
           <a:prstGeom prst="rect">
@@ -15429,7 +15495,73 @@
                 <a:ea typeface="Trebuchet MS" pitchFamily="34" charset="-122"/>
                 <a:cs typeface="Trebuchet MS" pitchFamily="34" charset="-120"/>
               </a:rPr>
-              <a:t>ss</a:t>
+              <a:t>s</a:t>
+            </a:r>
+            <a:endParaRPr lang="en-US" sz="900" dirty="0"/>
+          </a:p>
+        </p:txBody>
+      </p:sp>
+      <p:sp>
+        <p:nvSpPr>
+          <p:cNvPr id="45" name="Shape 43"/>
+          <p:cNvSpPr/>
+          <p:nvPr/>
+        </p:nvSpPr>
+        <p:spPr>
+          <a:xfrm>
+            <a:off x="7576947" y="4169664"/>
+            <a:ext cx="685800" cy="475488"/>
+          </a:xfrm>
+          <a:prstGeom prst="rect">
+            <a:avLst>
+              <a:gd name="adj" fmla="val 7692"/>
+            </a:avLst>
+          </a:prstGeom>
+          <a:solidFill>
+            <a:srgbClr val="FFFFFF"/>
+          </a:solidFill>
+          <a:ln w="12700">
+            <a:solidFill>
+              <a:srgbClr val="DB2777"/>
+            </a:solidFill>
+            <a:prstDash val="solid"/>
+          </a:ln>
+        </p:spPr>
+      </p:sp>
+      <p:sp>
+        <p:nvSpPr>
+          <p:cNvPr id="46" name="Text 44"/>
+          <p:cNvSpPr/>
+          <p:nvPr/>
+        </p:nvSpPr>
+        <p:spPr>
+          <a:xfrm>
+            <a:off x="7576947" y="4169664"/>
+            <a:ext cx="685800" cy="475488"/>
+          </a:xfrm>
+          <a:prstGeom prst="rect">
+            <a:avLst/>
+          </a:prstGeom>
+          <a:noFill/>
+          <a:ln/>
+        </p:spPr>
+        <p:txBody>
+          <a:bodyPr wrap="square" lIns="0" tIns="0" rIns="0" bIns="0" rtlCol="0" anchor="ctr"/>
+          <a:lstStyle/>
+          <a:p>
+            <a:pPr algn="ctr" indent="0" marL="0">
+              <a:buNone/>
+            </a:pPr>
+            <a:r>
+              <a:rPr lang="en-US" sz="900" b="1" dirty="0">
+                <a:solidFill>
+                  <a:srgbClr val="9D174D"/>
+                </a:solidFill>
+                <a:latin typeface="Trebuchet MS" pitchFamily="34" charset="0"/>
+                <a:ea typeface="Trebuchet MS" pitchFamily="34" charset="-122"/>
+                <a:cs typeface="Trebuchet MS" pitchFamily="34" charset="-120"/>
+              </a:rPr>
+              <a:t>t</a:t>
             </a:r>
             <a:endParaRPr lang="en-US" sz="900" dirty="0"/>
           </a:p>
@@ -16003,7 +16135,7 @@
                 <a:ea typeface="Calibri" pitchFamily="34" charset="-122"/>
                 <a:cs typeface="Calibri" pitchFamily="34" charset="-120"/>
               </a:rPr>
-              <a:t>Word Labs  •  wordlabs.app  •  Root: 'soft' = not hard, gentle, quiet</a:t>
+              <a:t>Word Labs  •  wordlabs.app  •  Root: 'soft' = not hard or rough</a:t>
             </a:r>
             <a:endParaRPr lang="en-US" sz="800" dirty="0"/>
           </a:p>
@@ -16337,7 +16469,7 @@
                 <a:ea typeface="Trebuchet MS" pitchFamily="34" charset="-122"/>
                 <a:cs typeface="Trebuchet MS" pitchFamily="34" charset="-120"/>
               </a:rPr>
-              <a:t>2</a:t>
+              <a:t>0</a:t>
             </a:r>
             <a:pPr algn="ctr" indent="0" marL="0">
               <a:buNone/>
@@ -16351,7 +16483,7 @@
                 <a:ea typeface="Trebuchet MS" pitchFamily="34" charset="-122"/>
                 <a:cs typeface="Trebuchet MS" pitchFamily="34" charset="-120"/>
               </a:rPr>
-              <a:t>  punctuation marks</a:t>
+              <a:t>  punctuation mark</a:t>
             </a:r>
             <a:endParaRPr lang="en-US" sz="2800" dirty="0"/>
           </a:p>
@@ -16643,7 +16775,7 @@
                 <a:ea typeface="Calibri" pitchFamily="34" charset="-122"/>
                 <a:cs typeface="Calibri" pitchFamily="34" charset="-120"/>
               </a:rPr>
-              <a:t>Word Labs  •  wordlabs.app  •  Root: 'soft' = not hard, gentle, quiet</a:t>
+              <a:t>Word Labs  •  wordlabs.app  •  Root: 'soft' = not hard or rough</a:t>
             </a:r>
             <a:endParaRPr lang="en-US" sz="800" dirty="0"/>
           </a:p>
@@ -16755,7 +16887,7 @@
                 <a:ea typeface="Calibri" pitchFamily="34" charset="-122"/>
                 <a:cs typeface="Calibri" pitchFamily="34" charset="-120"/>
               </a:rPr>
-              <a:t>The </a:t>
+              <a:t>The warm water </a:t>
             </a:r>
             <a:pPr algn="l" indent="0" marL="0">
               <a:buNone/>
@@ -16772,7 +16904,7 @@
                 <a:ea typeface="Calibri" pitchFamily="34" charset="-122"/>
                 <a:cs typeface="Calibri" pitchFamily="34" charset="-120"/>
               </a:rPr>
-              <a:t>softest</a:t>
+              <a:t>softened</a:t>
             </a:r>
             <a:pPr algn="l" indent="0" marL="0">
               <a:buNone/>
@@ -16786,7 +16918,7 @@
                 <a:ea typeface="Calibri" pitchFamily="34" charset="-122"/>
                 <a:cs typeface="Calibri" pitchFamily="34" charset="-120"/>
               </a:rPr>
-              <a:t> blanket began to </a:t>
+              <a:t> the dried clay. She loved the </a:t>
             </a:r>
             <a:pPr algn="l" indent="0" marL="0">
               <a:buNone/>
@@ -16803,7 +16935,7 @@
                 <a:ea typeface="Calibri" pitchFamily="34" charset="-122"/>
                 <a:cs typeface="Calibri" pitchFamily="34" charset="-120"/>
               </a:rPr>
-              <a:t>soften</a:t>
+              <a:t>softness</a:t>
             </a:r>
             <a:pPr algn="l" indent="0" marL="0">
               <a:buNone/>
@@ -16817,7 +16949,7 @@
                 <a:ea typeface="Calibri" pitchFamily="34" charset="-122"/>
                 <a:cs typeface="Calibri" pitchFamily="34" charset="-120"/>
               </a:rPr>
-              <a:t> even more after washing, but we were careful not to </a:t>
+              <a:t> of the new carpet under her feet. The butter is </a:t>
             </a:r>
             <a:pPr algn="l" indent="0" marL="0">
               <a:buNone/>
@@ -16834,7 +16966,7 @@
                 <a:ea typeface="Calibri" pitchFamily="34" charset="-122"/>
                 <a:cs typeface="Calibri" pitchFamily="34" charset="-120"/>
               </a:rPr>
-              <a:t>oversoften</a:t>
+              <a:t>softening</a:t>
             </a:r>
             <a:pPr algn="l" indent="0" marL="0">
               <a:buNone/>
@@ -16848,7 +16980,7 @@
                 <a:ea typeface="Calibri" pitchFamily="34" charset="-122"/>
                 <a:cs typeface="Calibri" pitchFamily="34" charset="-120"/>
               </a:rPr>
-              <a:t> it.</a:t>
+              <a:t> on the counter in the warm kitchen.</a:t>
             </a:r>
             <a:endParaRPr lang="en-US" sz="1800" dirty="0"/>
           </a:p>
@@ -17003,7 +17135,7 @@
                 <a:ea typeface="Trebuchet MS" pitchFamily="34" charset="-122"/>
                 <a:cs typeface="Trebuchet MS" pitchFamily="34" charset="-120"/>
               </a:rPr>
-              <a:t>softest</a:t>
+              <a:t>softened</a:t>
             </a:r>
             <a:endParaRPr lang="en-US" sz="1400" dirty="0"/>
           </a:p>
@@ -17131,7 +17263,7 @@
                 <a:ea typeface="Trebuchet MS" pitchFamily="34" charset="-122"/>
                 <a:cs typeface="Trebuchet MS" pitchFamily="34" charset="-120"/>
               </a:rPr>
-              <a:t>soften</a:t>
+              <a:t>softness</a:t>
             </a:r>
             <a:endParaRPr lang="en-US" sz="1400" dirty="0"/>
           </a:p>
@@ -17259,7 +17391,7 @@
                 <a:ea typeface="Trebuchet MS" pitchFamily="34" charset="-122"/>
                 <a:cs typeface="Trebuchet MS" pitchFamily="34" charset="-120"/>
               </a:rPr>
-              <a:t>oversoften</a:t>
+              <a:t>softening</a:t>
             </a:r>
             <a:endParaRPr lang="en-US" sz="1400" dirty="0"/>
           </a:p>
@@ -17590,7 +17722,7 @@
                 <a:ea typeface="Calibri" pitchFamily="34" charset="-122"/>
                 <a:cs typeface="Calibri" pitchFamily="34" charset="-120"/>
               </a:rPr>
-              <a:t>Word Labs  •  wordlabs.app  •  Root: 'soft' = not hard, gentle, quiet</a:t>
+              <a:t>Word Labs  •  wordlabs.app  •  Root: 'soft' = not hard or rough</a:t>
             </a:r>
             <a:endParaRPr lang="en-US" sz="800" dirty="0"/>
           </a:p>
@@ -17729,7 +17861,7 @@
                 <a:ea typeface="Trebuchet MS" pitchFamily="34" charset="-122"/>
                 <a:cs typeface="Trebuchet MS" pitchFamily="34" charset="-120"/>
               </a:rPr>
-              <a:t>softest</a:t>
+              <a:t>softened</a:t>
             </a:r>
             <a:endParaRPr lang="en-US" sz="2800" dirty="0"/>
           </a:p>
@@ -18417,7 +18549,7 @@
                 <a:ea typeface="Calibri" pitchFamily="34" charset="-122"/>
                 <a:cs typeface="Calibri" pitchFamily="34" charset="-120"/>
               </a:rPr>
-              <a:t>Word Labs  •  wordlabs.app  •  Root: 'soft' = not hard, gentle, quiet</a:t>
+              <a:t>Word Labs  •  wordlabs.app  •  Root: 'soft' = not hard or rough</a:t>
             </a:r>
             <a:endParaRPr lang="en-US" sz="800" dirty="0"/>
           </a:p>
@@ -18556,7 +18688,7 @@
                 <a:ea typeface="Trebuchet MS" pitchFamily="34" charset="-122"/>
                 <a:cs typeface="Trebuchet MS" pitchFamily="34" charset="-120"/>
               </a:rPr>
-              <a:t>softest</a:t>
+              <a:t>softened</a:t>
             </a:r>
             <a:endParaRPr lang="en-US" sz="2800" dirty="0"/>
           </a:p>
@@ -18636,7 +18768,7 @@
         </p:nvSpPr>
         <p:spPr>
           <a:xfrm>
-            <a:off x="2938272" y="2258568"/>
+            <a:off x="2221992" y="2258568"/>
             <a:ext cx="1828800" cy="292608"/>
           </a:xfrm>
           <a:prstGeom prst="rect">
@@ -18670,7 +18802,7 @@
         </p:nvSpPr>
         <p:spPr>
           <a:xfrm>
-            <a:off x="2938272" y="2258568"/>
+            <a:off x="2221992" y="2258568"/>
             <a:ext cx="1828800" cy="292608"/>
           </a:xfrm>
           <a:prstGeom prst="rect">
@@ -18709,7 +18841,7 @@
         </p:nvSpPr>
         <p:spPr>
           <a:xfrm>
-            <a:off x="2938272" y="2569464"/>
+            <a:off x="2221992" y="2569464"/>
             <a:ext cx="1828800" cy="201168"/>
           </a:xfrm>
           <a:prstGeom prst="rect">
@@ -18734,7 +18866,7 @@
                 <a:ea typeface="Calibri" pitchFamily="34" charset="-122"/>
                 <a:cs typeface="Calibri" pitchFamily="34" charset="-120"/>
               </a:rPr>
-              <a:t>gentle, not hard</a:t>
+              <a:t>not hard or rough</a:t>
             </a:r>
             <a:endParaRPr lang="en-US" sz="850" dirty="0"/>
           </a:p>
@@ -18748,7 +18880,7 @@
         </p:nvSpPr>
         <p:spPr>
           <a:xfrm>
-            <a:off x="5803392" y="2258568"/>
+            <a:off x="4370832" y="2258568"/>
             <a:ext cx="1828800" cy="292608"/>
           </a:xfrm>
           <a:prstGeom prst="rect">
@@ -18782,7 +18914,7 @@
         </p:nvSpPr>
         <p:spPr>
           <a:xfrm>
-            <a:off x="5803392" y="2258568"/>
+            <a:off x="4370832" y="2258568"/>
             <a:ext cx="1828800" cy="292608"/>
           </a:xfrm>
           <a:prstGeom prst="rect">
@@ -18807,7 +18939,7 @@
                 <a:ea typeface="Trebuchet MS" pitchFamily="34" charset="-122"/>
                 <a:cs typeface="Trebuchet MS" pitchFamily="34" charset="-120"/>
               </a:rPr>
-              <a:t>est</a:t>
+              <a:t>en</a:t>
             </a:r>
             <a:endParaRPr lang="en-US" sz="1300" dirty="0"/>
           </a:p>
@@ -18821,7 +18953,7 @@
         </p:nvSpPr>
         <p:spPr>
           <a:xfrm>
-            <a:off x="5803392" y="2569464"/>
+            <a:off x="4370832" y="2569464"/>
             <a:ext cx="1828800" cy="201168"/>
           </a:xfrm>
           <a:prstGeom prst="rect">
@@ -18846,7 +18978,7 @@
                 <a:ea typeface="Calibri" pitchFamily="34" charset="-122"/>
                 <a:cs typeface="Calibri" pitchFamily="34" charset="-120"/>
               </a:rPr>
-              <a:t>the most</a:t>
+              <a:t>made of; to make</a:t>
             </a:r>
             <a:endParaRPr lang="en-US" sz="850" dirty="0"/>
           </a:p>
@@ -18855,6 +18987,118 @@
       <p:sp>
         <p:nvSpPr>
           <p:cNvPr id="22" name="Shape 20"/>
+          <p:cNvSpPr/>
+          <p:nvPr/>
+        </p:nvSpPr>
+        <p:spPr>
+          <a:xfrm>
+            <a:off x="6519672" y="2258568"/>
+            <a:ext cx="1828800" cy="292608"/>
+          </a:xfrm>
+          <a:prstGeom prst="rect">
+            <a:avLst>
+              <a:gd name="adj" fmla="val 25000"/>
+            </a:avLst>
+          </a:prstGeom>
+          <a:solidFill>
+            <a:srgbClr val="FCE7F3"/>
+          </a:solidFill>
+          <a:ln w="19050">
+            <a:solidFill>
+              <a:srgbClr val="DB2777"/>
+            </a:solidFill>
+            <a:prstDash val="solid"/>
+          </a:ln>
+          <a:effectLst>
+            <a:outerShdw sx="100000" sy="100000" kx="0" ky="0" algn="bl" rotWithShape="0" blurRad="101600" dist="38100" dir="8100000">
+              <a:srgbClr val="000000">
+                <a:alpha val="12000"/>
+              </a:srgbClr>
+            </a:outerShdw>
+          </a:effectLst>
+        </p:spPr>
+      </p:sp>
+      <p:sp>
+        <p:nvSpPr>
+          <p:cNvPr id="23" name="Text 21"/>
+          <p:cNvSpPr/>
+          <p:nvPr/>
+        </p:nvSpPr>
+        <p:spPr>
+          <a:xfrm>
+            <a:off x="6519672" y="2258568"/>
+            <a:ext cx="1828800" cy="292608"/>
+          </a:xfrm>
+          <a:prstGeom prst="rect">
+            <a:avLst/>
+          </a:prstGeom>
+          <a:noFill/>
+          <a:ln/>
+        </p:spPr>
+        <p:txBody>
+          <a:bodyPr wrap="square" lIns="0" tIns="0" rIns="0" bIns="0" rtlCol="0" anchor="ctr"/>
+          <a:lstStyle/>
+          <a:p>
+            <a:pPr algn="ctr" indent="0" marL="0">
+              <a:buNone/>
+            </a:pPr>
+            <a:r>
+              <a:rPr lang="en-US" sz="1300" b="1" dirty="0">
+                <a:solidFill>
+                  <a:srgbClr val="9D174D"/>
+                </a:solidFill>
+                <a:latin typeface="Trebuchet MS" pitchFamily="34" charset="0"/>
+                <a:ea typeface="Trebuchet MS" pitchFamily="34" charset="-122"/>
+                <a:cs typeface="Trebuchet MS" pitchFamily="34" charset="-120"/>
+              </a:rPr>
+              <a:t>ed</a:t>
+            </a:r>
+            <a:endParaRPr lang="en-US" sz="1300" dirty="0"/>
+          </a:p>
+        </p:txBody>
+      </p:sp>
+      <p:sp>
+        <p:nvSpPr>
+          <p:cNvPr id="24" name="Text 22"/>
+          <p:cNvSpPr/>
+          <p:nvPr/>
+        </p:nvSpPr>
+        <p:spPr>
+          <a:xfrm>
+            <a:off x="6519672" y="2569464"/>
+            <a:ext cx="1828800" cy="201168"/>
+          </a:xfrm>
+          <a:prstGeom prst="rect">
+            <a:avLst/>
+          </a:prstGeom>
+          <a:noFill/>
+          <a:ln/>
+        </p:spPr>
+        <p:txBody>
+          <a:bodyPr wrap="square" lIns="0" tIns="0" rIns="0" bIns="0" rtlCol="0" anchor="t"/>
+          <a:lstStyle/>
+          <a:p>
+            <a:pPr algn="ctr" indent="0" marL="0">
+              <a:buNone/>
+            </a:pPr>
+            <a:r>
+              <a:rPr lang="en-US" sz="850" dirty="0">
+                <a:solidFill>
+                  <a:srgbClr val="475569"/>
+                </a:solidFill>
+                <a:latin typeface="Calibri" pitchFamily="34" charset="0"/>
+                <a:ea typeface="Calibri" pitchFamily="34" charset="-122"/>
+                <a:cs typeface="Calibri" pitchFamily="34" charset="-120"/>
+              </a:rPr>
+              <a:t>past tense</a:t>
+            </a:r>
+            <a:endParaRPr lang="en-US" sz="850" dirty="0"/>
+          </a:p>
+        </p:txBody>
+      </p:sp>
+      <p:sp>
+        <p:nvSpPr>
+          <p:cNvPr id="25" name="Shape 23"/>
           <p:cNvSpPr/>
           <p:nvPr/>
         </p:nvSpPr>
@@ -18881,7 +19125,7 @@
       </p:sp>
       <p:sp>
         <p:nvSpPr>
-          <p:cNvPr id="23" name="Text 21"/>
+          <p:cNvPr id="26" name="Text 24"/>
           <p:cNvSpPr/>
           <p:nvPr/>
         </p:nvSpPr>
@@ -18920,7 +19164,7 @@
       </p:sp>
       <p:sp>
         <p:nvSpPr>
-          <p:cNvPr id="24" name="Shape 22"/>
+          <p:cNvPr id="27" name="Shape 25"/>
           <p:cNvSpPr/>
           <p:nvPr/>
         </p:nvSpPr>
@@ -18947,7 +19191,7 @@
       </p:sp>
       <p:sp>
         <p:nvSpPr>
-          <p:cNvPr id="25" name="Text 23"/>
+          <p:cNvPr id="28" name="Text 26"/>
           <p:cNvSpPr/>
           <p:nvPr/>
         </p:nvSpPr>
@@ -18986,7 +19230,7 @@
       </p:sp>
       <p:sp>
         <p:nvSpPr>
-          <p:cNvPr id="26" name="Shape 24"/>
+          <p:cNvPr id="29" name="Shape 27"/>
           <p:cNvSpPr/>
           <p:nvPr/>
         </p:nvSpPr>
@@ -19013,7 +19257,7 @@
       </p:sp>
       <p:sp>
         <p:nvSpPr>
-          <p:cNvPr id="27" name="Text 25"/>
+          <p:cNvPr id="30" name="Text 28"/>
           <p:cNvSpPr/>
           <p:nvPr/>
         </p:nvSpPr>
@@ -19052,7 +19296,7 @@
       </p:sp>
       <p:sp>
         <p:nvSpPr>
-          <p:cNvPr id="28" name="Shape 26"/>
+          <p:cNvPr id="31" name="Shape 29"/>
           <p:cNvSpPr/>
           <p:nvPr/>
         </p:nvSpPr>
@@ -19079,7 +19323,7 @@
       </p:sp>
       <p:sp>
         <p:nvSpPr>
-          <p:cNvPr id="29" name="Text 27"/>
+          <p:cNvPr id="32" name="Text 30"/>
           <p:cNvSpPr/>
           <p:nvPr/>
         </p:nvSpPr>
@@ -19402,7 +19646,7 @@
                 <a:ea typeface="Calibri" pitchFamily="34" charset="-122"/>
                 <a:cs typeface="Calibri" pitchFamily="34" charset="-120"/>
               </a:rPr>
-              <a:t>Word Labs  •  wordlabs.app  •  Root: 'soft' = not hard, gentle, quiet</a:t>
+              <a:t>Word Labs  •  wordlabs.app  •  Root: 'soft' = not hard or rough</a:t>
             </a:r>
             <a:endParaRPr lang="en-US" sz="800" dirty="0"/>
           </a:p>
@@ -19541,7 +19785,7 @@
                 <a:ea typeface="Trebuchet MS" pitchFamily="34" charset="-122"/>
                 <a:cs typeface="Trebuchet MS" pitchFamily="34" charset="-120"/>
               </a:rPr>
-              <a:t>softest</a:t>
+              <a:t>softened</a:t>
             </a:r>
             <a:endParaRPr lang="en-US" sz="2800" dirty="0"/>
           </a:p>
@@ -19621,7 +19865,7 @@
         </p:nvSpPr>
         <p:spPr>
           <a:xfrm>
-            <a:off x="2938272" y="2258568"/>
+            <a:off x="2221992" y="2258568"/>
             <a:ext cx="1828800" cy="292608"/>
           </a:xfrm>
           <a:prstGeom prst="rect">
@@ -19655,7 +19899,7 @@
         </p:nvSpPr>
         <p:spPr>
           <a:xfrm>
-            <a:off x="2938272" y="2258568"/>
+            <a:off x="2221992" y="2258568"/>
             <a:ext cx="1828800" cy="292608"/>
           </a:xfrm>
           <a:prstGeom prst="rect">
@@ -19694,7 +19938,7 @@
         </p:nvSpPr>
         <p:spPr>
           <a:xfrm>
-            <a:off x="2938272" y="2569464"/>
+            <a:off x="2221992" y="2569464"/>
             <a:ext cx="1828800" cy="201168"/>
           </a:xfrm>
           <a:prstGeom prst="rect">
@@ -19719,7 +19963,7 @@
                 <a:ea typeface="Calibri" pitchFamily="34" charset="-122"/>
                 <a:cs typeface="Calibri" pitchFamily="34" charset="-120"/>
               </a:rPr>
-              <a:t>gentle, not hard</a:t>
+              <a:t>not hard or rough</a:t>
             </a:r>
             <a:endParaRPr lang="en-US" sz="850" dirty="0"/>
           </a:p>
@@ -19733,7 +19977,7 @@
         </p:nvSpPr>
         <p:spPr>
           <a:xfrm>
-            <a:off x="5803392" y="2258568"/>
+            <a:off x="4370832" y="2258568"/>
             <a:ext cx="1828800" cy="292608"/>
           </a:xfrm>
           <a:prstGeom prst="rect">
@@ -19767,7 +20011,7 @@
         </p:nvSpPr>
         <p:spPr>
           <a:xfrm>
-            <a:off x="5803392" y="2258568"/>
+            <a:off x="4370832" y="2258568"/>
             <a:ext cx="1828800" cy="292608"/>
           </a:xfrm>
           <a:prstGeom prst="rect">
@@ -19792,7 +20036,7 @@
                 <a:ea typeface="Trebuchet MS" pitchFamily="34" charset="-122"/>
                 <a:cs typeface="Trebuchet MS" pitchFamily="34" charset="-120"/>
               </a:rPr>
-              <a:t>est</a:t>
+              <a:t>en</a:t>
             </a:r>
             <a:endParaRPr lang="en-US" sz="1300" dirty="0"/>
           </a:p>
@@ -19806,7 +20050,7 @@
         </p:nvSpPr>
         <p:spPr>
           <a:xfrm>
-            <a:off x="5803392" y="2569464"/>
+            <a:off x="4370832" y="2569464"/>
             <a:ext cx="1828800" cy="201168"/>
           </a:xfrm>
           <a:prstGeom prst="rect">
@@ -19831,7 +20075,7 @@
                 <a:ea typeface="Calibri" pitchFamily="34" charset="-122"/>
                 <a:cs typeface="Calibri" pitchFamily="34" charset="-120"/>
               </a:rPr>
-              <a:t>the most</a:t>
+              <a:t>made of; to make</a:t>
             </a:r>
             <a:endParaRPr lang="en-US" sz="850" dirty="0"/>
           </a:p>
@@ -19840,6 +20084,118 @@
       <p:sp>
         <p:nvSpPr>
           <p:cNvPr id="22" name="Shape 20"/>
+          <p:cNvSpPr/>
+          <p:nvPr/>
+        </p:nvSpPr>
+        <p:spPr>
+          <a:xfrm>
+            <a:off x="6519672" y="2258568"/>
+            <a:ext cx="1828800" cy="292608"/>
+          </a:xfrm>
+          <a:prstGeom prst="rect">
+            <a:avLst>
+              <a:gd name="adj" fmla="val 25000"/>
+            </a:avLst>
+          </a:prstGeom>
+          <a:solidFill>
+            <a:srgbClr val="FCE7F3"/>
+          </a:solidFill>
+          <a:ln w="19050">
+            <a:solidFill>
+              <a:srgbClr val="DB2777"/>
+            </a:solidFill>
+            <a:prstDash val="solid"/>
+          </a:ln>
+          <a:effectLst>
+            <a:outerShdw sx="100000" sy="100000" kx="0" ky="0" algn="bl" rotWithShape="0" blurRad="101600" dist="38100" dir="8100000">
+              <a:srgbClr val="000000">
+                <a:alpha val="12000"/>
+              </a:srgbClr>
+            </a:outerShdw>
+          </a:effectLst>
+        </p:spPr>
+      </p:sp>
+      <p:sp>
+        <p:nvSpPr>
+          <p:cNvPr id="23" name="Text 21"/>
+          <p:cNvSpPr/>
+          <p:nvPr/>
+        </p:nvSpPr>
+        <p:spPr>
+          <a:xfrm>
+            <a:off x="6519672" y="2258568"/>
+            <a:ext cx="1828800" cy="292608"/>
+          </a:xfrm>
+          <a:prstGeom prst="rect">
+            <a:avLst/>
+          </a:prstGeom>
+          <a:noFill/>
+          <a:ln/>
+        </p:spPr>
+        <p:txBody>
+          <a:bodyPr wrap="square" lIns="0" tIns="0" rIns="0" bIns="0" rtlCol="0" anchor="ctr"/>
+          <a:lstStyle/>
+          <a:p>
+            <a:pPr algn="ctr" indent="0" marL="0">
+              <a:buNone/>
+            </a:pPr>
+            <a:r>
+              <a:rPr lang="en-US" sz="1300" b="1" dirty="0">
+                <a:solidFill>
+                  <a:srgbClr val="9D174D"/>
+                </a:solidFill>
+                <a:latin typeface="Trebuchet MS" pitchFamily="34" charset="0"/>
+                <a:ea typeface="Trebuchet MS" pitchFamily="34" charset="-122"/>
+                <a:cs typeface="Trebuchet MS" pitchFamily="34" charset="-120"/>
+              </a:rPr>
+              <a:t>ed</a:t>
+            </a:r>
+            <a:endParaRPr lang="en-US" sz="1300" dirty="0"/>
+          </a:p>
+        </p:txBody>
+      </p:sp>
+      <p:sp>
+        <p:nvSpPr>
+          <p:cNvPr id="24" name="Text 22"/>
+          <p:cNvSpPr/>
+          <p:nvPr/>
+        </p:nvSpPr>
+        <p:spPr>
+          <a:xfrm>
+            <a:off x="6519672" y="2569464"/>
+            <a:ext cx="1828800" cy="201168"/>
+          </a:xfrm>
+          <a:prstGeom prst="rect">
+            <a:avLst/>
+          </a:prstGeom>
+          <a:noFill/>
+          <a:ln/>
+        </p:spPr>
+        <p:txBody>
+          <a:bodyPr wrap="square" lIns="0" tIns="0" rIns="0" bIns="0" rtlCol="0" anchor="t"/>
+          <a:lstStyle/>
+          <a:p>
+            <a:pPr algn="ctr" indent="0" marL="0">
+              <a:buNone/>
+            </a:pPr>
+            <a:r>
+              <a:rPr lang="en-US" sz="850" dirty="0">
+                <a:solidFill>
+                  <a:srgbClr val="475569"/>
+                </a:solidFill>
+                <a:latin typeface="Calibri" pitchFamily="34" charset="0"/>
+                <a:ea typeface="Calibri" pitchFamily="34" charset="-122"/>
+                <a:cs typeface="Calibri" pitchFamily="34" charset="-120"/>
+              </a:rPr>
+              <a:t>past tense</a:t>
+            </a:r>
+            <a:endParaRPr lang="en-US" sz="850" dirty="0"/>
+          </a:p>
+        </p:txBody>
+      </p:sp>
+      <p:sp>
+        <p:nvSpPr>
+          <p:cNvPr id="25" name="Shape 23"/>
           <p:cNvSpPr/>
           <p:nvPr/>
         </p:nvSpPr>
@@ -19866,7 +20222,7 @@
       </p:sp>
       <p:sp>
         <p:nvSpPr>
-          <p:cNvPr id="23" name="Text 21"/>
+          <p:cNvPr id="26" name="Text 24"/>
           <p:cNvSpPr/>
           <p:nvPr/>
         </p:nvSpPr>
@@ -19905,7 +20261,7 @@
       </p:sp>
       <p:sp>
         <p:nvSpPr>
-          <p:cNvPr id="24" name="Shape 22"/>
+          <p:cNvPr id="27" name="Shape 25"/>
           <p:cNvSpPr/>
           <p:nvPr/>
         </p:nvSpPr>
@@ -19932,7 +20288,7 @@
       </p:sp>
       <p:sp>
         <p:nvSpPr>
-          <p:cNvPr id="25" name="Shape 23"/>
+          <p:cNvPr id="28" name="Shape 26"/>
           <p:cNvSpPr/>
           <p:nvPr/>
         </p:nvSpPr>
@@ -19959,7 +20315,7 @@
       </p:sp>
       <p:sp>
         <p:nvSpPr>
-          <p:cNvPr id="26" name="Text 24"/>
+          <p:cNvPr id="29" name="Text 27"/>
           <p:cNvSpPr/>
           <p:nvPr/>
         </p:nvSpPr>
@@ -19990,7 +20346,7 @@
                 <a:ea typeface="Trebuchet MS" pitchFamily="34" charset="-122"/>
                 <a:cs typeface="Trebuchet MS" pitchFamily="34" charset="-120"/>
               </a:rPr>
-              <a:t>soft</a:t>
+              <a:t>sof</a:t>
             </a:r>
             <a:endParaRPr lang="en-US" sz="1400" dirty="0"/>
           </a:p>
@@ -19998,7 +20354,7 @@
       </p:sp>
       <p:sp>
         <p:nvSpPr>
-          <p:cNvPr id="27" name="Text 25"/>
+          <p:cNvPr id="30" name="Text 28"/>
           <p:cNvSpPr/>
           <p:nvPr/>
         </p:nvSpPr>
@@ -20037,7 +20393,7 @@
       </p:sp>
       <p:sp>
         <p:nvSpPr>
-          <p:cNvPr id="28" name="Shape 26"/>
+          <p:cNvPr id="31" name="Shape 29"/>
           <p:cNvSpPr/>
           <p:nvPr/>
         </p:nvSpPr>
@@ -20064,7 +20420,7 @@
       </p:sp>
       <p:sp>
         <p:nvSpPr>
-          <p:cNvPr id="29" name="Text 27"/>
+          <p:cNvPr id="32" name="Text 30"/>
           <p:cNvSpPr/>
           <p:nvPr/>
         </p:nvSpPr>
@@ -20095,7 +20451,7 @@
                 <a:ea typeface="Trebuchet MS" pitchFamily="34" charset="-122"/>
                 <a:cs typeface="Trebuchet MS" pitchFamily="34" charset="-120"/>
               </a:rPr>
-              <a:t>est</a:t>
+              <a:t>tened</a:t>
             </a:r>
             <a:endParaRPr lang="en-US" sz="1400" dirty="0"/>
           </a:p>
@@ -20103,7 +20459,7 @@
       </p:sp>
       <p:sp>
         <p:nvSpPr>
-          <p:cNvPr id="30" name="Shape 28"/>
+          <p:cNvPr id="33" name="Shape 31"/>
           <p:cNvSpPr/>
           <p:nvPr/>
         </p:nvSpPr>
@@ -20130,7 +20486,7 @@
       </p:sp>
       <p:sp>
         <p:nvSpPr>
-          <p:cNvPr id="31" name="Text 29"/>
+          <p:cNvPr id="34" name="Text 32"/>
           <p:cNvSpPr/>
           <p:nvPr/>
         </p:nvSpPr>
@@ -20169,7 +20525,7 @@
       </p:sp>
       <p:sp>
         <p:nvSpPr>
-          <p:cNvPr id="32" name="Shape 30"/>
+          <p:cNvPr id="35" name="Shape 33"/>
           <p:cNvSpPr/>
           <p:nvPr/>
         </p:nvSpPr>
@@ -20196,7 +20552,7 @@
       </p:sp>
       <p:sp>
         <p:nvSpPr>
-          <p:cNvPr id="33" name="Text 31"/>
+          <p:cNvPr id="36" name="Text 34"/>
           <p:cNvSpPr/>
           <p:nvPr/>
         </p:nvSpPr>
@@ -20519,7 +20875,7 @@
                 <a:ea typeface="Calibri" pitchFamily="34" charset="-122"/>
                 <a:cs typeface="Calibri" pitchFamily="34" charset="-120"/>
               </a:rPr>
-              <a:t>Word Labs  •  wordlabs.app  •  Root: 'soft' = not hard, gentle, quiet</a:t>
+              <a:t>Word Labs  •  wordlabs.app  •  Root: 'soft' = not hard or rough</a:t>
             </a:r>
             <a:endParaRPr lang="en-US" sz="800" dirty="0"/>
           </a:p>
@@ -20658,7 +21014,7 @@
                 <a:ea typeface="Trebuchet MS" pitchFamily="34" charset="-122"/>
                 <a:cs typeface="Trebuchet MS" pitchFamily="34" charset="-120"/>
               </a:rPr>
-              <a:t>softest</a:t>
+              <a:t>softened</a:t>
             </a:r>
             <a:endParaRPr lang="en-US" sz="2800" dirty="0"/>
           </a:p>
@@ -20738,7 +21094,7 @@
         </p:nvSpPr>
         <p:spPr>
           <a:xfrm>
-            <a:off x="2938272" y="2258568"/>
+            <a:off x="2221992" y="2258568"/>
             <a:ext cx="1828800" cy="292608"/>
           </a:xfrm>
           <a:prstGeom prst="rect">
@@ -20772,7 +21128,7 @@
         </p:nvSpPr>
         <p:spPr>
           <a:xfrm>
-            <a:off x="2938272" y="2258568"/>
+            <a:off x="2221992" y="2258568"/>
             <a:ext cx="1828800" cy="292608"/>
           </a:xfrm>
           <a:prstGeom prst="rect">
@@ -20811,7 +21167,7 @@
         </p:nvSpPr>
         <p:spPr>
           <a:xfrm>
-            <a:off x="2938272" y="2569464"/>
+            <a:off x="2221992" y="2569464"/>
             <a:ext cx="1828800" cy="201168"/>
           </a:xfrm>
           <a:prstGeom prst="rect">
@@ -20836,7 +21192,7 @@
                 <a:ea typeface="Calibri" pitchFamily="34" charset="-122"/>
                 <a:cs typeface="Calibri" pitchFamily="34" charset="-120"/>
               </a:rPr>
-              <a:t>gentle, not hard</a:t>
+              <a:t>not hard or rough</a:t>
             </a:r>
             <a:endParaRPr lang="en-US" sz="850" dirty="0"/>
           </a:p>
@@ -20850,7 +21206,7 @@
         </p:nvSpPr>
         <p:spPr>
           <a:xfrm>
-            <a:off x="5803392" y="2258568"/>
+            <a:off x="4370832" y="2258568"/>
             <a:ext cx="1828800" cy="292608"/>
           </a:xfrm>
           <a:prstGeom prst="rect">
@@ -20884,7 +21240,7 @@
         </p:nvSpPr>
         <p:spPr>
           <a:xfrm>
-            <a:off x="5803392" y="2258568"/>
+            <a:off x="4370832" y="2258568"/>
             <a:ext cx="1828800" cy="292608"/>
           </a:xfrm>
           <a:prstGeom prst="rect">
@@ -20909,7 +21265,7 @@
                 <a:ea typeface="Trebuchet MS" pitchFamily="34" charset="-122"/>
                 <a:cs typeface="Trebuchet MS" pitchFamily="34" charset="-120"/>
               </a:rPr>
-              <a:t>est</a:t>
+              <a:t>en</a:t>
             </a:r>
             <a:endParaRPr lang="en-US" sz="1300" dirty="0"/>
           </a:p>
@@ -20923,7 +21279,7 @@
         </p:nvSpPr>
         <p:spPr>
           <a:xfrm>
-            <a:off x="5803392" y="2569464"/>
+            <a:off x="4370832" y="2569464"/>
             <a:ext cx="1828800" cy="201168"/>
           </a:xfrm>
           <a:prstGeom prst="rect">
@@ -20948,7 +21304,7 @@
                 <a:ea typeface="Calibri" pitchFamily="34" charset="-122"/>
                 <a:cs typeface="Calibri" pitchFamily="34" charset="-120"/>
               </a:rPr>
-              <a:t>the most</a:t>
+              <a:t>made of; to make</a:t>
             </a:r>
             <a:endParaRPr lang="en-US" sz="850" dirty="0"/>
           </a:p>
@@ -20957,6 +21313,118 @@
       <p:sp>
         <p:nvSpPr>
           <p:cNvPr id="22" name="Shape 20"/>
+          <p:cNvSpPr/>
+          <p:nvPr/>
+        </p:nvSpPr>
+        <p:spPr>
+          <a:xfrm>
+            <a:off x="6519672" y="2258568"/>
+            <a:ext cx="1828800" cy="292608"/>
+          </a:xfrm>
+          <a:prstGeom prst="rect">
+            <a:avLst>
+              <a:gd name="adj" fmla="val 25000"/>
+            </a:avLst>
+          </a:prstGeom>
+          <a:solidFill>
+            <a:srgbClr val="FCE7F3"/>
+          </a:solidFill>
+          <a:ln w="19050">
+            <a:solidFill>
+              <a:srgbClr val="DB2777"/>
+            </a:solidFill>
+            <a:prstDash val="solid"/>
+          </a:ln>
+          <a:effectLst>
+            <a:outerShdw sx="100000" sy="100000" kx="0" ky="0" algn="bl" rotWithShape="0" blurRad="101600" dist="38100" dir="8100000">
+              <a:srgbClr val="000000">
+                <a:alpha val="12000"/>
+              </a:srgbClr>
+            </a:outerShdw>
+          </a:effectLst>
+        </p:spPr>
+      </p:sp>
+      <p:sp>
+        <p:nvSpPr>
+          <p:cNvPr id="23" name="Text 21"/>
+          <p:cNvSpPr/>
+          <p:nvPr/>
+        </p:nvSpPr>
+        <p:spPr>
+          <a:xfrm>
+            <a:off x="6519672" y="2258568"/>
+            <a:ext cx="1828800" cy="292608"/>
+          </a:xfrm>
+          <a:prstGeom prst="rect">
+            <a:avLst/>
+          </a:prstGeom>
+          <a:noFill/>
+          <a:ln/>
+        </p:spPr>
+        <p:txBody>
+          <a:bodyPr wrap="square" lIns="0" tIns="0" rIns="0" bIns="0" rtlCol="0" anchor="ctr"/>
+          <a:lstStyle/>
+          <a:p>
+            <a:pPr algn="ctr" indent="0" marL="0">
+              <a:buNone/>
+            </a:pPr>
+            <a:r>
+              <a:rPr lang="en-US" sz="1300" b="1" dirty="0">
+                <a:solidFill>
+                  <a:srgbClr val="9D174D"/>
+                </a:solidFill>
+                <a:latin typeface="Trebuchet MS" pitchFamily="34" charset="0"/>
+                <a:ea typeface="Trebuchet MS" pitchFamily="34" charset="-122"/>
+                <a:cs typeface="Trebuchet MS" pitchFamily="34" charset="-120"/>
+              </a:rPr>
+              <a:t>ed</a:t>
+            </a:r>
+            <a:endParaRPr lang="en-US" sz="1300" dirty="0"/>
+          </a:p>
+        </p:txBody>
+      </p:sp>
+      <p:sp>
+        <p:nvSpPr>
+          <p:cNvPr id="24" name="Text 22"/>
+          <p:cNvSpPr/>
+          <p:nvPr/>
+        </p:nvSpPr>
+        <p:spPr>
+          <a:xfrm>
+            <a:off x="6519672" y="2569464"/>
+            <a:ext cx="1828800" cy="201168"/>
+          </a:xfrm>
+          <a:prstGeom prst="rect">
+            <a:avLst/>
+          </a:prstGeom>
+          <a:noFill/>
+          <a:ln/>
+        </p:spPr>
+        <p:txBody>
+          <a:bodyPr wrap="square" lIns="0" tIns="0" rIns="0" bIns="0" rtlCol="0" anchor="t"/>
+          <a:lstStyle/>
+          <a:p>
+            <a:pPr algn="ctr" indent="0" marL="0">
+              <a:buNone/>
+            </a:pPr>
+            <a:r>
+              <a:rPr lang="en-US" sz="850" dirty="0">
+                <a:solidFill>
+                  <a:srgbClr val="475569"/>
+                </a:solidFill>
+                <a:latin typeface="Calibri" pitchFamily="34" charset="0"/>
+                <a:ea typeface="Calibri" pitchFamily="34" charset="-122"/>
+                <a:cs typeface="Calibri" pitchFamily="34" charset="-120"/>
+              </a:rPr>
+              <a:t>past tense</a:t>
+            </a:r>
+            <a:endParaRPr lang="en-US" sz="850" dirty="0"/>
+          </a:p>
+        </p:txBody>
+      </p:sp>
+      <p:sp>
+        <p:nvSpPr>
+          <p:cNvPr id="25" name="Shape 23"/>
           <p:cNvSpPr/>
           <p:nvPr/>
         </p:nvSpPr>
@@ -20983,7 +21451,7 @@
       </p:sp>
       <p:sp>
         <p:nvSpPr>
-          <p:cNvPr id="23" name="Text 21"/>
+          <p:cNvPr id="26" name="Text 24"/>
           <p:cNvSpPr/>
           <p:nvPr/>
         </p:nvSpPr>
@@ -21022,7 +21490,7 @@
       </p:sp>
       <p:sp>
         <p:nvSpPr>
-          <p:cNvPr id="24" name="Shape 22"/>
+          <p:cNvPr id="27" name="Shape 25"/>
           <p:cNvSpPr/>
           <p:nvPr/>
         </p:nvSpPr>
@@ -21049,7 +21517,7 @@
       </p:sp>
       <p:sp>
         <p:nvSpPr>
-          <p:cNvPr id="25" name="Shape 23"/>
+          <p:cNvPr id="28" name="Shape 26"/>
           <p:cNvSpPr/>
           <p:nvPr/>
         </p:nvSpPr>
@@ -21076,7 +21544,7 @@
       </p:sp>
       <p:sp>
         <p:nvSpPr>
-          <p:cNvPr id="26" name="Text 24"/>
+          <p:cNvPr id="29" name="Text 27"/>
           <p:cNvSpPr/>
           <p:nvPr/>
         </p:nvSpPr>
@@ -21107,7 +21575,7 @@
                 <a:ea typeface="Trebuchet MS" pitchFamily="34" charset="-122"/>
                 <a:cs typeface="Trebuchet MS" pitchFamily="34" charset="-120"/>
               </a:rPr>
-              <a:t>soft</a:t>
+              <a:t>sof</a:t>
             </a:r>
             <a:endParaRPr lang="en-US" sz="1400" dirty="0"/>
           </a:p>
@@ -21115,7 +21583,7 @@
       </p:sp>
       <p:sp>
         <p:nvSpPr>
-          <p:cNvPr id="27" name="Text 25"/>
+          <p:cNvPr id="30" name="Text 28"/>
           <p:cNvSpPr/>
           <p:nvPr/>
         </p:nvSpPr>
@@ -21154,7 +21622,7 @@
       </p:sp>
       <p:sp>
         <p:nvSpPr>
-          <p:cNvPr id="28" name="Shape 26"/>
+          <p:cNvPr id="31" name="Shape 29"/>
           <p:cNvSpPr/>
           <p:nvPr/>
         </p:nvSpPr>
@@ -21181,7 +21649,7 @@
       </p:sp>
       <p:sp>
         <p:nvSpPr>
-          <p:cNvPr id="29" name="Text 27"/>
+          <p:cNvPr id="32" name="Text 30"/>
           <p:cNvSpPr/>
           <p:nvPr/>
         </p:nvSpPr>
@@ -21212,7 +21680,7 @@
                 <a:ea typeface="Trebuchet MS" pitchFamily="34" charset="-122"/>
                 <a:cs typeface="Trebuchet MS" pitchFamily="34" charset="-120"/>
               </a:rPr>
-              <a:t>est</a:t>
+              <a:t>tened</a:t>
             </a:r>
             <a:endParaRPr lang="en-US" sz="1400" dirty="0"/>
           </a:p>
@@ -21220,7 +21688,7 @@
       </p:sp>
       <p:sp>
         <p:nvSpPr>
-          <p:cNvPr id="30" name="Shape 28"/>
+          <p:cNvPr id="33" name="Shape 31"/>
           <p:cNvSpPr/>
           <p:nvPr/>
         </p:nvSpPr>
@@ -21247,7 +21715,7 @@
       </p:sp>
       <p:sp>
         <p:nvSpPr>
-          <p:cNvPr id="31" name="Text 29"/>
+          <p:cNvPr id="34" name="Text 32"/>
           <p:cNvSpPr/>
           <p:nvPr/>
         </p:nvSpPr>
@@ -21286,7 +21754,7 @@
       </p:sp>
       <p:sp>
         <p:nvSpPr>
-          <p:cNvPr id="32" name="Shape 30"/>
+          <p:cNvPr id="35" name="Shape 33"/>
           <p:cNvSpPr/>
           <p:nvPr/>
         </p:nvSpPr>
@@ -21313,13 +21781,13 @@
       </p:sp>
       <p:sp>
         <p:nvSpPr>
-          <p:cNvPr id="33" name="Shape 31"/>
-          <p:cNvSpPr/>
-          <p:nvPr/>
-        </p:nvSpPr>
-        <p:spPr>
-          <a:xfrm>
-            <a:off x="2254649" y="4169664"/>
+          <p:cNvPr id="36" name="Shape 34"/>
+          <p:cNvSpPr/>
+          <p:nvPr/>
+        </p:nvSpPr>
+        <p:spPr>
+          <a:xfrm>
+            <a:off x="2023872" y="4169664"/>
             <a:ext cx="685800" cy="475488"/>
           </a:xfrm>
           <a:prstGeom prst="rect">
@@ -21340,13 +21808,13 @@
       </p:sp>
       <p:sp>
         <p:nvSpPr>
-          <p:cNvPr id="34" name="Text 32"/>
-          <p:cNvSpPr/>
-          <p:nvPr/>
-        </p:nvSpPr>
-        <p:spPr>
-          <a:xfrm>
-            <a:off x="2254649" y="4169664"/>
+          <p:cNvPr id="37" name="Text 35"/>
+          <p:cNvSpPr/>
+          <p:nvPr/>
+        </p:nvSpPr>
+        <p:spPr>
+          <a:xfrm>
+            <a:off x="2023872" y="4169664"/>
             <a:ext cx="685800" cy="475488"/>
           </a:xfrm>
           <a:prstGeom prst="rect">
@@ -21379,13 +21847,13 @@
       </p:sp>
       <p:sp>
         <p:nvSpPr>
-          <p:cNvPr id="35" name="Shape 33"/>
-          <p:cNvSpPr/>
-          <p:nvPr/>
-        </p:nvSpPr>
-        <p:spPr>
-          <a:xfrm>
-            <a:off x="3293146" y="4169664"/>
+          <p:cNvPr id="38" name="Shape 36"/>
+          <p:cNvSpPr/>
+          <p:nvPr/>
+        </p:nvSpPr>
+        <p:spPr>
+          <a:xfrm>
+            <a:off x="2831592" y="4169664"/>
             <a:ext cx="685800" cy="475488"/>
           </a:xfrm>
           <a:prstGeom prst="rect">
@@ -21406,13 +21874,13 @@
       </p:sp>
       <p:sp>
         <p:nvSpPr>
-          <p:cNvPr id="36" name="Text 34"/>
-          <p:cNvSpPr/>
-          <p:nvPr/>
-        </p:nvSpPr>
-        <p:spPr>
-          <a:xfrm>
-            <a:off x="3293146" y="4169664"/>
+          <p:cNvPr id="39" name="Text 37"/>
+          <p:cNvSpPr/>
+          <p:nvPr/>
+        </p:nvSpPr>
+        <p:spPr>
+          <a:xfrm>
+            <a:off x="2831592" y="4169664"/>
             <a:ext cx="685800" cy="475488"/>
           </a:xfrm>
           <a:prstGeom prst="rect">
@@ -21445,13 +21913,13 @@
       </p:sp>
       <p:sp>
         <p:nvSpPr>
-          <p:cNvPr id="37" name="Shape 35"/>
-          <p:cNvSpPr/>
-          <p:nvPr/>
-        </p:nvSpPr>
-        <p:spPr>
-          <a:xfrm>
-            <a:off x="4331643" y="4169664"/>
+          <p:cNvPr id="40" name="Shape 38"/>
+          <p:cNvSpPr/>
+          <p:nvPr/>
+        </p:nvSpPr>
+        <p:spPr>
+          <a:xfrm>
+            <a:off x="3639312" y="4169664"/>
             <a:ext cx="685800" cy="475488"/>
           </a:xfrm>
           <a:prstGeom prst="rect">
@@ -21472,13 +21940,13 @@
       </p:sp>
       <p:sp>
         <p:nvSpPr>
-          <p:cNvPr id="38" name="Text 36"/>
-          <p:cNvSpPr/>
-          <p:nvPr/>
-        </p:nvSpPr>
-        <p:spPr>
-          <a:xfrm>
-            <a:off x="4331643" y="4169664"/>
+          <p:cNvPr id="41" name="Text 39"/>
+          <p:cNvSpPr/>
+          <p:nvPr/>
+        </p:nvSpPr>
+        <p:spPr>
+          <a:xfrm>
+            <a:off x="3639312" y="4169664"/>
             <a:ext cx="685800" cy="475488"/>
           </a:xfrm>
           <a:prstGeom prst="rect">
@@ -21503,7 +21971,7 @@
                 <a:ea typeface="Trebuchet MS" pitchFamily="34" charset="-122"/>
                 <a:cs typeface="Trebuchet MS" pitchFamily="34" charset="-120"/>
               </a:rPr>
-              <a:t>ft</a:t>
+              <a:t>f</a:t>
             </a:r>
             <a:endParaRPr lang="en-US" sz="900" dirty="0"/>
           </a:p>
@@ -21511,13 +21979,13 @@
       </p:sp>
       <p:sp>
         <p:nvSpPr>
-          <p:cNvPr id="39" name="Shape 37"/>
-          <p:cNvSpPr/>
-          <p:nvPr/>
-        </p:nvSpPr>
-        <p:spPr>
-          <a:xfrm>
-            <a:off x="5370141" y="4169664"/>
+          <p:cNvPr id="42" name="Shape 40"/>
+          <p:cNvSpPr/>
+          <p:nvPr/>
+        </p:nvSpPr>
+        <p:spPr>
+          <a:xfrm>
+            <a:off x="4447032" y="4169664"/>
             <a:ext cx="685800" cy="475488"/>
           </a:xfrm>
           <a:prstGeom prst="rect">
@@ -21538,13 +22006,13 @@
       </p:sp>
       <p:sp>
         <p:nvSpPr>
-          <p:cNvPr id="40" name="Text 38"/>
-          <p:cNvSpPr/>
-          <p:nvPr/>
-        </p:nvSpPr>
-        <p:spPr>
-          <a:xfrm>
-            <a:off x="5370141" y="4169664"/>
+          <p:cNvPr id="43" name="Text 41"/>
+          <p:cNvSpPr/>
+          <p:nvPr/>
+        </p:nvSpPr>
+        <p:spPr>
+          <a:xfrm>
+            <a:off x="4447032" y="4169664"/>
             <a:ext cx="685800" cy="475488"/>
           </a:xfrm>
           <a:prstGeom prst="rect">
@@ -21569,7 +22037,7 @@
                 <a:ea typeface="Trebuchet MS" pitchFamily="34" charset="-122"/>
                 <a:cs typeface="Trebuchet MS" pitchFamily="34" charset="-120"/>
               </a:rPr>
-              <a:t>e</a:t>
+              <a:t>t</a:t>
             </a:r>
             <a:endParaRPr lang="en-US" sz="900" dirty="0"/>
           </a:p>
@@ -21577,13 +22045,13 @@
       </p:sp>
       <p:sp>
         <p:nvSpPr>
-          <p:cNvPr id="41" name="Shape 39"/>
-          <p:cNvSpPr/>
-          <p:nvPr/>
-        </p:nvSpPr>
-        <p:spPr>
-          <a:xfrm>
-            <a:off x="6408638" y="4169664"/>
+          <p:cNvPr id="44" name="Shape 42"/>
+          <p:cNvSpPr/>
+          <p:nvPr/>
+        </p:nvSpPr>
+        <p:spPr>
+          <a:xfrm>
+            <a:off x="5254752" y="4169664"/>
             <a:ext cx="685800" cy="475488"/>
           </a:xfrm>
           <a:prstGeom prst="rect">
@@ -21604,13 +22072,13 @@
       </p:sp>
       <p:sp>
         <p:nvSpPr>
-          <p:cNvPr id="42" name="Text 40"/>
-          <p:cNvSpPr/>
-          <p:nvPr/>
-        </p:nvSpPr>
-        <p:spPr>
-          <a:xfrm>
-            <a:off x="6408638" y="4169664"/>
+          <p:cNvPr id="45" name="Text 43"/>
+          <p:cNvSpPr/>
+          <p:nvPr/>
+        </p:nvSpPr>
+        <p:spPr>
+          <a:xfrm>
+            <a:off x="5254752" y="4169664"/>
             <a:ext cx="685800" cy="475488"/>
           </a:xfrm>
           <a:prstGeom prst="rect">
@@ -21635,7 +22103,7 @@
                 <a:ea typeface="Trebuchet MS" pitchFamily="34" charset="-122"/>
                 <a:cs typeface="Trebuchet MS" pitchFamily="34" charset="-120"/>
               </a:rPr>
-              <a:t>s</a:t>
+              <a:t>e</a:t>
             </a:r>
             <a:endParaRPr lang="en-US" sz="900" dirty="0"/>
           </a:p>
@@ -21643,13 +22111,13 @@
       </p:sp>
       <p:sp>
         <p:nvSpPr>
-          <p:cNvPr id="43" name="Shape 41"/>
-          <p:cNvSpPr/>
-          <p:nvPr/>
-        </p:nvSpPr>
-        <p:spPr>
-          <a:xfrm>
-            <a:off x="7447135" y="4169664"/>
+          <p:cNvPr id="46" name="Shape 44"/>
+          <p:cNvSpPr/>
+          <p:nvPr/>
+        </p:nvSpPr>
+        <p:spPr>
+          <a:xfrm>
+            <a:off x="6062472" y="4169664"/>
             <a:ext cx="685800" cy="475488"/>
           </a:xfrm>
           <a:prstGeom prst="rect">
@@ -21670,13 +22138,13 @@
       </p:sp>
       <p:sp>
         <p:nvSpPr>
-          <p:cNvPr id="44" name="Text 42"/>
-          <p:cNvSpPr/>
-          <p:nvPr/>
-        </p:nvSpPr>
-        <p:spPr>
-          <a:xfrm>
-            <a:off x="7447135" y="4169664"/>
+          <p:cNvPr id="47" name="Text 45"/>
+          <p:cNvSpPr/>
+          <p:nvPr/>
+        </p:nvSpPr>
+        <p:spPr>
+          <a:xfrm>
+            <a:off x="6062472" y="4169664"/>
             <a:ext cx="685800" cy="475488"/>
           </a:xfrm>
           <a:prstGeom prst="rect">
@@ -21701,7 +22169,139 @@
                 <a:ea typeface="Trebuchet MS" pitchFamily="34" charset="-122"/>
                 <a:cs typeface="Trebuchet MS" pitchFamily="34" charset="-120"/>
               </a:rPr>
-              <a:t>t</a:t>
+              <a:t>n</a:t>
+            </a:r>
+            <a:endParaRPr lang="en-US" sz="900" dirty="0"/>
+          </a:p>
+        </p:txBody>
+      </p:sp>
+      <p:sp>
+        <p:nvSpPr>
+          <p:cNvPr id="48" name="Shape 46"/>
+          <p:cNvSpPr/>
+          <p:nvPr/>
+        </p:nvSpPr>
+        <p:spPr>
+          <a:xfrm>
+            <a:off x="6870192" y="4169664"/>
+            <a:ext cx="685800" cy="475488"/>
+          </a:xfrm>
+          <a:prstGeom prst="rect">
+            <a:avLst>
+              <a:gd name="adj" fmla="val 7692"/>
+            </a:avLst>
+          </a:prstGeom>
+          <a:solidFill>
+            <a:srgbClr val="FFFFFF"/>
+          </a:solidFill>
+          <a:ln w="12700">
+            <a:solidFill>
+              <a:srgbClr val="DB2777"/>
+            </a:solidFill>
+            <a:prstDash val="solid"/>
+          </a:ln>
+        </p:spPr>
+      </p:sp>
+      <p:sp>
+        <p:nvSpPr>
+          <p:cNvPr id="49" name="Text 47"/>
+          <p:cNvSpPr/>
+          <p:nvPr/>
+        </p:nvSpPr>
+        <p:spPr>
+          <a:xfrm>
+            <a:off x="6870192" y="4169664"/>
+            <a:ext cx="685800" cy="475488"/>
+          </a:xfrm>
+          <a:prstGeom prst="rect">
+            <a:avLst/>
+          </a:prstGeom>
+          <a:noFill/>
+          <a:ln/>
+        </p:spPr>
+        <p:txBody>
+          <a:bodyPr wrap="square" lIns="0" tIns="0" rIns="0" bIns="0" rtlCol="0" anchor="ctr"/>
+          <a:lstStyle/>
+          <a:p>
+            <a:pPr algn="ctr" indent="0" marL="0">
+              <a:buNone/>
+            </a:pPr>
+            <a:r>
+              <a:rPr lang="en-US" sz="900" b="1" dirty="0">
+                <a:solidFill>
+                  <a:srgbClr val="9D174D"/>
+                </a:solidFill>
+                <a:latin typeface="Trebuchet MS" pitchFamily="34" charset="0"/>
+                <a:ea typeface="Trebuchet MS" pitchFamily="34" charset="-122"/>
+                <a:cs typeface="Trebuchet MS" pitchFamily="34" charset="-120"/>
+              </a:rPr>
+              <a:t>e</a:t>
+            </a:r>
+            <a:endParaRPr lang="en-US" sz="900" dirty="0"/>
+          </a:p>
+        </p:txBody>
+      </p:sp>
+      <p:sp>
+        <p:nvSpPr>
+          <p:cNvPr id="50" name="Shape 48"/>
+          <p:cNvSpPr/>
+          <p:nvPr/>
+        </p:nvSpPr>
+        <p:spPr>
+          <a:xfrm>
+            <a:off x="7677912" y="4169664"/>
+            <a:ext cx="685800" cy="475488"/>
+          </a:xfrm>
+          <a:prstGeom prst="rect">
+            <a:avLst>
+              <a:gd name="adj" fmla="val 7692"/>
+            </a:avLst>
+          </a:prstGeom>
+          <a:solidFill>
+            <a:srgbClr val="FFFFFF"/>
+          </a:solidFill>
+          <a:ln w="12700">
+            <a:solidFill>
+              <a:srgbClr val="DB2777"/>
+            </a:solidFill>
+            <a:prstDash val="solid"/>
+          </a:ln>
+        </p:spPr>
+      </p:sp>
+      <p:sp>
+        <p:nvSpPr>
+          <p:cNvPr id="51" name="Text 49"/>
+          <p:cNvSpPr/>
+          <p:nvPr/>
+        </p:nvSpPr>
+        <p:spPr>
+          <a:xfrm>
+            <a:off x="7677912" y="4169664"/>
+            <a:ext cx="685800" cy="475488"/>
+          </a:xfrm>
+          <a:prstGeom prst="rect">
+            <a:avLst/>
+          </a:prstGeom>
+          <a:noFill/>
+          <a:ln/>
+        </p:spPr>
+        <p:txBody>
+          <a:bodyPr wrap="square" lIns="0" tIns="0" rIns="0" bIns="0" rtlCol="0" anchor="ctr"/>
+          <a:lstStyle/>
+          <a:p>
+            <a:pPr algn="ctr" indent="0" marL="0">
+              <a:buNone/>
+            </a:pPr>
+            <a:r>
+              <a:rPr lang="en-US" sz="900" b="1" dirty="0">
+                <a:solidFill>
+                  <a:srgbClr val="9D174D"/>
+                </a:solidFill>
+                <a:latin typeface="Trebuchet MS" pitchFamily="34" charset="0"/>
+                <a:ea typeface="Trebuchet MS" pitchFamily="34" charset="-122"/>
+                <a:cs typeface="Trebuchet MS" pitchFamily="34" charset="-120"/>
+              </a:rPr>
+              <a:t>d</a:t>
             </a:r>
             <a:endParaRPr lang="en-US" sz="900" dirty="0"/>
           </a:p>
@@ -21993,7 +22593,7 @@
                 <a:ea typeface="Calibri" pitchFamily="34" charset="-122"/>
                 <a:cs typeface="Calibri" pitchFamily="34" charset="-120"/>
               </a:rPr>
-              <a:t>Word Labs  •  wordlabs.app  •  Root: 'soft' = not hard, gentle, quiet</a:t>
+              <a:t>Word Labs  •  wordlabs.app  •  Root: 'soft' = not hard or rough</a:t>
             </a:r>
             <a:endParaRPr lang="en-US" sz="800" dirty="0"/>
           </a:p>
@@ -22132,7 +22732,7 @@
                 <a:ea typeface="Trebuchet MS" pitchFamily="34" charset="-122"/>
                 <a:cs typeface="Trebuchet MS" pitchFamily="34" charset="-120"/>
               </a:rPr>
-              <a:t>soften</a:t>
+              <a:t>softness</a:t>
             </a:r>
             <a:endParaRPr lang="en-US" sz="2800" dirty="0"/>
           </a:p>
@@ -22820,7 +23420,7 @@
                 <a:ea typeface="Calibri" pitchFamily="34" charset="-122"/>
                 <a:cs typeface="Calibri" pitchFamily="34" charset="-120"/>
               </a:rPr>
-              <a:t>Word Labs  •  wordlabs.app  •  Root: 'soft' = not hard, gentle, quiet</a:t>
+              <a:t>Word Labs  •  wordlabs.app  •  Root: 'soft' = not hard or rough</a:t>
             </a:r>
             <a:endParaRPr lang="en-US" sz="800" dirty="0"/>
           </a:p>
@@ -22959,7 +23559,7 @@
                 <a:ea typeface="Trebuchet MS" pitchFamily="34" charset="-122"/>
                 <a:cs typeface="Trebuchet MS" pitchFamily="34" charset="-120"/>
               </a:rPr>
-              <a:t>soften</a:t>
+              <a:t>softness</a:t>
             </a:r>
             <a:endParaRPr lang="en-US" sz="2800" dirty="0"/>
           </a:p>
@@ -23137,7 +23737,7 @@
                 <a:ea typeface="Calibri" pitchFamily="34" charset="-122"/>
                 <a:cs typeface="Calibri" pitchFamily="34" charset="-120"/>
               </a:rPr>
-              <a:t>gentle, not hard</a:t>
+              <a:t>not hard or rough</a:t>
             </a:r>
             <a:endParaRPr lang="en-US" sz="850" dirty="0"/>
           </a:p>
@@ -23210,7 +23810,7 @@
                 <a:ea typeface="Trebuchet MS" pitchFamily="34" charset="-122"/>
                 <a:cs typeface="Trebuchet MS" pitchFamily="34" charset="-120"/>
               </a:rPr>
-              <a:t>en</a:t>
+              <a:t>ness</a:t>
             </a:r>
             <a:endParaRPr lang="en-US" sz="1300" dirty="0"/>
           </a:p>
@@ -23249,7 +23849,7 @@
                 <a:ea typeface="Calibri" pitchFamily="34" charset="-122"/>
                 <a:cs typeface="Calibri" pitchFamily="34" charset="-120"/>
               </a:rPr>
-              <a:t>to make or become</a:t>
+              <a:t>state of</a:t>
             </a:r>
             <a:endParaRPr lang="en-US" sz="850" dirty="0"/>
           </a:p>
@@ -23805,7 +24405,7 @@
                 <a:ea typeface="Calibri" pitchFamily="34" charset="-122"/>
                 <a:cs typeface="Calibri" pitchFamily="34" charset="-120"/>
               </a:rPr>
-              <a:t>Word Labs  •  wordlabs.app  •  Root: 'soft' = not hard, gentle, quiet</a:t>
+              <a:t>Word Labs  •  wordlabs.app  •  Root: 'soft' = not hard or rough</a:t>
             </a:r>
             <a:endParaRPr lang="en-US" sz="800" dirty="0"/>
           </a:p>
@@ -23878,7 +24478,7 @@
                 <a:ea typeface="Trebuchet MS" pitchFamily="34" charset="-122"/>
                 <a:cs typeface="Trebuchet MS" pitchFamily="34" charset="-120"/>
               </a:rPr>
-              <a:t>We are learning that the root 'soft' means 'not hard, gentle, quiet'.</a:t>
+              <a:t>We are learning that the root 'soft' means 'not hard or rough'.</a:t>
             </a:r>
             <a:endParaRPr lang="en-US" sz="2000" dirty="0"/>
           </a:p>
@@ -24524,7 +25124,7 @@
                 <a:ea typeface="Calibri" pitchFamily="34" charset="-122"/>
                 <a:cs typeface="Calibri" pitchFamily="34" charset="-120"/>
               </a:rPr>
-              <a:t>Word Labs  •  wordlabs.app  •  Root: 'soft' = not hard, gentle, quiet</a:t>
+              <a:t>Word Labs  •  wordlabs.app  •  Root: 'soft' = not hard or rough</a:t>
             </a:r>
             <a:endParaRPr lang="en-US" sz="800" dirty="0"/>
           </a:p>
@@ -24663,7 +25263,7 @@
                 <a:ea typeface="Trebuchet MS" pitchFamily="34" charset="-122"/>
                 <a:cs typeface="Trebuchet MS" pitchFamily="34" charset="-120"/>
               </a:rPr>
-              <a:t>soften</a:t>
+              <a:t>softness</a:t>
             </a:r>
             <a:endParaRPr lang="en-US" sz="2800" dirty="0"/>
           </a:p>
@@ -24841,7 +25441,7 @@
                 <a:ea typeface="Calibri" pitchFamily="34" charset="-122"/>
                 <a:cs typeface="Calibri" pitchFamily="34" charset="-120"/>
               </a:rPr>
-              <a:t>gentle, not hard</a:t>
+              <a:t>not hard or rough</a:t>
             </a:r>
             <a:endParaRPr lang="en-US" sz="850" dirty="0"/>
           </a:p>
@@ -24914,7 +25514,7 @@
                 <a:ea typeface="Trebuchet MS" pitchFamily="34" charset="-122"/>
                 <a:cs typeface="Trebuchet MS" pitchFamily="34" charset="-120"/>
               </a:rPr>
-              <a:t>en</a:t>
+              <a:t>ness</a:t>
             </a:r>
             <a:endParaRPr lang="en-US" sz="1300" dirty="0"/>
           </a:p>
@@ -24953,7 +25553,7 @@
                 <a:ea typeface="Calibri" pitchFamily="34" charset="-122"/>
                 <a:cs typeface="Calibri" pitchFamily="34" charset="-120"/>
               </a:rPr>
-              <a:t>to make or become</a:t>
+              <a:t>state of</a:t>
             </a:r>
             <a:endParaRPr lang="en-US" sz="850" dirty="0"/>
           </a:p>
@@ -25217,7 +25817,7 @@
                 <a:ea typeface="Trebuchet MS" pitchFamily="34" charset="-122"/>
                 <a:cs typeface="Trebuchet MS" pitchFamily="34" charset="-120"/>
               </a:rPr>
-              <a:t>en</a:t>
+              <a:t>ness</a:t>
             </a:r>
             <a:endParaRPr lang="en-US" sz="1400" dirty="0"/>
           </a:p>
@@ -25641,7 +26241,7 @@
                 <a:ea typeface="Calibri" pitchFamily="34" charset="-122"/>
                 <a:cs typeface="Calibri" pitchFamily="34" charset="-120"/>
               </a:rPr>
-              <a:t>Word Labs  •  wordlabs.app  •  Root: 'soft' = not hard, gentle, quiet</a:t>
+              <a:t>Word Labs  •  wordlabs.app  •  Root: 'soft' = not hard or rough</a:t>
             </a:r>
             <a:endParaRPr lang="en-US" sz="800" dirty="0"/>
           </a:p>
@@ -25780,7 +26380,7 @@
                 <a:ea typeface="Trebuchet MS" pitchFamily="34" charset="-122"/>
                 <a:cs typeface="Trebuchet MS" pitchFamily="34" charset="-120"/>
               </a:rPr>
-              <a:t>soften</a:t>
+              <a:t>softness</a:t>
             </a:r>
             <a:endParaRPr lang="en-US" sz="2800" dirty="0"/>
           </a:p>
@@ -25958,7 +26558,7 @@
                 <a:ea typeface="Calibri" pitchFamily="34" charset="-122"/>
                 <a:cs typeface="Calibri" pitchFamily="34" charset="-120"/>
               </a:rPr>
-              <a:t>gentle, not hard</a:t>
+              <a:t>not hard or rough</a:t>
             </a:r>
             <a:endParaRPr lang="en-US" sz="850" dirty="0"/>
           </a:p>
@@ -26031,7 +26631,7 @@
                 <a:ea typeface="Trebuchet MS" pitchFamily="34" charset="-122"/>
                 <a:cs typeface="Trebuchet MS" pitchFamily="34" charset="-120"/>
               </a:rPr>
-              <a:t>en</a:t>
+              <a:t>ness</a:t>
             </a:r>
             <a:endParaRPr lang="en-US" sz="1300" dirty="0"/>
           </a:p>
@@ -26070,7 +26670,7 @@
                 <a:ea typeface="Calibri" pitchFamily="34" charset="-122"/>
                 <a:cs typeface="Calibri" pitchFamily="34" charset="-120"/>
               </a:rPr>
-              <a:t>to make or become</a:t>
+              <a:t>state of</a:t>
             </a:r>
             <a:endParaRPr lang="en-US" sz="850" dirty="0"/>
           </a:p>
@@ -26334,7 +26934,7 @@
                 <a:ea typeface="Trebuchet MS" pitchFamily="34" charset="-122"/>
                 <a:cs typeface="Trebuchet MS" pitchFamily="34" charset="-120"/>
               </a:rPr>
-              <a:t>en</a:t>
+              <a:t>ness</a:t>
             </a:r>
             <a:endParaRPr lang="en-US" sz="1400" dirty="0"/>
           </a:p>
@@ -26441,7 +27041,7 @@
         </p:nvSpPr>
         <p:spPr>
           <a:xfrm>
-            <a:off x="2427732" y="4169664"/>
+            <a:off x="2023872" y="4169664"/>
             <a:ext cx="685800" cy="475488"/>
           </a:xfrm>
           <a:prstGeom prst="rect">
@@ -26468,7 +27068,7 @@
         </p:nvSpPr>
         <p:spPr>
           <a:xfrm>
-            <a:off x="2427732" y="4169664"/>
+            <a:off x="2023872" y="4169664"/>
             <a:ext cx="685800" cy="475488"/>
           </a:xfrm>
           <a:prstGeom prst="rect">
@@ -26507,7 +27107,7 @@
         </p:nvSpPr>
         <p:spPr>
           <a:xfrm>
-            <a:off x="3639312" y="4169664"/>
+            <a:off x="2831592" y="4169664"/>
             <a:ext cx="685800" cy="475488"/>
           </a:xfrm>
           <a:prstGeom prst="rect">
@@ -26534,7 +27134,7 @@
         </p:nvSpPr>
         <p:spPr>
           <a:xfrm>
-            <a:off x="3639312" y="4169664"/>
+            <a:off x="2831592" y="4169664"/>
             <a:ext cx="685800" cy="475488"/>
           </a:xfrm>
           <a:prstGeom prst="rect">
@@ -26573,7 +27173,7 @@
         </p:nvSpPr>
         <p:spPr>
           <a:xfrm>
-            <a:off x="4850892" y="4169664"/>
+            <a:off x="3639312" y="4169664"/>
             <a:ext cx="685800" cy="475488"/>
           </a:xfrm>
           <a:prstGeom prst="rect">
@@ -26600,7 +27200,7 @@
         </p:nvSpPr>
         <p:spPr>
           <a:xfrm>
-            <a:off x="4850892" y="4169664"/>
+            <a:off x="3639312" y="4169664"/>
             <a:ext cx="685800" cy="475488"/>
           </a:xfrm>
           <a:prstGeom prst="rect">
@@ -26625,7 +27225,7 @@
                 <a:ea typeface="Trebuchet MS" pitchFamily="34" charset="-122"/>
                 <a:cs typeface="Trebuchet MS" pitchFamily="34" charset="-120"/>
               </a:rPr>
-              <a:t>ft</a:t>
+              <a:t>f</a:t>
             </a:r>
             <a:endParaRPr lang="en-US" sz="900" dirty="0"/>
           </a:p>
@@ -26639,7 +27239,7 @@
         </p:nvSpPr>
         <p:spPr>
           <a:xfrm>
-            <a:off x="6062472" y="4169664"/>
+            <a:off x="4447032" y="4169664"/>
             <a:ext cx="685800" cy="475488"/>
           </a:xfrm>
           <a:prstGeom prst="rect">
@@ -26666,7 +27266,7 @@
         </p:nvSpPr>
         <p:spPr>
           <a:xfrm>
-            <a:off x="6062472" y="4169664"/>
+            <a:off x="4447032" y="4169664"/>
             <a:ext cx="685800" cy="475488"/>
           </a:xfrm>
           <a:prstGeom prst="rect">
@@ -26691,7 +27291,7 @@
                 <a:ea typeface="Trebuchet MS" pitchFamily="34" charset="-122"/>
                 <a:cs typeface="Trebuchet MS" pitchFamily="34" charset="-120"/>
               </a:rPr>
-              <a:t>e</a:t>
+              <a:t>t</a:t>
             </a:r>
             <a:endParaRPr lang="en-US" sz="900" dirty="0"/>
           </a:p>
@@ -26705,7 +27305,7 @@
         </p:nvSpPr>
         <p:spPr>
           <a:xfrm>
-            <a:off x="7274052" y="4169664"/>
+            <a:off x="5254752" y="4169664"/>
             <a:ext cx="685800" cy="475488"/>
           </a:xfrm>
           <a:prstGeom prst="rect">
@@ -26732,7 +27332,7 @@
         </p:nvSpPr>
         <p:spPr>
           <a:xfrm>
-            <a:off x="7274052" y="4169664"/>
+            <a:off x="5254752" y="4169664"/>
             <a:ext cx="685800" cy="475488"/>
           </a:xfrm>
           <a:prstGeom prst="rect">
@@ -26758,6 +27358,204 @@
                 <a:cs typeface="Trebuchet MS" pitchFamily="34" charset="-120"/>
               </a:rPr>
               <a:t>n</a:t>
+            </a:r>
+            <a:endParaRPr lang="en-US" sz="900" dirty="0"/>
+          </a:p>
+        </p:txBody>
+      </p:sp>
+      <p:sp>
+        <p:nvSpPr>
+          <p:cNvPr id="43" name="Shape 41"/>
+          <p:cNvSpPr/>
+          <p:nvPr/>
+        </p:nvSpPr>
+        <p:spPr>
+          <a:xfrm>
+            <a:off x="6062472" y="4169664"/>
+            <a:ext cx="685800" cy="475488"/>
+          </a:xfrm>
+          <a:prstGeom prst="rect">
+            <a:avLst>
+              <a:gd name="adj" fmla="val 7692"/>
+            </a:avLst>
+          </a:prstGeom>
+          <a:solidFill>
+            <a:srgbClr val="FFFFFF"/>
+          </a:solidFill>
+          <a:ln w="12700">
+            <a:solidFill>
+              <a:srgbClr val="DB2777"/>
+            </a:solidFill>
+            <a:prstDash val="solid"/>
+          </a:ln>
+        </p:spPr>
+      </p:sp>
+      <p:sp>
+        <p:nvSpPr>
+          <p:cNvPr id="44" name="Text 42"/>
+          <p:cNvSpPr/>
+          <p:nvPr/>
+        </p:nvSpPr>
+        <p:spPr>
+          <a:xfrm>
+            <a:off x="6062472" y="4169664"/>
+            <a:ext cx="685800" cy="475488"/>
+          </a:xfrm>
+          <a:prstGeom prst="rect">
+            <a:avLst/>
+          </a:prstGeom>
+          <a:noFill/>
+          <a:ln/>
+        </p:spPr>
+        <p:txBody>
+          <a:bodyPr wrap="square" lIns="0" tIns="0" rIns="0" bIns="0" rtlCol="0" anchor="ctr"/>
+          <a:lstStyle/>
+          <a:p>
+            <a:pPr algn="ctr" indent="0" marL="0">
+              <a:buNone/>
+            </a:pPr>
+            <a:r>
+              <a:rPr lang="en-US" sz="900" b="1" dirty="0">
+                <a:solidFill>
+                  <a:srgbClr val="9D174D"/>
+                </a:solidFill>
+                <a:latin typeface="Trebuchet MS" pitchFamily="34" charset="0"/>
+                <a:ea typeface="Trebuchet MS" pitchFamily="34" charset="-122"/>
+                <a:cs typeface="Trebuchet MS" pitchFamily="34" charset="-120"/>
+              </a:rPr>
+              <a:t>e</a:t>
+            </a:r>
+            <a:endParaRPr lang="en-US" sz="900" dirty="0"/>
+          </a:p>
+        </p:txBody>
+      </p:sp>
+      <p:sp>
+        <p:nvSpPr>
+          <p:cNvPr id="45" name="Shape 43"/>
+          <p:cNvSpPr/>
+          <p:nvPr/>
+        </p:nvSpPr>
+        <p:spPr>
+          <a:xfrm>
+            <a:off x="6870192" y="4169664"/>
+            <a:ext cx="685800" cy="475488"/>
+          </a:xfrm>
+          <a:prstGeom prst="rect">
+            <a:avLst>
+              <a:gd name="adj" fmla="val 7692"/>
+            </a:avLst>
+          </a:prstGeom>
+          <a:solidFill>
+            <a:srgbClr val="FFFFFF"/>
+          </a:solidFill>
+          <a:ln w="12700">
+            <a:solidFill>
+              <a:srgbClr val="DB2777"/>
+            </a:solidFill>
+            <a:prstDash val="solid"/>
+          </a:ln>
+        </p:spPr>
+      </p:sp>
+      <p:sp>
+        <p:nvSpPr>
+          <p:cNvPr id="46" name="Text 44"/>
+          <p:cNvSpPr/>
+          <p:nvPr/>
+        </p:nvSpPr>
+        <p:spPr>
+          <a:xfrm>
+            <a:off x="6870192" y="4169664"/>
+            <a:ext cx="685800" cy="475488"/>
+          </a:xfrm>
+          <a:prstGeom prst="rect">
+            <a:avLst/>
+          </a:prstGeom>
+          <a:noFill/>
+          <a:ln/>
+        </p:spPr>
+        <p:txBody>
+          <a:bodyPr wrap="square" lIns="0" tIns="0" rIns="0" bIns="0" rtlCol="0" anchor="ctr"/>
+          <a:lstStyle/>
+          <a:p>
+            <a:pPr algn="ctr" indent="0" marL="0">
+              <a:buNone/>
+            </a:pPr>
+            <a:r>
+              <a:rPr lang="en-US" sz="900" b="1" dirty="0">
+                <a:solidFill>
+                  <a:srgbClr val="9D174D"/>
+                </a:solidFill>
+                <a:latin typeface="Trebuchet MS" pitchFamily="34" charset="0"/>
+                <a:ea typeface="Trebuchet MS" pitchFamily="34" charset="-122"/>
+                <a:cs typeface="Trebuchet MS" pitchFamily="34" charset="-120"/>
+              </a:rPr>
+              <a:t>s</a:t>
+            </a:r>
+            <a:endParaRPr lang="en-US" sz="900" dirty="0"/>
+          </a:p>
+        </p:txBody>
+      </p:sp>
+      <p:sp>
+        <p:nvSpPr>
+          <p:cNvPr id="47" name="Shape 45"/>
+          <p:cNvSpPr/>
+          <p:nvPr/>
+        </p:nvSpPr>
+        <p:spPr>
+          <a:xfrm>
+            <a:off x="7677912" y="4169664"/>
+            <a:ext cx="685800" cy="475488"/>
+          </a:xfrm>
+          <a:prstGeom prst="rect">
+            <a:avLst>
+              <a:gd name="adj" fmla="val 7692"/>
+            </a:avLst>
+          </a:prstGeom>
+          <a:solidFill>
+            <a:srgbClr val="FFFFFF"/>
+          </a:solidFill>
+          <a:ln w="12700">
+            <a:solidFill>
+              <a:srgbClr val="DB2777"/>
+            </a:solidFill>
+            <a:prstDash val="solid"/>
+          </a:ln>
+        </p:spPr>
+      </p:sp>
+      <p:sp>
+        <p:nvSpPr>
+          <p:cNvPr id="48" name="Text 46"/>
+          <p:cNvSpPr/>
+          <p:nvPr/>
+        </p:nvSpPr>
+        <p:spPr>
+          <a:xfrm>
+            <a:off x="7677912" y="4169664"/>
+            <a:ext cx="685800" cy="475488"/>
+          </a:xfrm>
+          <a:prstGeom prst="rect">
+            <a:avLst/>
+          </a:prstGeom>
+          <a:noFill/>
+          <a:ln/>
+        </p:spPr>
+        <p:txBody>
+          <a:bodyPr wrap="square" lIns="0" tIns="0" rIns="0" bIns="0" rtlCol="0" anchor="ctr"/>
+          <a:lstStyle/>
+          <a:p>
+            <a:pPr algn="ctr" indent="0" marL="0">
+              <a:buNone/>
+            </a:pPr>
+            <a:r>
+              <a:rPr lang="en-US" sz="900" b="1" dirty="0">
+                <a:solidFill>
+                  <a:srgbClr val="9D174D"/>
+                </a:solidFill>
+                <a:latin typeface="Trebuchet MS" pitchFamily="34" charset="0"/>
+                <a:ea typeface="Trebuchet MS" pitchFamily="34" charset="-122"/>
+                <a:cs typeface="Trebuchet MS" pitchFamily="34" charset="-120"/>
+              </a:rPr>
+              <a:t>s</a:t>
             </a:r>
             <a:endParaRPr lang="en-US" sz="900" dirty="0"/>
           </a:p>
@@ -27049,7 +27847,7 @@
                 <a:ea typeface="Calibri" pitchFamily="34" charset="-122"/>
                 <a:cs typeface="Calibri" pitchFamily="34" charset="-120"/>
               </a:rPr>
-              <a:t>Word Labs  •  wordlabs.app  •  Root: 'soft' = not hard, gentle, quiet</a:t>
+              <a:t>Word Labs  •  wordlabs.app  •  Root: 'soft' = not hard or rough</a:t>
             </a:r>
             <a:endParaRPr lang="en-US" sz="800" dirty="0"/>
           </a:p>
@@ -27188,7 +27986,7 @@
                 <a:ea typeface="Trebuchet MS" pitchFamily="34" charset="-122"/>
                 <a:cs typeface="Trebuchet MS" pitchFamily="34" charset="-120"/>
               </a:rPr>
-              <a:t>oversoften</a:t>
+              <a:t>softening</a:t>
             </a:r>
             <a:endParaRPr lang="en-US" sz="2800" dirty="0"/>
           </a:p>
@@ -27876,7 +28674,7 @@
                 <a:ea typeface="Calibri" pitchFamily="34" charset="-122"/>
                 <a:cs typeface="Calibri" pitchFamily="34" charset="-120"/>
               </a:rPr>
-              <a:t>Word Labs  •  wordlabs.app  •  Root: 'soft' = not hard, gentle, quiet</a:t>
+              <a:t>Word Labs  •  wordlabs.app  •  Root: 'soft' = not hard or rough</a:t>
             </a:r>
             <a:endParaRPr lang="en-US" sz="800" dirty="0"/>
           </a:p>
@@ -28015,7 +28813,7 @@
                 <a:ea typeface="Trebuchet MS" pitchFamily="34" charset="-122"/>
                 <a:cs typeface="Trebuchet MS" pitchFamily="34" charset="-120"/>
               </a:rPr>
-              <a:t>oversoften</a:t>
+              <a:t>softening</a:t>
             </a:r>
             <a:endParaRPr lang="en-US" sz="2800" dirty="0"/>
           </a:p>
@@ -28104,11 +28902,11 @@
             </a:avLst>
           </a:prstGeom>
           <a:solidFill>
-            <a:srgbClr val="DDD6FE"/>
+            <a:srgbClr val="CCFBF1"/>
           </a:solidFill>
           <a:ln w="19050">
             <a:solidFill>
-              <a:srgbClr val="7C3AED"/>
+              <a:srgbClr val="0D9488"/>
             </a:solidFill>
             <a:prstDash val="solid"/>
           </a:ln>
@@ -28148,13 +28946,13 @@
             <a:r>
               <a:rPr lang="en-US" sz="1300" b="1" dirty="0">
                 <a:solidFill>
-                  <a:srgbClr val="4C1D95"/>
+                  <a:srgbClr val="0F766E"/>
                 </a:solidFill>
                 <a:latin typeface="Trebuchet MS" pitchFamily="34" charset="0"/>
                 <a:ea typeface="Trebuchet MS" pitchFamily="34" charset="-122"/>
                 <a:cs typeface="Trebuchet MS" pitchFamily="34" charset="-120"/>
               </a:rPr>
-              <a:t>over</a:t>
+              <a:t>soft</a:t>
             </a:r>
             <a:endParaRPr lang="en-US" sz="1300" dirty="0"/>
           </a:p>
@@ -28193,7 +28991,7 @@
                 <a:ea typeface="Calibri" pitchFamily="34" charset="-122"/>
                 <a:cs typeface="Calibri" pitchFamily="34" charset="-120"/>
               </a:rPr>
-              <a:t>too much, beyond</a:t>
+              <a:t>not hard or rough</a:t>
             </a:r>
             <a:endParaRPr lang="en-US" sz="850" dirty="0"/>
           </a:p>
@@ -28216,11 +29014,11 @@
             </a:avLst>
           </a:prstGeom>
           <a:solidFill>
-            <a:srgbClr val="CCFBF1"/>
+            <a:srgbClr val="FCE7F3"/>
           </a:solidFill>
           <a:ln w="19050">
             <a:solidFill>
-              <a:srgbClr val="0D9488"/>
+              <a:srgbClr val="DB2777"/>
             </a:solidFill>
             <a:prstDash val="solid"/>
           </a:ln>
@@ -28260,13 +29058,13 @@
             <a:r>
               <a:rPr lang="en-US" sz="1300" b="1" dirty="0">
                 <a:solidFill>
-                  <a:srgbClr val="0F766E"/>
+                  <a:srgbClr val="9D174D"/>
                 </a:solidFill>
                 <a:latin typeface="Trebuchet MS" pitchFamily="34" charset="0"/>
                 <a:ea typeface="Trebuchet MS" pitchFamily="34" charset="-122"/>
                 <a:cs typeface="Trebuchet MS" pitchFamily="34" charset="-120"/>
               </a:rPr>
-              <a:t>soft</a:t>
+              <a:t>en</a:t>
             </a:r>
             <a:endParaRPr lang="en-US" sz="1300" dirty="0"/>
           </a:p>
@@ -28305,7 +29103,7 @@
                 <a:ea typeface="Calibri" pitchFamily="34" charset="-122"/>
                 <a:cs typeface="Calibri" pitchFamily="34" charset="-120"/>
               </a:rPr>
-              <a:t>gentle, not hard</a:t>
+              <a:t>made of; to make</a:t>
             </a:r>
             <a:endParaRPr lang="en-US" sz="850" dirty="0"/>
           </a:p>
@@ -28378,7 +29176,7 @@
                 <a:ea typeface="Trebuchet MS" pitchFamily="34" charset="-122"/>
                 <a:cs typeface="Trebuchet MS" pitchFamily="34" charset="-120"/>
               </a:rPr>
-              <a:t>en</a:t>
+              <a:t>ing</a:t>
             </a:r>
             <a:endParaRPr lang="en-US" sz="1300" dirty="0"/>
           </a:p>
@@ -28417,7 +29215,7 @@
                 <a:ea typeface="Calibri" pitchFamily="34" charset="-122"/>
                 <a:cs typeface="Calibri" pitchFamily="34" charset="-120"/>
               </a:rPr>
-              <a:t>to make or become</a:t>
+              <a:t>happening now</a:t>
             </a:r>
             <a:endParaRPr lang="en-US" sz="850" dirty="0"/>
           </a:p>
@@ -28973,7 +29771,7 @@
                 <a:ea typeface="Calibri" pitchFamily="34" charset="-122"/>
                 <a:cs typeface="Calibri" pitchFamily="34" charset="-120"/>
               </a:rPr>
-              <a:t>Word Labs  •  wordlabs.app  •  Root: 'soft' = not hard, gentle, quiet</a:t>
+              <a:t>Word Labs  •  wordlabs.app  •  Root: 'soft' = not hard or rough</a:t>
             </a:r>
             <a:endParaRPr lang="en-US" sz="800" dirty="0"/>
           </a:p>
@@ -29112,7 +29910,7 @@
                 <a:ea typeface="Trebuchet MS" pitchFamily="34" charset="-122"/>
                 <a:cs typeface="Trebuchet MS" pitchFamily="34" charset="-120"/>
               </a:rPr>
-              <a:t>oversoften</a:t>
+              <a:t>softening</a:t>
             </a:r>
             <a:endParaRPr lang="en-US" sz="2800" dirty="0"/>
           </a:p>
@@ -29201,11 +29999,11 @@
             </a:avLst>
           </a:prstGeom>
           <a:solidFill>
-            <a:srgbClr val="DDD6FE"/>
+            <a:srgbClr val="CCFBF1"/>
           </a:solidFill>
           <a:ln w="19050">
             <a:solidFill>
-              <a:srgbClr val="7C3AED"/>
+              <a:srgbClr val="0D9488"/>
             </a:solidFill>
             <a:prstDash val="solid"/>
           </a:ln>
@@ -29245,13 +30043,13 @@
             <a:r>
               <a:rPr lang="en-US" sz="1300" b="1" dirty="0">
                 <a:solidFill>
-                  <a:srgbClr val="4C1D95"/>
+                  <a:srgbClr val="0F766E"/>
                 </a:solidFill>
                 <a:latin typeface="Trebuchet MS" pitchFamily="34" charset="0"/>
                 <a:ea typeface="Trebuchet MS" pitchFamily="34" charset="-122"/>
                 <a:cs typeface="Trebuchet MS" pitchFamily="34" charset="-120"/>
               </a:rPr>
-              <a:t>over</a:t>
+              <a:t>soft</a:t>
             </a:r>
             <a:endParaRPr lang="en-US" sz="1300" dirty="0"/>
           </a:p>
@@ -29290,7 +30088,7 @@
                 <a:ea typeface="Calibri" pitchFamily="34" charset="-122"/>
                 <a:cs typeface="Calibri" pitchFamily="34" charset="-120"/>
               </a:rPr>
-              <a:t>too much, beyond</a:t>
+              <a:t>not hard or rough</a:t>
             </a:r>
             <a:endParaRPr lang="en-US" sz="850" dirty="0"/>
           </a:p>
@@ -29313,11 +30111,11 @@
             </a:avLst>
           </a:prstGeom>
           <a:solidFill>
-            <a:srgbClr val="CCFBF1"/>
+            <a:srgbClr val="FCE7F3"/>
           </a:solidFill>
           <a:ln w="19050">
             <a:solidFill>
-              <a:srgbClr val="0D9488"/>
+              <a:srgbClr val="DB2777"/>
             </a:solidFill>
             <a:prstDash val="solid"/>
           </a:ln>
@@ -29357,13 +30155,13 @@
             <a:r>
               <a:rPr lang="en-US" sz="1300" b="1" dirty="0">
                 <a:solidFill>
-                  <a:srgbClr val="0F766E"/>
+                  <a:srgbClr val="9D174D"/>
                 </a:solidFill>
                 <a:latin typeface="Trebuchet MS" pitchFamily="34" charset="0"/>
                 <a:ea typeface="Trebuchet MS" pitchFamily="34" charset="-122"/>
                 <a:cs typeface="Trebuchet MS" pitchFamily="34" charset="-120"/>
               </a:rPr>
-              <a:t>soft</a:t>
+              <a:t>en</a:t>
             </a:r>
             <a:endParaRPr lang="en-US" sz="1300" dirty="0"/>
           </a:p>
@@ -29402,7 +30200,7 @@
                 <a:ea typeface="Calibri" pitchFamily="34" charset="-122"/>
                 <a:cs typeface="Calibri" pitchFamily="34" charset="-120"/>
               </a:rPr>
-              <a:t>gentle, not hard</a:t>
+              <a:t>made of; to make</a:t>
             </a:r>
             <a:endParaRPr lang="en-US" sz="850" dirty="0"/>
           </a:p>
@@ -29475,7 +30273,7 @@
                 <a:ea typeface="Trebuchet MS" pitchFamily="34" charset="-122"/>
                 <a:cs typeface="Trebuchet MS" pitchFamily="34" charset="-120"/>
               </a:rPr>
-              <a:t>en</a:t>
+              <a:t>ing</a:t>
             </a:r>
             <a:endParaRPr lang="en-US" sz="1300" dirty="0"/>
           </a:p>
@@ -29514,7 +30312,7 @@
                 <a:ea typeface="Calibri" pitchFamily="34" charset="-122"/>
                 <a:cs typeface="Calibri" pitchFamily="34" charset="-120"/>
               </a:rPr>
-              <a:t>to make or become</a:t>
+              <a:t>happening now</a:t>
             </a:r>
             <a:endParaRPr lang="en-US" sz="850" dirty="0"/>
           </a:p>
@@ -29621,8 +30419,8 @@
         </p:nvSpPr>
         <p:spPr>
           <a:xfrm>
-            <a:off x="1975104" y="3364992"/>
-            <a:ext cx="1554480" cy="475488"/>
+            <a:off x="2313432" y="3364992"/>
+            <a:ext cx="1645920" cy="475488"/>
           </a:xfrm>
           <a:prstGeom prst="rect">
             <a:avLst>
@@ -29648,8 +30446,8 @@
         </p:nvSpPr>
         <p:spPr>
           <a:xfrm>
-            <a:off x="1975104" y="3364992"/>
-            <a:ext cx="1554480" cy="475488"/>
+            <a:off x="2313432" y="3364992"/>
+            <a:ext cx="1645920" cy="475488"/>
           </a:xfrm>
           <a:prstGeom prst="rect">
             <a:avLst/>
@@ -29673,7 +30471,7 @@
                 <a:ea typeface="Trebuchet MS" pitchFamily="34" charset="-122"/>
                 <a:cs typeface="Trebuchet MS" pitchFamily="34" charset="-120"/>
               </a:rPr>
-              <a:t>o</a:t>
+              <a:t>sof</a:t>
             </a:r>
             <a:endParaRPr lang="en-US" sz="1400" dirty="0"/>
           </a:p>
@@ -29687,8 +30485,8 @@
         </p:nvSpPr>
         <p:spPr>
           <a:xfrm>
-            <a:off x="3529584" y="3364992"/>
-            <a:ext cx="73152" cy="475488"/>
+            <a:off x="3959352" y="3364992"/>
+            <a:ext cx="411480" cy="475488"/>
           </a:xfrm>
           <a:prstGeom prst="rect">
             <a:avLst/>
@@ -29726,8 +30524,8 @@
         </p:nvSpPr>
         <p:spPr>
           <a:xfrm>
-            <a:off x="3602736" y="3364992"/>
-            <a:ext cx="1554480" cy="475488"/>
+            <a:off x="4370832" y="3364992"/>
+            <a:ext cx="1645920" cy="475488"/>
           </a:xfrm>
           <a:prstGeom prst="rect">
             <a:avLst>
@@ -29753,8 +30551,8 @@
         </p:nvSpPr>
         <p:spPr>
           <a:xfrm>
-            <a:off x="3602736" y="3364992"/>
-            <a:ext cx="1554480" cy="475488"/>
+            <a:off x="4370832" y="3364992"/>
+            <a:ext cx="1645920" cy="475488"/>
           </a:xfrm>
           <a:prstGeom prst="rect">
             <a:avLst/>
@@ -29778,7 +30576,7 @@
                 <a:ea typeface="Trebuchet MS" pitchFamily="34" charset="-122"/>
                 <a:cs typeface="Trebuchet MS" pitchFamily="34" charset="-120"/>
               </a:rPr>
-              <a:t>ver</a:t>
+              <a:t>ten</a:t>
             </a:r>
             <a:endParaRPr lang="en-US" sz="1400" dirty="0"/>
           </a:p>
@@ -29792,8 +30590,8 @@
         </p:nvSpPr>
         <p:spPr>
           <a:xfrm>
-            <a:off x="5157216" y="3364992"/>
-            <a:ext cx="73152" cy="475488"/>
+            <a:off x="6016752" y="3364992"/>
+            <a:ext cx="411480" cy="475488"/>
           </a:xfrm>
           <a:prstGeom prst="rect">
             <a:avLst/>
@@ -29831,8 +30629,8 @@
         </p:nvSpPr>
         <p:spPr>
           <a:xfrm>
-            <a:off x="5230368" y="3364992"/>
-            <a:ext cx="1554480" cy="475488"/>
+            <a:off x="6428232" y="3364992"/>
+            <a:ext cx="1645920" cy="475488"/>
           </a:xfrm>
           <a:prstGeom prst="rect">
             <a:avLst>
@@ -29858,8 +30656,8 @@
         </p:nvSpPr>
         <p:spPr>
           <a:xfrm>
-            <a:off x="5230368" y="3364992"/>
-            <a:ext cx="1554480" cy="475488"/>
+            <a:off x="6428232" y="3364992"/>
+            <a:ext cx="1645920" cy="475488"/>
           </a:xfrm>
           <a:prstGeom prst="rect">
             <a:avLst/>
@@ -29883,7 +30681,7 @@
                 <a:ea typeface="Trebuchet MS" pitchFamily="34" charset="-122"/>
                 <a:cs typeface="Trebuchet MS" pitchFamily="34" charset="-120"/>
               </a:rPr>
-              <a:t>soft</a:t>
+              <a:t>ing</a:t>
             </a:r>
             <a:endParaRPr lang="en-US" sz="1400" dirty="0"/>
           </a:p>
@@ -29891,14 +30689,41 @@
       </p:sp>
       <p:sp>
         <p:nvSpPr>
-          <p:cNvPr id="36" name="Text 34"/>
-          <p:cNvSpPr/>
-          <p:nvPr/>
-        </p:nvSpPr>
-        <p:spPr>
-          <a:xfrm>
-            <a:off x="6784848" y="3364992"/>
-            <a:ext cx="73152" cy="475488"/>
+          <p:cNvPr id="36" name="Shape 34"/>
+          <p:cNvSpPr/>
+          <p:nvPr/>
+        </p:nvSpPr>
+        <p:spPr>
+          <a:xfrm>
+            <a:off x="365760" y="4096512"/>
+            <a:ext cx="1371600" cy="804672"/>
+          </a:xfrm>
+          <a:prstGeom prst="rect">
+            <a:avLst>
+              <a:gd name="adj" fmla="val 6818"/>
+            </a:avLst>
+          </a:prstGeom>
+          <a:solidFill>
+            <a:srgbClr val="E2E8F0"/>
+          </a:solidFill>
+          <a:ln w="12700">
+            <a:solidFill>
+              <a:srgbClr val="E2E8F0"/>
+            </a:solidFill>
+            <a:prstDash val="solid"/>
+          </a:ln>
+        </p:spPr>
+      </p:sp>
+      <p:sp>
+        <p:nvSpPr>
+          <p:cNvPr id="37" name="Text 35"/>
+          <p:cNvSpPr/>
+          <p:nvPr/>
+        </p:nvSpPr>
+        <p:spPr>
+          <a:xfrm>
+            <a:off x="365760" y="4096512"/>
+            <a:ext cx="1371600" cy="804672"/>
           </a:xfrm>
           <a:prstGeom prst="rect">
             <a:avLst/>
@@ -29914,96 +30739,30 @@
               <a:buNone/>
             </a:pPr>
             <a:r>
-              <a:rPr lang="en-US" sz="1600" b="1" dirty="0">
-                <a:solidFill>
-                  <a:srgbClr val="0D9488"/>
+              <a:rPr lang="en-US" sz="1100" b="1" dirty="0">
+                <a:solidFill>
+                  <a:srgbClr val="475569"/>
                 </a:solidFill>
                 <a:latin typeface="Trebuchet MS" pitchFamily="34" charset="0"/>
                 <a:ea typeface="Trebuchet MS" pitchFamily="34" charset="-122"/>
                 <a:cs typeface="Trebuchet MS" pitchFamily="34" charset="-120"/>
               </a:rPr>
-              <a:t>·</a:t>
-            </a:r>
-            <a:endParaRPr lang="en-US" sz="1600" dirty="0"/>
-          </a:p>
-        </p:txBody>
-      </p:sp>
-      <p:sp>
-        <p:nvSpPr>
-          <p:cNvPr id="37" name="Shape 35"/>
-          <p:cNvSpPr/>
-          <p:nvPr/>
-        </p:nvSpPr>
-        <p:spPr>
-          <a:xfrm>
-            <a:off x="6858000" y="3364992"/>
-            <a:ext cx="1554480" cy="475488"/>
-          </a:xfrm>
-          <a:prstGeom prst="rect">
-            <a:avLst>
-              <a:gd name="adj" fmla="val 9615"/>
-            </a:avLst>
-          </a:prstGeom>
-          <a:solidFill>
-            <a:srgbClr val="FFFFFF"/>
-          </a:solidFill>
-          <a:ln w="12700">
-            <a:solidFill>
-              <a:srgbClr val="0D9488"/>
-            </a:solidFill>
-            <a:prstDash val="solid"/>
-          </a:ln>
-        </p:spPr>
-      </p:sp>
-      <p:sp>
-        <p:nvSpPr>
-          <p:cNvPr id="38" name="Text 36"/>
-          <p:cNvSpPr/>
-          <p:nvPr/>
-        </p:nvSpPr>
-        <p:spPr>
-          <a:xfrm>
-            <a:off x="6858000" y="3364992"/>
-            <a:ext cx="1554480" cy="475488"/>
-          </a:xfrm>
-          <a:prstGeom prst="rect">
-            <a:avLst/>
-          </a:prstGeom>
-          <a:noFill/>
-          <a:ln/>
-        </p:spPr>
-        <p:txBody>
-          <a:bodyPr wrap="square" lIns="0" tIns="0" rIns="0" bIns="0" rtlCol="0" anchor="ctr"/>
-          <a:lstStyle/>
-          <a:p>
-            <a:pPr algn="ctr" indent="0" marL="0">
-              <a:buNone/>
-            </a:pPr>
-            <a:r>
-              <a:rPr lang="en-US" sz="1400" b="1" dirty="0">
-                <a:solidFill>
-                  <a:srgbClr val="0D9488"/>
-                </a:solidFill>
-                <a:latin typeface="Trebuchet MS" pitchFamily="34" charset="0"/>
-                <a:ea typeface="Trebuchet MS" pitchFamily="34" charset="-122"/>
-                <a:cs typeface="Trebuchet MS" pitchFamily="34" charset="-120"/>
-              </a:rPr>
-              <a:t>en</a:t>
-            </a:r>
-            <a:endParaRPr lang="en-US" sz="1400" dirty="0"/>
-          </a:p>
-        </p:txBody>
-      </p:sp>
-      <p:sp>
-        <p:nvSpPr>
-          <p:cNvPr id="39" name="Shape 37"/>
-          <p:cNvSpPr/>
-          <p:nvPr/>
-        </p:nvSpPr>
-        <p:spPr>
-          <a:xfrm>
-            <a:off x="365760" y="4096512"/>
-            <a:ext cx="1371600" cy="804672"/>
+              <a:t>Phonemes</a:t>
+            </a:r>
+            <a:endParaRPr lang="en-US" sz="1100" dirty="0"/>
+          </a:p>
+        </p:txBody>
+      </p:sp>
+      <p:sp>
+        <p:nvSpPr>
+          <p:cNvPr id="38" name="Shape 36"/>
+          <p:cNvSpPr/>
+          <p:nvPr/>
+        </p:nvSpPr>
+        <p:spPr>
+          <a:xfrm>
+            <a:off x="1874520" y="4096512"/>
+            <a:ext cx="6903720" cy="804672"/>
           </a:xfrm>
           <a:prstGeom prst="rect">
             <a:avLst>
@@ -30011,85 +30770,19 @@
             </a:avLst>
           </a:prstGeom>
           <a:solidFill>
-            <a:srgbClr val="E2E8F0"/>
+            <a:srgbClr val="F8FAFC"/>
           </a:solidFill>
           <a:ln w="12700">
             <a:solidFill>
               <a:srgbClr val="E2E8F0"/>
             </a:solidFill>
-            <a:prstDash val="solid"/>
-          </a:ln>
-        </p:spPr>
-      </p:sp>
-      <p:sp>
-        <p:nvSpPr>
-          <p:cNvPr id="40" name="Text 38"/>
-          <p:cNvSpPr/>
-          <p:nvPr/>
-        </p:nvSpPr>
-        <p:spPr>
-          <a:xfrm>
-            <a:off x="365760" y="4096512"/>
-            <a:ext cx="1371600" cy="804672"/>
-          </a:xfrm>
-          <a:prstGeom prst="rect">
-            <a:avLst/>
-          </a:prstGeom>
-          <a:noFill/>
-          <a:ln/>
-        </p:spPr>
-        <p:txBody>
-          <a:bodyPr wrap="square" lIns="0" tIns="0" rIns="0" bIns="0" rtlCol="0" anchor="ctr"/>
-          <a:lstStyle/>
-          <a:p>
-            <a:pPr algn="ctr" indent="0" marL="0">
-              <a:buNone/>
-            </a:pPr>
-            <a:r>
-              <a:rPr lang="en-US" sz="1100" b="1" dirty="0">
-                <a:solidFill>
-                  <a:srgbClr val="475569"/>
-                </a:solidFill>
-                <a:latin typeface="Trebuchet MS" pitchFamily="34" charset="0"/>
-                <a:ea typeface="Trebuchet MS" pitchFamily="34" charset="-122"/>
-                <a:cs typeface="Trebuchet MS" pitchFamily="34" charset="-120"/>
-              </a:rPr>
-              <a:t>Phonemes</a:t>
-            </a:r>
-            <a:endParaRPr lang="en-US" sz="1100" dirty="0"/>
-          </a:p>
-        </p:txBody>
-      </p:sp>
-      <p:sp>
-        <p:nvSpPr>
-          <p:cNvPr id="41" name="Shape 39"/>
-          <p:cNvSpPr/>
-          <p:nvPr/>
-        </p:nvSpPr>
-        <p:spPr>
-          <a:xfrm>
-            <a:off x="1874520" y="4096512"/>
-            <a:ext cx="6903720" cy="804672"/>
-          </a:xfrm>
-          <a:prstGeom prst="rect">
-            <a:avLst>
-              <a:gd name="adj" fmla="val 6818"/>
-            </a:avLst>
-          </a:prstGeom>
-          <a:solidFill>
-            <a:srgbClr val="F8FAFC"/>
-          </a:solidFill>
-          <a:ln w="12700">
-            <a:solidFill>
-              <a:srgbClr val="E2E8F0"/>
-            </a:solidFill>
             <a:prstDash val="dash"/>
           </a:ln>
         </p:spPr>
       </p:sp>
       <p:sp>
         <p:nvSpPr>
-          <p:cNvPr id="42" name="Text 40"/>
+          <p:cNvPr id="39" name="Text 37"/>
           <p:cNvSpPr/>
           <p:nvPr/>
         </p:nvSpPr>
@@ -30412,7 +31105,7 @@
                 <a:ea typeface="Calibri" pitchFamily="34" charset="-122"/>
                 <a:cs typeface="Calibri" pitchFamily="34" charset="-120"/>
               </a:rPr>
-              <a:t>Word Labs  •  wordlabs.app  •  Root: 'soft' = not hard, gentle, quiet</a:t>
+              <a:t>Word Labs  •  wordlabs.app  •  Root: 'soft' = not hard or rough</a:t>
             </a:r>
             <a:endParaRPr lang="en-US" sz="800" dirty="0"/>
           </a:p>
@@ -30551,7 +31244,7 @@
                 <a:ea typeface="Trebuchet MS" pitchFamily="34" charset="-122"/>
                 <a:cs typeface="Trebuchet MS" pitchFamily="34" charset="-120"/>
               </a:rPr>
-              <a:t>oversoften</a:t>
+              <a:t>softening</a:t>
             </a:r>
             <a:endParaRPr lang="en-US" sz="2800" dirty="0"/>
           </a:p>
@@ -30640,11 +31333,11 @@
             </a:avLst>
           </a:prstGeom>
           <a:solidFill>
-            <a:srgbClr val="DDD6FE"/>
+            <a:srgbClr val="CCFBF1"/>
           </a:solidFill>
           <a:ln w="19050">
             <a:solidFill>
-              <a:srgbClr val="7C3AED"/>
+              <a:srgbClr val="0D9488"/>
             </a:solidFill>
             <a:prstDash val="solid"/>
           </a:ln>
@@ -30684,13 +31377,13 @@
             <a:r>
               <a:rPr lang="en-US" sz="1300" b="1" dirty="0">
                 <a:solidFill>
-                  <a:srgbClr val="4C1D95"/>
+                  <a:srgbClr val="0F766E"/>
                 </a:solidFill>
                 <a:latin typeface="Trebuchet MS" pitchFamily="34" charset="0"/>
                 <a:ea typeface="Trebuchet MS" pitchFamily="34" charset="-122"/>
                 <a:cs typeface="Trebuchet MS" pitchFamily="34" charset="-120"/>
               </a:rPr>
-              <a:t>over</a:t>
+              <a:t>soft</a:t>
             </a:r>
             <a:endParaRPr lang="en-US" sz="1300" dirty="0"/>
           </a:p>
@@ -30729,7 +31422,7 @@
                 <a:ea typeface="Calibri" pitchFamily="34" charset="-122"/>
                 <a:cs typeface="Calibri" pitchFamily="34" charset="-120"/>
               </a:rPr>
-              <a:t>too much, beyond</a:t>
+              <a:t>not hard or rough</a:t>
             </a:r>
             <a:endParaRPr lang="en-US" sz="850" dirty="0"/>
           </a:p>
@@ -30752,11 +31445,11 @@
             </a:avLst>
           </a:prstGeom>
           <a:solidFill>
-            <a:srgbClr val="CCFBF1"/>
+            <a:srgbClr val="FCE7F3"/>
           </a:solidFill>
           <a:ln w="19050">
             <a:solidFill>
-              <a:srgbClr val="0D9488"/>
+              <a:srgbClr val="DB2777"/>
             </a:solidFill>
             <a:prstDash val="solid"/>
           </a:ln>
@@ -30796,13 +31489,13 @@
             <a:r>
               <a:rPr lang="en-US" sz="1300" b="1" dirty="0">
                 <a:solidFill>
-                  <a:srgbClr val="0F766E"/>
+                  <a:srgbClr val="9D174D"/>
                 </a:solidFill>
                 <a:latin typeface="Trebuchet MS" pitchFamily="34" charset="0"/>
                 <a:ea typeface="Trebuchet MS" pitchFamily="34" charset="-122"/>
                 <a:cs typeface="Trebuchet MS" pitchFamily="34" charset="-120"/>
               </a:rPr>
-              <a:t>soft</a:t>
+              <a:t>en</a:t>
             </a:r>
             <a:endParaRPr lang="en-US" sz="1300" dirty="0"/>
           </a:p>
@@ -30841,7 +31534,7 @@
                 <a:ea typeface="Calibri" pitchFamily="34" charset="-122"/>
                 <a:cs typeface="Calibri" pitchFamily="34" charset="-120"/>
               </a:rPr>
-              <a:t>gentle, not hard</a:t>
+              <a:t>made of; to make</a:t>
             </a:r>
             <a:endParaRPr lang="en-US" sz="850" dirty="0"/>
           </a:p>
@@ -30914,7 +31607,7 @@
                 <a:ea typeface="Trebuchet MS" pitchFamily="34" charset="-122"/>
                 <a:cs typeface="Trebuchet MS" pitchFamily="34" charset="-120"/>
               </a:rPr>
-              <a:t>en</a:t>
+              <a:t>ing</a:t>
             </a:r>
             <a:endParaRPr lang="en-US" sz="1300" dirty="0"/>
           </a:p>
@@ -30953,7 +31646,7 @@
                 <a:ea typeface="Calibri" pitchFamily="34" charset="-122"/>
                 <a:cs typeface="Calibri" pitchFamily="34" charset="-120"/>
               </a:rPr>
-              <a:t>to make or become</a:t>
+              <a:t>happening now</a:t>
             </a:r>
             <a:endParaRPr lang="en-US" sz="850" dirty="0"/>
           </a:p>
@@ -31060,8 +31753,8 @@
         </p:nvSpPr>
         <p:spPr>
           <a:xfrm>
-            <a:off x="1975104" y="3364992"/>
-            <a:ext cx="1554480" cy="475488"/>
+            <a:off x="2313432" y="3364992"/>
+            <a:ext cx="1645920" cy="475488"/>
           </a:xfrm>
           <a:prstGeom prst="rect">
             <a:avLst>
@@ -31087,8 +31780,8 @@
         </p:nvSpPr>
         <p:spPr>
           <a:xfrm>
-            <a:off x="1975104" y="3364992"/>
-            <a:ext cx="1554480" cy="475488"/>
+            <a:off x="2313432" y="3364992"/>
+            <a:ext cx="1645920" cy="475488"/>
           </a:xfrm>
           <a:prstGeom prst="rect">
             <a:avLst/>
@@ -31112,7 +31805,7 @@
                 <a:ea typeface="Trebuchet MS" pitchFamily="34" charset="-122"/>
                 <a:cs typeface="Trebuchet MS" pitchFamily="34" charset="-120"/>
               </a:rPr>
-              <a:t>o</a:t>
+              <a:t>sof</a:t>
             </a:r>
             <a:endParaRPr lang="en-US" sz="1400" dirty="0"/>
           </a:p>
@@ -31126,8 +31819,8 @@
         </p:nvSpPr>
         <p:spPr>
           <a:xfrm>
-            <a:off x="3529584" y="3364992"/>
-            <a:ext cx="73152" cy="475488"/>
+            <a:off x="3959352" y="3364992"/>
+            <a:ext cx="411480" cy="475488"/>
           </a:xfrm>
           <a:prstGeom prst="rect">
             <a:avLst/>
@@ -31165,8 +31858,8 @@
         </p:nvSpPr>
         <p:spPr>
           <a:xfrm>
-            <a:off x="3602736" y="3364992"/>
-            <a:ext cx="1554480" cy="475488"/>
+            <a:off x="4370832" y="3364992"/>
+            <a:ext cx="1645920" cy="475488"/>
           </a:xfrm>
           <a:prstGeom prst="rect">
             <a:avLst>
@@ -31192,8 +31885,8 @@
         </p:nvSpPr>
         <p:spPr>
           <a:xfrm>
-            <a:off x="3602736" y="3364992"/>
-            <a:ext cx="1554480" cy="475488"/>
+            <a:off x="4370832" y="3364992"/>
+            <a:ext cx="1645920" cy="475488"/>
           </a:xfrm>
           <a:prstGeom prst="rect">
             <a:avLst/>
@@ -31217,7 +31910,7 @@
                 <a:ea typeface="Trebuchet MS" pitchFamily="34" charset="-122"/>
                 <a:cs typeface="Trebuchet MS" pitchFamily="34" charset="-120"/>
               </a:rPr>
-              <a:t>ver</a:t>
+              <a:t>ten</a:t>
             </a:r>
             <a:endParaRPr lang="en-US" sz="1400" dirty="0"/>
           </a:p>
@@ -31231,8 +31924,8 @@
         </p:nvSpPr>
         <p:spPr>
           <a:xfrm>
-            <a:off x="5157216" y="3364992"/>
-            <a:ext cx="73152" cy="475488"/>
+            <a:off x="6016752" y="3364992"/>
+            <a:ext cx="411480" cy="475488"/>
           </a:xfrm>
           <a:prstGeom prst="rect">
             <a:avLst/>
@@ -31270,8 +31963,8 @@
         </p:nvSpPr>
         <p:spPr>
           <a:xfrm>
-            <a:off x="5230368" y="3364992"/>
-            <a:ext cx="1554480" cy="475488"/>
+            <a:off x="6428232" y="3364992"/>
+            <a:ext cx="1645920" cy="475488"/>
           </a:xfrm>
           <a:prstGeom prst="rect">
             <a:avLst>
@@ -31297,8 +31990,8 @@
         </p:nvSpPr>
         <p:spPr>
           <a:xfrm>
-            <a:off x="5230368" y="3364992"/>
-            <a:ext cx="1554480" cy="475488"/>
+            <a:off x="6428232" y="3364992"/>
+            <a:ext cx="1645920" cy="475488"/>
           </a:xfrm>
           <a:prstGeom prst="rect">
             <a:avLst/>
@@ -31322,7 +32015,7 @@
                 <a:ea typeface="Trebuchet MS" pitchFamily="34" charset="-122"/>
                 <a:cs typeface="Trebuchet MS" pitchFamily="34" charset="-120"/>
               </a:rPr>
-              <a:t>soft</a:t>
+              <a:t>ing</a:t>
             </a:r>
             <a:endParaRPr lang="en-US" sz="1400" dirty="0"/>
           </a:p>
@@ -31330,14 +32023,41 @@
       </p:sp>
       <p:sp>
         <p:nvSpPr>
-          <p:cNvPr id="36" name="Text 34"/>
-          <p:cNvSpPr/>
-          <p:nvPr/>
-        </p:nvSpPr>
-        <p:spPr>
-          <a:xfrm>
-            <a:off x="6784848" y="3364992"/>
-            <a:ext cx="73152" cy="475488"/>
+          <p:cNvPr id="36" name="Shape 34"/>
+          <p:cNvSpPr/>
+          <p:nvPr/>
+        </p:nvSpPr>
+        <p:spPr>
+          <a:xfrm>
+            <a:off x="365760" y="4096512"/>
+            <a:ext cx="1371600" cy="804672"/>
+          </a:xfrm>
+          <a:prstGeom prst="rect">
+            <a:avLst>
+              <a:gd name="adj" fmla="val 6818"/>
+            </a:avLst>
+          </a:prstGeom>
+          <a:solidFill>
+            <a:srgbClr val="E2E8F0"/>
+          </a:solidFill>
+          <a:ln w="12700">
+            <a:solidFill>
+              <a:srgbClr val="E2E8F0"/>
+            </a:solidFill>
+            <a:prstDash val="solid"/>
+          </a:ln>
+        </p:spPr>
+      </p:sp>
+      <p:sp>
+        <p:nvSpPr>
+          <p:cNvPr id="37" name="Text 35"/>
+          <p:cNvSpPr/>
+          <p:nvPr/>
+        </p:nvSpPr>
+        <p:spPr>
+          <a:xfrm>
+            <a:off x="365760" y="4096512"/>
+            <a:ext cx="1371600" cy="804672"/>
           </a:xfrm>
           <a:prstGeom prst="rect">
             <a:avLst/>
@@ -31353,57 +32073,84 @@
               <a:buNone/>
             </a:pPr>
             <a:r>
-              <a:rPr lang="en-US" sz="1600" b="1" dirty="0">
-                <a:solidFill>
-                  <a:srgbClr val="0D9488"/>
+              <a:rPr lang="en-US" sz="1100" b="1" dirty="0">
+                <a:solidFill>
+                  <a:srgbClr val="475569"/>
                 </a:solidFill>
                 <a:latin typeface="Trebuchet MS" pitchFamily="34" charset="0"/>
                 <a:ea typeface="Trebuchet MS" pitchFamily="34" charset="-122"/>
                 <a:cs typeface="Trebuchet MS" pitchFamily="34" charset="-120"/>
               </a:rPr>
-              <a:t>·</a:t>
-            </a:r>
-            <a:endParaRPr lang="en-US" sz="1600" dirty="0"/>
-          </a:p>
-        </p:txBody>
-      </p:sp>
-      <p:sp>
-        <p:nvSpPr>
-          <p:cNvPr id="37" name="Shape 35"/>
-          <p:cNvSpPr/>
-          <p:nvPr/>
-        </p:nvSpPr>
-        <p:spPr>
-          <a:xfrm>
-            <a:off x="6858000" y="3364992"/>
-            <a:ext cx="1554480" cy="475488"/>
+              <a:t>Phonemes</a:t>
+            </a:r>
+            <a:endParaRPr lang="en-US" sz="1100" dirty="0"/>
+          </a:p>
+        </p:txBody>
+      </p:sp>
+      <p:sp>
+        <p:nvSpPr>
+          <p:cNvPr id="38" name="Shape 36"/>
+          <p:cNvSpPr/>
+          <p:nvPr/>
+        </p:nvSpPr>
+        <p:spPr>
+          <a:xfrm>
+            <a:off x="1874520" y="4096512"/>
+            <a:ext cx="6903720" cy="658368"/>
           </a:xfrm>
           <a:prstGeom prst="rect">
             <a:avLst>
-              <a:gd name="adj" fmla="val 9615"/>
+              <a:gd name="adj" fmla="val 8333"/>
             </a:avLst>
           </a:prstGeom>
           <a:solidFill>
+            <a:srgbClr val="FCE7F3"/>
+          </a:solidFill>
+          <a:ln w="12700">
+            <a:solidFill>
+              <a:srgbClr val="DB2777"/>
+            </a:solidFill>
+            <a:prstDash val="solid"/>
+          </a:ln>
+        </p:spPr>
+      </p:sp>
+      <p:sp>
+        <p:nvSpPr>
+          <p:cNvPr id="39" name="Shape 37"/>
+          <p:cNvSpPr/>
+          <p:nvPr/>
+        </p:nvSpPr>
+        <p:spPr>
+          <a:xfrm>
+            <a:off x="2023872" y="4169664"/>
+            <a:ext cx="685800" cy="475488"/>
+          </a:xfrm>
+          <a:prstGeom prst="rect">
+            <a:avLst>
+              <a:gd name="adj" fmla="val 7692"/>
+            </a:avLst>
+          </a:prstGeom>
+          <a:solidFill>
             <a:srgbClr val="FFFFFF"/>
           </a:solidFill>
           <a:ln w="12700">
             <a:solidFill>
-              <a:srgbClr val="0D9488"/>
-            </a:solidFill>
-            <a:prstDash val="solid"/>
-          </a:ln>
-        </p:spPr>
-      </p:sp>
-      <p:sp>
-        <p:nvSpPr>
-          <p:cNvPr id="38" name="Text 36"/>
-          <p:cNvSpPr/>
-          <p:nvPr/>
-        </p:nvSpPr>
-        <p:spPr>
-          <a:xfrm>
-            <a:off x="6858000" y="3364992"/>
-            <a:ext cx="1554480" cy="475488"/>
+              <a:srgbClr val="DB2777"/>
+            </a:solidFill>
+            <a:prstDash val="solid"/>
+          </a:ln>
+        </p:spPr>
+      </p:sp>
+      <p:sp>
+        <p:nvSpPr>
+          <p:cNvPr id="40" name="Text 38"/>
+          <p:cNvSpPr/>
+          <p:nvPr/>
+        </p:nvSpPr>
+        <p:spPr>
+          <a:xfrm>
+            <a:off x="2023872" y="4169664"/>
+            <a:ext cx="685800" cy="475488"/>
           </a:xfrm>
           <a:prstGeom prst="rect">
             <a:avLst/>
@@ -31419,57 +32166,57 @@
               <a:buNone/>
             </a:pPr>
             <a:r>
-              <a:rPr lang="en-US" sz="1400" b="1" dirty="0">
-                <a:solidFill>
-                  <a:srgbClr val="0D9488"/>
+              <a:rPr lang="en-US" sz="900" b="1" dirty="0">
+                <a:solidFill>
+                  <a:srgbClr val="9D174D"/>
                 </a:solidFill>
                 <a:latin typeface="Trebuchet MS" pitchFamily="34" charset="0"/>
                 <a:ea typeface="Trebuchet MS" pitchFamily="34" charset="-122"/>
                 <a:cs typeface="Trebuchet MS" pitchFamily="34" charset="-120"/>
               </a:rPr>
-              <a:t>en</a:t>
-            </a:r>
-            <a:endParaRPr lang="en-US" sz="1400" dirty="0"/>
-          </a:p>
-        </p:txBody>
-      </p:sp>
-      <p:sp>
-        <p:nvSpPr>
-          <p:cNvPr id="39" name="Shape 37"/>
-          <p:cNvSpPr/>
-          <p:nvPr/>
-        </p:nvSpPr>
-        <p:spPr>
-          <a:xfrm>
-            <a:off x="365760" y="4096512"/>
-            <a:ext cx="1371600" cy="804672"/>
+              <a:t>s</a:t>
+            </a:r>
+            <a:endParaRPr lang="en-US" sz="900" dirty="0"/>
+          </a:p>
+        </p:txBody>
+      </p:sp>
+      <p:sp>
+        <p:nvSpPr>
+          <p:cNvPr id="41" name="Shape 39"/>
+          <p:cNvSpPr/>
+          <p:nvPr/>
+        </p:nvSpPr>
+        <p:spPr>
+          <a:xfrm>
+            <a:off x="2831592" y="4169664"/>
+            <a:ext cx="685800" cy="475488"/>
           </a:xfrm>
           <a:prstGeom prst="rect">
             <a:avLst>
-              <a:gd name="adj" fmla="val 6818"/>
+              <a:gd name="adj" fmla="val 7692"/>
             </a:avLst>
           </a:prstGeom>
           <a:solidFill>
-            <a:srgbClr val="E2E8F0"/>
-          </a:solidFill>
-          <a:ln w="12700">
-            <a:solidFill>
-              <a:srgbClr val="E2E8F0"/>
-            </a:solidFill>
-            <a:prstDash val="solid"/>
-          </a:ln>
-        </p:spPr>
-      </p:sp>
-      <p:sp>
-        <p:nvSpPr>
-          <p:cNvPr id="40" name="Text 38"/>
-          <p:cNvSpPr/>
-          <p:nvPr/>
-        </p:nvSpPr>
-        <p:spPr>
-          <a:xfrm>
-            <a:off x="365760" y="4096512"/>
-            <a:ext cx="1371600" cy="804672"/>
+            <a:srgbClr val="FFFFFF"/>
+          </a:solidFill>
+          <a:ln w="12700">
+            <a:solidFill>
+              <a:srgbClr val="DB2777"/>
+            </a:solidFill>
+            <a:prstDash val="solid"/>
+          </a:ln>
+        </p:spPr>
+      </p:sp>
+      <p:sp>
+        <p:nvSpPr>
+          <p:cNvPr id="42" name="Text 40"/>
+          <p:cNvSpPr/>
+          <p:nvPr/>
+        </p:nvSpPr>
+        <p:spPr>
+          <a:xfrm>
+            <a:off x="2831592" y="4169664"/>
+            <a:ext cx="685800" cy="475488"/>
           </a:xfrm>
           <a:prstGeom prst="rect">
             <a:avLst/>
@@ -31485,56 +32232,29 @@
               <a:buNone/>
             </a:pPr>
             <a:r>
-              <a:rPr lang="en-US" sz="1100" b="1" dirty="0">
-                <a:solidFill>
-                  <a:srgbClr val="475569"/>
+              <a:rPr lang="en-US" sz="900" b="1" dirty="0">
+                <a:solidFill>
+                  <a:srgbClr val="9D174D"/>
                 </a:solidFill>
                 <a:latin typeface="Trebuchet MS" pitchFamily="34" charset="0"/>
                 <a:ea typeface="Trebuchet MS" pitchFamily="34" charset="-122"/>
                 <a:cs typeface="Trebuchet MS" pitchFamily="34" charset="-120"/>
               </a:rPr>
-              <a:t>Phonemes</a:t>
-            </a:r>
-            <a:endParaRPr lang="en-US" sz="1100" dirty="0"/>
-          </a:p>
-        </p:txBody>
-      </p:sp>
-      <p:sp>
-        <p:nvSpPr>
-          <p:cNvPr id="41" name="Shape 39"/>
-          <p:cNvSpPr/>
-          <p:nvPr/>
-        </p:nvSpPr>
-        <p:spPr>
-          <a:xfrm>
-            <a:off x="1874520" y="4096512"/>
-            <a:ext cx="6903720" cy="658368"/>
-          </a:xfrm>
-          <a:prstGeom prst="rect">
-            <a:avLst>
-              <a:gd name="adj" fmla="val 8333"/>
-            </a:avLst>
-          </a:prstGeom>
-          <a:solidFill>
-            <a:srgbClr val="FCE7F3"/>
-          </a:solidFill>
-          <a:ln w="12700">
-            <a:solidFill>
-              <a:srgbClr val="DB2777"/>
-            </a:solidFill>
-            <a:prstDash val="solid"/>
-          </a:ln>
-        </p:spPr>
-      </p:sp>
-      <p:sp>
-        <p:nvSpPr>
-          <p:cNvPr id="42" name="Shape 40"/>
-          <p:cNvSpPr/>
-          <p:nvPr/>
-        </p:nvSpPr>
-        <p:spPr>
-          <a:xfrm>
-            <a:off x="2023872" y="4169664"/>
+              <a:t>o</a:t>
+            </a:r>
+            <a:endParaRPr lang="en-US" sz="900" dirty="0"/>
+          </a:p>
+        </p:txBody>
+      </p:sp>
+      <p:sp>
+        <p:nvSpPr>
+          <p:cNvPr id="43" name="Shape 41"/>
+          <p:cNvSpPr/>
+          <p:nvPr/>
+        </p:nvSpPr>
+        <p:spPr>
+          <a:xfrm>
+            <a:off x="3639312" y="4169664"/>
             <a:ext cx="685800" cy="475488"/>
           </a:xfrm>
           <a:prstGeom prst="rect">
@@ -31555,13 +32275,13 @@
       </p:sp>
       <p:sp>
         <p:nvSpPr>
-          <p:cNvPr id="43" name="Text 41"/>
-          <p:cNvSpPr/>
-          <p:nvPr/>
-        </p:nvSpPr>
-        <p:spPr>
-          <a:xfrm>
-            <a:off x="2023872" y="4169664"/>
+          <p:cNvPr id="44" name="Text 42"/>
+          <p:cNvSpPr/>
+          <p:nvPr/>
+        </p:nvSpPr>
+        <p:spPr>
+          <a:xfrm>
+            <a:off x="3639312" y="4169664"/>
             <a:ext cx="685800" cy="475488"/>
           </a:xfrm>
           <a:prstGeom prst="rect">
@@ -31586,7 +32306,7 @@
                 <a:ea typeface="Trebuchet MS" pitchFamily="34" charset="-122"/>
                 <a:cs typeface="Trebuchet MS" pitchFamily="34" charset="-120"/>
               </a:rPr>
-              <a:t>o</a:t>
+              <a:t>f</a:t>
             </a:r>
             <a:endParaRPr lang="en-US" sz="900" dirty="0"/>
           </a:p>
@@ -31594,13 +32314,13 @@
       </p:sp>
       <p:sp>
         <p:nvSpPr>
-          <p:cNvPr id="44" name="Shape 42"/>
-          <p:cNvSpPr/>
-          <p:nvPr/>
-        </p:nvSpPr>
-        <p:spPr>
-          <a:xfrm>
-            <a:off x="2831592" y="4169664"/>
+          <p:cNvPr id="45" name="Shape 43"/>
+          <p:cNvSpPr/>
+          <p:nvPr/>
+        </p:nvSpPr>
+        <p:spPr>
+          <a:xfrm>
+            <a:off x="4447032" y="4169664"/>
             <a:ext cx="685800" cy="475488"/>
           </a:xfrm>
           <a:prstGeom prst="rect">
@@ -31621,13 +32341,13 @@
       </p:sp>
       <p:sp>
         <p:nvSpPr>
-          <p:cNvPr id="45" name="Text 43"/>
-          <p:cNvSpPr/>
-          <p:nvPr/>
-        </p:nvSpPr>
-        <p:spPr>
-          <a:xfrm>
-            <a:off x="2831592" y="4169664"/>
+          <p:cNvPr id="46" name="Text 44"/>
+          <p:cNvSpPr/>
+          <p:nvPr/>
+        </p:nvSpPr>
+        <p:spPr>
+          <a:xfrm>
+            <a:off x="4447032" y="4169664"/>
             <a:ext cx="685800" cy="475488"/>
           </a:xfrm>
           <a:prstGeom prst="rect">
@@ -31652,7 +32372,7 @@
                 <a:ea typeface="Trebuchet MS" pitchFamily="34" charset="-122"/>
                 <a:cs typeface="Trebuchet MS" pitchFamily="34" charset="-120"/>
               </a:rPr>
-              <a:t>v</a:t>
+              <a:t>t</a:t>
             </a:r>
             <a:endParaRPr lang="en-US" sz="900" dirty="0"/>
           </a:p>
@@ -31660,13 +32380,13 @@
       </p:sp>
       <p:sp>
         <p:nvSpPr>
-          <p:cNvPr id="46" name="Shape 44"/>
-          <p:cNvSpPr/>
-          <p:nvPr/>
-        </p:nvSpPr>
-        <p:spPr>
-          <a:xfrm>
-            <a:off x="3639312" y="4169664"/>
+          <p:cNvPr id="47" name="Shape 45"/>
+          <p:cNvSpPr/>
+          <p:nvPr/>
+        </p:nvSpPr>
+        <p:spPr>
+          <a:xfrm>
+            <a:off x="5254752" y="4169664"/>
             <a:ext cx="685800" cy="475488"/>
           </a:xfrm>
           <a:prstGeom prst="rect">
@@ -31687,13 +32407,13 @@
       </p:sp>
       <p:sp>
         <p:nvSpPr>
-          <p:cNvPr id="47" name="Text 45"/>
-          <p:cNvSpPr/>
-          <p:nvPr/>
-        </p:nvSpPr>
-        <p:spPr>
-          <a:xfrm>
-            <a:off x="3639312" y="4169664"/>
+          <p:cNvPr id="48" name="Text 46"/>
+          <p:cNvSpPr/>
+          <p:nvPr/>
+        </p:nvSpPr>
+        <p:spPr>
+          <a:xfrm>
+            <a:off x="5254752" y="4169664"/>
             <a:ext cx="685800" cy="475488"/>
           </a:xfrm>
           <a:prstGeom prst="rect">
@@ -31718,7 +32438,7 @@
                 <a:ea typeface="Trebuchet MS" pitchFamily="34" charset="-122"/>
                 <a:cs typeface="Trebuchet MS" pitchFamily="34" charset="-120"/>
               </a:rPr>
-              <a:t>er</a:t>
+              <a:t>e</a:t>
             </a:r>
             <a:endParaRPr lang="en-US" sz="900" dirty="0"/>
           </a:p>
@@ -31726,13 +32446,13 @@
       </p:sp>
       <p:sp>
         <p:nvSpPr>
-          <p:cNvPr id="48" name="Shape 46"/>
-          <p:cNvSpPr/>
-          <p:nvPr/>
-        </p:nvSpPr>
-        <p:spPr>
-          <a:xfrm>
-            <a:off x="4447032" y="4169664"/>
+          <p:cNvPr id="49" name="Shape 47"/>
+          <p:cNvSpPr/>
+          <p:nvPr/>
+        </p:nvSpPr>
+        <p:spPr>
+          <a:xfrm>
+            <a:off x="6062472" y="4169664"/>
             <a:ext cx="685800" cy="475488"/>
           </a:xfrm>
           <a:prstGeom prst="rect">
@@ -31753,13 +32473,13 @@
       </p:sp>
       <p:sp>
         <p:nvSpPr>
-          <p:cNvPr id="49" name="Text 47"/>
-          <p:cNvSpPr/>
-          <p:nvPr/>
-        </p:nvSpPr>
-        <p:spPr>
-          <a:xfrm>
-            <a:off x="4447032" y="4169664"/>
+          <p:cNvPr id="50" name="Text 48"/>
+          <p:cNvSpPr/>
+          <p:nvPr/>
+        </p:nvSpPr>
+        <p:spPr>
+          <a:xfrm>
+            <a:off x="6062472" y="4169664"/>
             <a:ext cx="685800" cy="475488"/>
           </a:xfrm>
           <a:prstGeom prst="rect">
@@ -31784,7 +32504,7 @@
                 <a:ea typeface="Trebuchet MS" pitchFamily="34" charset="-122"/>
                 <a:cs typeface="Trebuchet MS" pitchFamily="34" charset="-120"/>
               </a:rPr>
-              <a:t>s</a:t>
+              <a:t>n</a:t>
             </a:r>
             <a:endParaRPr lang="en-US" sz="900" dirty="0"/>
           </a:p>
@@ -31792,13 +32512,13 @@
       </p:sp>
       <p:sp>
         <p:nvSpPr>
-          <p:cNvPr id="50" name="Shape 48"/>
-          <p:cNvSpPr/>
-          <p:nvPr/>
-        </p:nvSpPr>
-        <p:spPr>
-          <a:xfrm>
-            <a:off x="5254752" y="4169664"/>
+          <p:cNvPr id="51" name="Shape 49"/>
+          <p:cNvSpPr/>
+          <p:nvPr/>
+        </p:nvSpPr>
+        <p:spPr>
+          <a:xfrm>
+            <a:off x="6870192" y="4169664"/>
             <a:ext cx="685800" cy="475488"/>
           </a:xfrm>
           <a:prstGeom prst="rect">
@@ -31819,13 +32539,13 @@
       </p:sp>
       <p:sp>
         <p:nvSpPr>
-          <p:cNvPr id="51" name="Text 49"/>
-          <p:cNvSpPr/>
-          <p:nvPr/>
-        </p:nvSpPr>
-        <p:spPr>
-          <a:xfrm>
-            <a:off x="5254752" y="4169664"/>
+          <p:cNvPr id="52" name="Text 50"/>
+          <p:cNvSpPr/>
+          <p:nvPr/>
+        </p:nvSpPr>
+        <p:spPr>
+          <a:xfrm>
+            <a:off x="6870192" y="4169664"/>
             <a:ext cx="685800" cy="475488"/>
           </a:xfrm>
           <a:prstGeom prst="rect">
@@ -31850,7 +32570,7 @@
                 <a:ea typeface="Trebuchet MS" pitchFamily="34" charset="-122"/>
                 <a:cs typeface="Trebuchet MS" pitchFamily="34" charset="-120"/>
               </a:rPr>
-              <a:t>o</a:t>
+              <a:t>i</a:t>
             </a:r>
             <a:endParaRPr lang="en-US" sz="900" dirty="0"/>
           </a:p>
@@ -31858,13 +32578,13 @@
       </p:sp>
       <p:sp>
         <p:nvSpPr>
-          <p:cNvPr id="52" name="Shape 50"/>
-          <p:cNvSpPr/>
-          <p:nvPr/>
-        </p:nvSpPr>
-        <p:spPr>
-          <a:xfrm>
-            <a:off x="6062472" y="4169664"/>
+          <p:cNvPr id="53" name="Shape 51"/>
+          <p:cNvSpPr/>
+          <p:nvPr/>
+        </p:nvSpPr>
+        <p:spPr>
+          <a:xfrm>
+            <a:off x="7677912" y="4169664"/>
             <a:ext cx="685800" cy="475488"/>
           </a:xfrm>
           <a:prstGeom prst="rect">
@@ -31885,13 +32605,13 @@
       </p:sp>
       <p:sp>
         <p:nvSpPr>
-          <p:cNvPr id="53" name="Text 51"/>
-          <p:cNvSpPr/>
-          <p:nvPr/>
-        </p:nvSpPr>
-        <p:spPr>
-          <a:xfrm>
-            <a:off x="6062472" y="4169664"/>
+          <p:cNvPr id="54" name="Text 52"/>
+          <p:cNvSpPr/>
+          <p:nvPr/>
+        </p:nvSpPr>
+        <p:spPr>
+          <a:xfrm>
+            <a:off x="7677912" y="4169664"/>
             <a:ext cx="685800" cy="475488"/>
           </a:xfrm>
           <a:prstGeom prst="rect">
@@ -31916,139 +32636,7 @@
                 <a:ea typeface="Trebuchet MS" pitchFamily="34" charset="-122"/>
                 <a:cs typeface="Trebuchet MS" pitchFamily="34" charset="-120"/>
               </a:rPr>
-              <a:t>ft</a:t>
-            </a:r>
-            <a:endParaRPr lang="en-US" sz="900" dirty="0"/>
-          </a:p>
-        </p:txBody>
-      </p:sp>
-      <p:sp>
-        <p:nvSpPr>
-          <p:cNvPr id="54" name="Shape 52"/>
-          <p:cNvSpPr/>
-          <p:nvPr/>
-        </p:nvSpPr>
-        <p:spPr>
-          <a:xfrm>
-            <a:off x="6870192" y="4169664"/>
-            <a:ext cx="685800" cy="475488"/>
-          </a:xfrm>
-          <a:prstGeom prst="rect">
-            <a:avLst>
-              <a:gd name="adj" fmla="val 7692"/>
-            </a:avLst>
-          </a:prstGeom>
-          <a:solidFill>
-            <a:srgbClr val="FFFFFF"/>
-          </a:solidFill>
-          <a:ln w="12700">
-            <a:solidFill>
-              <a:srgbClr val="DB2777"/>
-            </a:solidFill>
-            <a:prstDash val="solid"/>
-          </a:ln>
-        </p:spPr>
-      </p:sp>
-      <p:sp>
-        <p:nvSpPr>
-          <p:cNvPr id="55" name="Text 53"/>
-          <p:cNvSpPr/>
-          <p:nvPr/>
-        </p:nvSpPr>
-        <p:spPr>
-          <a:xfrm>
-            <a:off x="6870192" y="4169664"/>
-            <a:ext cx="685800" cy="475488"/>
-          </a:xfrm>
-          <a:prstGeom prst="rect">
-            <a:avLst/>
-          </a:prstGeom>
-          <a:noFill/>
-          <a:ln/>
-        </p:spPr>
-        <p:txBody>
-          <a:bodyPr wrap="square" lIns="0" tIns="0" rIns="0" bIns="0" rtlCol="0" anchor="ctr"/>
-          <a:lstStyle/>
-          <a:p>
-            <a:pPr algn="ctr" indent="0" marL="0">
-              <a:buNone/>
-            </a:pPr>
-            <a:r>
-              <a:rPr lang="en-US" sz="900" b="1" dirty="0">
-                <a:solidFill>
-                  <a:srgbClr val="9D174D"/>
-                </a:solidFill>
-                <a:latin typeface="Trebuchet MS" pitchFamily="34" charset="0"/>
-                <a:ea typeface="Trebuchet MS" pitchFamily="34" charset="-122"/>
-                <a:cs typeface="Trebuchet MS" pitchFamily="34" charset="-120"/>
-              </a:rPr>
-              <a:t>e</a:t>
-            </a:r>
-            <a:endParaRPr lang="en-US" sz="900" dirty="0"/>
-          </a:p>
-        </p:txBody>
-      </p:sp>
-      <p:sp>
-        <p:nvSpPr>
-          <p:cNvPr id="56" name="Shape 54"/>
-          <p:cNvSpPr/>
-          <p:nvPr/>
-        </p:nvSpPr>
-        <p:spPr>
-          <a:xfrm>
-            <a:off x="7677912" y="4169664"/>
-            <a:ext cx="685800" cy="475488"/>
-          </a:xfrm>
-          <a:prstGeom prst="rect">
-            <a:avLst>
-              <a:gd name="adj" fmla="val 7692"/>
-            </a:avLst>
-          </a:prstGeom>
-          <a:solidFill>
-            <a:srgbClr val="FFFFFF"/>
-          </a:solidFill>
-          <a:ln w="12700">
-            <a:solidFill>
-              <a:srgbClr val="DB2777"/>
-            </a:solidFill>
-            <a:prstDash val="solid"/>
-          </a:ln>
-        </p:spPr>
-      </p:sp>
-      <p:sp>
-        <p:nvSpPr>
-          <p:cNvPr id="57" name="Text 55"/>
-          <p:cNvSpPr/>
-          <p:nvPr/>
-        </p:nvSpPr>
-        <p:spPr>
-          <a:xfrm>
-            <a:off x="7677912" y="4169664"/>
-            <a:ext cx="685800" cy="475488"/>
-          </a:xfrm>
-          <a:prstGeom prst="rect">
-            <a:avLst/>
-          </a:prstGeom>
-          <a:noFill/>
-          <a:ln/>
-        </p:spPr>
-        <p:txBody>
-          <a:bodyPr wrap="square" lIns="0" tIns="0" rIns="0" bIns="0" rtlCol="0" anchor="ctr"/>
-          <a:lstStyle/>
-          <a:p>
-            <a:pPr algn="ctr" indent="0" marL="0">
-              <a:buNone/>
-            </a:pPr>
-            <a:r>
-              <a:rPr lang="en-US" sz="900" b="1" dirty="0">
-                <a:solidFill>
-                  <a:srgbClr val="9D174D"/>
-                </a:solidFill>
-                <a:latin typeface="Trebuchet MS" pitchFamily="34" charset="0"/>
-                <a:ea typeface="Trebuchet MS" pitchFamily="34" charset="-122"/>
-                <a:cs typeface="Trebuchet MS" pitchFamily="34" charset="-120"/>
-              </a:rPr>
-              <a:t>n</a:t>
+              <a:t>ng</a:t>
             </a:r>
             <a:endParaRPr lang="en-US" sz="900" dirty="0"/>
           </a:p>
@@ -32340,7 +32928,7 @@
                 <a:ea typeface="Calibri" pitchFamily="34" charset="-122"/>
                 <a:cs typeface="Calibri" pitchFamily="34" charset="-120"/>
               </a:rPr>
-              <a:t>Word Labs  •  wordlabs.app  •  Root: 'soft' = not hard, gentle, quiet</a:t>
+              <a:t>Word Labs  •  wordlabs.app  •  Root: 'soft' = not hard or rough</a:t>
             </a:r>
             <a:endParaRPr lang="en-US" sz="800" dirty="0"/>
           </a:p>
@@ -33509,7 +34097,7 @@
                 <a:ea typeface="Calibri" pitchFamily="34" charset="-122"/>
                 <a:cs typeface="Calibri" pitchFamily="34" charset="-120"/>
               </a:rPr>
-              <a:t>Word Labs  •  wordlabs.app  •  Root: 'soft' = not hard, gentle, quiet</a:t>
+              <a:t>Word Labs  •  wordlabs.app  •  Root: 'soft' = not hard or rough</a:t>
             </a:r>
             <a:endParaRPr lang="en-US" sz="800" dirty="0"/>
           </a:p>
@@ -33767,7 +34355,7 @@
             <a:avLst/>
           </a:prstGeom>
           <a:solidFill>
-            <a:srgbClr val="DDD6FE"/>
+            <a:srgbClr val="F8FAFC"/>
           </a:solidFill>
           <a:ln w="12700">
             <a:solidFill>
@@ -33779,14 +34367,39 @@
       </p:sp>
       <p:sp>
         <p:nvSpPr>
-          <p:cNvPr id="18" name="Text 16"/>
-          <p:cNvSpPr/>
-          <p:nvPr/>
-        </p:nvSpPr>
-        <p:spPr>
-          <a:xfrm>
-            <a:off x="365760" y="1563624"/>
-            <a:ext cx="2468880" cy="402336"/>
+          <p:cNvPr id="18" name="Shape 16"/>
+          <p:cNvSpPr/>
+          <p:nvPr/>
+        </p:nvSpPr>
+        <p:spPr>
+          <a:xfrm>
+            <a:off x="2971800" y="1563624"/>
+            <a:ext cx="2834640" cy="402336"/>
+          </a:xfrm>
+          <a:prstGeom prst="rect">
+            <a:avLst/>
+          </a:prstGeom>
+          <a:solidFill>
+            <a:srgbClr val="CCFBF1"/>
+          </a:solidFill>
+          <a:ln w="12700">
+            <a:solidFill>
+              <a:srgbClr val="E2E8F0"/>
+            </a:solidFill>
+            <a:prstDash val="solid"/>
+          </a:ln>
+        </p:spPr>
+      </p:sp>
+      <p:sp>
+        <p:nvSpPr>
+          <p:cNvPr id="19" name="Text 17"/>
+          <p:cNvSpPr/>
+          <p:nvPr/>
+        </p:nvSpPr>
+        <p:spPr>
+          <a:xfrm>
+            <a:off x="2971800" y="1563624"/>
+            <a:ext cx="2834640" cy="402336"/>
           </a:xfrm>
           <a:prstGeom prst="rect">
             <a:avLst/>
@@ -33804,13 +34417,13 @@
             <a:r>
               <a:rPr lang="en-US" sz="1300" b="1" dirty="0">
                 <a:solidFill>
-                  <a:srgbClr val="4C1D95"/>
+                  <a:srgbClr val="0F766E"/>
                 </a:solidFill>
                 <a:latin typeface="Trebuchet MS" pitchFamily="34" charset="0"/>
                 <a:ea typeface="Trebuchet MS" pitchFamily="34" charset="-122"/>
                 <a:cs typeface="Trebuchet MS" pitchFamily="34" charset="-120"/>
               </a:rPr>
-              <a:t>un-</a:t>
+              <a:t>soft</a:t>
             </a:r>
             <a:endParaRPr lang="en-US" sz="1300" dirty="0"/>
           </a:p>
@@ -33818,20 +34431,20 @@
       </p:sp>
       <p:sp>
         <p:nvSpPr>
-          <p:cNvPr id="19" name="Shape 17"/>
-          <p:cNvSpPr/>
-          <p:nvPr/>
-        </p:nvSpPr>
-        <p:spPr>
-          <a:xfrm>
-            <a:off x="2971800" y="1563624"/>
+          <p:cNvPr id="20" name="Shape 18"/>
+          <p:cNvSpPr/>
+          <p:nvPr/>
+        </p:nvSpPr>
+        <p:spPr>
+          <a:xfrm>
+            <a:off x="5943600" y="1563624"/>
             <a:ext cx="2834640" cy="402336"/>
           </a:xfrm>
           <a:prstGeom prst="rect">
             <a:avLst/>
           </a:prstGeom>
           <a:solidFill>
-            <a:srgbClr val="CCFBF1"/>
+            <a:srgbClr val="FCE7F3"/>
           </a:solidFill>
           <a:ln w="12700">
             <a:solidFill>
@@ -33843,13 +34456,13 @@
       </p:sp>
       <p:sp>
         <p:nvSpPr>
-          <p:cNvPr id="20" name="Text 18"/>
-          <p:cNvSpPr/>
-          <p:nvPr/>
-        </p:nvSpPr>
-        <p:spPr>
-          <a:xfrm>
-            <a:off x="2971800" y="1563624"/>
+          <p:cNvPr id="21" name="Text 19"/>
+          <p:cNvSpPr/>
+          <p:nvPr/>
+        </p:nvSpPr>
+        <p:spPr>
+          <a:xfrm>
+            <a:off x="5943600" y="1563624"/>
             <a:ext cx="2834640" cy="402336"/>
           </a:xfrm>
           <a:prstGeom prst="rect">
@@ -33868,13 +34481,13 @@
             <a:r>
               <a:rPr lang="en-US" sz="1300" b="1" dirty="0">
                 <a:solidFill>
-                  <a:srgbClr val="0F766E"/>
+                  <a:srgbClr val="9D174D"/>
                 </a:solidFill>
                 <a:latin typeface="Trebuchet MS" pitchFamily="34" charset="0"/>
                 <a:ea typeface="Trebuchet MS" pitchFamily="34" charset="-122"/>
                 <a:cs typeface="Trebuchet MS" pitchFamily="34" charset="-120"/>
               </a:rPr>
-              <a:t>soft</a:t>
+              <a:t>-en</a:t>
             </a:r>
             <a:endParaRPr lang="en-US" sz="1300" dirty="0"/>
           </a:p>
@@ -33882,19 +34495,69 @@
       </p:sp>
       <p:sp>
         <p:nvSpPr>
-          <p:cNvPr id="21" name="Shape 19"/>
-          <p:cNvSpPr/>
-          <p:nvPr/>
-        </p:nvSpPr>
-        <p:spPr>
-          <a:xfrm>
-            <a:off x="5943600" y="1563624"/>
+          <p:cNvPr id="22" name="Shape 20"/>
+          <p:cNvSpPr/>
+          <p:nvPr/>
+        </p:nvSpPr>
+        <p:spPr>
+          <a:xfrm>
+            <a:off x="365760" y="1984248"/>
+            <a:ext cx="2468880" cy="402336"/>
+          </a:xfrm>
+          <a:prstGeom prst="rect">
+            <a:avLst/>
+          </a:prstGeom>
+          <a:solidFill>
+            <a:srgbClr val="F1F5F9"/>
+          </a:solidFill>
+          <a:ln w="12700">
+            <a:solidFill>
+              <a:srgbClr val="E2E8F0"/>
+            </a:solidFill>
+            <a:prstDash val="solid"/>
+          </a:ln>
+        </p:spPr>
+      </p:sp>
+      <p:sp>
+        <p:nvSpPr>
+          <p:cNvPr id="23" name="Shape 21"/>
+          <p:cNvSpPr/>
+          <p:nvPr/>
+        </p:nvSpPr>
+        <p:spPr>
+          <a:xfrm>
+            <a:off x="2971800" y="1984248"/>
             <a:ext cx="2834640" cy="402336"/>
           </a:xfrm>
           <a:prstGeom prst="rect">
             <a:avLst/>
           </a:prstGeom>
           <a:solidFill>
+            <a:srgbClr val="F1F5F9"/>
+          </a:solidFill>
+          <a:ln w="12700">
+            <a:solidFill>
+              <a:srgbClr val="E2E8F0"/>
+            </a:solidFill>
+            <a:prstDash val="solid"/>
+          </a:ln>
+        </p:spPr>
+      </p:sp>
+      <p:sp>
+        <p:nvSpPr>
+          <p:cNvPr id="24" name="Shape 22"/>
+          <p:cNvSpPr/>
+          <p:nvPr/>
+        </p:nvSpPr>
+        <p:spPr>
+          <a:xfrm>
+            <a:off x="5943600" y="1984248"/>
+            <a:ext cx="2834640" cy="402336"/>
+          </a:xfrm>
+          <a:prstGeom prst="rect">
+            <a:avLst/>
+          </a:prstGeom>
+          <a:solidFill>
             <a:srgbClr val="FCE7F3"/>
           </a:solidFill>
           <a:ln w="12700">
@@ -33907,13 +34570,13 @@
       </p:sp>
       <p:sp>
         <p:nvSpPr>
-          <p:cNvPr id="22" name="Text 20"/>
-          <p:cNvSpPr/>
-          <p:nvPr/>
-        </p:nvSpPr>
-        <p:spPr>
-          <a:xfrm>
-            <a:off x="5943600" y="1563624"/>
+          <p:cNvPr id="25" name="Text 23"/>
+          <p:cNvSpPr/>
+          <p:nvPr/>
+        </p:nvSpPr>
+        <p:spPr>
+          <a:xfrm>
+            <a:off x="5943600" y="1984248"/>
             <a:ext cx="2834640" cy="402336"/>
           </a:xfrm>
           <a:prstGeom prst="rect">
@@ -33938,7 +34601,7 @@
                 <a:ea typeface="Trebuchet MS" pitchFamily="34" charset="-122"/>
                 <a:cs typeface="Trebuchet MS" pitchFamily="34" charset="-120"/>
               </a:rPr>
-              <a:t>-ly</a:t>
+              <a:t>-er</a:t>
             </a:r>
             <a:endParaRPr lang="en-US" sz="1300" dirty="0"/>
           </a:p>
@@ -33946,20 +34609,20 @@
       </p:sp>
       <p:sp>
         <p:nvSpPr>
-          <p:cNvPr id="23" name="Shape 21"/>
-          <p:cNvSpPr/>
-          <p:nvPr/>
-        </p:nvSpPr>
-        <p:spPr>
-          <a:xfrm>
-            <a:off x="365760" y="1984248"/>
+          <p:cNvPr id="26" name="Shape 24"/>
+          <p:cNvSpPr/>
+          <p:nvPr/>
+        </p:nvSpPr>
+        <p:spPr>
+          <a:xfrm>
+            <a:off x="365760" y="2404872"/>
             <a:ext cx="2468880" cy="402336"/>
           </a:xfrm>
           <a:prstGeom prst="rect">
             <a:avLst/>
           </a:prstGeom>
           <a:solidFill>
-            <a:srgbClr val="DDD6FE"/>
+            <a:srgbClr val="F8FAFC"/>
           </a:solidFill>
           <a:ln w="12700">
             <a:solidFill>
@@ -33971,14 +34634,64 @@
       </p:sp>
       <p:sp>
         <p:nvSpPr>
-          <p:cNvPr id="24" name="Text 22"/>
-          <p:cNvSpPr/>
-          <p:nvPr/>
-        </p:nvSpPr>
-        <p:spPr>
-          <a:xfrm>
-            <a:off x="365760" y="1984248"/>
-            <a:ext cx="2468880" cy="402336"/>
+          <p:cNvPr id="27" name="Shape 25"/>
+          <p:cNvSpPr/>
+          <p:nvPr/>
+        </p:nvSpPr>
+        <p:spPr>
+          <a:xfrm>
+            <a:off x="2971800" y="2404872"/>
+            <a:ext cx="2834640" cy="402336"/>
+          </a:xfrm>
+          <a:prstGeom prst="rect">
+            <a:avLst/>
+          </a:prstGeom>
+          <a:solidFill>
+            <a:srgbClr val="F8FAFC"/>
+          </a:solidFill>
+          <a:ln w="12700">
+            <a:solidFill>
+              <a:srgbClr val="E2E8F0"/>
+            </a:solidFill>
+            <a:prstDash val="solid"/>
+          </a:ln>
+        </p:spPr>
+      </p:sp>
+      <p:sp>
+        <p:nvSpPr>
+          <p:cNvPr id="28" name="Shape 26"/>
+          <p:cNvSpPr/>
+          <p:nvPr/>
+        </p:nvSpPr>
+        <p:spPr>
+          <a:xfrm>
+            <a:off x="5943600" y="2404872"/>
+            <a:ext cx="2834640" cy="402336"/>
+          </a:xfrm>
+          <a:prstGeom prst="rect">
+            <a:avLst/>
+          </a:prstGeom>
+          <a:solidFill>
+            <a:srgbClr val="FCE7F3"/>
+          </a:solidFill>
+          <a:ln w="12700">
+            <a:solidFill>
+              <a:srgbClr val="E2E8F0"/>
+            </a:solidFill>
+            <a:prstDash val="solid"/>
+          </a:ln>
+        </p:spPr>
+      </p:sp>
+      <p:sp>
+        <p:nvSpPr>
+          <p:cNvPr id="29" name="Text 27"/>
+          <p:cNvSpPr/>
+          <p:nvPr/>
+        </p:nvSpPr>
+        <p:spPr>
+          <a:xfrm>
+            <a:off x="5943600" y="2404872"/>
+            <a:ext cx="2834640" cy="402336"/>
           </a:xfrm>
           <a:prstGeom prst="rect">
             <a:avLst/>
@@ -33996,13 +34709,13 @@
             <a:r>
               <a:rPr lang="en-US" sz="1300" b="1" dirty="0">
                 <a:solidFill>
-                  <a:srgbClr val="4C1D95"/>
+                  <a:srgbClr val="9D174D"/>
                 </a:solidFill>
                 <a:latin typeface="Trebuchet MS" pitchFamily="34" charset="0"/>
                 <a:ea typeface="Trebuchet MS" pitchFamily="34" charset="-122"/>
                 <a:cs typeface="Trebuchet MS" pitchFamily="34" charset="-120"/>
               </a:rPr>
-              <a:t>over-</a:t>
+              <a:t>-est</a:t>
             </a:r>
             <a:endParaRPr lang="en-US" sz="1300" dirty="0"/>
           </a:p>
@@ -34010,13 +34723,38 @@
       </p:sp>
       <p:sp>
         <p:nvSpPr>
-          <p:cNvPr id="25" name="Shape 23"/>
-          <p:cNvSpPr/>
-          <p:nvPr/>
-        </p:nvSpPr>
-        <p:spPr>
-          <a:xfrm>
-            <a:off x="2971800" y="1984248"/>
+          <p:cNvPr id="30" name="Shape 28"/>
+          <p:cNvSpPr/>
+          <p:nvPr/>
+        </p:nvSpPr>
+        <p:spPr>
+          <a:xfrm>
+            <a:off x="365760" y="2825496"/>
+            <a:ext cx="2468880" cy="402336"/>
+          </a:xfrm>
+          <a:prstGeom prst="rect">
+            <a:avLst/>
+          </a:prstGeom>
+          <a:solidFill>
+            <a:srgbClr val="F1F5F9"/>
+          </a:solidFill>
+          <a:ln w="12700">
+            <a:solidFill>
+              <a:srgbClr val="E2E8F0"/>
+            </a:solidFill>
+            <a:prstDash val="solid"/>
+          </a:ln>
+        </p:spPr>
+      </p:sp>
+      <p:sp>
+        <p:nvSpPr>
+          <p:cNvPr id="31" name="Shape 29"/>
+          <p:cNvSpPr/>
+          <p:nvPr/>
+        </p:nvSpPr>
+        <p:spPr>
+          <a:xfrm>
+            <a:off x="2971800" y="2825496"/>
             <a:ext cx="2834640" cy="402336"/>
           </a:xfrm>
           <a:prstGeom prst="rect">
@@ -34035,13 +34773,13 @@
       </p:sp>
       <p:sp>
         <p:nvSpPr>
-          <p:cNvPr id="26" name="Shape 24"/>
-          <p:cNvSpPr/>
-          <p:nvPr/>
-        </p:nvSpPr>
-        <p:spPr>
-          <a:xfrm>
-            <a:off x="5943600" y="1984248"/>
+          <p:cNvPr id="32" name="Shape 30"/>
+          <p:cNvSpPr/>
+          <p:nvPr/>
+        </p:nvSpPr>
+        <p:spPr>
+          <a:xfrm>
+            <a:off x="5943600" y="2825496"/>
             <a:ext cx="2834640" cy="402336"/>
           </a:xfrm>
           <a:prstGeom prst="rect">
@@ -34060,13 +34798,13 @@
       </p:sp>
       <p:sp>
         <p:nvSpPr>
-          <p:cNvPr id="27" name="Text 25"/>
-          <p:cNvSpPr/>
-          <p:nvPr/>
-        </p:nvSpPr>
-        <p:spPr>
-          <a:xfrm>
-            <a:off x="5943600" y="1984248"/>
+          <p:cNvPr id="33" name="Text 31"/>
+          <p:cNvSpPr/>
+          <p:nvPr/>
+        </p:nvSpPr>
+        <p:spPr>
+          <a:xfrm>
+            <a:off x="5943600" y="2825496"/>
             <a:ext cx="2834640" cy="402336"/>
           </a:xfrm>
           <a:prstGeom prst="rect">
@@ -34091,7 +34829,7 @@
                 <a:ea typeface="Trebuchet MS" pitchFamily="34" charset="-122"/>
                 <a:cs typeface="Trebuchet MS" pitchFamily="34" charset="-120"/>
               </a:rPr>
-              <a:t>-en</a:t>
+              <a:t>-ly</a:t>
             </a:r>
             <a:endParaRPr lang="en-US" sz="1300" dirty="0"/>
           </a:p>
@@ -34099,20 +34837,20 @@
       </p:sp>
       <p:sp>
         <p:nvSpPr>
-          <p:cNvPr id="28" name="Shape 26"/>
-          <p:cNvSpPr/>
-          <p:nvPr/>
-        </p:nvSpPr>
-        <p:spPr>
-          <a:xfrm>
-            <a:off x="365760" y="2404872"/>
+          <p:cNvPr id="34" name="Shape 32"/>
+          <p:cNvSpPr/>
+          <p:nvPr/>
+        </p:nvSpPr>
+        <p:spPr>
+          <a:xfrm>
+            <a:off x="365760" y="3246120"/>
             <a:ext cx="2468880" cy="402336"/>
           </a:xfrm>
           <a:prstGeom prst="rect">
             <a:avLst/>
           </a:prstGeom>
           <a:solidFill>
-            <a:srgbClr val="DDD6FE"/>
+            <a:srgbClr val="F8FAFC"/>
           </a:solidFill>
           <a:ln w="12700">
             <a:solidFill>
@@ -34124,14 +34862,64 @@
       </p:sp>
       <p:sp>
         <p:nvSpPr>
-          <p:cNvPr id="29" name="Text 27"/>
-          <p:cNvSpPr/>
-          <p:nvPr/>
-        </p:nvSpPr>
-        <p:spPr>
-          <a:xfrm>
-            <a:off x="365760" y="2404872"/>
-            <a:ext cx="2468880" cy="402336"/>
+          <p:cNvPr id="35" name="Shape 33"/>
+          <p:cNvSpPr/>
+          <p:nvPr/>
+        </p:nvSpPr>
+        <p:spPr>
+          <a:xfrm>
+            <a:off x="2971800" y="3246120"/>
+            <a:ext cx="2834640" cy="402336"/>
+          </a:xfrm>
+          <a:prstGeom prst="rect">
+            <a:avLst/>
+          </a:prstGeom>
+          <a:solidFill>
+            <a:srgbClr val="F8FAFC"/>
+          </a:solidFill>
+          <a:ln w="12700">
+            <a:solidFill>
+              <a:srgbClr val="E2E8F0"/>
+            </a:solidFill>
+            <a:prstDash val="solid"/>
+          </a:ln>
+        </p:spPr>
+      </p:sp>
+      <p:sp>
+        <p:nvSpPr>
+          <p:cNvPr id="36" name="Shape 34"/>
+          <p:cNvSpPr/>
+          <p:nvPr/>
+        </p:nvSpPr>
+        <p:spPr>
+          <a:xfrm>
+            <a:off x="5943600" y="3246120"/>
+            <a:ext cx="2834640" cy="402336"/>
+          </a:xfrm>
+          <a:prstGeom prst="rect">
+            <a:avLst/>
+          </a:prstGeom>
+          <a:solidFill>
+            <a:srgbClr val="FCE7F3"/>
+          </a:solidFill>
+          <a:ln w="12700">
+            <a:solidFill>
+              <a:srgbClr val="E2E8F0"/>
+            </a:solidFill>
+            <a:prstDash val="solid"/>
+          </a:ln>
+        </p:spPr>
+      </p:sp>
+      <p:sp>
+        <p:nvSpPr>
+          <p:cNvPr id="37" name="Text 35"/>
+          <p:cNvSpPr/>
+          <p:nvPr/>
+        </p:nvSpPr>
+        <p:spPr>
+          <a:xfrm>
+            <a:off x="5943600" y="3246120"/>
+            <a:ext cx="2834640" cy="402336"/>
           </a:xfrm>
           <a:prstGeom prst="rect">
             <a:avLst/>
@@ -34149,13 +34937,13 @@
             <a:r>
               <a:rPr lang="en-US" sz="1300" b="1" dirty="0">
                 <a:solidFill>
-                  <a:srgbClr val="4C1D95"/>
+                  <a:srgbClr val="9D174D"/>
                 </a:solidFill>
                 <a:latin typeface="Trebuchet MS" pitchFamily="34" charset="0"/>
                 <a:ea typeface="Trebuchet MS" pitchFamily="34" charset="-122"/>
                 <a:cs typeface="Trebuchet MS" pitchFamily="34" charset="-120"/>
               </a:rPr>
-              <a:t>semi-</a:t>
+              <a:t>-ness</a:t>
             </a:r>
             <a:endParaRPr lang="en-US" sz="1300" dirty="0"/>
           </a:p>
@@ -34163,64 +34951,14 @@
       </p:sp>
       <p:sp>
         <p:nvSpPr>
-          <p:cNvPr id="30" name="Shape 28"/>
-          <p:cNvSpPr/>
-          <p:nvPr/>
-        </p:nvSpPr>
-        <p:spPr>
-          <a:xfrm>
-            <a:off x="2971800" y="2404872"/>
-            <a:ext cx="2834640" cy="402336"/>
-          </a:xfrm>
-          <a:prstGeom prst="rect">
-            <a:avLst/>
-          </a:prstGeom>
-          <a:solidFill>
-            <a:srgbClr val="F8FAFC"/>
-          </a:solidFill>
-          <a:ln w="12700">
-            <a:solidFill>
-              <a:srgbClr val="E2E8F0"/>
-            </a:solidFill>
-            <a:prstDash val="solid"/>
-          </a:ln>
-        </p:spPr>
-      </p:sp>
-      <p:sp>
-        <p:nvSpPr>
-          <p:cNvPr id="31" name="Shape 29"/>
-          <p:cNvSpPr/>
-          <p:nvPr/>
-        </p:nvSpPr>
-        <p:spPr>
-          <a:xfrm>
-            <a:off x="5943600" y="2404872"/>
-            <a:ext cx="2834640" cy="402336"/>
-          </a:xfrm>
-          <a:prstGeom prst="rect">
-            <a:avLst/>
-          </a:prstGeom>
-          <a:solidFill>
-            <a:srgbClr val="FCE7F3"/>
-          </a:solidFill>
-          <a:ln w="12700">
-            <a:solidFill>
-              <a:srgbClr val="E2E8F0"/>
-            </a:solidFill>
-            <a:prstDash val="solid"/>
-          </a:ln>
-        </p:spPr>
-      </p:sp>
-      <p:sp>
-        <p:nvSpPr>
-          <p:cNvPr id="32" name="Text 30"/>
-          <p:cNvSpPr/>
-          <p:nvPr/>
-        </p:nvSpPr>
-        <p:spPr>
-          <a:xfrm>
-            <a:off x="5943600" y="2404872"/>
-            <a:ext cx="2834640" cy="402336"/>
+          <p:cNvPr id="38" name="Text 36"/>
+          <p:cNvSpPr/>
+          <p:nvPr/>
+        </p:nvSpPr>
+        <p:spPr>
+          <a:xfrm>
+            <a:off x="365760" y="3611880"/>
+            <a:ext cx="1828800" cy="347472"/>
           </a:xfrm>
           <a:prstGeom prst="rect">
             <a:avLst/>
@@ -34232,59 +34970,61 @@
           <a:bodyPr wrap="square" lIns="0" tIns="0" rIns="0" bIns="0" rtlCol="0" anchor="ctr"/>
           <a:lstStyle/>
           <a:p>
-            <a:pPr algn="ctr" indent="0" marL="0">
-              <a:buNone/>
-            </a:pPr>
-            <a:r>
-              <a:rPr lang="en-US" sz="1300" b="1" dirty="0">
-                <a:solidFill>
-                  <a:srgbClr val="9D174D"/>
+            <a:pPr algn="l" indent="0" marL="0">
+              <a:buNone/>
+            </a:pPr>
+            <a:r>
+              <a:rPr lang="en-US" sz="1200" b="1" dirty="0">
+                <a:solidFill>
+                  <a:srgbClr val="0F172A"/>
                 </a:solidFill>
                 <a:latin typeface="Trebuchet MS" pitchFamily="34" charset="0"/>
                 <a:ea typeface="Trebuchet MS" pitchFamily="34" charset="-122"/>
                 <a:cs typeface="Trebuchet MS" pitchFamily="34" charset="-120"/>
               </a:rPr>
-              <a:t>-ness</a:t>
-            </a:r>
-            <a:endParaRPr lang="en-US" sz="1300" dirty="0"/>
-          </a:p>
-        </p:txBody>
-      </p:sp>
-      <p:sp>
-        <p:nvSpPr>
-          <p:cNvPr id="33" name="Shape 31"/>
-          <p:cNvSpPr/>
-          <p:nvPr/>
-        </p:nvSpPr>
-        <p:spPr>
-          <a:xfrm>
-            <a:off x="365760" y="2825496"/>
-            <a:ext cx="2468880" cy="402336"/>
-          </a:xfrm>
-          <a:prstGeom prst="rect">
-            <a:avLst/>
-          </a:prstGeom>
-          <a:solidFill>
-            <a:srgbClr val="DDD6FE"/>
-          </a:solidFill>
-          <a:ln w="12700">
-            <a:solidFill>
-              <a:srgbClr val="E2E8F0"/>
-            </a:solidFill>
-            <a:prstDash val="solid"/>
-          </a:ln>
-        </p:spPr>
-      </p:sp>
-      <p:sp>
-        <p:nvSpPr>
-          <p:cNvPr id="34" name="Text 32"/>
-          <p:cNvSpPr/>
-          <p:nvPr/>
-        </p:nvSpPr>
-        <p:spPr>
-          <a:xfrm>
-            <a:off x="365760" y="2825496"/>
-            <a:ext cx="2468880" cy="402336"/>
+              <a:t>Sample words:</a:t>
+            </a:r>
+            <a:endParaRPr lang="en-US" sz="1200" dirty="0"/>
+          </a:p>
+        </p:txBody>
+      </p:sp>
+      <p:sp>
+        <p:nvSpPr>
+          <p:cNvPr id="39" name="Shape 37"/>
+          <p:cNvSpPr/>
+          <p:nvPr/>
+        </p:nvSpPr>
+        <p:spPr>
+          <a:xfrm>
+            <a:off x="365760" y="4023360"/>
+            <a:ext cx="2011680" cy="402336"/>
+          </a:xfrm>
+          <a:prstGeom prst="rect">
+            <a:avLst>
+              <a:gd name="adj" fmla="val 13636"/>
+            </a:avLst>
+          </a:prstGeom>
+          <a:solidFill>
+            <a:srgbClr val="EEF2FF"/>
+          </a:solidFill>
+          <a:ln w="12700">
+            <a:solidFill>
+              <a:srgbClr val="6366F1"/>
+            </a:solidFill>
+            <a:prstDash val="solid"/>
+          </a:ln>
+        </p:spPr>
+      </p:sp>
+      <p:sp>
+        <p:nvSpPr>
+          <p:cNvPr id="40" name="Text 38"/>
+          <p:cNvSpPr/>
+          <p:nvPr/>
+        </p:nvSpPr>
+        <p:spPr>
+          <a:xfrm>
+            <a:off x="365760" y="4023360"/>
+            <a:ext cx="2011680" cy="402336"/>
           </a:xfrm>
           <a:prstGeom prst="rect">
             <a:avLst/>
@@ -34300,80 +35040,57 @@
               <a:buNone/>
             </a:pPr>
             <a:r>
-              <a:rPr lang="en-US" sz="1300" b="1" dirty="0">
-                <a:solidFill>
-                  <a:srgbClr val="4C1D95"/>
+              <a:rPr lang="en-US" sz="1200" b="1" dirty="0">
+                <a:solidFill>
+                  <a:srgbClr val="4338CA"/>
                 </a:solidFill>
                 <a:latin typeface="Trebuchet MS" pitchFamily="34" charset="0"/>
                 <a:ea typeface="Trebuchet MS" pitchFamily="34" charset="-122"/>
                 <a:cs typeface="Trebuchet MS" pitchFamily="34" charset="-120"/>
               </a:rPr>
-              <a:t>non-</a:t>
-            </a:r>
-            <a:endParaRPr lang="en-US" sz="1300" dirty="0"/>
-          </a:p>
-        </p:txBody>
-      </p:sp>
-      <p:sp>
-        <p:nvSpPr>
-          <p:cNvPr id="35" name="Shape 33"/>
-          <p:cNvSpPr/>
-          <p:nvPr/>
-        </p:nvSpPr>
-        <p:spPr>
-          <a:xfrm>
-            <a:off x="2971800" y="2825496"/>
-            <a:ext cx="2834640" cy="402336"/>
-          </a:xfrm>
-          <a:prstGeom prst="rect">
-            <a:avLst/>
-          </a:prstGeom>
-          <a:solidFill>
-            <a:srgbClr val="F1F5F9"/>
-          </a:solidFill>
-          <a:ln w="12700">
-            <a:solidFill>
-              <a:srgbClr val="E2E8F0"/>
-            </a:solidFill>
-            <a:prstDash val="solid"/>
-          </a:ln>
-        </p:spPr>
-      </p:sp>
-      <p:sp>
-        <p:nvSpPr>
-          <p:cNvPr id="36" name="Shape 34"/>
-          <p:cNvSpPr/>
-          <p:nvPr/>
-        </p:nvSpPr>
-        <p:spPr>
-          <a:xfrm>
-            <a:off x="5943600" y="2825496"/>
-            <a:ext cx="2834640" cy="402336"/>
-          </a:xfrm>
-          <a:prstGeom prst="rect">
-            <a:avLst/>
-          </a:prstGeom>
-          <a:solidFill>
-            <a:srgbClr val="FCE7F3"/>
-          </a:solidFill>
-          <a:ln w="12700">
-            <a:solidFill>
-              <a:srgbClr val="E2E8F0"/>
-            </a:solidFill>
-            <a:prstDash val="solid"/>
-          </a:ln>
-        </p:spPr>
-      </p:sp>
-      <p:sp>
-        <p:nvSpPr>
-          <p:cNvPr id="37" name="Text 35"/>
-          <p:cNvSpPr/>
-          <p:nvPr/>
-        </p:nvSpPr>
-        <p:spPr>
-          <a:xfrm>
-            <a:off x="5943600" y="2825496"/>
-            <a:ext cx="2834640" cy="402336"/>
+              <a:t>soft</a:t>
+            </a:r>
+            <a:endParaRPr lang="en-US" sz="1200" dirty="0"/>
+          </a:p>
+        </p:txBody>
+      </p:sp>
+      <p:sp>
+        <p:nvSpPr>
+          <p:cNvPr id="41" name="Shape 39"/>
+          <p:cNvSpPr/>
+          <p:nvPr/>
+        </p:nvSpPr>
+        <p:spPr>
+          <a:xfrm>
+            <a:off x="2542032" y="4023360"/>
+            <a:ext cx="2011680" cy="402336"/>
+          </a:xfrm>
+          <a:prstGeom prst="rect">
+            <a:avLst>
+              <a:gd name="adj" fmla="val 13636"/>
+            </a:avLst>
+          </a:prstGeom>
+          <a:solidFill>
+            <a:srgbClr val="EEF2FF"/>
+          </a:solidFill>
+          <a:ln w="12700">
+            <a:solidFill>
+              <a:srgbClr val="6366F1"/>
+            </a:solidFill>
+            <a:prstDash val="solid"/>
+          </a:ln>
+        </p:spPr>
+      </p:sp>
+      <p:sp>
+        <p:nvSpPr>
+          <p:cNvPr id="42" name="Text 40"/>
+          <p:cNvSpPr/>
+          <p:nvPr/>
+        </p:nvSpPr>
+        <p:spPr>
+          <a:xfrm>
+            <a:off x="2542032" y="4023360"/>
+            <a:ext cx="2011680" cy="402336"/>
           </a:xfrm>
           <a:prstGeom prst="rect">
             <a:avLst/>
@@ -34389,55 +35106,57 @@
               <a:buNone/>
             </a:pPr>
             <a:r>
-              <a:rPr lang="en-US" sz="1300" b="1" dirty="0">
-                <a:solidFill>
-                  <a:srgbClr val="9D174D"/>
+              <a:rPr lang="en-US" sz="1200" b="1" dirty="0">
+                <a:solidFill>
+                  <a:srgbClr val="4338CA"/>
                 </a:solidFill>
                 <a:latin typeface="Trebuchet MS" pitchFamily="34" charset="0"/>
                 <a:ea typeface="Trebuchet MS" pitchFamily="34" charset="-122"/>
                 <a:cs typeface="Trebuchet MS" pitchFamily="34" charset="-120"/>
               </a:rPr>
-              <a:t>-er</a:t>
-            </a:r>
-            <a:endParaRPr lang="en-US" sz="1300" dirty="0"/>
-          </a:p>
-        </p:txBody>
-      </p:sp>
-      <p:sp>
-        <p:nvSpPr>
-          <p:cNvPr id="38" name="Shape 36"/>
-          <p:cNvSpPr/>
-          <p:nvPr/>
-        </p:nvSpPr>
-        <p:spPr>
-          <a:xfrm>
-            <a:off x="365760" y="3246120"/>
-            <a:ext cx="2468880" cy="402336"/>
-          </a:xfrm>
-          <a:prstGeom prst="rect">
-            <a:avLst/>
-          </a:prstGeom>
-          <a:solidFill>
-            <a:srgbClr val="DDD6FE"/>
-          </a:solidFill>
-          <a:ln w="12700">
-            <a:solidFill>
-              <a:srgbClr val="E2E8F0"/>
-            </a:solidFill>
-            <a:prstDash val="solid"/>
-          </a:ln>
-        </p:spPr>
-      </p:sp>
-      <p:sp>
-        <p:nvSpPr>
-          <p:cNvPr id="39" name="Text 37"/>
-          <p:cNvSpPr/>
-          <p:nvPr/>
-        </p:nvSpPr>
-        <p:spPr>
-          <a:xfrm>
-            <a:off x="365760" y="3246120"/>
-            <a:ext cx="2468880" cy="402336"/>
+              <a:t>soften</a:t>
+            </a:r>
+            <a:endParaRPr lang="en-US" sz="1200" dirty="0"/>
+          </a:p>
+        </p:txBody>
+      </p:sp>
+      <p:sp>
+        <p:nvSpPr>
+          <p:cNvPr id="43" name="Shape 41"/>
+          <p:cNvSpPr/>
+          <p:nvPr/>
+        </p:nvSpPr>
+        <p:spPr>
+          <a:xfrm>
+            <a:off x="4718304" y="4023360"/>
+            <a:ext cx="2011680" cy="402336"/>
+          </a:xfrm>
+          <a:prstGeom prst="rect">
+            <a:avLst>
+              <a:gd name="adj" fmla="val 13636"/>
+            </a:avLst>
+          </a:prstGeom>
+          <a:solidFill>
+            <a:srgbClr val="EEF2FF"/>
+          </a:solidFill>
+          <a:ln w="12700">
+            <a:solidFill>
+              <a:srgbClr val="6366F1"/>
+            </a:solidFill>
+            <a:prstDash val="solid"/>
+          </a:ln>
+        </p:spPr>
+      </p:sp>
+      <p:sp>
+        <p:nvSpPr>
+          <p:cNvPr id="44" name="Text 42"/>
+          <p:cNvSpPr/>
+          <p:nvPr/>
+        </p:nvSpPr>
+        <p:spPr>
+          <a:xfrm>
+            <a:off x="4718304" y="4023360"/>
+            <a:ext cx="2011680" cy="402336"/>
           </a:xfrm>
           <a:prstGeom prst="rect">
             <a:avLst/>
@@ -34453,671 +35172,15 @@
               <a:buNone/>
             </a:pPr>
             <a:r>
-              <a:rPr lang="en-US" sz="1300" b="1" dirty="0">
-                <a:solidFill>
-                  <a:srgbClr val="4C1D95"/>
+              <a:rPr lang="en-US" sz="1200" b="1" dirty="0">
+                <a:solidFill>
+                  <a:srgbClr val="4338CA"/>
                 </a:solidFill>
                 <a:latin typeface="Trebuchet MS" pitchFamily="34" charset="0"/>
                 <a:ea typeface="Trebuchet MS" pitchFamily="34" charset="-122"/>
                 <a:cs typeface="Trebuchet MS" pitchFamily="34" charset="-120"/>
               </a:rPr>
-              <a:t>super-</a:t>
-            </a:r>
-            <a:endParaRPr lang="en-US" sz="1300" dirty="0"/>
-          </a:p>
-        </p:txBody>
-      </p:sp>
-      <p:sp>
-        <p:nvSpPr>
-          <p:cNvPr id="40" name="Shape 38"/>
-          <p:cNvSpPr/>
-          <p:nvPr/>
-        </p:nvSpPr>
-        <p:spPr>
-          <a:xfrm>
-            <a:off x="2971800" y="3246120"/>
-            <a:ext cx="2834640" cy="402336"/>
-          </a:xfrm>
-          <a:prstGeom prst="rect">
-            <a:avLst/>
-          </a:prstGeom>
-          <a:solidFill>
-            <a:srgbClr val="F8FAFC"/>
-          </a:solidFill>
-          <a:ln w="12700">
-            <a:solidFill>
-              <a:srgbClr val="E2E8F0"/>
-            </a:solidFill>
-            <a:prstDash val="solid"/>
-          </a:ln>
-        </p:spPr>
-      </p:sp>
-      <p:sp>
-        <p:nvSpPr>
-          <p:cNvPr id="41" name="Shape 39"/>
-          <p:cNvSpPr/>
-          <p:nvPr/>
-        </p:nvSpPr>
-        <p:spPr>
-          <a:xfrm>
-            <a:off x="5943600" y="3246120"/>
-            <a:ext cx="2834640" cy="402336"/>
-          </a:xfrm>
-          <a:prstGeom prst="rect">
-            <a:avLst/>
-          </a:prstGeom>
-          <a:solidFill>
-            <a:srgbClr val="FCE7F3"/>
-          </a:solidFill>
-          <a:ln w="12700">
-            <a:solidFill>
-              <a:srgbClr val="E2E8F0"/>
-            </a:solidFill>
-            <a:prstDash val="solid"/>
-          </a:ln>
-        </p:spPr>
-      </p:sp>
-      <p:sp>
-        <p:nvSpPr>
-          <p:cNvPr id="42" name="Text 40"/>
-          <p:cNvSpPr/>
-          <p:nvPr/>
-        </p:nvSpPr>
-        <p:spPr>
-          <a:xfrm>
-            <a:off x="5943600" y="3246120"/>
-            <a:ext cx="2834640" cy="402336"/>
-          </a:xfrm>
-          <a:prstGeom prst="rect">
-            <a:avLst/>
-          </a:prstGeom>
-          <a:noFill/>
-          <a:ln/>
-        </p:spPr>
-        <p:txBody>
-          <a:bodyPr wrap="square" lIns="0" tIns="0" rIns="0" bIns="0" rtlCol="0" anchor="ctr"/>
-          <a:lstStyle/>
-          <a:p>
-            <a:pPr algn="ctr" indent="0" marL="0">
-              <a:buNone/>
-            </a:pPr>
-            <a:r>
-              <a:rPr lang="en-US" sz="1300" b="1" dirty="0">
-                <a:solidFill>
-                  <a:srgbClr val="9D174D"/>
-                </a:solidFill>
-                <a:latin typeface="Trebuchet MS" pitchFamily="34" charset="0"/>
-                <a:ea typeface="Trebuchet MS" pitchFamily="34" charset="-122"/>
-                <a:cs typeface="Trebuchet MS" pitchFamily="34" charset="-120"/>
-              </a:rPr>
-              <a:t>-est</a:t>
-            </a:r>
-            <a:endParaRPr lang="en-US" sz="1300" dirty="0"/>
-          </a:p>
-        </p:txBody>
-      </p:sp>
-      <p:sp>
-        <p:nvSpPr>
-          <p:cNvPr id="43" name="Text 41"/>
-          <p:cNvSpPr/>
-          <p:nvPr/>
-        </p:nvSpPr>
-        <p:spPr>
-          <a:xfrm>
-            <a:off x="365760" y="3611880"/>
-            <a:ext cx="1828800" cy="347472"/>
-          </a:xfrm>
-          <a:prstGeom prst="rect">
-            <a:avLst/>
-          </a:prstGeom>
-          <a:noFill/>
-          <a:ln/>
-        </p:spPr>
-        <p:txBody>
-          <a:bodyPr wrap="square" lIns="0" tIns="0" rIns="0" bIns="0" rtlCol="0" anchor="ctr"/>
-          <a:lstStyle/>
-          <a:p>
-            <a:pPr algn="l" indent="0" marL="0">
-              <a:buNone/>
-            </a:pPr>
-            <a:r>
-              <a:rPr lang="en-US" sz="1200" b="1" dirty="0">
-                <a:solidFill>
-                  <a:srgbClr val="0F172A"/>
-                </a:solidFill>
-                <a:latin typeface="Trebuchet MS" pitchFamily="34" charset="0"/>
-                <a:ea typeface="Trebuchet MS" pitchFamily="34" charset="-122"/>
-                <a:cs typeface="Trebuchet MS" pitchFamily="34" charset="-120"/>
-              </a:rPr>
-              <a:t>Sample words:</a:t>
-            </a:r>
-            <a:endParaRPr lang="en-US" sz="1200" dirty="0"/>
-          </a:p>
-        </p:txBody>
-      </p:sp>
-      <p:sp>
-        <p:nvSpPr>
-          <p:cNvPr id="44" name="Shape 42"/>
-          <p:cNvSpPr/>
-          <p:nvPr/>
-        </p:nvSpPr>
-        <p:spPr>
-          <a:xfrm>
-            <a:off x="365760" y="4023360"/>
-            <a:ext cx="2011680" cy="402336"/>
-          </a:xfrm>
-          <a:prstGeom prst="rect">
-            <a:avLst>
-              <a:gd name="adj" fmla="val 13636"/>
-            </a:avLst>
-          </a:prstGeom>
-          <a:solidFill>
-            <a:srgbClr val="EEF2FF"/>
-          </a:solidFill>
-          <a:ln w="12700">
-            <a:solidFill>
-              <a:srgbClr val="6366F1"/>
-            </a:solidFill>
-            <a:prstDash val="solid"/>
-          </a:ln>
-        </p:spPr>
-      </p:sp>
-      <p:sp>
-        <p:nvSpPr>
-          <p:cNvPr id="45" name="Text 43"/>
-          <p:cNvSpPr/>
-          <p:nvPr/>
-        </p:nvSpPr>
-        <p:spPr>
-          <a:xfrm>
-            <a:off x="365760" y="4023360"/>
-            <a:ext cx="2011680" cy="402336"/>
-          </a:xfrm>
-          <a:prstGeom prst="rect">
-            <a:avLst/>
-          </a:prstGeom>
-          <a:noFill/>
-          <a:ln/>
-        </p:spPr>
-        <p:txBody>
-          <a:bodyPr wrap="square" lIns="0" tIns="0" rIns="0" bIns="0" rtlCol="0" anchor="ctr"/>
-          <a:lstStyle/>
-          <a:p>
-            <a:pPr algn="ctr" indent="0" marL="0">
-              <a:buNone/>
-            </a:pPr>
-            <a:r>
-              <a:rPr lang="en-US" sz="1200" b="1" dirty="0">
-                <a:solidFill>
-                  <a:srgbClr val="4338CA"/>
-                </a:solidFill>
-                <a:latin typeface="Trebuchet MS" pitchFamily="34" charset="0"/>
-                <a:ea typeface="Trebuchet MS" pitchFamily="34" charset="-122"/>
-                <a:cs typeface="Trebuchet MS" pitchFamily="34" charset="-120"/>
-              </a:rPr>
-              <a:t>softly</a:t>
-            </a:r>
-            <a:endParaRPr lang="en-US" sz="1200" dirty="0"/>
-          </a:p>
-        </p:txBody>
-      </p:sp>
-      <p:sp>
-        <p:nvSpPr>
-          <p:cNvPr id="46" name="Shape 44"/>
-          <p:cNvSpPr/>
-          <p:nvPr/>
-        </p:nvSpPr>
-        <p:spPr>
-          <a:xfrm>
-            <a:off x="2542032" y="4023360"/>
-            <a:ext cx="2011680" cy="402336"/>
-          </a:xfrm>
-          <a:prstGeom prst="rect">
-            <a:avLst>
-              <a:gd name="adj" fmla="val 13636"/>
-            </a:avLst>
-          </a:prstGeom>
-          <a:solidFill>
-            <a:srgbClr val="EEF2FF"/>
-          </a:solidFill>
-          <a:ln w="12700">
-            <a:solidFill>
-              <a:srgbClr val="6366F1"/>
-            </a:solidFill>
-            <a:prstDash val="solid"/>
-          </a:ln>
-        </p:spPr>
-      </p:sp>
-      <p:sp>
-        <p:nvSpPr>
-          <p:cNvPr id="47" name="Text 45"/>
-          <p:cNvSpPr/>
-          <p:nvPr/>
-        </p:nvSpPr>
-        <p:spPr>
-          <a:xfrm>
-            <a:off x="2542032" y="4023360"/>
-            <a:ext cx="2011680" cy="402336"/>
-          </a:xfrm>
-          <a:prstGeom prst="rect">
-            <a:avLst/>
-          </a:prstGeom>
-          <a:noFill/>
-          <a:ln/>
-        </p:spPr>
-        <p:txBody>
-          <a:bodyPr wrap="square" lIns="0" tIns="0" rIns="0" bIns="0" rtlCol="0" anchor="ctr"/>
-          <a:lstStyle/>
-          <a:p>
-            <a:pPr algn="ctr" indent="0" marL="0">
-              <a:buNone/>
-            </a:pPr>
-            <a:r>
-              <a:rPr lang="en-US" sz="1200" b="1" dirty="0">
-                <a:solidFill>
-                  <a:srgbClr val="4338CA"/>
-                </a:solidFill>
-                <a:latin typeface="Trebuchet MS" pitchFamily="34" charset="0"/>
-                <a:ea typeface="Trebuchet MS" pitchFamily="34" charset="-122"/>
-                <a:cs typeface="Trebuchet MS" pitchFamily="34" charset="-120"/>
-              </a:rPr>
-              <a:t>soften</a:t>
-            </a:r>
-            <a:endParaRPr lang="en-US" sz="1200" dirty="0"/>
-          </a:p>
-        </p:txBody>
-      </p:sp>
-      <p:sp>
-        <p:nvSpPr>
-          <p:cNvPr id="48" name="Shape 46"/>
-          <p:cNvSpPr/>
-          <p:nvPr/>
-        </p:nvSpPr>
-        <p:spPr>
-          <a:xfrm>
-            <a:off x="4718304" y="4023360"/>
-            <a:ext cx="2011680" cy="402336"/>
-          </a:xfrm>
-          <a:prstGeom prst="rect">
-            <a:avLst>
-              <a:gd name="adj" fmla="val 13636"/>
-            </a:avLst>
-          </a:prstGeom>
-          <a:solidFill>
-            <a:srgbClr val="EEF2FF"/>
-          </a:solidFill>
-          <a:ln w="12700">
-            <a:solidFill>
-              <a:srgbClr val="6366F1"/>
-            </a:solidFill>
-            <a:prstDash val="solid"/>
-          </a:ln>
-        </p:spPr>
-      </p:sp>
-      <p:sp>
-        <p:nvSpPr>
-          <p:cNvPr id="49" name="Text 47"/>
-          <p:cNvSpPr/>
-          <p:nvPr/>
-        </p:nvSpPr>
-        <p:spPr>
-          <a:xfrm>
-            <a:off x="4718304" y="4023360"/>
-            <a:ext cx="2011680" cy="402336"/>
-          </a:xfrm>
-          <a:prstGeom prst="rect">
-            <a:avLst/>
-          </a:prstGeom>
-          <a:noFill/>
-          <a:ln/>
-        </p:spPr>
-        <p:txBody>
-          <a:bodyPr wrap="square" lIns="0" tIns="0" rIns="0" bIns="0" rtlCol="0" anchor="ctr"/>
-          <a:lstStyle/>
-          <a:p>
-            <a:pPr algn="ctr" indent="0" marL="0">
-              <a:buNone/>
-            </a:pPr>
-            <a:r>
-              <a:rPr lang="en-US" sz="1200" b="1" dirty="0">
-                <a:solidFill>
-                  <a:srgbClr val="4338CA"/>
-                </a:solidFill>
-                <a:latin typeface="Trebuchet MS" pitchFamily="34" charset="0"/>
-                <a:ea typeface="Trebuchet MS" pitchFamily="34" charset="-122"/>
-                <a:cs typeface="Trebuchet MS" pitchFamily="34" charset="-120"/>
-              </a:rPr>
-              <a:t>softness</a:t>
-            </a:r>
-            <a:endParaRPr lang="en-US" sz="1200" dirty="0"/>
-          </a:p>
-        </p:txBody>
-      </p:sp>
-      <p:sp>
-        <p:nvSpPr>
-          <p:cNvPr id="50" name="Shape 48"/>
-          <p:cNvSpPr/>
-          <p:nvPr/>
-        </p:nvSpPr>
-        <p:spPr>
-          <a:xfrm>
-            <a:off x="6894576" y="4023360"/>
-            <a:ext cx="2011680" cy="402336"/>
-          </a:xfrm>
-          <a:prstGeom prst="rect">
-            <a:avLst>
-              <a:gd name="adj" fmla="val 13636"/>
-            </a:avLst>
-          </a:prstGeom>
-          <a:solidFill>
-            <a:srgbClr val="EEF2FF"/>
-          </a:solidFill>
-          <a:ln w="12700">
-            <a:solidFill>
-              <a:srgbClr val="6366F1"/>
-            </a:solidFill>
-            <a:prstDash val="solid"/>
-          </a:ln>
-        </p:spPr>
-      </p:sp>
-      <p:sp>
-        <p:nvSpPr>
-          <p:cNvPr id="51" name="Text 49"/>
-          <p:cNvSpPr/>
-          <p:nvPr/>
-        </p:nvSpPr>
-        <p:spPr>
-          <a:xfrm>
-            <a:off x="6894576" y="4023360"/>
-            <a:ext cx="2011680" cy="402336"/>
-          </a:xfrm>
-          <a:prstGeom prst="rect">
-            <a:avLst/>
-          </a:prstGeom>
-          <a:noFill/>
-          <a:ln/>
-        </p:spPr>
-        <p:txBody>
-          <a:bodyPr wrap="square" lIns="0" tIns="0" rIns="0" bIns="0" rtlCol="0" anchor="ctr"/>
-          <a:lstStyle/>
-          <a:p>
-            <a:pPr algn="ctr" indent="0" marL="0">
-              <a:buNone/>
-            </a:pPr>
-            <a:r>
-              <a:rPr lang="en-US" sz="1200" b="1" dirty="0">
-                <a:solidFill>
-                  <a:srgbClr val="4338CA"/>
-                </a:solidFill>
-                <a:latin typeface="Trebuchet MS" pitchFamily="34" charset="0"/>
-                <a:ea typeface="Trebuchet MS" pitchFamily="34" charset="-122"/>
-                <a:cs typeface="Trebuchet MS" pitchFamily="34" charset="-120"/>
-              </a:rPr>
               <a:t>softer</a:t>
-            </a:r>
-            <a:endParaRPr lang="en-US" sz="1200" dirty="0"/>
-          </a:p>
-        </p:txBody>
-      </p:sp>
-      <p:sp>
-        <p:nvSpPr>
-          <p:cNvPr id="52" name="Shape 50"/>
-          <p:cNvSpPr/>
-          <p:nvPr/>
-        </p:nvSpPr>
-        <p:spPr>
-          <a:xfrm>
-            <a:off x="365760" y="4498848"/>
-            <a:ext cx="2011680" cy="402336"/>
-          </a:xfrm>
-          <a:prstGeom prst="rect">
-            <a:avLst>
-              <a:gd name="adj" fmla="val 13636"/>
-            </a:avLst>
-          </a:prstGeom>
-          <a:solidFill>
-            <a:srgbClr val="EEF2FF"/>
-          </a:solidFill>
-          <a:ln w="12700">
-            <a:solidFill>
-              <a:srgbClr val="6366F1"/>
-            </a:solidFill>
-            <a:prstDash val="solid"/>
-          </a:ln>
-        </p:spPr>
-      </p:sp>
-      <p:sp>
-        <p:nvSpPr>
-          <p:cNvPr id="53" name="Text 51"/>
-          <p:cNvSpPr/>
-          <p:nvPr/>
-        </p:nvSpPr>
-        <p:spPr>
-          <a:xfrm>
-            <a:off x="365760" y="4498848"/>
-            <a:ext cx="2011680" cy="402336"/>
-          </a:xfrm>
-          <a:prstGeom prst="rect">
-            <a:avLst/>
-          </a:prstGeom>
-          <a:noFill/>
-          <a:ln/>
-        </p:spPr>
-        <p:txBody>
-          <a:bodyPr wrap="square" lIns="0" tIns="0" rIns="0" bIns="0" rtlCol="0" anchor="ctr"/>
-          <a:lstStyle/>
-          <a:p>
-            <a:pPr algn="ctr" indent="0" marL="0">
-              <a:buNone/>
-            </a:pPr>
-            <a:r>
-              <a:rPr lang="en-US" sz="1200" b="1" dirty="0">
-                <a:solidFill>
-                  <a:srgbClr val="4338CA"/>
-                </a:solidFill>
-                <a:latin typeface="Trebuchet MS" pitchFamily="34" charset="0"/>
-                <a:ea typeface="Trebuchet MS" pitchFamily="34" charset="-122"/>
-                <a:cs typeface="Trebuchet MS" pitchFamily="34" charset="-120"/>
-              </a:rPr>
-              <a:t>softest</a:t>
-            </a:r>
-            <a:endParaRPr lang="en-US" sz="1200" dirty="0"/>
-          </a:p>
-        </p:txBody>
-      </p:sp>
-      <p:sp>
-        <p:nvSpPr>
-          <p:cNvPr id="54" name="Shape 52"/>
-          <p:cNvSpPr/>
-          <p:nvPr/>
-        </p:nvSpPr>
-        <p:spPr>
-          <a:xfrm>
-            <a:off x="2542032" y="4498848"/>
-            <a:ext cx="2011680" cy="402336"/>
-          </a:xfrm>
-          <a:prstGeom prst="rect">
-            <a:avLst>
-              <a:gd name="adj" fmla="val 13636"/>
-            </a:avLst>
-          </a:prstGeom>
-          <a:solidFill>
-            <a:srgbClr val="EEF2FF"/>
-          </a:solidFill>
-          <a:ln w="12700">
-            <a:solidFill>
-              <a:srgbClr val="6366F1"/>
-            </a:solidFill>
-            <a:prstDash val="solid"/>
-          </a:ln>
-        </p:spPr>
-      </p:sp>
-      <p:sp>
-        <p:nvSpPr>
-          <p:cNvPr id="55" name="Text 53"/>
-          <p:cNvSpPr/>
-          <p:nvPr/>
-        </p:nvSpPr>
-        <p:spPr>
-          <a:xfrm>
-            <a:off x="2542032" y="4498848"/>
-            <a:ext cx="2011680" cy="402336"/>
-          </a:xfrm>
-          <a:prstGeom prst="rect">
-            <a:avLst/>
-          </a:prstGeom>
-          <a:noFill/>
-          <a:ln/>
-        </p:spPr>
-        <p:txBody>
-          <a:bodyPr wrap="square" lIns="0" tIns="0" rIns="0" bIns="0" rtlCol="0" anchor="ctr"/>
-          <a:lstStyle/>
-          <a:p>
-            <a:pPr algn="ctr" indent="0" marL="0">
-              <a:buNone/>
-            </a:pPr>
-            <a:r>
-              <a:rPr lang="en-US" sz="1200" b="1" dirty="0">
-                <a:solidFill>
-                  <a:srgbClr val="4338CA"/>
-                </a:solidFill>
-                <a:latin typeface="Trebuchet MS" pitchFamily="34" charset="0"/>
-                <a:ea typeface="Trebuchet MS" pitchFamily="34" charset="-122"/>
-                <a:cs typeface="Trebuchet MS" pitchFamily="34" charset="-120"/>
-              </a:rPr>
-              <a:t>unsoftened</a:t>
-            </a:r>
-            <a:endParaRPr lang="en-US" sz="1200" dirty="0"/>
-          </a:p>
-        </p:txBody>
-      </p:sp>
-      <p:sp>
-        <p:nvSpPr>
-          <p:cNvPr id="56" name="Shape 54"/>
-          <p:cNvSpPr/>
-          <p:nvPr/>
-        </p:nvSpPr>
-        <p:spPr>
-          <a:xfrm>
-            <a:off x="4718304" y="4498848"/>
-            <a:ext cx="2011680" cy="402336"/>
-          </a:xfrm>
-          <a:prstGeom prst="rect">
-            <a:avLst>
-              <a:gd name="adj" fmla="val 13636"/>
-            </a:avLst>
-          </a:prstGeom>
-          <a:solidFill>
-            <a:srgbClr val="EEF2FF"/>
-          </a:solidFill>
-          <a:ln w="12700">
-            <a:solidFill>
-              <a:srgbClr val="6366F1"/>
-            </a:solidFill>
-            <a:prstDash val="solid"/>
-          </a:ln>
-        </p:spPr>
-      </p:sp>
-      <p:sp>
-        <p:nvSpPr>
-          <p:cNvPr id="57" name="Text 55"/>
-          <p:cNvSpPr/>
-          <p:nvPr/>
-        </p:nvSpPr>
-        <p:spPr>
-          <a:xfrm>
-            <a:off x="4718304" y="4498848"/>
-            <a:ext cx="2011680" cy="402336"/>
-          </a:xfrm>
-          <a:prstGeom prst="rect">
-            <a:avLst/>
-          </a:prstGeom>
-          <a:noFill/>
-          <a:ln/>
-        </p:spPr>
-        <p:txBody>
-          <a:bodyPr wrap="square" lIns="0" tIns="0" rIns="0" bIns="0" rtlCol="0" anchor="ctr"/>
-          <a:lstStyle/>
-          <a:p>
-            <a:pPr algn="ctr" indent="0" marL="0">
-              <a:buNone/>
-            </a:pPr>
-            <a:r>
-              <a:rPr lang="en-US" sz="1200" b="1" dirty="0">
-                <a:solidFill>
-                  <a:srgbClr val="4338CA"/>
-                </a:solidFill>
-                <a:latin typeface="Trebuchet MS" pitchFamily="34" charset="0"/>
-                <a:ea typeface="Trebuchet MS" pitchFamily="34" charset="-122"/>
-                <a:cs typeface="Trebuchet MS" pitchFamily="34" charset="-120"/>
-              </a:rPr>
-              <a:t>oversoften</a:t>
-            </a:r>
-            <a:endParaRPr lang="en-US" sz="1200" dirty="0"/>
-          </a:p>
-        </p:txBody>
-      </p:sp>
-      <p:sp>
-        <p:nvSpPr>
-          <p:cNvPr id="58" name="Shape 56"/>
-          <p:cNvSpPr/>
-          <p:nvPr/>
-        </p:nvSpPr>
-        <p:spPr>
-          <a:xfrm>
-            <a:off x="6894576" y="4498848"/>
-            <a:ext cx="2011680" cy="402336"/>
-          </a:xfrm>
-          <a:prstGeom prst="rect">
-            <a:avLst>
-              <a:gd name="adj" fmla="val 13636"/>
-            </a:avLst>
-          </a:prstGeom>
-          <a:solidFill>
-            <a:srgbClr val="EEF2FF"/>
-          </a:solidFill>
-          <a:ln w="12700">
-            <a:solidFill>
-              <a:srgbClr val="6366F1"/>
-            </a:solidFill>
-            <a:prstDash val="solid"/>
-          </a:ln>
-        </p:spPr>
-      </p:sp>
-      <p:sp>
-        <p:nvSpPr>
-          <p:cNvPr id="59" name="Text 57"/>
-          <p:cNvSpPr/>
-          <p:nvPr/>
-        </p:nvSpPr>
-        <p:spPr>
-          <a:xfrm>
-            <a:off x="6894576" y="4498848"/>
-            <a:ext cx="2011680" cy="402336"/>
-          </a:xfrm>
-          <a:prstGeom prst="rect">
-            <a:avLst/>
-          </a:prstGeom>
-          <a:noFill/>
-          <a:ln/>
-        </p:spPr>
-        <p:txBody>
-          <a:bodyPr wrap="square" lIns="0" tIns="0" rIns="0" bIns="0" rtlCol="0" anchor="ctr"/>
-          <a:lstStyle/>
-          <a:p>
-            <a:pPr algn="ctr" indent="0" marL="0">
-              <a:buNone/>
-            </a:pPr>
-            <a:r>
-              <a:rPr lang="en-US" sz="1200" b="1" dirty="0">
-                <a:solidFill>
-                  <a:srgbClr val="4338CA"/>
-                </a:solidFill>
-                <a:latin typeface="Trebuchet MS" pitchFamily="34" charset="0"/>
-                <a:ea typeface="Trebuchet MS" pitchFamily="34" charset="-122"/>
-                <a:cs typeface="Trebuchet MS" pitchFamily="34" charset="-120"/>
-              </a:rPr>
-              <a:t>softener</a:t>
             </a:r>
             <a:endParaRPr lang="en-US" sz="1200" dirty="0"/>
           </a:p>
@@ -35409,7 +35472,7 @@
                 <a:ea typeface="Calibri" pitchFamily="34" charset="-122"/>
                 <a:cs typeface="Calibri" pitchFamily="34" charset="-120"/>
               </a:rPr>
-              <a:t>Word Labs  •  wordlabs.app  •  Root: 'soft' = not hard, gentle, quiet</a:t>
+              <a:t>Word Labs  •  wordlabs.app  •  Root: 'soft' = not hard or rough</a:t>
             </a:r>
             <a:endParaRPr lang="en-US" sz="800" dirty="0"/>
           </a:p>
@@ -35573,7 +35636,7 @@
                 <a:ea typeface="Calibri" pitchFamily="34" charset="-122"/>
                 <a:cs typeface="Calibri" pitchFamily="34" charset="-120"/>
               </a:rPr>
-              <a:t>The core part of a word carrying its basic meaning. For example, 'soft' means 'not hard, gentle, quiet'.</a:t>
+              <a:t>The core part of a word carrying its basic meaning. For example, 'soft' means 'not hard or rough'.</a:t>
             </a:r>
             <a:endParaRPr lang="en-US" sz="1350" dirty="0"/>
           </a:p>
@@ -36193,7 +36256,7 @@
                 <a:ea typeface="Calibri" pitchFamily="34" charset="-122"/>
                 <a:cs typeface="Calibri" pitchFamily="34" charset="-120"/>
               </a:rPr>
-              <a:t>Word Labs  •  wordlabs.app  •  Root: 'soft' = not hard, gentle, quiet</a:t>
+              <a:t>Word Labs  •  wordlabs.app  •  Root: 'soft' = not hard or rough</a:t>
             </a:r>
             <a:endParaRPr lang="en-US" sz="800" dirty="0"/>
           </a:p>
@@ -36305,7 +36368,7 @@
                 <a:ea typeface="Calibri" pitchFamily="34" charset="-122"/>
                 <a:cs typeface="Calibri" pitchFamily="34" charset="-120"/>
               </a:rPr>
-              <a:t>1.  The word 'softest' means something is only slightly soft.</a:t>
+              <a:t>1.  'soften' means 'to make something much louder'.</a:t>
             </a:r>
             <a:endParaRPr lang="en-US" sz="1300" dirty="0"/>
           </a:p>
@@ -36444,7 +36507,7 @@
                 <a:ea typeface="Calibri" pitchFamily="34" charset="-122"/>
                 <a:cs typeface="Calibri" pitchFamily="34" charset="-120"/>
               </a:rPr>
-              <a:t>2.  The word 'softly' contains the root 'soft' plus the suffix '-ly'.</a:t>
+              <a:t>2.  'soften' means 'to make or become less hard or firm'.</a:t>
             </a:r>
             <a:endParaRPr lang="en-US" sz="1300" dirty="0"/>
           </a:p>
@@ -36583,7 +36646,7 @@
                 <a:ea typeface="Calibri" pitchFamily="34" charset="-122"/>
                 <a:cs typeface="Calibri" pitchFamily="34" charset="-120"/>
               </a:rPr>
-              <a:t>3.  The root 'soft' comes from the Greek language.</a:t>
+              <a:t>3.  'soft' means 'not hard or rough'.</a:t>
             </a:r>
             <a:endParaRPr lang="en-US" sz="1300" dirty="0"/>
           </a:p>
@@ -36606,11 +36669,11 @@
             </a:avLst>
           </a:prstGeom>
           <a:solidFill>
-            <a:srgbClr val="FEE2E2"/>
-          </a:solidFill>
-          <a:ln w="12700">
-            <a:solidFill>
-              <a:srgbClr val="DC2626"/>
+            <a:srgbClr val="DCFCE7"/>
+          </a:solidFill>
+          <a:ln w="12700">
+            <a:solidFill>
+              <a:srgbClr val="16A34A"/>
             </a:solidFill>
             <a:prstDash val="solid"/>
           </a:ln>
@@ -36643,13 +36706,13 @@
             <a:r>
               <a:rPr lang="en-US" sz="1100" b="1" dirty="0">
                 <a:solidFill>
-                  <a:srgbClr val="DC2626"/>
+                  <a:srgbClr val="16A34A"/>
                 </a:solidFill>
                 <a:latin typeface="Trebuchet MS" pitchFamily="34" charset="0"/>
                 <a:ea typeface="Trebuchet MS" pitchFamily="34" charset="-122"/>
                 <a:cs typeface="Trebuchet MS" pitchFamily="34" charset="-120"/>
               </a:rPr>
-              <a:t>FALSE</a:t>
+              <a:t>TRUE</a:t>
             </a:r>
             <a:endParaRPr lang="en-US" sz="1100" dirty="0"/>
           </a:p>
@@ -36722,7 +36785,7 @@
                 <a:ea typeface="Calibri" pitchFamily="34" charset="-122"/>
                 <a:cs typeface="Calibri" pitchFamily="34" charset="-120"/>
               </a:rPr>
-              <a:t>4.  The prefix 'un-' can be added to softened to mean not softened.</a:t>
+              <a:t>4.  'soft' means 'not hard or firm to the touch'.</a:t>
             </a:r>
             <a:endParaRPr lang="en-US" sz="1300" dirty="0"/>
           </a:p>
@@ -36861,7 +36924,7 @@
                 <a:ea typeface="Calibri" pitchFamily="34" charset="-122"/>
                 <a:cs typeface="Calibri" pitchFamily="34" charset="-120"/>
               </a:rPr>
-              <a:t>5.  Adding '-en' to 'soft' makes the verb 'soften', meaning to make something softer.</a:t>
+              <a:t>5.  'soft' means 'extremely loud in sound'.</a:t>
             </a:r>
             <a:endParaRPr lang="en-US" sz="1300" dirty="0"/>
           </a:p>
@@ -36884,11 +36947,11 @@
             </a:avLst>
           </a:prstGeom>
           <a:solidFill>
-            <a:srgbClr val="DCFCE7"/>
-          </a:solidFill>
-          <a:ln w="12700">
-            <a:solidFill>
-              <a:srgbClr val="16A34A"/>
+            <a:srgbClr val="FEE2E2"/>
+          </a:solidFill>
+          <a:ln w="12700">
+            <a:solidFill>
+              <a:srgbClr val="DC2626"/>
             </a:solidFill>
             <a:prstDash val="solid"/>
           </a:ln>
@@ -36921,13 +36984,13 @@
             <a:r>
               <a:rPr lang="en-US" sz="1100" b="1" dirty="0">
                 <a:solidFill>
-                  <a:srgbClr val="16A34A"/>
+                  <a:srgbClr val="DC2626"/>
                 </a:solidFill>
                 <a:latin typeface="Trebuchet MS" pitchFamily="34" charset="0"/>
                 <a:ea typeface="Trebuchet MS" pitchFamily="34" charset="-122"/>
                 <a:cs typeface="Trebuchet MS" pitchFamily="34" charset="-120"/>
               </a:rPr>
-              <a:t>TRUE</a:t>
+              <a:t>FALSE</a:t>
             </a:r>
             <a:endParaRPr lang="en-US" sz="1100" dirty="0"/>
           </a:p>
@@ -37219,7 +37282,7 @@
                 <a:ea typeface="Calibri" pitchFamily="34" charset="-122"/>
                 <a:cs typeface="Calibri" pitchFamily="34" charset="-120"/>
               </a:rPr>
-              <a:t>Word Labs  •  wordlabs.app  •  Root: 'soft' = not hard, gentle, quiet</a:t>
+              <a:t>Word Labs  •  wordlabs.app  •  Root: 'soft' = not hard or rough</a:t>
             </a:r>
             <a:endParaRPr lang="en-US" sz="800" dirty="0"/>
           </a:p>
@@ -37356,7 +37419,7 @@
                 <a:ea typeface="Trebuchet MS" pitchFamily="34" charset="-122"/>
                 <a:cs typeface="Trebuchet MS" pitchFamily="34" charset="-120"/>
               </a:rPr>
-              <a:t>not hard, gentle, quiet</a:t>
+              <a:t>not hard or rough</a:t>
             </a:r>
             <a:endParaRPr lang="en-US" sz="2000" dirty="0"/>
           </a:p>
@@ -37395,7 +37458,7 @@
                 <a:ea typeface="Calibri" pitchFamily="34" charset="-122"/>
                 <a:cs typeface="Calibri" pitchFamily="34" charset="-120"/>
               </a:rPr>
-              <a:t>Origin: Latin: softus</a:t>
+              <a:t>Origin: Anglo-Saxon (Old English) root</a:t>
             </a:r>
             <a:endParaRPr lang="en-US" sz="1100" dirty="0"/>
           </a:p>
@@ -37500,7 +37563,7 @@
                 <a:ea typeface="Trebuchet MS" pitchFamily="34" charset="-122"/>
                 <a:cs typeface="Trebuchet MS" pitchFamily="34" charset="-120"/>
               </a:rPr>
-              <a:t>softly</a:t>
+              <a:t>soft</a:t>
             </a:r>
             <a:endParaRPr lang="en-US" sz="1300" dirty="0"/>
           </a:p>
@@ -37632,271 +37695,7 @@
                 <a:ea typeface="Trebuchet MS" pitchFamily="34" charset="-122"/>
                 <a:cs typeface="Trebuchet MS" pitchFamily="34" charset="-120"/>
               </a:rPr>
-              <a:t>softness</a:t>
-            </a:r>
-            <a:endParaRPr lang="en-US" sz="1300" dirty="0"/>
-          </a:p>
-        </p:txBody>
-      </p:sp>
-      <p:sp>
-        <p:nvSpPr>
-          <p:cNvPr id="22" name="Shape 20"/>
-          <p:cNvSpPr/>
-          <p:nvPr/>
-        </p:nvSpPr>
-        <p:spPr>
-          <a:xfrm>
-            <a:off x="6812280" y="2743200"/>
-            <a:ext cx="2011680" cy="502920"/>
-          </a:xfrm>
-          <a:prstGeom prst="rect">
-            <a:avLst>
-              <a:gd name="adj" fmla="val 14545"/>
-            </a:avLst>
-          </a:prstGeom>
-          <a:solidFill>
-            <a:srgbClr val="EEF2FF"/>
-          </a:solidFill>
-          <a:ln w="12700">
-            <a:solidFill>
-              <a:srgbClr val="6366F1"/>
-            </a:solidFill>
-            <a:prstDash val="solid"/>
-          </a:ln>
-        </p:spPr>
-      </p:sp>
-      <p:sp>
-        <p:nvSpPr>
-          <p:cNvPr id="23" name="Text 21"/>
-          <p:cNvSpPr/>
-          <p:nvPr/>
-        </p:nvSpPr>
-        <p:spPr>
-          <a:xfrm>
-            <a:off x="6812280" y="2743200"/>
-            <a:ext cx="2011680" cy="502920"/>
-          </a:xfrm>
-          <a:prstGeom prst="rect">
-            <a:avLst/>
-          </a:prstGeom>
-          <a:noFill/>
-          <a:ln/>
-        </p:spPr>
-        <p:txBody>
-          <a:bodyPr wrap="square" lIns="0" tIns="0" rIns="0" bIns="0" rtlCol="0" anchor="ctr"/>
-          <a:lstStyle/>
-          <a:p>
-            <a:pPr algn="ctr" indent="0" marL="0">
-              <a:buNone/>
-            </a:pPr>
-            <a:r>
-              <a:rPr lang="en-US" sz="1300" b="1" dirty="0">
-                <a:solidFill>
-                  <a:srgbClr val="4338CA"/>
-                </a:solidFill>
-                <a:latin typeface="Trebuchet MS" pitchFamily="34" charset="0"/>
-                <a:ea typeface="Trebuchet MS" pitchFamily="34" charset="-122"/>
-                <a:cs typeface="Trebuchet MS" pitchFamily="34" charset="-120"/>
-              </a:rPr>
               <a:t>softer</a:t>
-            </a:r>
-            <a:endParaRPr lang="en-US" sz="1300" dirty="0"/>
-          </a:p>
-        </p:txBody>
-      </p:sp>
-      <p:sp>
-        <p:nvSpPr>
-          <p:cNvPr id="24" name="Shape 22"/>
-          <p:cNvSpPr/>
-          <p:nvPr/>
-        </p:nvSpPr>
-        <p:spPr>
-          <a:xfrm>
-            <a:off x="365760" y="3401568"/>
-            <a:ext cx="2011680" cy="502920"/>
-          </a:xfrm>
-          <a:prstGeom prst="rect">
-            <a:avLst>
-              <a:gd name="adj" fmla="val 14545"/>
-            </a:avLst>
-          </a:prstGeom>
-          <a:solidFill>
-            <a:srgbClr val="EEF2FF"/>
-          </a:solidFill>
-          <a:ln w="12700">
-            <a:solidFill>
-              <a:srgbClr val="6366F1"/>
-            </a:solidFill>
-            <a:prstDash val="solid"/>
-          </a:ln>
-        </p:spPr>
-      </p:sp>
-      <p:sp>
-        <p:nvSpPr>
-          <p:cNvPr id="25" name="Text 23"/>
-          <p:cNvSpPr/>
-          <p:nvPr/>
-        </p:nvSpPr>
-        <p:spPr>
-          <a:xfrm>
-            <a:off x="365760" y="3401568"/>
-            <a:ext cx="2011680" cy="502920"/>
-          </a:xfrm>
-          <a:prstGeom prst="rect">
-            <a:avLst/>
-          </a:prstGeom>
-          <a:noFill/>
-          <a:ln/>
-        </p:spPr>
-        <p:txBody>
-          <a:bodyPr wrap="square" lIns="0" tIns="0" rIns="0" bIns="0" rtlCol="0" anchor="ctr"/>
-          <a:lstStyle/>
-          <a:p>
-            <a:pPr algn="ctr" indent="0" marL="0">
-              <a:buNone/>
-            </a:pPr>
-            <a:r>
-              <a:rPr lang="en-US" sz="1300" b="1" dirty="0">
-                <a:solidFill>
-                  <a:srgbClr val="4338CA"/>
-                </a:solidFill>
-                <a:latin typeface="Trebuchet MS" pitchFamily="34" charset="0"/>
-                <a:ea typeface="Trebuchet MS" pitchFamily="34" charset="-122"/>
-                <a:cs typeface="Trebuchet MS" pitchFamily="34" charset="-120"/>
-              </a:rPr>
-              <a:t>softest</a:t>
-            </a:r>
-            <a:endParaRPr lang="en-US" sz="1300" dirty="0"/>
-          </a:p>
-        </p:txBody>
-      </p:sp>
-      <p:sp>
-        <p:nvSpPr>
-          <p:cNvPr id="26" name="Shape 24"/>
-          <p:cNvSpPr/>
-          <p:nvPr/>
-        </p:nvSpPr>
-        <p:spPr>
-          <a:xfrm>
-            <a:off x="2514600" y="3401568"/>
-            <a:ext cx="2011680" cy="502920"/>
-          </a:xfrm>
-          <a:prstGeom prst="rect">
-            <a:avLst>
-              <a:gd name="adj" fmla="val 14545"/>
-            </a:avLst>
-          </a:prstGeom>
-          <a:solidFill>
-            <a:srgbClr val="EEF2FF"/>
-          </a:solidFill>
-          <a:ln w="12700">
-            <a:solidFill>
-              <a:srgbClr val="6366F1"/>
-            </a:solidFill>
-            <a:prstDash val="solid"/>
-          </a:ln>
-        </p:spPr>
-      </p:sp>
-      <p:sp>
-        <p:nvSpPr>
-          <p:cNvPr id="27" name="Text 25"/>
-          <p:cNvSpPr/>
-          <p:nvPr/>
-        </p:nvSpPr>
-        <p:spPr>
-          <a:xfrm>
-            <a:off x="2514600" y="3401568"/>
-            <a:ext cx="2011680" cy="502920"/>
-          </a:xfrm>
-          <a:prstGeom prst="rect">
-            <a:avLst/>
-          </a:prstGeom>
-          <a:noFill/>
-          <a:ln/>
-        </p:spPr>
-        <p:txBody>
-          <a:bodyPr wrap="square" lIns="0" tIns="0" rIns="0" bIns="0" rtlCol="0" anchor="ctr"/>
-          <a:lstStyle/>
-          <a:p>
-            <a:pPr algn="ctr" indent="0" marL="0">
-              <a:buNone/>
-            </a:pPr>
-            <a:r>
-              <a:rPr lang="en-US" sz="1300" b="1" dirty="0">
-                <a:solidFill>
-                  <a:srgbClr val="4338CA"/>
-                </a:solidFill>
-                <a:latin typeface="Trebuchet MS" pitchFamily="34" charset="0"/>
-                <a:ea typeface="Trebuchet MS" pitchFamily="34" charset="-122"/>
-                <a:cs typeface="Trebuchet MS" pitchFamily="34" charset="-120"/>
-              </a:rPr>
-              <a:t>unsoftened</a:t>
-            </a:r>
-            <a:endParaRPr lang="en-US" sz="1300" dirty="0"/>
-          </a:p>
-        </p:txBody>
-      </p:sp>
-      <p:sp>
-        <p:nvSpPr>
-          <p:cNvPr id="28" name="Shape 26"/>
-          <p:cNvSpPr/>
-          <p:nvPr/>
-        </p:nvSpPr>
-        <p:spPr>
-          <a:xfrm>
-            <a:off x="4663440" y="3401568"/>
-            <a:ext cx="2011680" cy="502920"/>
-          </a:xfrm>
-          <a:prstGeom prst="rect">
-            <a:avLst>
-              <a:gd name="adj" fmla="val 14545"/>
-            </a:avLst>
-          </a:prstGeom>
-          <a:solidFill>
-            <a:srgbClr val="EEF2FF"/>
-          </a:solidFill>
-          <a:ln w="12700">
-            <a:solidFill>
-              <a:srgbClr val="6366F1"/>
-            </a:solidFill>
-            <a:prstDash val="solid"/>
-          </a:ln>
-        </p:spPr>
-      </p:sp>
-      <p:sp>
-        <p:nvSpPr>
-          <p:cNvPr id="29" name="Text 27"/>
-          <p:cNvSpPr/>
-          <p:nvPr/>
-        </p:nvSpPr>
-        <p:spPr>
-          <a:xfrm>
-            <a:off x="4663440" y="3401568"/>
-            <a:ext cx="2011680" cy="502920"/>
-          </a:xfrm>
-          <a:prstGeom prst="rect">
-            <a:avLst/>
-          </a:prstGeom>
-          <a:noFill/>
-          <a:ln/>
-        </p:spPr>
-        <p:txBody>
-          <a:bodyPr wrap="square" lIns="0" tIns="0" rIns="0" bIns="0" rtlCol="0" anchor="ctr"/>
-          <a:lstStyle/>
-          <a:p>
-            <a:pPr algn="ctr" indent="0" marL="0">
-              <a:buNone/>
-            </a:pPr>
-            <a:r>
-              <a:rPr lang="en-US" sz="1300" b="1" dirty="0">
-                <a:solidFill>
-                  <a:srgbClr val="4338CA"/>
-                </a:solidFill>
-                <a:latin typeface="Trebuchet MS" pitchFamily="34" charset="0"/>
-                <a:ea typeface="Trebuchet MS" pitchFamily="34" charset="-122"/>
-                <a:cs typeface="Trebuchet MS" pitchFamily="34" charset="-120"/>
-              </a:rPr>
-              <a:t>oversoften</a:t>
             </a:r>
             <a:endParaRPr lang="en-US" sz="1300" dirty="0"/>
           </a:p>
@@ -38188,7 +37987,7 @@
                 <a:ea typeface="Calibri" pitchFamily="34" charset="-122"/>
                 <a:cs typeface="Calibri" pitchFamily="34" charset="-120"/>
               </a:rPr>
-              <a:t>Word Labs  •  wordlabs.app  •  Root: 'soft' = not hard, gentle, quiet</a:t>
+              <a:t>Word Labs  •  wordlabs.app  •  Root: 'soft' = not hard or rough</a:t>
             </a:r>
             <a:endParaRPr lang="en-US" sz="800" dirty="0"/>
           </a:p>
@@ -38446,7 +38245,7 @@
             <a:avLst/>
           </a:prstGeom>
           <a:solidFill>
-            <a:srgbClr val="DDD6FE"/>
+            <a:srgbClr val="F8FAFC"/>
           </a:solidFill>
           <a:ln w="12700">
             <a:solidFill>
@@ -38458,14 +38257,39 @@
       </p:sp>
       <p:sp>
         <p:nvSpPr>
-          <p:cNvPr id="18" name="Text 16"/>
-          <p:cNvSpPr/>
-          <p:nvPr/>
-        </p:nvSpPr>
-        <p:spPr>
-          <a:xfrm>
-            <a:off x="640080" y="1755648"/>
-            <a:ext cx="1463040" cy="420624"/>
+          <p:cNvPr id="18" name="Shape 16"/>
+          <p:cNvSpPr/>
+          <p:nvPr/>
+        </p:nvSpPr>
+        <p:spPr>
+          <a:xfrm>
+            <a:off x="3291840" y="1755648"/>
+            <a:ext cx="1645920" cy="420624"/>
+          </a:xfrm>
+          <a:prstGeom prst="rect">
+            <a:avLst/>
+          </a:prstGeom>
+          <a:solidFill>
+            <a:srgbClr val="CCFBF1"/>
+          </a:solidFill>
+          <a:ln w="12700">
+            <a:solidFill>
+              <a:srgbClr val="E5E7EB"/>
+            </a:solidFill>
+            <a:prstDash val="solid"/>
+          </a:ln>
+        </p:spPr>
+      </p:sp>
+      <p:sp>
+        <p:nvSpPr>
+          <p:cNvPr id="19" name="Text 17"/>
+          <p:cNvSpPr/>
+          <p:nvPr/>
+        </p:nvSpPr>
+        <p:spPr>
+          <a:xfrm>
+            <a:off x="3291840" y="1755648"/>
+            <a:ext cx="1645920" cy="420624"/>
           </a:xfrm>
           <a:prstGeom prst="rect">
             <a:avLst/>
@@ -38483,13 +38307,13 @@
             <a:r>
               <a:rPr lang="en-US" sz="1300" b="1" dirty="0">
                 <a:solidFill>
-                  <a:srgbClr val="4C1D95"/>
+                  <a:srgbClr val="0F766E"/>
                 </a:solidFill>
                 <a:latin typeface="Trebuchet MS" pitchFamily="34" charset="0"/>
                 <a:ea typeface="Trebuchet MS" pitchFamily="34" charset="-122"/>
                 <a:cs typeface="Trebuchet MS" pitchFamily="34" charset="-120"/>
               </a:rPr>
-              <a:t>un-</a:t>
+              <a:t>soft</a:t>
             </a:r>
             <a:endParaRPr lang="en-US" sz="1300" dirty="0"/>
           </a:p>
@@ -38497,20 +38321,20 @@
       </p:sp>
       <p:sp>
         <p:nvSpPr>
-          <p:cNvPr id="19" name="Shape 17"/>
-          <p:cNvSpPr/>
-          <p:nvPr/>
-        </p:nvSpPr>
-        <p:spPr>
-          <a:xfrm>
-            <a:off x="3291840" y="1755648"/>
-            <a:ext cx="1645920" cy="420624"/>
-          </a:xfrm>
-          <a:prstGeom prst="rect">
-            <a:avLst/>
-          </a:prstGeom>
-          <a:solidFill>
-            <a:srgbClr val="CCFBF1"/>
+          <p:cNvPr id="20" name="Shape 18"/>
+          <p:cNvSpPr/>
+          <p:nvPr/>
+        </p:nvSpPr>
+        <p:spPr>
+          <a:xfrm>
+            <a:off x="5943600" y="1755648"/>
+            <a:ext cx="1463040" cy="420624"/>
+          </a:xfrm>
+          <a:prstGeom prst="rect">
+            <a:avLst/>
+          </a:prstGeom>
+          <a:solidFill>
+            <a:srgbClr val="FCE7F3"/>
           </a:solidFill>
           <a:ln w="12700">
             <a:solidFill>
@@ -38522,14 +38346,14 @@
       </p:sp>
       <p:sp>
         <p:nvSpPr>
-          <p:cNvPr id="20" name="Text 18"/>
-          <p:cNvSpPr/>
-          <p:nvPr/>
-        </p:nvSpPr>
-        <p:spPr>
-          <a:xfrm>
-            <a:off x="3291840" y="1755648"/>
-            <a:ext cx="1645920" cy="420624"/>
+          <p:cNvPr id="21" name="Text 19"/>
+          <p:cNvSpPr/>
+          <p:nvPr/>
+        </p:nvSpPr>
+        <p:spPr>
+          <a:xfrm>
+            <a:off x="5943600" y="1755648"/>
+            <a:ext cx="1463040" cy="420624"/>
           </a:xfrm>
           <a:prstGeom prst="rect">
             <a:avLst/>
@@ -38547,13 +38371,13 @@
             <a:r>
               <a:rPr lang="en-US" sz="1300" b="1" dirty="0">
                 <a:solidFill>
-                  <a:srgbClr val="0F766E"/>
+                  <a:srgbClr val="9D174D"/>
                 </a:solidFill>
                 <a:latin typeface="Trebuchet MS" pitchFamily="34" charset="0"/>
                 <a:ea typeface="Trebuchet MS" pitchFamily="34" charset="-122"/>
                 <a:cs typeface="Trebuchet MS" pitchFamily="34" charset="-120"/>
               </a:rPr>
-              <a:t>soft</a:t>
+              <a:t>-en</a:t>
             </a:r>
             <a:endParaRPr lang="en-US" sz="1300" dirty="0"/>
           </a:p>
@@ -38561,19 +38385,69 @@
       </p:sp>
       <p:sp>
         <p:nvSpPr>
-          <p:cNvPr id="21" name="Shape 19"/>
-          <p:cNvSpPr/>
-          <p:nvPr/>
-        </p:nvSpPr>
-        <p:spPr>
-          <a:xfrm>
-            <a:off x="5943600" y="1755648"/>
+          <p:cNvPr id="22" name="Shape 20"/>
+          <p:cNvSpPr/>
+          <p:nvPr/>
+        </p:nvSpPr>
+        <p:spPr>
+          <a:xfrm>
+            <a:off x="640080" y="2212848"/>
             <a:ext cx="1463040" cy="420624"/>
           </a:xfrm>
           <a:prstGeom prst="rect">
             <a:avLst/>
           </a:prstGeom>
           <a:solidFill>
+            <a:srgbClr val="F1F5F9"/>
+          </a:solidFill>
+          <a:ln w="12700">
+            <a:solidFill>
+              <a:srgbClr val="E5E7EB"/>
+            </a:solidFill>
+            <a:prstDash val="solid"/>
+          </a:ln>
+        </p:spPr>
+      </p:sp>
+      <p:sp>
+        <p:nvSpPr>
+          <p:cNvPr id="23" name="Shape 21"/>
+          <p:cNvSpPr/>
+          <p:nvPr/>
+        </p:nvSpPr>
+        <p:spPr>
+          <a:xfrm>
+            <a:off x="3291840" y="2212848"/>
+            <a:ext cx="1645920" cy="420624"/>
+          </a:xfrm>
+          <a:prstGeom prst="rect">
+            <a:avLst/>
+          </a:prstGeom>
+          <a:solidFill>
+            <a:srgbClr val="F1F5F9"/>
+          </a:solidFill>
+          <a:ln w="12700">
+            <a:solidFill>
+              <a:srgbClr val="E5E7EB"/>
+            </a:solidFill>
+            <a:prstDash val="solid"/>
+          </a:ln>
+        </p:spPr>
+      </p:sp>
+      <p:sp>
+        <p:nvSpPr>
+          <p:cNvPr id="24" name="Shape 22"/>
+          <p:cNvSpPr/>
+          <p:nvPr/>
+        </p:nvSpPr>
+        <p:spPr>
+          <a:xfrm>
+            <a:off x="5943600" y="2212848"/>
+            <a:ext cx="1463040" cy="420624"/>
+          </a:xfrm>
+          <a:prstGeom prst="rect">
+            <a:avLst/>
+          </a:prstGeom>
+          <a:solidFill>
             <a:srgbClr val="FCE7F3"/>
           </a:solidFill>
           <a:ln w="12700">
@@ -38586,13 +38460,13 @@
       </p:sp>
       <p:sp>
         <p:nvSpPr>
-          <p:cNvPr id="22" name="Text 20"/>
-          <p:cNvSpPr/>
-          <p:nvPr/>
-        </p:nvSpPr>
-        <p:spPr>
-          <a:xfrm>
-            <a:off x="5943600" y="1755648"/>
+          <p:cNvPr id="25" name="Text 23"/>
+          <p:cNvSpPr/>
+          <p:nvPr/>
+        </p:nvSpPr>
+        <p:spPr>
+          <a:xfrm>
+            <a:off x="5943600" y="2212848"/>
             <a:ext cx="1463040" cy="420624"/>
           </a:xfrm>
           <a:prstGeom prst="rect">
@@ -38617,7 +38491,7 @@
                 <a:ea typeface="Trebuchet MS" pitchFamily="34" charset="-122"/>
                 <a:cs typeface="Trebuchet MS" pitchFamily="34" charset="-120"/>
               </a:rPr>
-              <a:t>-ly</a:t>
+              <a:t>-er</a:t>
             </a:r>
             <a:endParaRPr lang="en-US" sz="1300" dirty="0"/>
           </a:p>
@@ -38625,20 +38499,20 @@
       </p:sp>
       <p:sp>
         <p:nvSpPr>
-          <p:cNvPr id="23" name="Shape 21"/>
-          <p:cNvSpPr/>
-          <p:nvPr/>
-        </p:nvSpPr>
-        <p:spPr>
-          <a:xfrm>
-            <a:off x="640080" y="2212848"/>
+          <p:cNvPr id="26" name="Shape 24"/>
+          <p:cNvSpPr/>
+          <p:nvPr/>
+        </p:nvSpPr>
+        <p:spPr>
+          <a:xfrm>
+            <a:off x="640080" y="2670048"/>
             <a:ext cx="1463040" cy="420624"/>
           </a:xfrm>
           <a:prstGeom prst="rect">
             <a:avLst/>
           </a:prstGeom>
           <a:solidFill>
-            <a:srgbClr val="DDD6FE"/>
+            <a:srgbClr val="F8FAFC"/>
           </a:solidFill>
           <a:ln w="12700">
             <a:solidFill>
@@ -38650,18 +38524,68 @@
       </p:sp>
       <p:sp>
         <p:nvSpPr>
-          <p:cNvPr id="24" name="Text 22"/>
-          <p:cNvSpPr/>
-          <p:nvPr/>
-        </p:nvSpPr>
-        <p:spPr>
-          <a:xfrm>
-            <a:off x="640080" y="2212848"/>
+          <p:cNvPr id="27" name="Shape 25"/>
+          <p:cNvSpPr/>
+          <p:nvPr/>
+        </p:nvSpPr>
+        <p:spPr>
+          <a:xfrm>
+            <a:off x="3291840" y="2670048"/>
+            <a:ext cx="1645920" cy="420624"/>
+          </a:xfrm>
+          <a:prstGeom prst="rect">
+            <a:avLst/>
+          </a:prstGeom>
+          <a:solidFill>
+            <a:srgbClr val="F8FAFC"/>
+          </a:solidFill>
+          <a:ln w="12700">
+            <a:solidFill>
+              <a:srgbClr val="E5E7EB"/>
+            </a:solidFill>
+            <a:prstDash val="solid"/>
+          </a:ln>
+        </p:spPr>
+      </p:sp>
+      <p:sp>
+        <p:nvSpPr>
+          <p:cNvPr id="28" name="Shape 26"/>
+          <p:cNvSpPr/>
+          <p:nvPr/>
+        </p:nvSpPr>
+        <p:spPr>
+          <a:xfrm>
+            <a:off x="5943600" y="2670048"/>
             <a:ext cx="1463040" cy="420624"/>
           </a:xfrm>
           <a:prstGeom prst="rect">
             <a:avLst/>
           </a:prstGeom>
+          <a:solidFill>
+            <a:srgbClr val="FCE7F3"/>
+          </a:solidFill>
+          <a:ln w="12700">
+            <a:solidFill>
+              <a:srgbClr val="E5E7EB"/>
+            </a:solidFill>
+            <a:prstDash val="solid"/>
+          </a:ln>
+        </p:spPr>
+      </p:sp>
+      <p:sp>
+        <p:nvSpPr>
+          <p:cNvPr id="29" name="Text 27"/>
+          <p:cNvSpPr/>
+          <p:nvPr/>
+        </p:nvSpPr>
+        <p:spPr>
+          <a:xfrm>
+            <a:off x="5943600" y="2670048"/>
+            <a:ext cx="1463040" cy="420624"/>
+          </a:xfrm>
+          <a:prstGeom prst="rect">
+            <a:avLst/>
+          </a:prstGeom>
           <a:noFill/>
           <a:ln/>
         </p:spPr>
@@ -38675,13 +38599,13 @@
             <a:r>
               <a:rPr lang="en-US" sz="1300" b="1" dirty="0">
                 <a:solidFill>
-                  <a:srgbClr val="4C1D95"/>
+                  <a:srgbClr val="9D174D"/>
                 </a:solidFill>
                 <a:latin typeface="Trebuchet MS" pitchFamily="34" charset="0"/>
                 <a:ea typeface="Trebuchet MS" pitchFamily="34" charset="-122"/>
                 <a:cs typeface="Trebuchet MS" pitchFamily="34" charset="-120"/>
               </a:rPr>
-              <a:t>over-</a:t>
+              <a:t>-est</a:t>
             </a:r>
             <a:endParaRPr lang="en-US" sz="1300" dirty="0"/>
           </a:p>
@@ -38689,13 +38613,38 @@
       </p:sp>
       <p:sp>
         <p:nvSpPr>
-          <p:cNvPr id="25" name="Shape 23"/>
-          <p:cNvSpPr/>
-          <p:nvPr/>
-        </p:nvSpPr>
-        <p:spPr>
-          <a:xfrm>
-            <a:off x="3291840" y="2212848"/>
+          <p:cNvPr id="30" name="Shape 28"/>
+          <p:cNvSpPr/>
+          <p:nvPr/>
+        </p:nvSpPr>
+        <p:spPr>
+          <a:xfrm>
+            <a:off x="640080" y="3127248"/>
+            <a:ext cx="1463040" cy="420624"/>
+          </a:xfrm>
+          <a:prstGeom prst="rect">
+            <a:avLst/>
+          </a:prstGeom>
+          <a:solidFill>
+            <a:srgbClr val="F1F5F9"/>
+          </a:solidFill>
+          <a:ln w="12700">
+            <a:solidFill>
+              <a:srgbClr val="E5E7EB"/>
+            </a:solidFill>
+            <a:prstDash val="solid"/>
+          </a:ln>
+        </p:spPr>
+      </p:sp>
+      <p:sp>
+        <p:nvSpPr>
+          <p:cNvPr id="31" name="Shape 29"/>
+          <p:cNvSpPr/>
+          <p:nvPr/>
+        </p:nvSpPr>
+        <p:spPr>
+          <a:xfrm>
+            <a:off x="3291840" y="3127248"/>
             <a:ext cx="1645920" cy="420624"/>
           </a:xfrm>
           <a:prstGeom prst="rect">
@@ -38714,13 +38663,13 @@
       </p:sp>
       <p:sp>
         <p:nvSpPr>
-          <p:cNvPr id="26" name="Shape 24"/>
-          <p:cNvSpPr/>
-          <p:nvPr/>
-        </p:nvSpPr>
-        <p:spPr>
-          <a:xfrm>
-            <a:off x="5943600" y="2212848"/>
+          <p:cNvPr id="32" name="Shape 30"/>
+          <p:cNvSpPr/>
+          <p:nvPr/>
+        </p:nvSpPr>
+        <p:spPr>
+          <a:xfrm>
+            <a:off x="5943600" y="3127248"/>
             <a:ext cx="1463040" cy="420624"/>
           </a:xfrm>
           <a:prstGeom prst="rect">
@@ -38739,13 +38688,13 @@
       </p:sp>
       <p:sp>
         <p:nvSpPr>
-          <p:cNvPr id="27" name="Text 25"/>
-          <p:cNvSpPr/>
-          <p:nvPr/>
-        </p:nvSpPr>
-        <p:spPr>
-          <a:xfrm>
-            <a:off x="5943600" y="2212848"/>
+          <p:cNvPr id="33" name="Text 31"/>
+          <p:cNvSpPr/>
+          <p:nvPr/>
+        </p:nvSpPr>
+        <p:spPr>
+          <a:xfrm>
+            <a:off x="5943600" y="3127248"/>
             <a:ext cx="1463040" cy="420624"/>
           </a:xfrm>
           <a:prstGeom prst="rect">
@@ -38770,7 +38719,7 @@
                 <a:ea typeface="Trebuchet MS" pitchFamily="34" charset="-122"/>
                 <a:cs typeface="Trebuchet MS" pitchFamily="34" charset="-120"/>
               </a:rPr>
-              <a:t>-en</a:t>
+              <a:t>-ly</a:t>
             </a:r>
             <a:endParaRPr lang="en-US" sz="1300" dirty="0"/>
           </a:p>
@@ -38778,20 +38727,20 @@
       </p:sp>
       <p:sp>
         <p:nvSpPr>
-          <p:cNvPr id="28" name="Shape 26"/>
-          <p:cNvSpPr/>
-          <p:nvPr/>
-        </p:nvSpPr>
-        <p:spPr>
-          <a:xfrm>
-            <a:off x="640080" y="2670048"/>
+          <p:cNvPr id="34" name="Shape 32"/>
+          <p:cNvSpPr/>
+          <p:nvPr/>
+        </p:nvSpPr>
+        <p:spPr>
+          <a:xfrm>
+            <a:off x="640080" y="3584448"/>
             <a:ext cx="1463040" cy="420624"/>
           </a:xfrm>
           <a:prstGeom prst="rect">
             <a:avLst/>
           </a:prstGeom>
           <a:solidFill>
-            <a:srgbClr val="DDD6FE"/>
+            <a:srgbClr val="F8FAFC"/>
           </a:solidFill>
           <a:ln w="12700">
             <a:solidFill>
@@ -38803,18 +38752,68 @@
       </p:sp>
       <p:sp>
         <p:nvSpPr>
-          <p:cNvPr id="29" name="Text 27"/>
-          <p:cNvSpPr/>
-          <p:nvPr/>
-        </p:nvSpPr>
-        <p:spPr>
-          <a:xfrm>
-            <a:off x="640080" y="2670048"/>
+          <p:cNvPr id="35" name="Shape 33"/>
+          <p:cNvSpPr/>
+          <p:nvPr/>
+        </p:nvSpPr>
+        <p:spPr>
+          <a:xfrm>
+            <a:off x="3291840" y="3584448"/>
+            <a:ext cx="1645920" cy="420624"/>
+          </a:xfrm>
+          <a:prstGeom prst="rect">
+            <a:avLst/>
+          </a:prstGeom>
+          <a:solidFill>
+            <a:srgbClr val="F8FAFC"/>
+          </a:solidFill>
+          <a:ln w="12700">
+            <a:solidFill>
+              <a:srgbClr val="E5E7EB"/>
+            </a:solidFill>
+            <a:prstDash val="solid"/>
+          </a:ln>
+        </p:spPr>
+      </p:sp>
+      <p:sp>
+        <p:nvSpPr>
+          <p:cNvPr id="36" name="Shape 34"/>
+          <p:cNvSpPr/>
+          <p:nvPr/>
+        </p:nvSpPr>
+        <p:spPr>
+          <a:xfrm>
+            <a:off x="5943600" y="3584448"/>
             <a:ext cx="1463040" cy="420624"/>
           </a:xfrm>
           <a:prstGeom prst="rect">
             <a:avLst/>
           </a:prstGeom>
+          <a:solidFill>
+            <a:srgbClr val="FCE7F3"/>
+          </a:solidFill>
+          <a:ln w="12700">
+            <a:solidFill>
+              <a:srgbClr val="E5E7EB"/>
+            </a:solidFill>
+            <a:prstDash val="solid"/>
+          </a:ln>
+        </p:spPr>
+      </p:sp>
+      <p:sp>
+        <p:nvSpPr>
+          <p:cNvPr id="37" name="Text 35"/>
+          <p:cNvSpPr/>
+          <p:nvPr/>
+        </p:nvSpPr>
+        <p:spPr>
+          <a:xfrm>
+            <a:off x="5943600" y="3584448"/>
+            <a:ext cx="1463040" cy="420624"/>
+          </a:xfrm>
+          <a:prstGeom prst="rect">
+            <a:avLst/>
+          </a:prstGeom>
           <a:noFill/>
           <a:ln/>
         </p:spPr>
@@ -38828,13 +38827,13 @@
             <a:r>
               <a:rPr lang="en-US" sz="1300" b="1" dirty="0">
                 <a:solidFill>
-                  <a:srgbClr val="4C1D95"/>
+                  <a:srgbClr val="9D174D"/>
                 </a:solidFill>
                 <a:latin typeface="Trebuchet MS" pitchFamily="34" charset="0"/>
                 <a:ea typeface="Trebuchet MS" pitchFamily="34" charset="-122"/>
                 <a:cs typeface="Trebuchet MS" pitchFamily="34" charset="-120"/>
               </a:rPr>
-              <a:t>semi-</a:t>
+              <a:t>-ness</a:t>
             </a:r>
             <a:endParaRPr lang="en-US" sz="1300" dirty="0"/>
           </a:p>
@@ -38842,402 +38841,7 @@
       </p:sp>
       <p:sp>
         <p:nvSpPr>
-          <p:cNvPr id="30" name="Shape 28"/>
-          <p:cNvSpPr/>
-          <p:nvPr/>
-        </p:nvSpPr>
-        <p:spPr>
-          <a:xfrm>
-            <a:off x="3291840" y="2670048"/>
-            <a:ext cx="1645920" cy="420624"/>
-          </a:xfrm>
-          <a:prstGeom prst="rect">
-            <a:avLst/>
-          </a:prstGeom>
-          <a:solidFill>
-            <a:srgbClr val="F8FAFC"/>
-          </a:solidFill>
-          <a:ln w="12700">
-            <a:solidFill>
-              <a:srgbClr val="E5E7EB"/>
-            </a:solidFill>
-            <a:prstDash val="solid"/>
-          </a:ln>
-        </p:spPr>
-      </p:sp>
-      <p:sp>
-        <p:nvSpPr>
-          <p:cNvPr id="31" name="Shape 29"/>
-          <p:cNvSpPr/>
-          <p:nvPr/>
-        </p:nvSpPr>
-        <p:spPr>
-          <a:xfrm>
-            <a:off x="5943600" y="2670048"/>
-            <a:ext cx="1463040" cy="420624"/>
-          </a:xfrm>
-          <a:prstGeom prst="rect">
-            <a:avLst/>
-          </a:prstGeom>
-          <a:solidFill>
-            <a:srgbClr val="FCE7F3"/>
-          </a:solidFill>
-          <a:ln w="12700">
-            <a:solidFill>
-              <a:srgbClr val="E5E7EB"/>
-            </a:solidFill>
-            <a:prstDash val="solid"/>
-          </a:ln>
-        </p:spPr>
-      </p:sp>
-      <p:sp>
-        <p:nvSpPr>
-          <p:cNvPr id="32" name="Text 30"/>
-          <p:cNvSpPr/>
-          <p:nvPr/>
-        </p:nvSpPr>
-        <p:spPr>
-          <a:xfrm>
-            <a:off x="5943600" y="2670048"/>
-            <a:ext cx="1463040" cy="420624"/>
-          </a:xfrm>
-          <a:prstGeom prst="rect">
-            <a:avLst/>
-          </a:prstGeom>
-          <a:noFill/>
-          <a:ln/>
-        </p:spPr>
-        <p:txBody>
-          <a:bodyPr wrap="square" lIns="0" tIns="0" rIns="0" bIns="0" rtlCol="0" anchor="ctr"/>
-          <a:lstStyle/>
-          <a:p>
-            <a:pPr algn="ctr" indent="0" marL="0">
-              <a:buNone/>
-            </a:pPr>
-            <a:r>
-              <a:rPr lang="en-US" sz="1300" b="1" dirty="0">
-                <a:solidFill>
-                  <a:srgbClr val="9D174D"/>
-                </a:solidFill>
-                <a:latin typeface="Trebuchet MS" pitchFamily="34" charset="0"/>
-                <a:ea typeface="Trebuchet MS" pitchFamily="34" charset="-122"/>
-                <a:cs typeface="Trebuchet MS" pitchFamily="34" charset="-120"/>
-              </a:rPr>
-              <a:t>-ness</a:t>
-            </a:r>
-            <a:endParaRPr lang="en-US" sz="1300" dirty="0"/>
-          </a:p>
-        </p:txBody>
-      </p:sp>
-      <p:sp>
-        <p:nvSpPr>
-          <p:cNvPr id="33" name="Shape 31"/>
-          <p:cNvSpPr/>
-          <p:nvPr/>
-        </p:nvSpPr>
-        <p:spPr>
-          <a:xfrm>
-            <a:off x="640080" y="3127248"/>
-            <a:ext cx="1463040" cy="420624"/>
-          </a:xfrm>
-          <a:prstGeom prst="rect">
-            <a:avLst/>
-          </a:prstGeom>
-          <a:solidFill>
-            <a:srgbClr val="DDD6FE"/>
-          </a:solidFill>
-          <a:ln w="12700">
-            <a:solidFill>
-              <a:srgbClr val="E5E7EB"/>
-            </a:solidFill>
-            <a:prstDash val="solid"/>
-          </a:ln>
-        </p:spPr>
-      </p:sp>
-      <p:sp>
-        <p:nvSpPr>
-          <p:cNvPr id="34" name="Text 32"/>
-          <p:cNvSpPr/>
-          <p:nvPr/>
-        </p:nvSpPr>
-        <p:spPr>
-          <a:xfrm>
-            <a:off x="640080" y="3127248"/>
-            <a:ext cx="1463040" cy="420624"/>
-          </a:xfrm>
-          <a:prstGeom prst="rect">
-            <a:avLst/>
-          </a:prstGeom>
-          <a:noFill/>
-          <a:ln/>
-        </p:spPr>
-        <p:txBody>
-          <a:bodyPr wrap="square" lIns="0" tIns="0" rIns="0" bIns="0" rtlCol="0" anchor="ctr"/>
-          <a:lstStyle/>
-          <a:p>
-            <a:pPr algn="ctr" indent="0" marL="0">
-              <a:buNone/>
-            </a:pPr>
-            <a:r>
-              <a:rPr lang="en-US" sz="1300" b="1" dirty="0">
-                <a:solidFill>
-                  <a:srgbClr val="4C1D95"/>
-                </a:solidFill>
-                <a:latin typeface="Trebuchet MS" pitchFamily="34" charset="0"/>
-                <a:ea typeface="Trebuchet MS" pitchFamily="34" charset="-122"/>
-                <a:cs typeface="Trebuchet MS" pitchFamily="34" charset="-120"/>
-              </a:rPr>
-              <a:t>non-</a:t>
-            </a:r>
-            <a:endParaRPr lang="en-US" sz="1300" dirty="0"/>
-          </a:p>
-        </p:txBody>
-      </p:sp>
-      <p:sp>
-        <p:nvSpPr>
-          <p:cNvPr id="35" name="Shape 33"/>
-          <p:cNvSpPr/>
-          <p:nvPr/>
-        </p:nvSpPr>
-        <p:spPr>
-          <a:xfrm>
-            <a:off x="3291840" y="3127248"/>
-            <a:ext cx="1645920" cy="420624"/>
-          </a:xfrm>
-          <a:prstGeom prst="rect">
-            <a:avLst/>
-          </a:prstGeom>
-          <a:solidFill>
-            <a:srgbClr val="F1F5F9"/>
-          </a:solidFill>
-          <a:ln w="12700">
-            <a:solidFill>
-              <a:srgbClr val="E5E7EB"/>
-            </a:solidFill>
-            <a:prstDash val="solid"/>
-          </a:ln>
-        </p:spPr>
-      </p:sp>
-      <p:sp>
-        <p:nvSpPr>
-          <p:cNvPr id="36" name="Shape 34"/>
-          <p:cNvSpPr/>
-          <p:nvPr/>
-        </p:nvSpPr>
-        <p:spPr>
-          <a:xfrm>
-            <a:off x="5943600" y="3127248"/>
-            <a:ext cx="1463040" cy="420624"/>
-          </a:xfrm>
-          <a:prstGeom prst="rect">
-            <a:avLst/>
-          </a:prstGeom>
-          <a:solidFill>
-            <a:srgbClr val="FCE7F3"/>
-          </a:solidFill>
-          <a:ln w="12700">
-            <a:solidFill>
-              <a:srgbClr val="E5E7EB"/>
-            </a:solidFill>
-            <a:prstDash val="solid"/>
-          </a:ln>
-        </p:spPr>
-      </p:sp>
-      <p:sp>
-        <p:nvSpPr>
-          <p:cNvPr id="37" name="Text 35"/>
-          <p:cNvSpPr/>
-          <p:nvPr/>
-        </p:nvSpPr>
-        <p:spPr>
-          <a:xfrm>
-            <a:off x="5943600" y="3127248"/>
-            <a:ext cx="1463040" cy="420624"/>
-          </a:xfrm>
-          <a:prstGeom prst="rect">
-            <a:avLst/>
-          </a:prstGeom>
-          <a:noFill/>
-          <a:ln/>
-        </p:spPr>
-        <p:txBody>
-          <a:bodyPr wrap="square" lIns="0" tIns="0" rIns="0" bIns="0" rtlCol="0" anchor="ctr"/>
-          <a:lstStyle/>
-          <a:p>
-            <a:pPr algn="ctr" indent="0" marL="0">
-              <a:buNone/>
-            </a:pPr>
-            <a:r>
-              <a:rPr lang="en-US" sz="1300" b="1" dirty="0">
-                <a:solidFill>
-                  <a:srgbClr val="9D174D"/>
-                </a:solidFill>
-                <a:latin typeface="Trebuchet MS" pitchFamily="34" charset="0"/>
-                <a:ea typeface="Trebuchet MS" pitchFamily="34" charset="-122"/>
-                <a:cs typeface="Trebuchet MS" pitchFamily="34" charset="-120"/>
-              </a:rPr>
-              <a:t>-er</a:t>
-            </a:r>
-            <a:endParaRPr lang="en-US" sz="1300" dirty="0"/>
-          </a:p>
-        </p:txBody>
-      </p:sp>
-      <p:sp>
-        <p:nvSpPr>
-          <p:cNvPr id="38" name="Shape 36"/>
-          <p:cNvSpPr/>
-          <p:nvPr/>
-        </p:nvSpPr>
-        <p:spPr>
-          <a:xfrm>
-            <a:off x="640080" y="3584448"/>
-            <a:ext cx="1463040" cy="420624"/>
-          </a:xfrm>
-          <a:prstGeom prst="rect">
-            <a:avLst/>
-          </a:prstGeom>
-          <a:solidFill>
-            <a:srgbClr val="DDD6FE"/>
-          </a:solidFill>
-          <a:ln w="12700">
-            <a:solidFill>
-              <a:srgbClr val="E5E7EB"/>
-            </a:solidFill>
-            <a:prstDash val="solid"/>
-          </a:ln>
-        </p:spPr>
-      </p:sp>
-      <p:sp>
-        <p:nvSpPr>
-          <p:cNvPr id="39" name="Text 37"/>
-          <p:cNvSpPr/>
-          <p:nvPr/>
-        </p:nvSpPr>
-        <p:spPr>
-          <a:xfrm>
-            <a:off x="640080" y="3584448"/>
-            <a:ext cx="1463040" cy="420624"/>
-          </a:xfrm>
-          <a:prstGeom prst="rect">
-            <a:avLst/>
-          </a:prstGeom>
-          <a:noFill/>
-          <a:ln/>
-        </p:spPr>
-        <p:txBody>
-          <a:bodyPr wrap="square" lIns="0" tIns="0" rIns="0" bIns="0" rtlCol="0" anchor="ctr"/>
-          <a:lstStyle/>
-          <a:p>
-            <a:pPr algn="ctr" indent="0" marL="0">
-              <a:buNone/>
-            </a:pPr>
-            <a:r>
-              <a:rPr lang="en-US" sz="1300" b="1" dirty="0">
-                <a:solidFill>
-                  <a:srgbClr val="4C1D95"/>
-                </a:solidFill>
-                <a:latin typeface="Trebuchet MS" pitchFamily="34" charset="0"/>
-                <a:ea typeface="Trebuchet MS" pitchFamily="34" charset="-122"/>
-                <a:cs typeface="Trebuchet MS" pitchFamily="34" charset="-120"/>
-              </a:rPr>
-              <a:t>super-</a:t>
-            </a:r>
-            <a:endParaRPr lang="en-US" sz="1300" dirty="0"/>
-          </a:p>
-        </p:txBody>
-      </p:sp>
-      <p:sp>
-        <p:nvSpPr>
-          <p:cNvPr id="40" name="Shape 38"/>
-          <p:cNvSpPr/>
-          <p:nvPr/>
-        </p:nvSpPr>
-        <p:spPr>
-          <a:xfrm>
-            <a:off x="3291840" y="3584448"/>
-            <a:ext cx="1645920" cy="420624"/>
-          </a:xfrm>
-          <a:prstGeom prst="rect">
-            <a:avLst/>
-          </a:prstGeom>
-          <a:solidFill>
-            <a:srgbClr val="F8FAFC"/>
-          </a:solidFill>
-          <a:ln w="12700">
-            <a:solidFill>
-              <a:srgbClr val="E5E7EB"/>
-            </a:solidFill>
-            <a:prstDash val="solid"/>
-          </a:ln>
-        </p:spPr>
-      </p:sp>
-      <p:sp>
-        <p:nvSpPr>
-          <p:cNvPr id="41" name="Shape 39"/>
-          <p:cNvSpPr/>
-          <p:nvPr/>
-        </p:nvSpPr>
-        <p:spPr>
-          <a:xfrm>
-            <a:off x="5943600" y="3584448"/>
-            <a:ext cx="1463040" cy="420624"/>
-          </a:xfrm>
-          <a:prstGeom prst="rect">
-            <a:avLst/>
-          </a:prstGeom>
-          <a:solidFill>
-            <a:srgbClr val="FCE7F3"/>
-          </a:solidFill>
-          <a:ln w="12700">
-            <a:solidFill>
-              <a:srgbClr val="E5E7EB"/>
-            </a:solidFill>
-            <a:prstDash val="solid"/>
-          </a:ln>
-        </p:spPr>
-      </p:sp>
-      <p:sp>
-        <p:nvSpPr>
-          <p:cNvPr id="42" name="Text 40"/>
-          <p:cNvSpPr/>
-          <p:nvPr/>
-        </p:nvSpPr>
-        <p:spPr>
-          <a:xfrm>
-            <a:off x="5943600" y="3584448"/>
-            <a:ext cx="1463040" cy="420624"/>
-          </a:xfrm>
-          <a:prstGeom prst="rect">
-            <a:avLst/>
-          </a:prstGeom>
-          <a:noFill/>
-          <a:ln/>
-        </p:spPr>
-        <p:txBody>
-          <a:bodyPr wrap="square" lIns="0" tIns="0" rIns="0" bIns="0" rtlCol="0" anchor="ctr"/>
-          <a:lstStyle/>
-          <a:p>
-            <a:pPr algn="ctr" indent="0" marL="0">
-              <a:buNone/>
-            </a:pPr>
-            <a:r>
-              <a:rPr lang="en-US" sz="1300" b="1" dirty="0">
-                <a:solidFill>
-                  <a:srgbClr val="9D174D"/>
-                </a:solidFill>
-                <a:latin typeface="Trebuchet MS" pitchFamily="34" charset="0"/>
-                <a:ea typeface="Trebuchet MS" pitchFamily="34" charset="-122"/>
-                <a:cs typeface="Trebuchet MS" pitchFamily="34" charset="-120"/>
-              </a:rPr>
-              <a:t>-est</a:t>
-            </a:r>
-            <a:endParaRPr lang="en-US" sz="1300" dirty="0"/>
-          </a:p>
-        </p:txBody>
-      </p:sp>
-      <p:sp>
-        <p:nvSpPr>
-          <p:cNvPr id="43" name="Text 41"/>
+          <p:cNvPr id="38" name="Text 36"/>
           <p:cNvSpPr/>
           <p:nvPr/>
         </p:nvSpPr>
@@ -39276,14 +38880,14 @@
       </p:sp>
       <p:sp>
         <p:nvSpPr>
-          <p:cNvPr id="44" name="Shape 42"/>
+          <p:cNvPr id="39" name="Shape 37"/>
           <p:cNvSpPr/>
           <p:nvPr/>
         </p:nvSpPr>
         <p:spPr>
           <a:xfrm>
             <a:off x="1508760" y="4178808"/>
-            <a:ext cx="822960" cy="420624"/>
+            <a:ext cx="1243584" cy="420624"/>
           </a:xfrm>
           <a:prstGeom prst="rect">
             <a:avLst>
@@ -39291,11 +38895,11 @@
             </a:avLst>
           </a:prstGeom>
           <a:solidFill>
-            <a:srgbClr val="DDD6FE"/>
+            <a:srgbClr val="CCFBF1"/>
           </a:solidFill>
           <a:ln w="19050">
             <a:solidFill>
-              <a:srgbClr val="7C3AED"/>
+              <a:srgbClr val="0D9488"/>
             </a:solidFill>
             <a:prstDash val="solid"/>
           </a:ln>
@@ -39310,14 +38914,14 @@
       </p:sp>
       <p:sp>
         <p:nvSpPr>
-          <p:cNvPr id="45" name="Text 43"/>
+          <p:cNvPr id="40" name="Text 38"/>
           <p:cNvSpPr/>
           <p:nvPr/>
         </p:nvSpPr>
         <p:spPr>
           <a:xfrm>
             <a:off x="1508760" y="4178808"/>
-            <a:ext cx="822960" cy="420624"/>
+            <a:ext cx="1243584" cy="420624"/>
           </a:xfrm>
           <a:prstGeom prst="rect">
             <a:avLst/>
@@ -39335,13 +38939,13 @@
             <a:r>
               <a:rPr lang="en-US" sz="1300" b="1" dirty="0">
                 <a:solidFill>
-                  <a:srgbClr val="4C1D95"/>
+                  <a:srgbClr val="0F766E"/>
                 </a:solidFill>
                 <a:latin typeface="Trebuchet MS" pitchFamily="34" charset="0"/>
                 <a:ea typeface="Trebuchet MS" pitchFamily="34" charset="-122"/>
                 <a:cs typeface="Trebuchet MS" pitchFamily="34" charset="-120"/>
               </a:rPr>
-              <a:t>un-</a:t>
+              <a:t>'soft'</a:t>
             </a:r>
             <a:endParaRPr lang="en-US" sz="1300" dirty="0"/>
           </a:p>
@@ -39349,13 +38953,13 @@
       </p:sp>
       <p:sp>
         <p:nvSpPr>
-          <p:cNvPr id="46" name="Text 44"/>
-          <p:cNvSpPr/>
-          <p:nvPr/>
-        </p:nvSpPr>
-        <p:spPr>
-          <a:xfrm>
-            <a:off x="2359152" y="4178808"/>
+          <p:cNvPr id="41" name="Text 39"/>
+          <p:cNvSpPr/>
+          <p:nvPr/>
+        </p:nvSpPr>
+        <p:spPr>
+          <a:xfrm>
+            <a:off x="2779776" y="4178808"/>
             <a:ext cx="320040" cy="420624"/>
           </a:xfrm>
           <a:prstGeom prst="rect">
@@ -39388,14 +38992,14 @@
       </p:sp>
       <p:sp>
         <p:nvSpPr>
-          <p:cNvPr id="47" name="Shape 45"/>
-          <p:cNvSpPr/>
-          <p:nvPr/>
-        </p:nvSpPr>
-        <p:spPr>
-          <a:xfrm>
-            <a:off x="2706624" y="4178808"/>
-            <a:ext cx="1243584" cy="420624"/>
+          <p:cNvPr id="42" name="Shape 40"/>
+          <p:cNvSpPr/>
+          <p:nvPr/>
+        </p:nvSpPr>
+        <p:spPr>
+          <a:xfrm>
+            <a:off x="3127248" y="4178808"/>
+            <a:ext cx="822960" cy="420624"/>
           </a:xfrm>
           <a:prstGeom prst="rect">
             <a:avLst>
@@ -39403,11 +39007,11 @@
             </a:avLst>
           </a:prstGeom>
           <a:solidFill>
-            <a:srgbClr val="CCFBF1"/>
+            <a:srgbClr val="FCE7F3"/>
           </a:solidFill>
           <a:ln w="19050">
             <a:solidFill>
-              <a:srgbClr val="0D9488"/>
+              <a:srgbClr val="DB2777"/>
             </a:solidFill>
             <a:prstDash val="solid"/>
           </a:ln>
@@ -39422,14 +39026,14 @@
       </p:sp>
       <p:sp>
         <p:nvSpPr>
-          <p:cNvPr id="48" name="Text 46"/>
-          <p:cNvSpPr/>
-          <p:nvPr/>
-        </p:nvSpPr>
-        <p:spPr>
-          <a:xfrm>
-            <a:off x="2706624" y="4178808"/>
-            <a:ext cx="1243584" cy="420624"/>
+          <p:cNvPr id="43" name="Text 41"/>
+          <p:cNvSpPr/>
+          <p:nvPr/>
+        </p:nvSpPr>
+        <p:spPr>
+          <a:xfrm>
+            <a:off x="3127248" y="4178808"/>
+            <a:ext cx="822960" cy="420624"/>
           </a:xfrm>
           <a:prstGeom prst="rect">
             <a:avLst/>
@@ -39447,13 +39051,13 @@
             <a:r>
               <a:rPr lang="en-US" sz="1300" b="1" dirty="0">
                 <a:solidFill>
-                  <a:srgbClr val="0F766E"/>
+                  <a:srgbClr val="9D174D"/>
                 </a:solidFill>
                 <a:latin typeface="Trebuchet MS" pitchFamily="34" charset="0"/>
                 <a:ea typeface="Trebuchet MS" pitchFamily="34" charset="-122"/>
                 <a:cs typeface="Trebuchet MS" pitchFamily="34" charset="-120"/>
               </a:rPr>
-              <a:t>'soft'</a:t>
+              <a:t>-en</a:t>
             </a:r>
             <a:endParaRPr lang="en-US" sz="1300" dirty="0"/>
           </a:p>
@@ -39461,14 +39065,14 @@
       </p:sp>
       <p:sp>
         <p:nvSpPr>
-          <p:cNvPr id="49" name="Text 47"/>
-          <p:cNvSpPr/>
-          <p:nvPr/>
-        </p:nvSpPr>
-        <p:spPr>
-          <a:xfrm>
-            <a:off x="3977640" y="4178808"/>
-            <a:ext cx="320040" cy="420624"/>
+          <p:cNvPr id="44" name="Text 42"/>
+          <p:cNvSpPr/>
+          <p:nvPr/>
+        </p:nvSpPr>
+        <p:spPr>
+          <a:xfrm>
+            <a:off x="4023360" y="4178808"/>
+            <a:ext cx="365760" cy="420624"/>
           </a:xfrm>
           <a:prstGeom prst="rect">
             <a:avLst/>
@@ -39484,30 +39088,30 @@
               <a:buNone/>
             </a:pPr>
             <a:r>
-              <a:rPr lang="en-US" sz="1400" dirty="0">
-                <a:solidFill>
-                  <a:srgbClr val="475569"/>
+              <a:rPr lang="en-US" sz="1800" b="1" dirty="0">
+                <a:solidFill>
+                  <a:srgbClr val="0D9488"/>
                 </a:solidFill>
                 <a:latin typeface="Trebuchet MS" pitchFamily="34" charset="0"/>
                 <a:ea typeface="Trebuchet MS" pitchFamily="34" charset="-122"/>
                 <a:cs typeface="Trebuchet MS" pitchFamily="34" charset="-120"/>
               </a:rPr>
-              <a:t>+</a:t>
-            </a:r>
-            <a:endParaRPr lang="en-US" sz="1400" dirty="0"/>
-          </a:p>
-        </p:txBody>
-      </p:sp>
-      <p:sp>
-        <p:nvSpPr>
-          <p:cNvPr id="50" name="Shape 48"/>
-          <p:cNvSpPr/>
-          <p:nvPr/>
-        </p:nvSpPr>
-        <p:spPr>
-          <a:xfrm>
-            <a:off x="4325112" y="4178808"/>
-            <a:ext cx="822960" cy="420624"/>
+              <a:t>=</a:t>
+            </a:r>
+            <a:endParaRPr lang="en-US" sz="1800" dirty="0"/>
+          </a:p>
+        </p:txBody>
+      </p:sp>
+      <p:sp>
+        <p:nvSpPr>
+          <p:cNvPr id="45" name="Shape 43"/>
+          <p:cNvSpPr/>
+          <p:nvPr/>
+        </p:nvSpPr>
+        <p:spPr>
+          <a:xfrm>
+            <a:off x="4434840" y="4178808"/>
+            <a:ext cx="2194560" cy="420624"/>
           </a:xfrm>
           <a:prstGeom prst="rect">
             <a:avLst>
@@ -39515,33 +39119,26 @@
             </a:avLst>
           </a:prstGeom>
           <a:solidFill>
-            <a:srgbClr val="FCE7F3"/>
-          </a:solidFill>
-          <a:ln w="19050">
-            <a:solidFill>
-              <a:srgbClr val="DB2777"/>
-            </a:solidFill>
-            <a:prstDash val="solid"/>
-          </a:ln>
-          <a:effectLst>
-            <a:outerShdw sx="100000" sy="100000" kx="0" ky="0" algn="bl" rotWithShape="0" blurRad="101600" dist="38100" dir="8100000">
-              <a:srgbClr val="000000">
-                <a:alpha val="12000"/>
-              </a:srgbClr>
-            </a:outerShdw>
-          </a:effectLst>
-        </p:spPr>
-      </p:sp>
-      <p:sp>
-        <p:nvSpPr>
-          <p:cNvPr id="51" name="Text 49"/>
-          <p:cNvSpPr/>
-          <p:nvPr/>
-        </p:nvSpPr>
-        <p:spPr>
-          <a:xfrm>
-            <a:off x="4325112" y="4178808"/>
-            <a:ext cx="822960" cy="420624"/>
+            <a:srgbClr val="0D9488"/>
+          </a:solidFill>
+          <a:ln w="12700">
+            <a:solidFill>
+              <a:srgbClr val="0D9488"/>
+            </a:solidFill>
+            <a:prstDash val="solid"/>
+          </a:ln>
+        </p:spPr>
+      </p:sp>
+      <p:sp>
+        <p:nvSpPr>
+          <p:cNvPr id="46" name="Text 44"/>
+          <p:cNvSpPr/>
+          <p:nvPr/>
+        </p:nvSpPr>
+        <p:spPr>
+          <a:xfrm>
+            <a:off x="4434840" y="4178808"/>
+            <a:ext cx="2194560" cy="420624"/>
           </a:xfrm>
           <a:prstGeom prst="rect">
             <a:avLst/>
@@ -39557,120 +39154,15 @@
               <a:buNone/>
             </a:pPr>
             <a:r>
-              <a:rPr lang="en-US" sz="1300" b="1" dirty="0">
-                <a:solidFill>
-                  <a:srgbClr val="9D174D"/>
+              <a:rPr lang="en-US" sz="1400" b="1" dirty="0">
+                <a:solidFill>
+                  <a:srgbClr val="FFFFFF"/>
                 </a:solidFill>
                 <a:latin typeface="Trebuchet MS" pitchFamily="34" charset="0"/>
                 <a:ea typeface="Trebuchet MS" pitchFamily="34" charset="-122"/>
                 <a:cs typeface="Trebuchet MS" pitchFamily="34" charset="-120"/>
               </a:rPr>
-              <a:t>-ly</a:t>
-            </a:r>
-            <a:endParaRPr lang="en-US" sz="1300" dirty="0"/>
-          </a:p>
-        </p:txBody>
-      </p:sp>
-      <p:sp>
-        <p:nvSpPr>
-          <p:cNvPr id="52" name="Text 50"/>
-          <p:cNvSpPr/>
-          <p:nvPr/>
-        </p:nvSpPr>
-        <p:spPr>
-          <a:xfrm>
-            <a:off x="5221224" y="4178808"/>
-            <a:ext cx="365760" cy="420624"/>
-          </a:xfrm>
-          <a:prstGeom prst="rect">
-            <a:avLst/>
-          </a:prstGeom>
-          <a:noFill/>
-          <a:ln/>
-        </p:spPr>
-        <p:txBody>
-          <a:bodyPr wrap="square" lIns="0" tIns="0" rIns="0" bIns="0" rtlCol="0" anchor="ctr"/>
-          <a:lstStyle/>
-          <a:p>
-            <a:pPr algn="ctr" indent="0" marL="0">
-              <a:buNone/>
-            </a:pPr>
-            <a:r>
-              <a:rPr lang="en-US" sz="1800" b="1" dirty="0">
-                <a:solidFill>
-                  <a:srgbClr val="0D9488"/>
-                </a:solidFill>
-                <a:latin typeface="Trebuchet MS" pitchFamily="34" charset="0"/>
-                <a:ea typeface="Trebuchet MS" pitchFamily="34" charset="-122"/>
-                <a:cs typeface="Trebuchet MS" pitchFamily="34" charset="-120"/>
-              </a:rPr>
-              <a:t>=</a:t>
-            </a:r>
-            <a:endParaRPr lang="en-US" sz="1800" dirty="0"/>
-          </a:p>
-        </p:txBody>
-      </p:sp>
-      <p:sp>
-        <p:nvSpPr>
-          <p:cNvPr id="53" name="Shape 51"/>
-          <p:cNvSpPr/>
-          <p:nvPr/>
-        </p:nvSpPr>
-        <p:spPr>
-          <a:xfrm>
-            <a:off x="5632704" y="4178808"/>
-            <a:ext cx="2194560" cy="420624"/>
-          </a:xfrm>
-          <a:prstGeom prst="rect">
-            <a:avLst>
-              <a:gd name="adj" fmla="val 17391"/>
-            </a:avLst>
-          </a:prstGeom>
-          <a:solidFill>
-            <a:srgbClr val="0D9488"/>
-          </a:solidFill>
-          <a:ln w="12700">
-            <a:solidFill>
-              <a:srgbClr val="0D9488"/>
-            </a:solidFill>
-            <a:prstDash val="solid"/>
-          </a:ln>
-        </p:spPr>
-      </p:sp>
-      <p:sp>
-        <p:nvSpPr>
-          <p:cNvPr id="54" name="Text 52"/>
-          <p:cNvSpPr/>
-          <p:nvPr/>
-        </p:nvSpPr>
-        <p:spPr>
-          <a:xfrm>
-            <a:off x="5632704" y="4178808"/>
-            <a:ext cx="2194560" cy="420624"/>
-          </a:xfrm>
-          <a:prstGeom prst="rect">
-            <a:avLst/>
-          </a:prstGeom>
-          <a:noFill/>
-          <a:ln/>
-        </p:spPr>
-        <p:txBody>
-          <a:bodyPr wrap="square" lIns="0" tIns="0" rIns="0" bIns="0" rtlCol="0" anchor="ctr"/>
-          <a:lstStyle/>
-          <a:p>
-            <a:pPr algn="ctr" indent="0" marL="0">
-              <a:buNone/>
-            </a:pPr>
-            <a:r>
-              <a:rPr lang="en-US" sz="1400" b="1" dirty="0">
-                <a:solidFill>
-                  <a:srgbClr val="FFFFFF"/>
-                </a:solidFill>
-                <a:latin typeface="Trebuchet MS" pitchFamily="34" charset="0"/>
-                <a:ea typeface="Trebuchet MS" pitchFamily="34" charset="-122"/>
-                <a:cs typeface="Trebuchet MS" pitchFamily="34" charset="-120"/>
-              </a:rPr>
-              <a:t>softly</a:t>
+              <a:t>soft</a:t>
             </a:r>
             <a:endParaRPr lang="en-US" sz="1400" dirty="0"/>
           </a:p>
@@ -39962,7 +39454,7 @@
                 <a:ea typeface="Calibri" pitchFamily="34" charset="-122"/>
                 <a:cs typeface="Calibri" pitchFamily="34" charset="-120"/>
               </a:rPr>
-              <a:t>Word Labs  •  wordlabs.app  •  Root: 'soft' = not hard, gentle, quiet</a:t>
+              <a:t>Word Labs  •  wordlabs.app  •  Root: 'soft' = not hard or rough</a:t>
             </a:r>
             <a:endParaRPr lang="en-US" sz="800" dirty="0"/>
           </a:p>
@@ -40074,7 +39566,7 @@
                 <a:ea typeface="Trebuchet MS" pitchFamily="34" charset="-122"/>
                 <a:cs typeface="Trebuchet MS" pitchFamily="34" charset="-120"/>
               </a:rPr>
-              <a:t>softly</a:t>
+              <a:t>soft</a:t>
             </a:r>
             <a:endParaRPr lang="en-US" sz="1200" dirty="0"/>
           </a:p>
@@ -40140,7 +39632,7 @@
                 <a:ea typeface="Calibri" pitchFamily="34" charset="-122"/>
                 <a:cs typeface="Calibri" pitchFamily="34" charset="-120"/>
               </a:rPr>
-              <a:t>To make something too soft or too gentle.</a:t>
+              <a:t>to make or become less hard or firm</a:t>
             </a:r>
             <a:endParaRPr lang="en-US" sz="1200" dirty="0"/>
           </a:p>
@@ -40279,7 +39771,7 @@
                 <a:ea typeface="Calibri" pitchFamily="34" charset="-122"/>
                 <a:cs typeface="Calibri" pitchFamily="34" charset="-120"/>
               </a:rPr>
-              <a:t>The most gentle or least hard of all things being compared.</a:t>
+              <a:t>less hard or firm than something else</a:t>
             </a:r>
             <a:endParaRPr lang="en-US" sz="1200" dirty="0"/>
           </a:p>
@@ -40352,7 +39844,7 @@
                 <a:ea typeface="Trebuchet MS" pitchFamily="34" charset="-122"/>
                 <a:cs typeface="Trebuchet MS" pitchFamily="34" charset="-120"/>
               </a:rPr>
-              <a:t>softness</a:t>
+              <a:t>softer</a:t>
             </a:r>
             <a:endParaRPr lang="en-US" sz="1200" dirty="0"/>
           </a:p>
@@ -40418,563 +39910,7 @@
                 <a:ea typeface="Calibri" pitchFamily="34" charset="-122"/>
                 <a:cs typeface="Calibri" pitchFamily="34" charset="-120"/>
               </a:rPr>
-              <a:t>More gentle or less hard than something else.</a:t>
-            </a:r>
-            <a:endParaRPr lang="en-US" sz="1200" dirty="0"/>
-          </a:p>
-        </p:txBody>
-      </p:sp>
-      <p:sp>
-        <p:nvSpPr>
-          <p:cNvPr id="23" name="Shape 21"/>
-          <p:cNvSpPr/>
-          <p:nvPr/>
-        </p:nvSpPr>
-        <p:spPr>
-          <a:xfrm>
-            <a:off x="365760" y="2779776"/>
-            <a:ext cx="2011680" cy="457200"/>
-          </a:xfrm>
-          <a:prstGeom prst="rect">
-            <a:avLst>
-              <a:gd name="adj" fmla="val 12000"/>
-            </a:avLst>
-          </a:prstGeom>
-          <a:solidFill>
-            <a:srgbClr val="EEF2FF"/>
-          </a:solidFill>
-          <a:ln w="12700">
-            <a:solidFill>
-              <a:srgbClr val="6366F1"/>
-            </a:solidFill>
-            <a:prstDash val="solid"/>
-          </a:ln>
-          <a:effectLst>
-            <a:outerShdw sx="100000" sy="100000" kx="0" ky="0" algn="bl" rotWithShape="0" blurRad="101600" dist="38100" dir="8100000">
-              <a:srgbClr val="000000">
-                <a:alpha val="12000"/>
-              </a:srgbClr>
-            </a:outerShdw>
-          </a:effectLst>
-        </p:spPr>
-      </p:sp>
-      <p:sp>
-        <p:nvSpPr>
-          <p:cNvPr id="24" name="Text 22"/>
-          <p:cNvSpPr/>
-          <p:nvPr/>
-        </p:nvSpPr>
-        <p:spPr>
-          <a:xfrm>
-            <a:off x="365760" y="2779776"/>
-            <a:ext cx="2011680" cy="457200"/>
-          </a:xfrm>
-          <a:prstGeom prst="rect">
-            <a:avLst/>
-          </a:prstGeom>
-          <a:noFill/>
-          <a:ln/>
-        </p:spPr>
-        <p:txBody>
-          <a:bodyPr wrap="square" lIns="0" tIns="0" rIns="0" bIns="0" rtlCol="0" anchor="ctr"/>
-          <a:lstStyle/>
-          <a:p>
-            <a:pPr algn="ctr" indent="0" marL="0">
-              <a:buNone/>
-            </a:pPr>
-            <a:r>
-              <a:rPr lang="en-US" sz="1200" b="1" dirty="0">
-                <a:solidFill>
-                  <a:srgbClr val="4338CA"/>
-                </a:solidFill>
-                <a:latin typeface="Trebuchet MS" pitchFamily="34" charset="0"/>
-                <a:ea typeface="Trebuchet MS" pitchFamily="34" charset="-122"/>
-                <a:cs typeface="Trebuchet MS" pitchFamily="34" charset="-120"/>
-              </a:rPr>
-              <a:t>softer</a:t>
-            </a:r>
-            <a:endParaRPr lang="en-US" sz="1200" dirty="0"/>
-          </a:p>
-        </p:txBody>
-      </p:sp>
-      <p:sp>
-        <p:nvSpPr>
-          <p:cNvPr id="25" name="Shape 23"/>
-          <p:cNvSpPr/>
-          <p:nvPr/>
-        </p:nvSpPr>
-        <p:spPr>
-          <a:xfrm>
-            <a:off x="2514600" y="2779776"/>
-            <a:ext cx="6263640" cy="457200"/>
-          </a:xfrm>
-          <a:prstGeom prst="rect">
-            <a:avLst>
-              <a:gd name="adj" fmla="val 12000"/>
-            </a:avLst>
-          </a:prstGeom>
-          <a:solidFill>
-            <a:srgbClr val="F8FAFC"/>
-          </a:solidFill>
-          <a:ln w="12700">
-            <a:solidFill>
-              <a:srgbClr val="E2E8F0"/>
-            </a:solidFill>
-            <a:prstDash val="solid"/>
-          </a:ln>
-        </p:spPr>
-      </p:sp>
-      <p:sp>
-        <p:nvSpPr>
-          <p:cNvPr id="26" name="Text 24"/>
-          <p:cNvSpPr/>
-          <p:nvPr/>
-        </p:nvSpPr>
-        <p:spPr>
-          <a:xfrm>
-            <a:off x="2651760" y="2779776"/>
-            <a:ext cx="6035040" cy="457200"/>
-          </a:xfrm>
-          <a:prstGeom prst="rect">
-            <a:avLst/>
-          </a:prstGeom>
-          <a:noFill/>
-          <a:ln/>
-        </p:spPr>
-        <p:txBody>
-          <a:bodyPr wrap="square" rtlCol="0" anchor="ctr"/>
-          <a:lstStyle/>
-          <a:p>
-            <a:pPr algn="l" indent="0" marL="0">
-              <a:buNone/>
-            </a:pPr>
-            <a:r>
-              <a:rPr lang="en-US" sz="1200" dirty="0">
-                <a:solidFill>
-                  <a:srgbClr val="0F172A"/>
-                </a:solidFill>
-                <a:latin typeface="Calibri" pitchFamily="34" charset="0"/>
-                <a:ea typeface="Calibri" pitchFamily="34" charset="-122"/>
-                <a:cs typeface="Calibri" pitchFamily="34" charset="-120"/>
-              </a:rPr>
-              <a:t>Not made gentler or less harsh; still hard or rough.</a:t>
-            </a:r>
-            <a:endParaRPr lang="en-US" sz="1200" dirty="0"/>
-          </a:p>
-        </p:txBody>
-      </p:sp>
-      <p:sp>
-        <p:nvSpPr>
-          <p:cNvPr id="27" name="Shape 25"/>
-          <p:cNvSpPr/>
-          <p:nvPr/>
-        </p:nvSpPr>
-        <p:spPr>
-          <a:xfrm>
-            <a:off x="365760" y="3310128"/>
-            <a:ext cx="2011680" cy="457200"/>
-          </a:xfrm>
-          <a:prstGeom prst="rect">
-            <a:avLst>
-              <a:gd name="adj" fmla="val 12000"/>
-            </a:avLst>
-          </a:prstGeom>
-          <a:solidFill>
-            <a:srgbClr val="EEF2FF"/>
-          </a:solidFill>
-          <a:ln w="12700">
-            <a:solidFill>
-              <a:srgbClr val="6366F1"/>
-            </a:solidFill>
-            <a:prstDash val="solid"/>
-          </a:ln>
-          <a:effectLst>
-            <a:outerShdw sx="100000" sy="100000" kx="0" ky="0" algn="bl" rotWithShape="0" blurRad="101600" dist="38100" dir="8100000">
-              <a:srgbClr val="000000">
-                <a:alpha val="12000"/>
-              </a:srgbClr>
-            </a:outerShdw>
-          </a:effectLst>
-        </p:spPr>
-      </p:sp>
-      <p:sp>
-        <p:nvSpPr>
-          <p:cNvPr id="28" name="Text 26"/>
-          <p:cNvSpPr/>
-          <p:nvPr/>
-        </p:nvSpPr>
-        <p:spPr>
-          <a:xfrm>
-            <a:off x="365760" y="3310128"/>
-            <a:ext cx="2011680" cy="457200"/>
-          </a:xfrm>
-          <a:prstGeom prst="rect">
-            <a:avLst/>
-          </a:prstGeom>
-          <a:noFill/>
-          <a:ln/>
-        </p:spPr>
-        <p:txBody>
-          <a:bodyPr wrap="square" lIns="0" tIns="0" rIns="0" bIns="0" rtlCol="0" anchor="ctr"/>
-          <a:lstStyle/>
-          <a:p>
-            <a:pPr algn="ctr" indent="0" marL="0">
-              <a:buNone/>
-            </a:pPr>
-            <a:r>
-              <a:rPr lang="en-US" sz="1200" b="1" dirty="0">
-                <a:solidFill>
-                  <a:srgbClr val="4338CA"/>
-                </a:solidFill>
-                <a:latin typeface="Trebuchet MS" pitchFamily="34" charset="0"/>
-                <a:ea typeface="Trebuchet MS" pitchFamily="34" charset="-122"/>
-                <a:cs typeface="Trebuchet MS" pitchFamily="34" charset="-120"/>
-              </a:rPr>
-              <a:t>softest</a:t>
-            </a:r>
-            <a:endParaRPr lang="en-US" sz="1200" dirty="0"/>
-          </a:p>
-        </p:txBody>
-      </p:sp>
-      <p:sp>
-        <p:nvSpPr>
-          <p:cNvPr id="29" name="Shape 27"/>
-          <p:cNvSpPr/>
-          <p:nvPr/>
-        </p:nvSpPr>
-        <p:spPr>
-          <a:xfrm>
-            <a:off x="2514600" y="3310128"/>
-            <a:ext cx="6263640" cy="457200"/>
-          </a:xfrm>
-          <a:prstGeom prst="rect">
-            <a:avLst>
-              <a:gd name="adj" fmla="val 12000"/>
-            </a:avLst>
-          </a:prstGeom>
-          <a:solidFill>
-            <a:srgbClr val="F8FAFC"/>
-          </a:solidFill>
-          <a:ln w="12700">
-            <a:solidFill>
-              <a:srgbClr val="E2E8F0"/>
-            </a:solidFill>
-            <a:prstDash val="solid"/>
-          </a:ln>
-        </p:spPr>
-      </p:sp>
-      <p:sp>
-        <p:nvSpPr>
-          <p:cNvPr id="30" name="Text 28"/>
-          <p:cNvSpPr/>
-          <p:nvPr/>
-        </p:nvSpPr>
-        <p:spPr>
-          <a:xfrm>
-            <a:off x="2651760" y="3310128"/>
-            <a:ext cx="6035040" cy="457200"/>
-          </a:xfrm>
-          <a:prstGeom prst="rect">
-            <a:avLst/>
-          </a:prstGeom>
-          <a:noFill/>
-          <a:ln/>
-        </p:spPr>
-        <p:txBody>
-          <a:bodyPr wrap="square" rtlCol="0" anchor="ctr"/>
-          <a:lstStyle/>
-          <a:p>
-            <a:pPr algn="l" indent="0" marL="0">
-              <a:buNone/>
-            </a:pPr>
-            <a:r>
-              <a:rPr lang="en-US" sz="1200" dirty="0">
-                <a:solidFill>
-                  <a:srgbClr val="0F172A"/>
-                </a:solidFill>
-                <a:latin typeface="Calibri" pitchFamily="34" charset="0"/>
-                <a:ea typeface="Calibri" pitchFamily="34" charset="-122"/>
-                <a:cs typeface="Calibri" pitchFamily="34" charset="-120"/>
-              </a:rPr>
-              <a:t>The quality of being smooth, gentle, or not hard.</a:t>
-            </a:r>
-            <a:endParaRPr lang="en-US" sz="1200" dirty="0"/>
-          </a:p>
-        </p:txBody>
-      </p:sp>
-      <p:sp>
-        <p:nvSpPr>
-          <p:cNvPr id="31" name="Shape 29"/>
-          <p:cNvSpPr/>
-          <p:nvPr/>
-        </p:nvSpPr>
-        <p:spPr>
-          <a:xfrm>
-            <a:off x="365760" y="3840480"/>
-            <a:ext cx="2011680" cy="457200"/>
-          </a:xfrm>
-          <a:prstGeom prst="rect">
-            <a:avLst>
-              <a:gd name="adj" fmla="val 12000"/>
-            </a:avLst>
-          </a:prstGeom>
-          <a:solidFill>
-            <a:srgbClr val="EEF2FF"/>
-          </a:solidFill>
-          <a:ln w="12700">
-            <a:solidFill>
-              <a:srgbClr val="6366F1"/>
-            </a:solidFill>
-            <a:prstDash val="solid"/>
-          </a:ln>
-          <a:effectLst>
-            <a:outerShdw sx="100000" sy="100000" kx="0" ky="0" algn="bl" rotWithShape="0" blurRad="101600" dist="38100" dir="8100000">
-              <a:srgbClr val="000000">
-                <a:alpha val="12000"/>
-              </a:srgbClr>
-            </a:outerShdw>
-          </a:effectLst>
-        </p:spPr>
-      </p:sp>
-      <p:sp>
-        <p:nvSpPr>
-          <p:cNvPr id="32" name="Text 30"/>
-          <p:cNvSpPr/>
-          <p:nvPr/>
-        </p:nvSpPr>
-        <p:spPr>
-          <a:xfrm>
-            <a:off x="365760" y="3840480"/>
-            <a:ext cx="2011680" cy="457200"/>
-          </a:xfrm>
-          <a:prstGeom prst="rect">
-            <a:avLst/>
-          </a:prstGeom>
-          <a:noFill/>
-          <a:ln/>
-        </p:spPr>
-        <p:txBody>
-          <a:bodyPr wrap="square" lIns="0" tIns="0" rIns="0" bIns="0" rtlCol="0" anchor="ctr"/>
-          <a:lstStyle/>
-          <a:p>
-            <a:pPr algn="ctr" indent="0" marL="0">
-              <a:buNone/>
-            </a:pPr>
-            <a:r>
-              <a:rPr lang="en-US" sz="1200" b="1" dirty="0">
-                <a:solidFill>
-                  <a:srgbClr val="4338CA"/>
-                </a:solidFill>
-                <a:latin typeface="Trebuchet MS" pitchFamily="34" charset="0"/>
-                <a:ea typeface="Trebuchet MS" pitchFamily="34" charset="-122"/>
-                <a:cs typeface="Trebuchet MS" pitchFamily="34" charset="-120"/>
-              </a:rPr>
-              <a:t>unsoftened</a:t>
-            </a:r>
-            <a:endParaRPr lang="en-US" sz="1200" dirty="0"/>
-          </a:p>
-        </p:txBody>
-      </p:sp>
-      <p:sp>
-        <p:nvSpPr>
-          <p:cNvPr id="33" name="Shape 31"/>
-          <p:cNvSpPr/>
-          <p:nvPr/>
-        </p:nvSpPr>
-        <p:spPr>
-          <a:xfrm>
-            <a:off x="2514600" y="3840480"/>
-            <a:ext cx="6263640" cy="457200"/>
-          </a:xfrm>
-          <a:prstGeom prst="rect">
-            <a:avLst>
-              <a:gd name="adj" fmla="val 12000"/>
-            </a:avLst>
-          </a:prstGeom>
-          <a:solidFill>
-            <a:srgbClr val="F8FAFC"/>
-          </a:solidFill>
-          <a:ln w="12700">
-            <a:solidFill>
-              <a:srgbClr val="E2E8F0"/>
-            </a:solidFill>
-            <a:prstDash val="solid"/>
-          </a:ln>
-        </p:spPr>
-      </p:sp>
-      <p:sp>
-        <p:nvSpPr>
-          <p:cNvPr id="34" name="Text 32"/>
-          <p:cNvSpPr/>
-          <p:nvPr/>
-        </p:nvSpPr>
-        <p:spPr>
-          <a:xfrm>
-            <a:off x="2651760" y="3840480"/>
-            <a:ext cx="6035040" cy="457200"/>
-          </a:xfrm>
-          <a:prstGeom prst="rect">
-            <a:avLst/>
-          </a:prstGeom>
-          <a:noFill/>
-          <a:ln/>
-        </p:spPr>
-        <p:txBody>
-          <a:bodyPr wrap="square" rtlCol="0" anchor="ctr"/>
-          <a:lstStyle/>
-          <a:p>
-            <a:pPr algn="l" indent="0" marL="0">
-              <a:buNone/>
-            </a:pPr>
-            <a:r>
-              <a:rPr lang="en-US" sz="1200" dirty="0">
-                <a:solidFill>
-                  <a:srgbClr val="0F172A"/>
-                </a:solidFill>
-                <a:latin typeface="Calibri" pitchFamily="34" charset="0"/>
-                <a:ea typeface="Calibri" pitchFamily="34" charset="-122"/>
-                <a:cs typeface="Calibri" pitchFamily="34" charset="-120"/>
-              </a:rPr>
-              <a:t>In a gentle or quiet way, without making much noise or force.</a:t>
-            </a:r>
-            <a:endParaRPr lang="en-US" sz="1200" dirty="0"/>
-          </a:p>
-        </p:txBody>
-      </p:sp>
-      <p:sp>
-        <p:nvSpPr>
-          <p:cNvPr id="35" name="Shape 33"/>
-          <p:cNvSpPr/>
-          <p:nvPr/>
-        </p:nvSpPr>
-        <p:spPr>
-          <a:xfrm>
-            <a:off x="365760" y="4370832"/>
-            <a:ext cx="2011680" cy="457200"/>
-          </a:xfrm>
-          <a:prstGeom prst="rect">
-            <a:avLst>
-              <a:gd name="adj" fmla="val 12000"/>
-            </a:avLst>
-          </a:prstGeom>
-          <a:solidFill>
-            <a:srgbClr val="EEF2FF"/>
-          </a:solidFill>
-          <a:ln w="12700">
-            <a:solidFill>
-              <a:srgbClr val="6366F1"/>
-            </a:solidFill>
-            <a:prstDash val="solid"/>
-          </a:ln>
-          <a:effectLst>
-            <a:outerShdw sx="100000" sy="100000" kx="0" ky="0" algn="bl" rotWithShape="0" blurRad="101600" dist="38100" dir="8100000">
-              <a:srgbClr val="000000">
-                <a:alpha val="12000"/>
-              </a:srgbClr>
-            </a:outerShdw>
-          </a:effectLst>
-        </p:spPr>
-      </p:sp>
-      <p:sp>
-        <p:nvSpPr>
-          <p:cNvPr id="36" name="Text 34"/>
-          <p:cNvSpPr/>
-          <p:nvPr/>
-        </p:nvSpPr>
-        <p:spPr>
-          <a:xfrm>
-            <a:off x="365760" y="4370832"/>
-            <a:ext cx="2011680" cy="457200"/>
-          </a:xfrm>
-          <a:prstGeom prst="rect">
-            <a:avLst/>
-          </a:prstGeom>
-          <a:noFill/>
-          <a:ln/>
-        </p:spPr>
-        <p:txBody>
-          <a:bodyPr wrap="square" lIns="0" tIns="0" rIns="0" bIns="0" rtlCol="0" anchor="ctr"/>
-          <a:lstStyle/>
-          <a:p>
-            <a:pPr algn="ctr" indent="0" marL="0">
-              <a:buNone/>
-            </a:pPr>
-            <a:r>
-              <a:rPr lang="en-US" sz="1200" b="1" dirty="0">
-                <a:solidFill>
-                  <a:srgbClr val="4338CA"/>
-                </a:solidFill>
-                <a:latin typeface="Trebuchet MS" pitchFamily="34" charset="0"/>
-                <a:ea typeface="Trebuchet MS" pitchFamily="34" charset="-122"/>
-                <a:cs typeface="Trebuchet MS" pitchFamily="34" charset="-120"/>
-              </a:rPr>
-              <a:t>oversoften</a:t>
-            </a:r>
-            <a:endParaRPr lang="en-US" sz="1200" dirty="0"/>
-          </a:p>
-        </p:txBody>
-      </p:sp>
-      <p:sp>
-        <p:nvSpPr>
-          <p:cNvPr id="37" name="Shape 35"/>
-          <p:cNvSpPr/>
-          <p:nvPr/>
-        </p:nvSpPr>
-        <p:spPr>
-          <a:xfrm>
-            <a:off x="2514600" y="4370832"/>
-            <a:ext cx="6263640" cy="457200"/>
-          </a:xfrm>
-          <a:prstGeom prst="rect">
-            <a:avLst>
-              <a:gd name="adj" fmla="val 12000"/>
-            </a:avLst>
-          </a:prstGeom>
-          <a:solidFill>
-            <a:srgbClr val="F8FAFC"/>
-          </a:solidFill>
-          <a:ln w="12700">
-            <a:solidFill>
-              <a:srgbClr val="E2E8F0"/>
-            </a:solidFill>
-            <a:prstDash val="solid"/>
-          </a:ln>
-        </p:spPr>
-      </p:sp>
-      <p:sp>
-        <p:nvSpPr>
-          <p:cNvPr id="38" name="Text 36"/>
-          <p:cNvSpPr/>
-          <p:nvPr/>
-        </p:nvSpPr>
-        <p:spPr>
-          <a:xfrm>
-            <a:off x="2651760" y="4370832"/>
-            <a:ext cx="6035040" cy="457200"/>
-          </a:xfrm>
-          <a:prstGeom prst="rect">
-            <a:avLst/>
-          </a:prstGeom>
-          <a:noFill/>
-          <a:ln/>
-        </p:spPr>
-        <p:txBody>
-          <a:bodyPr wrap="square" rtlCol="0" anchor="ctr"/>
-          <a:lstStyle/>
-          <a:p>
-            <a:pPr algn="l" indent="0" marL="0">
-              <a:buNone/>
-            </a:pPr>
-            <a:r>
-              <a:rPr lang="en-US" sz="1200" dirty="0">
-                <a:solidFill>
-                  <a:srgbClr val="0F172A"/>
-                </a:solidFill>
-                <a:latin typeface="Calibri" pitchFamily="34" charset="0"/>
-                <a:ea typeface="Calibri" pitchFamily="34" charset="-122"/>
-                <a:cs typeface="Calibri" pitchFamily="34" charset="-120"/>
-              </a:rPr>
-              <a:t>To make something less hard, less harsh, or more gentle.</a:t>
+              <a:t>not hard or firm to the touch</a:t>
             </a:r>
             <a:endParaRPr lang="en-US" sz="1200" dirty="0"/>
           </a:p>
@@ -41266,7 +40202,7 @@
                 <a:ea typeface="Calibri" pitchFamily="34" charset="-122"/>
                 <a:cs typeface="Calibri" pitchFamily="34" charset="-120"/>
               </a:rPr>
-              <a:t>Word Labs  •  wordlabs.app  •  Root: 'soft' = not hard, gentle, quiet</a:t>
+              <a:t>Word Labs  •  wordlabs.app  •  Root: 'soft' = not hard or rough</a:t>
             </a:r>
             <a:endParaRPr lang="en-US" sz="800" dirty="0"/>
           </a:p>
@@ -41469,7 +40405,7 @@
                 <a:ea typeface="Calibri" pitchFamily="34" charset="-122"/>
                 <a:cs typeface="Calibri" pitchFamily="34" charset="-120"/>
               </a:rPr>
-              <a:t>The teacher spoke softly so she wouldn't wake the students who were reading quietly.</a:t>
+              <a:t>The kitten's fur was soft and fluffy.</a:t>
             </a:r>
             <a:endParaRPr lang="en-US" sz="1500" dirty="0"/>
           </a:p>
@@ -41633,7 +40569,7 @@
                 <a:ea typeface="Calibri" pitchFamily="34" charset="-122"/>
                 <a:cs typeface="Calibri" pitchFamily="34" charset="-120"/>
               </a:rPr>
-              <a:t>Mum used fabric softener in the wash to make the towels feel fluffy and gentle on our skin.</a:t>
+              <a:t>Leave the butter out to soften before baking.</a:t>
             </a:r>
             <a:endParaRPr lang="en-US" sz="1500" dirty="0"/>
           </a:p>
@@ -41797,7 +40733,7 @@
                 <a:ea typeface="Calibri" pitchFamily="34" charset="-122"/>
                 <a:cs typeface="Calibri" pitchFamily="34" charset="-120"/>
               </a:rPr>
-              <a:t>The softness of the new pillow made it much easier to fall asleep at night.</a:t>
+              <a:t>This pillow is softer than the one on my bed.</a:t>
             </a:r>
             <a:endParaRPr lang="en-US" sz="1500" dirty="0"/>
           </a:p>
